--- a/8D模板.pptx
+++ b/8D模板.pptx
@@ -4129,8 +4129,8 @@
         </p:nvSpPr>
         <p:spPr>
           <a:xfrm>
-            <a:off x="3440430" y="3435985"/>
-            <a:ext cx="1784985" cy="1524635"/>
+            <a:off x="3275965" y="3435985"/>
+            <a:ext cx="2753360" cy="1524635"/>
           </a:xfrm>
           <a:prstGeom prst="rect">
             <a:avLst/>
@@ -4143,6 +4143,11 @@
           </a:bodyPr>
           <a:lstStyle/>
           <a:p>
+            <a:pPr>
+              <a:lnSpc>
+                <a:spcPct val="150000"/>
+              </a:lnSpc>
+            </a:pPr>
             <a:r>
               <a:rPr lang="zh-CN" altLang="en-US" sz="1400" dirty="0" smtClean="0">
                 <a:latin typeface="微软雅黑" panose="020B0503020204020204" pitchFamily="34" charset="-122"/>
@@ -4150,44 +4155,35 @@
               </a:rPr>
               <a:t>编制：</a:t>
             </a:r>
-            <a:r>
-              <a:rPr lang="zh-CN" altLang="en-US" sz="1400" dirty="0">
-                <a:latin typeface="微软雅黑" panose="020B0503020204020204" pitchFamily="34" charset="-122"/>
-                <a:ea typeface="微软雅黑" panose="020B0503020204020204" pitchFamily="34" charset="-122"/>
-              </a:rPr>
-              <a:t>{{Content}}</a:t>
-            </a:r>
-            <a:endParaRPr lang="zh-CN" altLang="en-US" sz="1400" dirty="0">
-              <a:latin typeface="微软雅黑" panose="020B0503020204020204" pitchFamily="34" charset="-122"/>
-              <a:ea typeface="微软雅黑" panose="020B0503020204020204" pitchFamily="34" charset="-122"/>
-            </a:endParaRPr>
-          </a:p>
-          <a:p>
             <a:endParaRPr lang="en-US" altLang="zh-CN" sz="1400" dirty="0" smtClean="0">
               <a:latin typeface="微软雅黑" panose="020B0503020204020204" pitchFamily="34" charset="-122"/>
               <a:ea typeface="微软雅黑" panose="020B0503020204020204" pitchFamily="34" charset="-122"/>
             </a:endParaRPr>
           </a:p>
           <a:p>
+            <a:pPr>
+              <a:lnSpc>
+                <a:spcPct val="150000"/>
+              </a:lnSpc>
+            </a:pPr>
             <a:r>
               <a:rPr lang="zh-CN" altLang="en-US" sz="1400" dirty="0" smtClean="0">
                 <a:latin typeface="微软雅黑" panose="020B0503020204020204" pitchFamily="34" charset="-122"/>
                 <a:ea typeface="微软雅黑" panose="020B0503020204020204" pitchFamily="34" charset="-122"/>
               </a:rPr>
-              <a:t>审核：{{Content}}</a:t>
+              <a:t>审核：</a:t>
             </a:r>
-            <a:endParaRPr lang="zh-CN" altLang="en-US" sz="1400" dirty="0" smtClean="0">
-              <a:latin typeface="微软雅黑" panose="020B0503020204020204" pitchFamily="34" charset="-122"/>
-              <a:ea typeface="微软雅黑" panose="020B0503020204020204" pitchFamily="34" charset="-122"/>
-            </a:endParaRPr>
-          </a:p>
-          <a:p>
             <a:endParaRPr lang="en-US" altLang="zh-CN" sz="1400" dirty="0">
               <a:latin typeface="微软雅黑" panose="020B0503020204020204" pitchFamily="34" charset="-122"/>
               <a:ea typeface="微软雅黑" panose="020B0503020204020204" pitchFamily="34" charset="-122"/>
             </a:endParaRPr>
           </a:p>
           <a:p>
+            <a:pPr>
+              <a:lnSpc>
+                <a:spcPct val="150000"/>
+              </a:lnSpc>
+            </a:pPr>
             <a:r>
               <a:rPr lang="zh-CN" altLang="en-US" sz="1400" dirty="0">
                 <a:latin typeface="微软雅黑" panose="020B0503020204020204" pitchFamily="34" charset="-122"/>
@@ -4200,33 +4196,25 @@
                 <a:latin typeface="微软雅黑" panose="020B0503020204020204" pitchFamily="34" charset="-122"/>
                 <a:ea typeface="微软雅黑" panose="020B0503020204020204" pitchFamily="34" charset="-122"/>
               </a:rPr>
-              <a:t>：{{Content}}</a:t>
+              <a:t>：</a:t>
             </a:r>
-            <a:endParaRPr lang="zh-CN" altLang="en-US" sz="1400" dirty="0" smtClean="0">
-              <a:latin typeface="微软雅黑" panose="020B0503020204020204" pitchFamily="34" charset="-122"/>
-              <a:ea typeface="微软雅黑" panose="020B0503020204020204" pitchFamily="34" charset="-122"/>
-            </a:endParaRPr>
-          </a:p>
-          <a:p>
             <a:endParaRPr lang="en-US" altLang="zh-CN" sz="1400" dirty="0">
               <a:latin typeface="微软雅黑" panose="020B0503020204020204" pitchFamily="34" charset="-122"/>
               <a:ea typeface="微软雅黑" panose="020B0503020204020204" pitchFamily="34" charset="-122"/>
             </a:endParaRPr>
           </a:p>
           <a:p>
+            <a:pPr>
+              <a:lnSpc>
+                <a:spcPct val="150000"/>
+              </a:lnSpc>
+            </a:pPr>
             <a:r>
               <a:rPr lang="zh-CN" altLang="en-US" sz="1400" dirty="0" smtClean="0">
                 <a:latin typeface="微软雅黑" panose="020B0503020204020204" pitchFamily="34" charset="-122"/>
                 <a:ea typeface="微软雅黑" panose="020B0503020204020204" pitchFamily="34" charset="-122"/>
               </a:rPr>
               <a:t>日期：</a:t>
-            </a:r>
-            <a:r>
-              <a:rPr lang="en-US" altLang="zh-CN" sz="1400" dirty="0" smtClean="0">
-                <a:latin typeface="微软雅黑" panose="020B0503020204020204" pitchFamily="34" charset="-122"/>
-                <a:ea typeface="微软雅黑" panose="020B0503020204020204" pitchFamily="34" charset="-122"/>
-              </a:rPr>
-              <a:t>{{Content}}</a:t>
             </a:r>
             <a:endParaRPr lang="en-US" altLang="zh-CN" sz="1400" dirty="0" smtClean="0">
               <a:latin typeface="微软雅黑" panose="020B0503020204020204" pitchFamily="34" charset="-122"/>

--- a/8D模板.pptx
+++ b/8D模板.pptx
@@ -9,7 +9,7 @@
     <p:notesMasterId r:id="rId5"/>
   </p:notesMasterIdLst>
   <p:handoutMasterIdLst>
-    <p:handoutMasterId r:id="rId19"/>
+    <p:handoutMasterId r:id="rId20"/>
   </p:handoutMasterIdLst>
   <p:sldIdLst>
     <p:sldId id="353" r:id="rId4"/>
@@ -19,18 +19,19 @@
     <p:sldId id="531" r:id="rId9"/>
     <p:sldId id="412" r:id="rId10"/>
     <p:sldId id="613" r:id="rId11"/>
-    <p:sldId id="619" r:id="rId12"/>
-    <p:sldId id="620" r:id="rId13"/>
-    <p:sldId id="577" r:id="rId14"/>
-    <p:sldId id="579" r:id="rId15"/>
-    <p:sldId id="580" r:id="rId16"/>
-    <p:sldId id="582" r:id="rId17"/>
-    <p:sldId id="411" r:id="rId18"/>
+    <p:sldId id="626" r:id="rId12"/>
+    <p:sldId id="619" r:id="rId13"/>
+    <p:sldId id="620" r:id="rId14"/>
+    <p:sldId id="577" r:id="rId15"/>
+    <p:sldId id="579" r:id="rId16"/>
+    <p:sldId id="580" r:id="rId17"/>
+    <p:sldId id="582" r:id="rId18"/>
+    <p:sldId id="411" r:id="rId19"/>
   </p:sldIdLst>
   <p:sldSz cx="9144000" cy="5143500" type="screen16x9"/>
   <p:notesSz cx="6797675" cy="9926320"/>
   <p:custDataLst>
-    <p:tags r:id="rId23"/>
+    <p:tags r:id="rId25"/>
   </p:custDataLst>
   <p:defaultTextStyle>
     <a:defPPr>
@@ -248,7 +249,7 @@
             <a:srgbClr val="A4A3A4"/>
           </p15:clr>
         </p15:guide>
-        <p15:guide id="5" orient="horz" pos="2955" userDrawn="1">
+        <p15:guide id="5" orient="horz" pos="2990" userDrawn="1">
           <p15:clr>
             <a:srgbClr val="A4A3A4"/>
           </p15:clr>
@@ -263,7 +264,7 @@
             <a:srgbClr val="A4A3A4"/>
           </p15:clr>
         </p15:guide>
-        <p15:guide id="8" pos="2804" userDrawn="1">
+        <p15:guide id="8" pos="2808" userDrawn="1">
           <p15:clr>
             <a:srgbClr val="A4A3A4"/>
           </p15:clr>
@@ -283,7 +284,7 @@
             <a:srgbClr val="A4A3A4"/>
           </p15:clr>
         </p15:guide>
-        <p15:guide id="12" pos="220" userDrawn="1">
+        <p15:guide id="12" pos="210" userDrawn="1">
           <p15:clr>
             <a:srgbClr val="A4A3A4"/>
           </p15:clr>
@@ -292,6 +293,12 @@
     </p:ext>
   </p:extLst>
 </p:presentation>
+</file>
+
+<file path=ppt/commentAuthors.xml><?xml version="1.0" encoding="utf-8"?>
+<p:cmAuthorLst xmlns:a="http://schemas.openxmlformats.org/drawingml/2006/main" xmlns:r="http://schemas.openxmlformats.org/officeDocument/2006/relationships" xmlns:p="http://schemas.openxmlformats.org/presentationml/2006/main">
+  <p:cmAuthor id="1" name="QX" initials="Q" lastIdx="1" clrIdx="0"/>
+</p:cmAuthorLst>
 </file>
 
 <file path=ppt/handoutMasters/handoutMaster1.xml><?xml version="1.0" encoding="utf-8"?>
@@ -972,7 +979,7 @@
       </p:grpSpPr>
       <p:sp>
         <p:nvSpPr>
-          <p:cNvPr id="25601" name="幻灯片图像占位符 1"/>
+          <p:cNvPr id="19457" name="幻灯片图像占位符 1"/>
           <p:cNvSpPr>
             <a:spLocks noGrp="1" noRot="1" noChangeAspect="1"/>
           </p:cNvSpPr>
@@ -984,7 +991,7 @@
       </p:sp>
       <p:sp>
         <p:nvSpPr>
-          <p:cNvPr id="25602" name="备注占位符 2"/>
+          <p:cNvPr id="19458" name="备注占位符 2"/>
           <p:cNvSpPr>
             <a:spLocks noGrp="1"/>
           </p:cNvSpPr>
@@ -997,6 +1004,57 @@
           <a:bodyPr wrap="square" lIns="91440" tIns="45720" rIns="91440" bIns="45720" anchor="t"/>
           <a:lstStyle/>
           <a:p>
+            <a:pPr marL="0" marR="0" lvl="0" indent="0" algn="l" defTabSz="914400" rtl="0" eaLnBrk="1" fontAlgn="base" latinLnBrk="0" hangingPunct="1">
+              <a:lnSpc>
+                <a:spcPct val="100000"/>
+              </a:lnSpc>
+              <a:spcBef>
+                <a:spcPct val="0"/>
+              </a:spcBef>
+              <a:spcAft>
+                <a:spcPct val="0"/>
+              </a:spcAft>
+              <a:buClrTx/>
+              <a:buSzTx/>
+              <a:buFontTx/>
+              <a:buNone/>
+              <a:defRPr/>
+            </a:pPr>
+            <a:r>
+              <a:rPr lang="en-US" altLang="zh-CN" dirty="0" smtClean="0"/>
+              <a:t>1</a:t>
+            </a:r>
+            <a:r>
+              <a:rPr lang="zh-CN" altLang="en-US" dirty="0" smtClean="0"/>
+              <a:t>、产生原因分析；</a:t>
+            </a:r>
+            <a:r>
+              <a:rPr lang="en-US" altLang="zh-CN" dirty="0" smtClean="0"/>
+              <a:t>2</a:t>
+            </a:r>
+            <a:r>
+              <a:rPr lang="zh-CN" altLang="en-US" dirty="0" smtClean="0"/>
+              <a:t>、流出原因分析；</a:t>
+            </a:r>
+            <a:r>
+              <a:rPr lang="en-US" altLang="zh-CN" dirty="0" smtClean="0"/>
+              <a:t>3</a:t>
+            </a:r>
+            <a:r>
+              <a:rPr lang="zh-CN" altLang="en-US" dirty="0" smtClean="0"/>
+              <a:t>、使用</a:t>
+            </a:r>
+            <a:r>
+              <a:rPr lang="en-US" altLang="zh-CN" dirty="0" smtClean="0"/>
+              <a:t>5WHY</a:t>
+            </a:r>
+            <a:r>
+              <a:rPr lang="zh-CN" altLang="en-US" dirty="0" smtClean="0"/>
+              <a:t>或鱼骨图等质量工具</a:t>
+            </a:r>
+            <a:endParaRPr lang="en-US" altLang="zh-CN" dirty="0" smtClean="0"/>
+          </a:p>
+          <a:p>
             <a:pPr lvl="0">
               <a:spcBef>
                 <a:spcPct val="0"/>
@@ -1008,7 +1066,7 @@
       </p:sp>
       <p:sp>
         <p:nvSpPr>
-          <p:cNvPr id="25603" name="灯片编号占位符 3"/>
+          <p:cNvPr id="19459" name="灯片编号占位符 3"/>
           <p:cNvSpPr>
             <a:spLocks noGrp="1"/>
           </p:cNvSpPr>
@@ -1074,7 +1132,7 @@
       </p:grpSpPr>
       <p:sp>
         <p:nvSpPr>
-          <p:cNvPr id="29697" name="幻灯片图像占位符 1"/>
+          <p:cNvPr id="25601" name="幻灯片图像占位符 1"/>
           <p:cNvSpPr>
             <a:spLocks noGrp="1" noRot="1" noChangeAspect="1"/>
           </p:cNvSpPr>
@@ -1086,7 +1144,7 @@
       </p:sp>
       <p:sp>
         <p:nvSpPr>
-          <p:cNvPr id="29698" name="备注占位符 2"/>
+          <p:cNvPr id="25602" name="备注占位符 2"/>
           <p:cNvSpPr>
             <a:spLocks noGrp="1"/>
           </p:cNvSpPr>
@@ -1110,7 +1168,7 @@
       </p:sp>
       <p:sp>
         <p:nvSpPr>
-          <p:cNvPr id="29699" name="灯片编号占位符 3"/>
+          <p:cNvPr id="25603" name="灯片编号占位符 3"/>
           <p:cNvSpPr>
             <a:spLocks noGrp="1"/>
           </p:cNvSpPr>
@@ -1278,6 +1336,108 @@
       </p:grpSpPr>
       <p:sp>
         <p:nvSpPr>
+          <p:cNvPr id="29697" name="幻灯片图像占位符 1"/>
+          <p:cNvSpPr>
+            <a:spLocks noGrp="1" noRot="1" noChangeAspect="1"/>
+          </p:cNvSpPr>
+          <p:nvPr>
+            <p:ph type="sldImg"/>
+          </p:nvPr>
+        </p:nvSpPr>
+        <p:spPr/>
+      </p:sp>
+      <p:sp>
+        <p:nvSpPr>
+          <p:cNvPr id="29698" name="备注占位符 2"/>
+          <p:cNvSpPr>
+            <a:spLocks noGrp="1"/>
+          </p:cNvSpPr>
+          <p:nvPr>
+            <p:ph type="body"/>
+          </p:nvPr>
+        </p:nvSpPr>
+        <p:spPr/>
+        <p:txBody>
+          <a:bodyPr wrap="square" lIns="91440" tIns="45720" rIns="91440" bIns="45720" anchor="t"/>
+          <a:lstStyle/>
+          <a:p>
+            <a:pPr lvl="0">
+              <a:spcBef>
+                <a:spcPct val="0"/>
+              </a:spcBef>
+            </a:pPr>
+            <a:endParaRPr lang="en-US" altLang="zh-CN" dirty="0"/>
+          </a:p>
+        </p:txBody>
+      </p:sp>
+      <p:sp>
+        <p:nvSpPr>
+          <p:cNvPr id="29699" name="灯片编号占位符 3"/>
+          <p:cNvSpPr>
+            <a:spLocks noGrp="1"/>
+          </p:cNvSpPr>
+          <p:nvPr>
+            <p:ph type="sldNum" sz="quarter"/>
+          </p:nvPr>
+        </p:nvSpPr>
+        <p:spPr>
+          <a:xfrm>
+            <a:off x="3849688" y="9428163"/>
+            <a:ext cx="2946400" cy="496887"/>
+          </a:xfrm>
+          <a:prstGeom prst="rect">
+            <a:avLst/>
+          </a:prstGeom>
+          <a:noFill/>
+          <a:ln w="9525">
+            <a:noFill/>
+          </a:ln>
+        </p:spPr>
+        <p:txBody>
+          <a:bodyPr vert="horz" wrap="square" lIns="91440" tIns="45720" rIns="91440" bIns="45720" anchor="b"/>
+          <a:lstStyle/>
+          <a:p>
+            <a:pPr lvl="0" algn="r"/>
+            <a:fld id="{9A0DB2DC-4C9A-4742-B13C-FB6460FD3503}" type="slidenum">
+              <a:rPr lang="en-US" altLang="zh-CN" sz="1200">
+                <a:latin typeface="Calibri" panose="020F0502020204030204" pitchFamily="34" charset="0"/>
+                <a:ea typeface="宋体" panose="02010600030101010101" pitchFamily="2" charset="-122"/>
+              </a:rPr>
+            </a:fld>
+            <a:endParaRPr lang="en-US" altLang="zh-CN" sz="1200">
+              <a:latin typeface="Calibri" panose="020F0502020204030204" pitchFamily="34" charset="0"/>
+              <a:ea typeface="宋体" panose="02010600030101010101" pitchFamily="2" charset="-122"/>
+            </a:endParaRPr>
+          </a:p>
+        </p:txBody>
+      </p:sp>
+    </p:spTree>
+  </p:cSld>
+  <p:clrMapOvr>
+    <a:masterClrMapping/>
+  </p:clrMapOvr>
+</p:notes>
+</file>
+
+<file path=ppt/notesSlides/notesSlide14.xml><?xml version="1.0" encoding="utf-8"?>
+<p:notes xmlns:a="http://schemas.openxmlformats.org/drawingml/2006/main" xmlns:r="http://schemas.openxmlformats.org/officeDocument/2006/relationships" xmlns:p="http://schemas.openxmlformats.org/presentationml/2006/main">
+  <p:cSld>
+    <p:spTree>
+      <p:nvGrpSpPr>
+        <p:cNvPr id="1" name=""/>
+        <p:cNvGrpSpPr/>
+        <p:nvPr/>
+      </p:nvGrpSpPr>
+      <p:grpSpPr>
+        <a:xfrm>
+          <a:off x="0" y="0"/>
+          <a:ext cx="0" cy="0"/>
+          <a:chOff x="0" y="0"/>
+          <a:chExt cx="0" cy="0"/>
+        </a:xfrm>
+      </p:grpSpPr>
+      <p:sp>
+        <p:nvSpPr>
           <p:cNvPr id="17409" name="幻灯片图像占位符 1"/>
           <p:cNvSpPr>
             <a:spLocks noGrp="1" noRot="1" noChangeAspect="1"/>
@@ -1361,7 +1521,7 @@
 </p:notes>
 </file>
 
-<file path=ppt/notesSlides/notesSlide14.xml><?xml version="1.0" encoding="utf-8"?>
+<file path=ppt/notesSlides/notesSlide15.xml><?xml version="1.0" encoding="utf-8"?>
 <p:notes xmlns:a="http://schemas.openxmlformats.org/drawingml/2006/main" xmlns:r="http://schemas.openxmlformats.org/officeDocument/2006/relationships" xmlns:p="http://schemas.openxmlformats.org/presentationml/2006/main">
   <p:cSld>
     <p:spTree>
@@ -4259,6 +4419,665 @@
           <a:chExt cx="0" cy="0"/>
         </a:xfrm>
       </p:grpSpPr>
+      <p:graphicFrame>
+        <p:nvGraphicFramePr>
+          <p:cNvPr id="9" name="表格 8"/>
+          <p:cNvGraphicFramePr/>
+          <p:nvPr>
+            <p:custDataLst>
+              <p:tags r:id="rId1"/>
+            </p:custDataLst>
+          </p:nvPr>
+        </p:nvGraphicFramePr>
+        <p:xfrm>
+          <a:off x="683260" y="1385570"/>
+          <a:ext cx="7987665" cy="3379470"/>
+        </p:xfrm>
+        <a:graphic>
+          <a:graphicData uri="http://schemas.openxmlformats.org/drawingml/2006/table">
+            <a:tbl>
+              <a:tblPr firstRow="1" bandRow="1">
+                <a:tableStyleId>{5940675A-B579-460E-94D1-54222C63F5DA}</a:tableStyleId>
+              </a:tblPr>
+              <a:tblGrid>
+                <a:gridCol w="633095"/>
+                <a:gridCol w="3912870"/>
+                <a:gridCol w="3441700"/>
+              </a:tblGrid>
+              <a:tr h="396000">
+                <a:tc>
+                  <a:txBody>
+                    <a:bodyPr/>
+                    <a:p>
+                      <a:pPr algn="ctr">
+                        <a:buNone/>
+                      </a:pPr>
+                      <a:r>
+                        <a:rPr lang="zh-CN" altLang="en-US" sz="1100" b="1" dirty="0">
+                          <a:effectLst/>
+                          <a:latin typeface="微软雅黑" panose="020B0503020204020204" pitchFamily="34" charset="-122"/>
+                          <a:ea typeface="微软雅黑" panose="020B0503020204020204" pitchFamily="34" charset="-122"/>
+                        </a:rPr>
+                        <a:t>层次</a:t>
+                      </a:r>
+                      <a:endParaRPr lang="zh-CN" altLang="en-US" sz="1100" b="1" dirty="0">
+                        <a:effectLst/>
+                        <a:latin typeface="微软雅黑" panose="020B0503020204020204" pitchFamily="34" charset="-122"/>
+                        <a:ea typeface="微软雅黑" panose="020B0503020204020204" pitchFamily="34" charset="-122"/>
+                      </a:endParaRPr>
+                    </a:p>
+                  </a:txBody>
+                  <a:tcPr anchor="ctr" anchorCtr="0">
+                    <a:solidFill>
+                      <a:schemeClr val="bg1">
+                        <a:lumMod val="85000"/>
+                      </a:schemeClr>
+                    </a:solidFill>
+                  </a:tcPr>
+                </a:tc>
+                <a:tc>
+                  <a:txBody>
+                    <a:bodyPr/>
+                    <a:p>
+                      <a:pPr algn="ctr">
+                        <a:buNone/>
+                      </a:pPr>
+                      <a:r>
+                        <a:rPr lang="zh-CN" altLang="en-US" sz="1100" b="1" dirty="0">
+                          <a:effectLst/>
+                          <a:latin typeface="微软雅黑" panose="020B0503020204020204" pitchFamily="34" charset="-122"/>
+                          <a:ea typeface="微软雅黑" panose="020B0503020204020204" pitchFamily="34" charset="-122"/>
+                        </a:rPr>
+                        <a:t>问题</a:t>
+                      </a:r>
+                      <a:endParaRPr lang="zh-CN" altLang="en-US" sz="1100" b="1" dirty="0">
+                        <a:effectLst/>
+                        <a:latin typeface="微软雅黑" panose="020B0503020204020204" pitchFamily="34" charset="-122"/>
+                        <a:ea typeface="微软雅黑" panose="020B0503020204020204" pitchFamily="34" charset="-122"/>
+                      </a:endParaRPr>
+                    </a:p>
+                  </a:txBody>
+                  <a:tcPr anchor="ctr" anchorCtr="0">
+                    <a:solidFill>
+                      <a:schemeClr val="bg1">
+                        <a:lumMod val="85000"/>
+                      </a:schemeClr>
+                    </a:solidFill>
+                  </a:tcPr>
+                </a:tc>
+                <a:tc>
+                  <a:txBody>
+                    <a:bodyPr/>
+                    <a:p>
+                      <a:pPr algn="ctr">
+                        <a:buNone/>
+                      </a:pPr>
+                      <a:r>
+                        <a:rPr lang="zh-CN" altLang="en-US" sz="1100" b="1" dirty="0">
+                          <a:effectLst/>
+                          <a:latin typeface="微软雅黑" panose="020B0503020204020204" pitchFamily="34" charset="-122"/>
+                          <a:ea typeface="微软雅黑" panose="020B0503020204020204" pitchFamily="34" charset="-122"/>
+                        </a:rPr>
+                        <a:t>原因</a:t>
+                      </a:r>
+                      <a:endParaRPr lang="zh-CN" altLang="en-US" sz="1100" b="1" dirty="0">
+                        <a:effectLst/>
+                        <a:latin typeface="微软雅黑" panose="020B0503020204020204" pitchFamily="34" charset="-122"/>
+                        <a:ea typeface="微软雅黑" panose="020B0503020204020204" pitchFamily="34" charset="-122"/>
+                      </a:endParaRPr>
+                    </a:p>
+                  </a:txBody>
+                  <a:tcPr anchor="ctr" anchorCtr="0">
+                    <a:solidFill>
+                      <a:schemeClr val="bg1">
+                        <a:lumMod val="85000"/>
+                      </a:schemeClr>
+                    </a:solidFill>
+                  </a:tcPr>
+                </a:tc>
+              </a:tr>
+              <a:tr h="396000">
+                <a:tc>
+                  <a:txBody>
+                    <a:bodyPr/>
+                    <a:p>
+                      <a:pPr algn="ctr">
+                        <a:buNone/>
+                      </a:pPr>
+                      <a:r>
+                        <a:rPr lang="en-US" altLang="zh-CN" sz="1000">
+                          <a:latin typeface="微软雅黑" panose="020B0503020204020204" pitchFamily="34" charset="-122"/>
+                          <a:ea typeface="微软雅黑" panose="020B0503020204020204" pitchFamily="34" charset="-122"/>
+                        </a:rPr>
+                        <a:t>Why1</a:t>
+                      </a:r>
+                      <a:endParaRPr lang="en-US" altLang="zh-CN" sz="1000">
+                        <a:latin typeface="微软雅黑" panose="020B0503020204020204" pitchFamily="34" charset="-122"/>
+                        <a:ea typeface="微软雅黑" panose="020B0503020204020204" pitchFamily="34" charset="-122"/>
+                      </a:endParaRPr>
+                    </a:p>
+                  </a:txBody>
+                  <a:tcPr anchor="ctr" anchorCtr="0"/>
+                </a:tc>
+                <a:tc>
+                  <a:txBody>
+                    <a:bodyPr/>
+                    <a:p>
+                      <a:pPr algn="ctr">
+                        <a:buNone/>
+                      </a:pPr>
+                      <a:endParaRPr lang="zh-CN" altLang="en-US" sz="1000">
+                        <a:latin typeface="微软雅黑" panose="020B0503020204020204" pitchFamily="34" charset="-122"/>
+                        <a:ea typeface="微软雅黑" panose="020B0503020204020204" pitchFamily="34" charset="-122"/>
+                      </a:endParaRPr>
+                    </a:p>
+                  </a:txBody>
+                  <a:tcPr anchor="ctr" anchorCtr="0"/>
+                </a:tc>
+                <a:tc>
+                  <a:txBody>
+                    <a:bodyPr/>
+                    <a:p>
+                      <a:pPr algn="ctr">
+                        <a:buNone/>
+                      </a:pPr>
+                      <a:endParaRPr lang="zh-CN" altLang="en-US" sz="1000">
+                        <a:latin typeface="微软雅黑" panose="020B0503020204020204" pitchFamily="34" charset="-122"/>
+                        <a:ea typeface="微软雅黑" panose="020B0503020204020204" pitchFamily="34" charset="-122"/>
+                      </a:endParaRPr>
+                    </a:p>
+                  </a:txBody>
+                  <a:tcPr anchor="ctr" anchorCtr="0"/>
+                </a:tc>
+              </a:tr>
+              <a:tr h="396000">
+                <a:tc>
+                  <a:txBody>
+                    <a:bodyPr/>
+                    <a:p>
+                      <a:pPr algn="ctr">
+                        <a:buNone/>
+                      </a:pPr>
+                      <a:r>
+                        <a:rPr lang="en-US" altLang="zh-CN" sz="1000">
+                          <a:latin typeface="微软雅黑" panose="020B0503020204020204" pitchFamily="34" charset="-122"/>
+                          <a:ea typeface="微软雅黑" panose="020B0503020204020204" pitchFamily="34" charset="-122"/>
+                          <a:sym typeface="+mn-ea"/>
+                        </a:rPr>
+                        <a:t>Why2</a:t>
+                      </a:r>
+                      <a:endParaRPr lang="zh-CN" altLang="en-US" sz="1000">
+                        <a:latin typeface="微软雅黑" panose="020B0503020204020204" pitchFamily="34" charset="-122"/>
+                        <a:ea typeface="微软雅黑" panose="020B0503020204020204" pitchFamily="34" charset="-122"/>
+                      </a:endParaRPr>
+                    </a:p>
+                  </a:txBody>
+                  <a:tcPr anchor="ctr" anchorCtr="0"/>
+                </a:tc>
+                <a:tc>
+                  <a:txBody>
+                    <a:bodyPr/>
+                    <a:p>
+                      <a:pPr algn="ctr">
+                        <a:buNone/>
+                      </a:pPr>
+                      <a:endParaRPr lang="zh-CN" altLang="en-US" sz="1000">
+                        <a:latin typeface="微软雅黑" panose="020B0503020204020204" pitchFamily="34" charset="-122"/>
+                        <a:ea typeface="微软雅黑" panose="020B0503020204020204" pitchFamily="34" charset="-122"/>
+                      </a:endParaRPr>
+                    </a:p>
+                  </a:txBody>
+                  <a:tcPr anchor="ctr" anchorCtr="0"/>
+                </a:tc>
+                <a:tc>
+                  <a:txBody>
+                    <a:bodyPr/>
+                    <a:p>
+                      <a:pPr algn="ctr">
+                        <a:buNone/>
+                      </a:pPr>
+                      <a:endParaRPr lang="zh-CN" altLang="en-US" sz="1000">
+                        <a:latin typeface="微软雅黑" panose="020B0503020204020204" pitchFamily="34" charset="-122"/>
+                        <a:ea typeface="微软雅黑" panose="020B0503020204020204" pitchFamily="34" charset="-122"/>
+                      </a:endParaRPr>
+                    </a:p>
+                  </a:txBody>
+                  <a:tcPr anchor="ctr" anchorCtr="0"/>
+                </a:tc>
+              </a:tr>
+              <a:tr h="396000">
+                <a:tc>
+                  <a:txBody>
+                    <a:bodyPr/>
+                    <a:p>
+                      <a:pPr algn="ctr">
+                        <a:buNone/>
+                      </a:pPr>
+                      <a:r>
+                        <a:rPr lang="en-US" altLang="zh-CN" sz="1000">
+                          <a:latin typeface="微软雅黑" panose="020B0503020204020204" pitchFamily="34" charset="-122"/>
+                          <a:ea typeface="微软雅黑" panose="020B0503020204020204" pitchFamily="34" charset="-122"/>
+                          <a:sym typeface="+mn-ea"/>
+                        </a:rPr>
+                        <a:t>Why3</a:t>
+                      </a:r>
+                      <a:endParaRPr lang="zh-CN" altLang="en-US" sz="1000">
+                        <a:latin typeface="微软雅黑" panose="020B0503020204020204" pitchFamily="34" charset="-122"/>
+                        <a:ea typeface="微软雅黑" panose="020B0503020204020204" pitchFamily="34" charset="-122"/>
+                      </a:endParaRPr>
+                    </a:p>
+                  </a:txBody>
+                  <a:tcPr anchor="ctr" anchorCtr="0"/>
+                </a:tc>
+                <a:tc>
+                  <a:txBody>
+                    <a:bodyPr/>
+                    <a:p>
+                      <a:pPr algn="ctr">
+                        <a:buNone/>
+                      </a:pPr>
+                      <a:endParaRPr lang="zh-CN" altLang="en-US" sz="1000">
+                        <a:latin typeface="微软雅黑" panose="020B0503020204020204" pitchFamily="34" charset="-122"/>
+                        <a:ea typeface="微软雅黑" panose="020B0503020204020204" pitchFamily="34" charset="-122"/>
+                      </a:endParaRPr>
+                    </a:p>
+                  </a:txBody>
+                  <a:tcPr anchor="ctr" anchorCtr="0"/>
+                </a:tc>
+                <a:tc>
+                  <a:txBody>
+                    <a:bodyPr/>
+                    <a:p>
+                      <a:pPr algn="ctr">
+                        <a:buNone/>
+                      </a:pPr>
+                      <a:endParaRPr lang="zh-CN" altLang="en-US" sz="1000">
+                        <a:latin typeface="微软雅黑" panose="020B0503020204020204" pitchFamily="34" charset="-122"/>
+                        <a:ea typeface="微软雅黑" panose="020B0503020204020204" pitchFamily="34" charset="-122"/>
+                      </a:endParaRPr>
+                    </a:p>
+                  </a:txBody>
+                  <a:tcPr anchor="ctr" anchorCtr="0"/>
+                </a:tc>
+              </a:tr>
+            </a:tbl>
+          </a:graphicData>
+        </a:graphic>
+      </p:graphicFrame>
+      <p:sp>
+        <p:nvSpPr>
+          <p:cNvPr id="18433" name="灯片编号占位符 1"/>
+          <p:cNvSpPr>
+            <a:spLocks noGrp="1"/>
+          </p:cNvSpPr>
+          <p:nvPr>
+            <p:ph type="sldNum" sz="quarter" idx="10"/>
+          </p:nvPr>
+        </p:nvSpPr>
+        <p:spPr>
+          <a:xfrm>
+            <a:off x="8388350" y="4691063"/>
+            <a:ext cx="360363" cy="112712"/>
+          </a:xfrm>
+          <a:noFill/>
+          <a:ln>
+            <a:noFill/>
+          </a:ln>
+        </p:spPr>
+        <p:txBody>
+          <a:bodyPr wrap="none" lIns="0" tIns="0" rIns="0" bIns="0" anchor="t"/>
+          <a:lstStyle>
+            <a:lvl1pPr marL="0" lvl="0" indent="0" algn="l" defTabSz="914400" rtl="0" eaLnBrk="1" fontAlgn="base" latinLnBrk="0" hangingPunct="1">
+              <a:lnSpc>
+                <a:spcPct val="100000"/>
+              </a:lnSpc>
+              <a:spcBef>
+                <a:spcPct val="0"/>
+              </a:spcBef>
+              <a:spcAft>
+                <a:spcPct val="0"/>
+              </a:spcAft>
+              <a:buNone/>
+              <a:defRPr sz="1800" kern="1200">
+                <a:solidFill>
+                  <a:schemeClr val="tx1"/>
+                </a:solidFill>
+                <a:latin typeface="Calibri" panose="020F0502020204030204" pitchFamily="34" charset="0"/>
+                <a:ea typeface="宋体" panose="02010600030101010101" pitchFamily="2" charset="-122"/>
+              </a:defRPr>
+            </a:lvl1pPr>
+            <a:lvl2pPr marL="457200" lvl="1" indent="0" algn="l" defTabSz="914400" rtl="0" eaLnBrk="1" fontAlgn="base" latinLnBrk="0" hangingPunct="1">
+              <a:lnSpc>
+                <a:spcPct val="100000"/>
+              </a:lnSpc>
+              <a:spcBef>
+                <a:spcPct val="0"/>
+              </a:spcBef>
+              <a:spcAft>
+                <a:spcPct val="0"/>
+              </a:spcAft>
+              <a:buFont typeface="Arial" panose="020B0604020202020204" pitchFamily="34" charset="0"/>
+              <a:buNone/>
+              <a:defRPr kern="1200">
+                <a:solidFill>
+                  <a:schemeClr val="tx1"/>
+                </a:solidFill>
+                <a:latin typeface="Calibri" panose="020F0502020204030204" pitchFamily="34" charset="0"/>
+                <a:ea typeface="宋体" panose="02010600030101010101" pitchFamily="2" charset="-122"/>
+                <a:cs typeface="+mn-cs"/>
+              </a:defRPr>
+            </a:lvl2pPr>
+            <a:lvl3pPr marL="914400" lvl="2" indent="0" algn="l" defTabSz="914400" rtl="0" eaLnBrk="1" fontAlgn="base" latinLnBrk="0" hangingPunct="1">
+              <a:lnSpc>
+                <a:spcPct val="100000"/>
+              </a:lnSpc>
+              <a:spcBef>
+                <a:spcPct val="0"/>
+              </a:spcBef>
+              <a:spcAft>
+                <a:spcPct val="0"/>
+              </a:spcAft>
+              <a:buFontTx/>
+              <a:buNone/>
+              <a:defRPr kern="1200">
+                <a:solidFill>
+                  <a:schemeClr val="tx1"/>
+                </a:solidFill>
+                <a:latin typeface="Calibri" panose="020F0502020204030204" pitchFamily="34" charset="0"/>
+                <a:ea typeface="宋体" panose="02010600030101010101" pitchFamily="2" charset="-122"/>
+                <a:cs typeface="+mn-cs"/>
+              </a:defRPr>
+            </a:lvl3pPr>
+            <a:lvl4pPr marL="1371600" lvl="3" indent="0" algn="l" defTabSz="914400" rtl="0" eaLnBrk="1" fontAlgn="base" latinLnBrk="0" hangingPunct="1">
+              <a:lnSpc>
+                <a:spcPct val="100000"/>
+              </a:lnSpc>
+              <a:spcBef>
+                <a:spcPct val="0"/>
+              </a:spcBef>
+              <a:spcAft>
+                <a:spcPct val="0"/>
+              </a:spcAft>
+              <a:buFont typeface="Arial" panose="020B0604020202020204" pitchFamily="34" charset="0"/>
+              <a:buNone/>
+              <a:defRPr kern="1200">
+                <a:solidFill>
+                  <a:schemeClr val="tx1"/>
+                </a:solidFill>
+                <a:latin typeface="Calibri" panose="020F0502020204030204" pitchFamily="34" charset="0"/>
+                <a:ea typeface="宋体" panose="02010600030101010101" pitchFamily="2" charset="-122"/>
+                <a:cs typeface="+mn-cs"/>
+              </a:defRPr>
+            </a:lvl4pPr>
+            <a:lvl5pPr marL="1828800" lvl="4" indent="0" algn="l" defTabSz="914400" rtl="0" eaLnBrk="1" fontAlgn="base" latinLnBrk="0" hangingPunct="1">
+              <a:lnSpc>
+                <a:spcPct val="100000"/>
+              </a:lnSpc>
+              <a:spcBef>
+                <a:spcPct val="0"/>
+              </a:spcBef>
+              <a:spcAft>
+                <a:spcPct val="0"/>
+              </a:spcAft>
+              <a:buFontTx/>
+              <a:buNone/>
+              <a:defRPr kern="1200">
+                <a:solidFill>
+                  <a:schemeClr val="tx1"/>
+                </a:solidFill>
+                <a:latin typeface="Calibri" panose="020F0502020204030204" pitchFamily="34" charset="0"/>
+                <a:ea typeface="宋体" panose="02010600030101010101" pitchFamily="2" charset="-122"/>
+                <a:cs typeface="+mn-cs"/>
+              </a:defRPr>
+            </a:lvl5pPr>
+          </a:lstStyle>
+          <a:p>
+            <a:pPr lvl="0" algn="r"/>
+            <a:fld id="{9A0DB2DC-4C9A-4742-B13C-FB6460FD3503}" type="slidenum">
+              <a:rPr lang="en-US" altLang="zh-CN" sz="1000" b="1">
+                <a:solidFill>
+                  <a:schemeClr val="bg1"/>
+                </a:solidFill>
+                <a:latin typeface="Arial" panose="020B0604020202020204" pitchFamily="34" charset="0"/>
+              </a:rPr>
+            </a:fld>
+            <a:endParaRPr lang="en-US" altLang="zh-CN" sz="1000" b="1">
+              <a:solidFill>
+                <a:schemeClr val="bg1"/>
+              </a:solidFill>
+              <a:latin typeface="Arial" panose="020B0604020202020204" pitchFamily="34" charset="0"/>
+            </a:endParaRPr>
+          </a:p>
+        </p:txBody>
+      </p:sp>
+      <p:grpSp>
+        <p:nvGrpSpPr>
+          <p:cNvPr id="3" name="组合 2"/>
+          <p:cNvGrpSpPr/>
+          <p:nvPr/>
+        </p:nvGrpSpPr>
+        <p:grpSpPr>
+          <a:xfrm>
+            <a:off x="467360" y="808990"/>
+            <a:ext cx="2835910" cy="245110"/>
+            <a:chOff x="736" y="1274"/>
+            <a:chExt cx="4466" cy="386"/>
+          </a:xfrm>
+        </p:grpSpPr>
+        <p:sp>
+          <p:nvSpPr>
+            <p:cNvPr id="4" name="TextBox 2"/>
+            <p:cNvSpPr/>
+            <p:nvPr/>
+          </p:nvSpPr>
+          <p:spPr>
+            <a:xfrm>
+              <a:off x="963" y="1274"/>
+              <a:ext cx="4239" cy="386"/>
+            </a:xfrm>
+            <a:prstGeom prst="rect">
+              <a:avLst/>
+            </a:prstGeom>
+            <a:noFill/>
+            <a:ln w="9525">
+              <a:noFill/>
+            </a:ln>
+          </p:spPr>
+          <p:txBody>
+            <a:bodyPr wrap="square" anchor="t">
+              <a:spAutoFit/>
+            </a:bodyPr>
+            <a:p>
+              <a:pPr>
+                <a:lnSpc>
+                  <a:spcPts val="1200"/>
+                </a:lnSpc>
+                <a:spcBef>
+                  <a:spcPts val="600"/>
+                </a:spcBef>
+              </a:pPr>
+              <a:r>
+                <a:rPr lang="en-US" altLang="zh-CN" sz="1400" b="1" dirty="0" smtClean="0">
+                  <a:solidFill>
+                    <a:srgbClr val="000000"/>
+                  </a:solidFill>
+                  <a:latin typeface="微软雅黑" panose="020B0503020204020204" pitchFamily="34" charset="-122"/>
+                  <a:ea typeface="微软雅黑" panose="020B0503020204020204" pitchFamily="34" charset="-122"/>
+                  <a:sym typeface="微软雅黑" panose="020B0503020204020204" pitchFamily="34" charset="-122"/>
+                </a:rPr>
+                <a:t>D4  </a:t>
+              </a:r>
+              <a:r>
+                <a:rPr lang="zh-CN" altLang="en-US" sz="1400" b="1" dirty="0" smtClean="0">
+                  <a:solidFill>
+                    <a:srgbClr val="000000"/>
+                  </a:solidFill>
+                  <a:latin typeface="微软雅黑" panose="020B0503020204020204" pitchFamily="34" charset="-122"/>
+                  <a:ea typeface="微软雅黑" panose="020B0503020204020204" pitchFamily="34" charset="-122"/>
+                  <a:sym typeface="微软雅黑" panose="020B0503020204020204" pitchFamily="34" charset="-122"/>
+                </a:rPr>
+                <a:t>原因</a:t>
+              </a:r>
+              <a:r>
+                <a:rPr lang="zh-CN" altLang="en-US" sz="1400" b="1" dirty="0">
+                  <a:solidFill>
+                    <a:srgbClr val="000000"/>
+                  </a:solidFill>
+                  <a:latin typeface="微软雅黑" panose="020B0503020204020204" pitchFamily="34" charset="-122"/>
+                  <a:ea typeface="微软雅黑" panose="020B0503020204020204" pitchFamily="34" charset="-122"/>
+                  <a:sym typeface="微软雅黑" panose="020B0503020204020204" pitchFamily="34" charset="-122"/>
+                </a:rPr>
+                <a:t>分析</a:t>
+              </a:r>
+              <a:endParaRPr lang="zh-CN" altLang="en-US" sz="1400" b="1">
+                <a:solidFill>
+                  <a:srgbClr val="000000"/>
+                </a:solidFill>
+                <a:latin typeface="微软雅黑" panose="020B0503020204020204" pitchFamily="34" charset="-122"/>
+                <a:ea typeface="微软雅黑" panose="020B0503020204020204" pitchFamily="34" charset="-122"/>
+                <a:sym typeface="微软雅黑" panose="020B0503020204020204" pitchFamily="34" charset="-122"/>
+              </a:endParaRPr>
+            </a:p>
+          </p:txBody>
+        </p:sp>
+        <p:sp>
+          <p:nvSpPr>
+            <p:cNvPr id="5" name="矩形 4"/>
+            <p:cNvSpPr/>
+            <p:nvPr/>
+          </p:nvSpPr>
+          <p:spPr>
+            <a:xfrm>
+              <a:off x="736" y="1313"/>
+              <a:ext cx="227" cy="229"/>
+            </a:xfrm>
+            <a:prstGeom prst="rect">
+              <a:avLst/>
+            </a:prstGeom>
+            <a:solidFill>
+              <a:srgbClr val="E62135"/>
+            </a:solidFill>
+            <a:ln w="9525">
+              <a:noFill/>
+            </a:ln>
+          </p:spPr>
+          <p:style>
+            <a:lnRef idx="1">
+              <a:schemeClr val="accent1"/>
+            </a:lnRef>
+            <a:fillRef idx="0">
+              <a:schemeClr val="accent1"/>
+            </a:fillRef>
+            <a:effectRef idx="0">
+              <a:schemeClr val="accent1"/>
+            </a:effectRef>
+            <a:fontRef idx="minor">
+              <a:schemeClr val="tx1"/>
+            </a:fontRef>
+          </p:style>
+          <p:txBody>
+            <a:bodyPr anchor="ctr"/>
+            <a:p>
+              <a:pPr algn="ctr" fontAlgn="auto">
+                <a:defRPr/>
+              </a:pPr>
+              <a:endParaRPr lang="zh-CN" altLang="en-US" sz="1600" noProof="1">
+                <a:solidFill>
+                  <a:srgbClr val="EBEBEB">
+                    <a:lumMod val="10000"/>
+                  </a:srgbClr>
+                </a:solidFill>
+              </a:endParaRPr>
+            </a:p>
+          </p:txBody>
+        </p:sp>
+      </p:grpSp>
+      <p:sp>
+        <p:nvSpPr>
+          <p:cNvPr id="7" name="文本框 6"/>
+          <p:cNvSpPr txBox="1"/>
+          <p:nvPr/>
+        </p:nvSpPr>
+        <p:spPr>
+          <a:xfrm>
+            <a:off x="611505" y="1059815"/>
+            <a:ext cx="3048000" cy="245110"/>
+          </a:xfrm>
+          <a:prstGeom prst="rect">
+            <a:avLst/>
+          </a:prstGeom>
+          <a:noFill/>
+        </p:spPr>
+        <p:txBody>
+          <a:bodyPr wrap="square" rtlCol="0">
+            <a:spAutoFit/>
+          </a:bodyPr>
+          <a:p>
+            <a:r>
+              <a:rPr lang="en-US" altLang="zh-CN" sz="1000">
+                <a:latin typeface="微软雅黑" panose="020B0503020204020204" pitchFamily="34" charset="-122"/>
+                <a:ea typeface="微软雅黑" panose="020B0503020204020204" pitchFamily="34" charset="-122"/>
+                <a:cs typeface="微软雅黑" panose="020B0503020204020204" pitchFamily="34" charset="-122"/>
+              </a:rPr>
+              <a:t>5WHY</a:t>
+            </a:r>
+            <a:r>
+              <a:rPr lang="zh-CN" altLang="en-US" sz="1000">
+                <a:latin typeface="微软雅黑" panose="020B0503020204020204" pitchFamily="34" charset="-122"/>
+                <a:ea typeface="微软雅黑" panose="020B0503020204020204" pitchFamily="34" charset="-122"/>
+                <a:cs typeface="微软雅黑" panose="020B0503020204020204" pitchFamily="34" charset="-122"/>
+              </a:rPr>
+              <a:t>流出</a:t>
+            </a:r>
+            <a:r>
+              <a:rPr lang="zh-CN" altLang="en-US" sz="1000">
+                <a:latin typeface="微软雅黑" panose="020B0503020204020204" pitchFamily="34" charset="-122"/>
+                <a:ea typeface="微软雅黑" panose="020B0503020204020204" pitchFamily="34" charset="-122"/>
+                <a:cs typeface="微软雅黑" panose="020B0503020204020204" pitchFamily="34" charset="-122"/>
+              </a:rPr>
+              <a:t>原因分析：</a:t>
+            </a:r>
+            <a:endParaRPr lang="zh-CN" altLang="en-US" sz="1000">
+              <a:latin typeface="微软雅黑" panose="020B0503020204020204" pitchFamily="34" charset="-122"/>
+              <a:ea typeface="微软雅黑" panose="020B0503020204020204" pitchFamily="34" charset="-122"/>
+              <a:cs typeface="微软雅黑" panose="020B0503020204020204" pitchFamily="34" charset="-122"/>
+            </a:endParaRPr>
+          </a:p>
+        </p:txBody>
+      </p:sp>
+    </p:spTree>
+  </p:cSld>
+  <p:clrMapOvr>
+    <a:masterClrMapping/>
+  </p:clrMapOvr>
+  <p:transition/>
+  <p:timing>
+    <p:tnLst>
+      <p:par>
+        <p:cTn id="1" dur="indefinite" restart="never" nodeType="tmRoot"/>
+      </p:par>
+    </p:tnLst>
+  </p:timing>
+</p:sld>
+</file>
+
+<file path=ppt/slides/slide11.xml><?xml version="1.0" encoding="utf-8"?>
+<p:sld xmlns:a="http://schemas.openxmlformats.org/drawingml/2006/main" xmlns:r="http://schemas.openxmlformats.org/officeDocument/2006/relationships" xmlns:p="http://schemas.openxmlformats.org/presentationml/2006/main">
+  <p:cSld>
+    <p:spTree>
+      <p:nvGrpSpPr>
+        <p:cNvPr id="1" name=""/>
+        <p:cNvGrpSpPr/>
+        <p:nvPr/>
+      </p:nvGrpSpPr>
+      <p:grpSpPr>
+        <a:xfrm>
+          <a:off x="0" y="0"/>
+          <a:ext cx="0" cy="0"/>
+          <a:chOff x="0" y="0"/>
+          <a:chExt cx="0" cy="0"/>
+        </a:xfrm>
+      </p:grpSpPr>
       <p:sp>
         <p:nvSpPr>
           <p:cNvPr id="24577" name="灯片编号占位符 1"/>
@@ -5302,6 +6121,50 @@
           </p:txBody>
         </p:sp>
       </p:grpSp>
+      <p:pic>
+        <p:nvPicPr>
+          <p:cNvPr id="6" name="图片 5"/>
+          <p:cNvPicPr/>
+          <p:nvPr/>
+        </p:nvPicPr>
+        <p:blipFill>
+          <a:blip r:embed="rId1"/>
+          <a:stretch>
+            <a:fillRect/>
+          </a:stretch>
+        </p:blipFill>
+        <p:spPr>
+          <a:xfrm>
+            <a:off x="971550" y="2284095"/>
+            <a:ext cx="2692400" cy="1887220"/>
+          </a:xfrm>
+          <a:prstGeom prst="rect">
+            <a:avLst/>
+          </a:prstGeom>
+        </p:spPr>
+      </p:pic>
+      <p:pic>
+        <p:nvPicPr>
+          <p:cNvPr id="8" name="图片 7"/>
+          <p:cNvPicPr/>
+          <p:nvPr/>
+        </p:nvPicPr>
+        <p:blipFill>
+          <a:blip r:embed="rId1"/>
+          <a:stretch>
+            <a:fillRect/>
+          </a:stretch>
+        </p:blipFill>
+        <p:spPr>
+          <a:xfrm>
+            <a:off x="4716145" y="2284095"/>
+            <a:ext cx="2692400" cy="1887220"/>
+          </a:xfrm>
+          <a:prstGeom prst="rect">
+            <a:avLst/>
+          </a:prstGeom>
+        </p:spPr>
+      </p:pic>
     </p:spTree>
   </p:cSld>
   <p:clrMapOvr>
@@ -5318,7 +6181,7 @@
 </p:sld>
 </file>
 
-<file path=ppt/slides/slide11.xml><?xml version="1.0" encoding="utf-8"?>
+<file path=ppt/slides/slide12.xml><?xml version="1.0" encoding="utf-8"?>
 <p:sld xmlns:a="http://schemas.openxmlformats.org/drawingml/2006/main" xmlns:r="http://schemas.openxmlformats.org/officeDocument/2006/relationships" xmlns:p="http://schemas.openxmlformats.org/presentationml/2006/main">
   <p:cSld>
     <p:spTree>
@@ -6344,7 +7207,7 @@
 </p:sld>
 </file>
 
-<file path=ppt/slides/slide12.xml><?xml version="1.0" encoding="utf-8"?>
+<file path=ppt/slides/slide13.xml><?xml version="1.0" encoding="utf-8"?>
 <p:sld xmlns:a="http://schemas.openxmlformats.org/drawingml/2006/main" xmlns:r="http://schemas.openxmlformats.org/officeDocument/2006/relationships" xmlns:p="http://schemas.openxmlformats.org/presentationml/2006/main">
   <p:cSld>
     <p:spTree>
@@ -10845,7 +11708,7 @@
 </p:sld>
 </file>
 
-<file path=ppt/slides/slide13.xml><?xml version="1.0" encoding="utf-8"?>
+<file path=ppt/slides/slide14.xml><?xml version="1.0" encoding="utf-8"?>
 <p:sld xmlns:a="http://schemas.openxmlformats.org/drawingml/2006/main" xmlns:r="http://schemas.openxmlformats.org/officeDocument/2006/relationships" xmlns:p="http://schemas.openxmlformats.org/presentationml/2006/main">
   <p:cSld>
     <p:spTree>
@@ -11017,7 +11880,7 @@
         <p:spPr>
           <a:xfrm>
             <a:off x="334441" y="1275606"/>
-            <a:ext cx="8247063" cy="460375"/>
+            <a:ext cx="8247063" cy="1568450"/>
           </a:xfrm>
           <a:prstGeom prst="rect">
             <a:avLst/>
@@ -11033,33 +11896,189 @@
           </a:bodyPr>
           <a:lstStyle/>
           <a:p>
-            <a:pPr marL="171450" indent="-171450">
+            <a:pPr indent="-171450" fontAlgn="auto">
               <a:lnSpc>
                 <a:spcPct val="200000"/>
               </a:lnSpc>
+              <a:spcBef>
+                <a:spcPts val="0"/>
+              </a:spcBef>
+              <a:spcAft>
+                <a:spcPts val="0"/>
+              </a:spcAft>
               <a:buFont typeface="Wingdings" panose="05000000000000000000" pitchFamily="2" charset="2"/>
               <a:buChar char="Ø"/>
+              <a:defRPr/>
             </a:pPr>
             <a:r>
-              <a:rPr lang="en-US" altLang="zh-CN" sz="1200" dirty="0" smtClean="0">
+              <a:rPr lang="zh-CN" sz="1200" dirty="0">
+                <a:solidFill>
+                  <a:srgbClr val="000000"/>
+                </a:solidFill>
                 <a:latin typeface="微软雅黑" panose="020B0503020204020204" pitchFamily="34" charset="-122"/>
                 <a:ea typeface="微软雅黑" panose="020B0503020204020204" pitchFamily="34" charset="-122"/>
+                <a:sym typeface="+mn-ea"/>
               </a:rPr>
-              <a:t>1</a:t>
+              <a:t>背景</a:t>
+            </a:r>
+            <a:r>
+              <a:rPr sz="1200" dirty="0">
+                <a:solidFill>
+                  <a:srgbClr val="000000"/>
+                </a:solidFill>
+                <a:latin typeface="微软雅黑" panose="020B0503020204020204" pitchFamily="34" charset="-122"/>
+                <a:ea typeface="微软雅黑" panose="020B0503020204020204" pitchFamily="34" charset="-122"/>
+                <a:sym typeface="+mn-ea"/>
+              </a:rPr>
+              <a:t>：</a:t>
+            </a:r>
+            <a:r>
+              <a:rPr lang="en-US" sz="1200" dirty="0">
+                <a:solidFill>
+                  <a:srgbClr val="000000"/>
+                </a:solidFill>
+                <a:latin typeface="微软雅黑" panose="020B0503020204020204" pitchFamily="34" charset="-122"/>
+                <a:ea typeface="微软雅黑" panose="020B0503020204020204" pitchFamily="34" charset="-122"/>
+                <a:sym typeface="+mn-ea"/>
+              </a:rPr>
+              <a:t>  </a:t>
+            </a:r>
+            <a:endParaRPr sz="1200" dirty="0" smtClean="0">
+              <a:latin typeface="微软雅黑" panose="020B0503020204020204" pitchFamily="34" charset="-122"/>
+              <a:ea typeface="微软雅黑" panose="020B0503020204020204" pitchFamily="34" charset="-122"/>
+            </a:endParaRPr>
+          </a:p>
+          <a:p>
+            <a:pPr indent="-171450" fontAlgn="auto">
+              <a:lnSpc>
+                <a:spcPct val="200000"/>
+              </a:lnSpc>
+              <a:spcBef>
+                <a:spcPts val="0"/>
+              </a:spcBef>
+              <a:spcAft>
+                <a:spcPts val="0"/>
+              </a:spcAft>
+              <a:buFont typeface="Wingdings" panose="05000000000000000000" pitchFamily="2" charset="2"/>
+              <a:buChar char="Ø"/>
+              <a:defRPr/>
+            </a:pPr>
+            <a:r>
+              <a:rPr lang="zh-CN" sz="1200" dirty="0">
+                <a:solidFill>
+                  <a:srgbClr val="000000"/>
+                </a:solidFill>
+                <a:latin typeface="微软雅黑" panose="020B0503020204020204" pitchFamily="34" charset="-122"/>
+                <a:ea typeface="微软雅黑" panose="020B0503020204020204" pitchFamily="34" charset="-122"/>
+                <a:sym typeface="+mn-ea"/>
+              </a:rPr>
+              <a:t>现状</a:t>
+            </a:r>
+            <a:r>
+              <a:rPr sz="1200" dirty="0">
+                <a:solidFill>
+                  <a:srgbClr val="000000"/>
+                </a:solidFill>
+                <a:latin typeface="微软雅黑" panose="020B0503020204020204" pitchFamily="34" charset="-122"/>
+                <a:ea typeface="微软雅黑" panose="020B0503020204020204" pitchFamily="34" charset="-122"/>
+                <a:sym typeface="+mn-ea"/>
+              </a:rPr>
+              <a:t>：</a:t>
+            </a:r>
+            <a:r>
+              <a:rPr lang="en-US" altLang="zh-CN" sz="1200" dirty="0">
+                <a:solidFill>
+                  <a:srgbClr val="000000"/>
+                </a:solidFill>
+                <a:latin typeface="微软雅黑" panose="020B0503020204020204" pitchFamily="34" charset="-122"/>
+                <a:ea typeface="微软雅黑" panose="020B0503020204020204" pitchFamily="34" charset="-122"/>
+                <a:sym typeface="+mn-ea"/>
+              </a:rPr>
+              <a:t> </a:t>
+            </a:r>
+            <a:endParaRPr lang="en-US" altLang="zh-CN" sz="1200" dirty="0">
+              <a:solidFill>
+                <a:srgbClr val="000000"/>
+              </a:solidFill>
+              <a:latin typeface="微软雅黑" panose="020B0503020204020204" pitchFamily="34" charset="-122"/>
+              <a:ea typeface="微软雅黑" panose="020B0503020204020204" pitchFamily="34" charset="-122"/>
+            </a:endParaRPr>
+          </a:p>
+          <a:p>
+            <a:pPr indent="-171450" fontAlgn="auto">
+              <a:lnSpc>
+                <a:spcPct val="200000"/>
+              </a:lnSpc>
+              <a:spcBef>
+                <a:spcPts val="0"/>
+              </a:spcBef>
+              <a:spcAft>
+                <a:spcPts val="0"/>
+              </a:spcAft>
+              <a:buFont typeface="Wingdings" panose="05000000000000000000" pitchFamily="2" charset="2"/>
+              <a:buChar char="Ø"/>
+              <a:defRPr/>
+            </a:pPr>
+            <a:r>
+              <a:rPr lang="zh-CN" altLang="en-US" sz="1200" dirty="0" smtClean="0">
+                <a:solidFill>
+                  <a:srgbClr val="000000"/>
+                </a:solidFill>
+                <a:latin typeface="微软雅黑" panose="020B0503020204020204" pitchFamily="34" charset="-122"/>
+                <a:ea typeface="微软雅黑" panose="020B0503020204020204" pitchFamily="34" charset="-122"/>
+                <a:sym typeface="+mn-ea"/>
+              </a:rPr>
+              <a:t>系统策略</a:t>
             </a:r>
             <a:r>
               <a:rPr lang="zh-CN" altLang="en-US" sz="1200" dirty="0" smtClean="0">
                 <a:latin typeface="微软雅黑" panose="020B0503020204020204" pitchFamily="34" charset="-122"/>
                 <a:ea typeface="微软雅黑" panose="020B0503020204020204" pitchFamily="34" charset="-122"/>
+                <a:sym typeface="+mn-ea"/>
               </a:rPr>
-              <a:t>、</a:t>
+              <a:t>：</a:t>
+            </a:r>
+            <a:endParaRPr lang="en-US" altLang="zh-CN" sz="1200" dirty="0" smtClean="0">
+              <a:latin typeface="微软雅黑" panose="020B0503020204020204" pitchFamily="34" charset="-122"/>
+              <a:ea typeface="微软雅黑" panose="020B0503020204020204" pitchFamily="34" charset="-122"/>
+            </a:endParaRPr>
+          </a:p>
+          <a:p>
+            <a:pPr indent="-171450" fontAlgn="auto">
+              <a:lnSpc>
+                <a:spcPct val="200000"/>
+              </a:lnSpc>
+              <a:spcBef>
+                <a:spcPts val="0"/>
+              </a:spcBef>
+              <a:spcAft>
+                <a:spcPts val="0"/>
+              </a:spcAft>
+              <a:buFont typeface="Wingdings" panose="05000000000000000000" pitchFamily="2" charset="2"/>
+              <a:buChar char="Ø"/>
+              <a:defRPr/>
+            </a:pPr>
+            <a:r>
+              <a:rPr lang="zh-CN" sz="1200" dirty="0" err="1" smtClean="0">
+                <a:solidFill>
+                  <a:srgbClr val="000000"/>
+                </a:solidFill>
+                <a:latin typeface="微软雅黑" panose="020B0503020204020204" pitchFamily="34" charset="-122"/>
+                <a:ea typeface="微软雅黑" panose="020B0503020204020204" pitchFamily="34" charset="-122"/>
+                <a:sym typeface="+mn-ea"/>
+              </a:rPr>
+              <a:t>策略逻辑</a:t>
             </a:r>
             <a:r>
-              <a:rPr lang="zh-CN" altLang="en-US" sz="1200" dirty="0">
+              <a:rPr lang="zh-CN" sz="1200" dirty="0" smtClean="0">
+                <a:solidFill>
+                  <a:srgbClr val="000000"/>
+                </a:solidFill>
                 <a:latin typeface="微软雅黑" panose="020B0503020204020204" pitchFamily="34" charset="-122"/>
                 <a:ea typeface="微软雅黑" panose="020B0503020204020204" pitchFamily="34" charset="-122"/>
+                <a:sym typeface="+mn-ea"/>
               </a:rPr>
-              <a:t>{{Content}}</a:t>
+              <a:t>：</a:t>
             </a:r>
             <a:endParaRPr lang="zh-CN" altLang="en-US" sz="1200" dirty="0">
               <a:latin typeface="微软雅黑" panose="020B0503020204020204" pitchFamily="34" charset="-122"/>
@@ -11215,7 +12234,7 @@
 </p:sld>
 </file>
 
-<file path=ppt/slides/slide14.xml><?xml version="1.0" encoding="utf-8"?>
+<file path=ppt/slides/slide15.xml><?xml version="1.0" encoding="utf-8"?>
 <p:sld xmlns:a="http://schemas.openxmlformats.org/drawingml/2006/main" xmlns:r="http://schemas.openxmlformats.org/officeDocument/2006/relationships" xmlns:p="http://schemas.openxmlformats.org/presentationml/2006/main">
   <p:cSld>
     <p:spTree>
@@ -13563,13 +14582,6 @@
               </a:rPr>
               <a:t>  </a:t>
             </a:r>
-            <a:r>
-              <a:rPr sz="1200" dirty="0" smtClean="0">
-                <a:latin typeface="微软雅黑" panose="020B0503020204020204" pitchFamily="34" charset="-122"/>
-                <a:ea typeface="微软雅黑" panose="020B0503020204020204" pitchFamily="34" charset="-122"/>
-              </a:rPr>
-              <a:t>{{Content}}</a:t>
-            </a:r>
             <a:endParaRPr sz="1200" dirty="0" smtClean="0">
               <a:latin typeface="微软雅黑" panose="020B0503020204020204" pitchFamily="34" charset="-122"/>
               <a:ea typeface="微软雅黑" panose="020B0503020204020204" pitchFamily="34" charset="-122"/>
@@ -13620,17 +14632,7 @@
               </a:rPr>
               <a:t> </a:t>
             </a:r>
-            <a:r>
-              <a:rPr lang="en-US" altLang="zh-CN" sz="1200" dirty="0" smtClean="0">
-                <a:solidFill>
-                  <a:srgbClr val="000000"/>
-                </a:solidFill>
-                <a:latin typeface="微软雅黑" panose="020B0503020204020204" pitchFamily="34" charset="-122"/>
-                <a:ea typeface="微软雅黑" panose="020B0503020204020204" pitchFamily="34" charset="-122"/>
-              </a:rPr>
-              <a:t>{{Content}}</a:t>
-            </a:r>
-            <a:endParaRPr lang="en-US" altLang="zh-CN" sz="1200" dirty="0" smtClean="0">
+            <a:endParaRPr lang="en-US" altLang="zh-CN" sz="1200" dirty="0">
               <a:solidFill>
                 <a:srgbClr val="000000"/>
               </a:solidFill>
@@ -13687,13 +14689,6 @@
               </a:rPr>
               <a:t>：</a:t>
             </a:r>
-            <a:r>
-              <a:rPr lang="en-US" altLang="zh-CN" sz="1200" dirty="0" smtClean="0">
-                <a:latin typeface="微软雅黑" panose="020B0503020204020204" pitchFamily="34" charset="-122"/>
-                <a:ea typeface="微软雅黑" panose="020B0503020204020204" pitchFamily="34" charset="-122"/>
-              </a:rPr>
-              <a:t>{{Content}}</a:t>
-            </a:r>
             <a:endParaRPr lang="en-US" altLang="zh-CN" sz="1200" dirty="0" smtClean="0">
               <a:latin typeface="微软雅黑" panose="020B0503020204020204" pitchFamily="34" charset="-122"/>
               <a:ea typeface="微软雅黑" panose="020B0503020204020204" pitchFamily="34" charset="-122"/>
@@ -13733,16 +14728,6 @@
                 <a:ea typeface="微软雅黑" panose="020B0503020204020204" pitchFamily="34" charset="-122"/>
               </a:rPr>
               <a:t>：</a:t>
-            </a:r>
-            <a:r>
-              <a:rPr lang="zh-CN" altLang="en-US" sz="1200" dirty="0" smtClean="0">
-                <a:solidFill>
-                  <a:srgbClr val="000000"/>
-                </a:solidFill>
-                <a:latin typeface="微软雅黑" panose="020B0503020204020204" pitchFamily="34" charset="-122"/>
-                <a:ea typeface="微软雅黑" panose="020B0503020204020204" pitchFamily="34" charset="-122"/>
-              </a:rPr>
-              <a:t>{{Content}}</a:t>
             </a:r>
             <a:endParaRPr lang="zh-CN" altLang="en-US" sz="1200" dirty="0" smtClean="0">
               <a:solidFill>
@@ -13786,16 +14771,6 @@
                 <a:ea typeface="微软雅黑" panose="020B0503020204020204" pitchFamily="34" charset="-122"/>
               </a:rPr>
               <a:t>：</a:t>
-            </a:r>
-            <a:r>
-              <a:rPr sz="1200" dirty="0">
-                <a:solidFill>
-                  <a:srgbClr val="000000"/>
-                </a:solidFill>
-                <a:latin typeface="微软雅黑" panose="020B0503020204020204" pitchFamily="34" charset="-122"/>
-                <a:ea typeface="微软雅黑" panose="020B0503020204020204" pitchFamily="34" charset="-122"/>
-              </a:rPr>
-              <a:t>{{Content}}</a:t>
             </a:r>
             <a:endParaRPr sz="1200" dirty="0">
               <a:solidFill>
@@ -14215,7 +15190,7 @@
         </p:nvGraphicFramePr>
         <p:xfrm>
           <a:off x="438250" y="1336480"/>
-          <a:ext cx="8382222" cy="2603422"/>
+          <a:ext cx="8382222" cy="3553460"/>
         </p:xfrm>
         <a:graphic>
           <a:graphicData uri="http://schemas.openxmlformats.org/drawingml/2006/table">
@@ -14664,7 +15639,73 @@
                     <a:bodyPr/>
                     <a:lstStyle/>
                     <a:p>
-                      <a:pPr marL="0" algn="ctr" defTabSz="914400" rtl="0" eaLnBrk="1" fontAlgn="ctr" latinLnBrk="0" hangingPunct="1"/>
+                      <a:pPr algn="ctr" rtl="0" fontAlgn="ctr"/>
+                      <a:r>
+                        <a:rPr sz="1200" dirty="0" smtClean="0">
+                          <a:latin typeface="微软雅黑" panose="020B0503020204020204" pitchFamily="34" charset="-122"/>
+                          <a:ea typeface="微软雅黑" panose="020B0503020204020204" pitchFamily="34" charset="-122"/>
+                          <a:sym typeface="+mn-ea"/>
+                        </a:rPr>
+                        <a:t>组</a:t>
+                      </a:r>
+                      <a:r>
+                        <a:rPr lang="zh-CN" sz="1200" dirty="0" smtClean="0">
+                          <a:latin typeface="微软雅黑" panose="020B0503020204020204" pitchFamily="34" charset="-122"/>
+                          <a:ea typeface="微软雅黑" panose="020B0503020204020204" pitchFamily="34" charset="-122"/>
+                          <a:sym typeface="+mn-ea"/>
+                        </a:rPr>
+                        <a:t>长</a:t>
+                      </a:r>
+                      <a:endParaRPr sz="1200" u="none" strike="noStrike" dirty="0" smtClean="0">
+                        <a:solidFill>
+                          <a:schemeClr val="tx1"/>
+                        </a:solidFill>
+                        <a:latin typeface="微软雅黑" panose="020B0503020204020204" pitchFamily="34" charset="-122"/>
+                        <a:ea typeface="微软雅黑" panose="020B0503020204020204" pitchFamily="34" charset="-122"/>
+                      </a:endParaRPr>
+                    </a:p>
+                    <a:p>
+                      <a:pPr algn="ctr" rtl="0" fontAlgn="ctr"/>
+                      <a:r>
+                        <a:rPr sz="1200" dirty="0" smtClean="0">
+                          <a:latin typeface="微软雅黑" panose="020B0503020204020204" pitchFamily="34" charset="-122"/>
+                          <a:ea typeface="微软雅黑" panose="020B0503020204020204" pitchFamily="34" charset="-122"/>
+                          <a:sym typeface="+mn-ea"/>
+                        </a:rPr>
+                        <a:t>(Team </a:t>
+                      </a:r>
+                      <a:r>
+                        <a:rPr lang="en-US" sz="1200" dirty="0" smtClean="0">
+                          <a:latin typeface="微软雅黑" panose="020B0503020204020204" pitchFamily="34" charset="-122"/>
+                          <a:ea typeface="微软雅黑" panose="020B0503020204020204" pitchFamily="34" charset="-122"/>
+                          <a:sym typeface="+mn-ea"/>
+                        </a:rPr>
+                        <a:t>lead</a:t>
+                      </a:r>
+                      <a:r>
+                        <a:rPr sz="1200" dirty="0" smtClean="0">
+                          <a:latin typeface="微软雅黑" panose="020B0503020204020204" pitchFamily="34" charset="-122"/>
+                          <a:ea typeface="微软雅黑" panose="020B0503020204020204" pitchFamily="34" charset="-122"/>
+                          <a:sym typeface="+mn-ea"/>
+                        </a:rPr>
+                        <a:t>e</a:t>
+                      </a:r>
+                      <a:r>
+                        <a:rPr lang="en-US" sz="1200" dirty="0" smtClean="0">
+                          <a:latin typeface="微软雅黑" panose="020B0503020204020204" pitchFamily="34" charset="-122"/>
+                          <a:ea typeface="微软雅黑" panose="020B0503020204020204" pitchFamily="34" charset="-122"/>
+                          <a:sym typeface="+mn-ea"/>
+                        </a:rPr>
+                        <a:t>r</a:t>
+                      </a:r>
+                      <a:r>
+                        <a:rPr sz="1200" dirty="0" smtClean="0">
+                          <a:latin typeface="微软雅黑" panose="020B0503020204020204" pitchFamily="34" charset="-122"/>
+                          <a:ea typeface="微软雅黑" panose="020B0503020204020204" pitchFamily="34" charset="-122"/>
+                          <a:sym typeface="+mn-ea"/>
+                        </a:rPr>
+                        <a:t>)</a:t>
+                      </a:r>
                       <a:endParaRPr lang="en-US" altLang="zh-CN" sz="1200" kern="1200" dirty="0">
                         <a:solidFill>
                           <a:schemeClr val="tx1"/>
@@ -14802,7 +15843,61 @@
                     <a:bodyPr/>
                     <a:lstStyle/>
                     <a:p>
-                      <a:pPr marL="0" algn="ctr" defTabSz="914400" rtl="0" eaLnBrk="1" fontAlgn="ctr" latinLnBrk="0" hangingPunct="1"/>
+                      <a:pPr algn="ctr" rtl="0" fontAlgn="ctr"/>
+                      <a:r>
+                        <a:rPr sz="1200" dirty="0" smtClean="0">
+                          <a:solidFill>
+                            <a:srgbClr val="000000"/>
+                          </a:solidFill>
+                          <a:latin typeface="微软雅黑" panose="020B0503020204020204" pitchFamily="34" charset="-122"/>
+                          <a:ea typeface="微软雅黑" panose="020B0503020204020204" pitchFamily="34" charset="-122"/>
+                          <a:sym typeface="+mn-ea"/>
+                        </a:rPr>
+                        <a:t>组员</a:t>
+                      </a:r>
+                      <a:endParaRPr sz="1200" u="none" strike="noStrike" dirty="0" smtClean="0">
+                        <a:solidFill>
+                          <a:srgbClr val="000000"/>
+                        </a:solidFill>
+                        <a:latin typeface="微软雅黑" panose="020B0503020204020204" pitchFamily="34" charset="-122"/>
+                        <a:ea typeface="微软雅黑" panose="020B0503020204020204" pitchFamily="34" charset="-122"/>
+                      </a:endParaRPr>
+                    </a:p>
+                    <a:p>
+                      <a:pPr algn="ctr" rtl="0" fontAlgn="ctr"/>
+                      <a:r>
+                        <a:rPr sz="1200" dirty="0" smtClean="0">
+                          <a:solidFill>
+                            <a:srgbClr val="000000"/>
+                          </a:solidFill>
+                          <a:latin typeface="微软雅黑" panose="020B0503020204020204" pitchFamily="34" charset="-122"/>
+                          <a:ea typeface="微软雅黑" panose="020B0503020204020204" pitchFamily="34" charset="-122"/>
+                          <a:sym typeface="+mn-ea"/>
+                        </a:rPr>
+                        <a:t>(Team </a:t>
+                      </a:r>
+                      <a:r>
+                        <a:rPr lang="en-US" sz="1200" dirty="0" smtClean="0">
+                          <a:solidFill>
+                            <a:srgbClr val="000000"/>
+                          </a:solidFill>
+                          <a:latin typeface="微软雅黑" panose="020B0503020204020204" pitchFamily="34" charset="-122"/>
+                          <a:ea typeface="微软雅黑" panose="020B0503020204020204" pitchFamily="34" charset="-122"/>
+                          <a:sym typeface="+mn-ea"/>
+                        </a:rPr>
+                        <a:t>lead</a:t>
+                      </a:r>
+                      <a:r>
+                        <a:rPr sz="1200" dirty="0" smtClean="0">
+                          <a:solidFill>
+                            <a:srgbClr val="000000"/>
+                          </a:solidFill>
+                          <a:latin typeface="微软雅黑" panose="020B0503020204020204" pitchFamily="34" charset="-122"/>
+                          <a:ea typeface="微软雅黑" panose="020B0503020204020204" pitchFamily="34" charset="-122"/>
+                          <a:sym typeface="+mn-ea"/>
+                        </a:rPr>
+                        <a:t>er)</a:t>
+                      </a:r>
                       <a:endParaRPr lang="en-US" altLang="zh-CN" sz="1200" b="0" kern="1200" dirty="0" smtClean="0">
                         <a:solidFill>
                           <a:schemeClr val="tx1"/>
@@ -14870,6 +15965,826 @@
                   <a:txBody>
                     <a:bodyPr/>
                     <a:lstStyle/>
+                    <a:p>
+                      <a:pPr marL="0" marR="0" indent="0" algn="ctr" defTabSz="914400" rtl="0" eaLnBrk="1" fontAlgn="auto" latinLnBrk="0" hangingPunct="1">
+                        <a:lnSpc>
+                          <a:spcPct val="100000"/>
+                        </a:lnSpc>
+                        <a:spcBef>
+                          <a:spcPts val="0"/>
+                        </a:spcBef>
+                        <a:spcAft>
+                          <a:spcPts val="0"/>
+                        </a:spcAft>
+                        <a:buClrTx/>
+                        <a:buSzTx/>
+                        <a:buFontTx/>
+                        <a:buNone/>
+                        <a:defRPr/>
+                      </a:pPr>
+                      <a:endParaRPr lang="zh-CN" altLang="en-US" sz="1200" b="0" kern="1200" dirty="0">
+                        <a:solidFill>
+                          <a:schemeClr val="tx1"/>
+                        </a:solidFill>
+                        <a:latin typeface="微软雅黑" panose="020B0503020204020204" pitchFamily="34" charset="-122"/>
+                        <a:ea typeface="微软雅黑" panose="020B0503020204020204" pitchFamily="34" charset="-122"/>
+                        <a:cs typeface="+mn-cs"/>
+                      </a:endParaRPr>
+                    </a:p>
+                  </a:txBody>
+                  <a:tcPr marL="12700" marR="12700" marT="12700" anchor="ctr"/>
+                </a:tc>
+              </a:tr>
+              <a:tr h="474760">
+                <a:tc>
+                  <a:txBody>
+                    <a:bodyPr/>
+                    <a:p>
+                      <a:pPr algn="ctr" rtl="0" fontAlgn="ctr">
+                        <a:buNone/>
+                      </a:pPr>
+                      <a:r>
+                        <a:rPr lang="en-US" altLang="en-US" sz="1200" kern="1200" dirty="0">
+                          <a:solidFill>
+                            <a:schemeClr val="tx1"/>
+                          </a:solidFill>
+                          <a:latin typeface="微软雅黑" panose="020B0503020204020204" pitchFamily="34" charset="-122"/>
+                          <a:ea typeface="微软雅黑" panose="020B0503020204020204" pitchFamily="34" charset="-122"/>
+                          <a:cs typeface="+mn-cs"/>
+                        </a:rPr>
+                        <a:t>3</a:t>
+                      </a:r>
+                      <a:endParaRPr lang="en-US" altLang="en-US" sz="1200" kern="1200" dirty="0">
+                        <a:solidFill>
+                          <a:schemeClr val="tx1"/>
+                        </a:solidFill>
+                        <a:latin typeface="微软雅黑" panose="020B0503020204020204" pitchFamily="34" charset="-122"/>
+                        <a:ea typeface="微软雅黑" panose="020B0503020204020204" pitchFamily="34" charset="-122"/>
+                        <a:cs typeface="+mn-cs"/>
+                      </a:endParaRPr>
+                    </a:p>
+                  </a:txBody>
+                  <a:tcPr marL="9525" marR="9525" marT="9525" marB="0" anchor="ctr"/>
+                </a:tc>
+                <a:tc>
+                  <a:txBody>
+                    <a:bodyPr/>
+                    <a:p>
+                      <a:pPr algn="ctr">
+                        <a:buNone/>
+                      </a:pPr>
+                      <a:endParaRPr lang="zh-CN" altLang="en-US" sz="1200" b="0" kern="1200" dirty="0">
+                        <a:solidFill>
+                          <a:schemeClr val="tx1"/>
+                        </a:solidFill>
+                        <a:latin typeface="微软雅黑" panose="020B0503020204020204" pitchFamily="34" charset="-122"/>
+                        <a:ea typeface="微软雅黑" panose="020B0503020204020204" pitchFamily="34" charset="-122"/>
+                        <a:cs typeface="+mn-cs"/>
+                      </a:endParaRPr>
+                    </a:p>
+                  </a:txBody>
+                  <a:tcPr marL="12700" marR="12700" marT="12700" anchor="ctr"/>
+                </a:tc>
+                <a:tc>
+                  <a:txBody>
+                    <a:bodyPr/>
+                    <a:p>
+                      <a:pPr algn="ctr" rtl="0" fontAlgn="ctr"/>
+                      <a:r>
+                        <a:rPr sz="1200" dirty="0" smtClean="0">
+                          <a:solidFill>
+                            <a:srgbClr val="000000"/>
+                          </a:solidFill>
+                          <a:latin typeface="微软雅黑" panose="020B0503020204020204" pitchFamily="34" charset="-122"/>
+                          <a:ea typeface="微软雅黑" panose="020B0503020204020204" pitchFamily="34" charset="-122"/>
+                          <a:sym typeface="+mn-ea"/>
+                        </a:rPr>
+                        <a:t>组员</a:t>
+                      </a:r>
+                      <a:endParaRPr sz="1200" u="none" strike="noStrike" dirty="0" smtClean="0">
+                        <a:solidFill>
+                          <a:srgbClr val="000000"/>
+                        </a:solidFill>
+                        <a:latin typeface="微软雅黑" panose="020B0503020204020204" pitchFamily="34" charset="-122"/>
+                        <a:ea typeface="微软雅黑" panose="020B0503020204020204" pitchFamily="34" charset="-122"/>
+                      </a:endParaRPr>
+                    </a:p>
+                    <a:p>
+                      <a:pPr algn="ctr" rtl="0" fontAlgn="ctr"/>
+                      <a:r>
+                        <a:rPr sz="1200" dirty="0" smtClean="0">
+                          <a:solidFill>
+                            <a:srgbClr val="000000"/>
+                          </a:solidFill>
+                          <a:latin typeface="微软雅黑" panose="020B0503020204020204" pitchFamily="34" charset="-122"/>
+                          <a:ea typeface="微软雅黑" panose="020B0503020204020204" pitchFamily="34" charset="-122"/>
+                          <a:sym typeface="+mn-ea"/>
+                        </a:rPr>
+                        <a:t>(Team </a:t>
+                      </a:r>
+                      <a:r>
+                        <a:rPr lang="en-US" sz="1200" dirty="0" smtClean="0">
+                          <a:solidFill>
+                            <a:srgbClr val="000000"/>
+                          </a:solidFill>
+                          <a:latin typeface="微软雅黑" panose="020B0503020204020204" pitchFamily="34" charset="-122"/>
+                          <a:ea typeface="微软雅黑" panose="020B0503020204020204" pitchFamily="34" charset="-122"/>
+                          <a:sym typeface="+mn-ea"/>
+                        </a:rPr>
+                        <a:t>lead</a:t>
+                      </a:r>
+                      <a:r>
+                        <a:rPr sz="1200" dirty="0" smtClean="0">
+                          <a:solidFill>
+                            <a:srgbClr val="000000"/>
+                          </a:solidFill>
+                          <a:latin typeface="微软雅黑" panose="020B0503020204020204" pitchFamily="34" charset="-122"/>
+                          <a:ea typeface="微软雅黑" panose="020B0503020204020204" pitchFamily="34" charset="-122"/>
+                          <a:sym typeface="+mn-ea"/>
+                        </a:rPr>
+                        <a:t>er)</a:t>
+                      </a:r>
+                      <a:endParaRPr lang="en-US" altLang="zh-CN" sz="1200" b="0" kern="1200" dirty="0" smtClean="0">
+                        <a:solidFill>
+                          <a:schemeClr val="tx1"/>
+                        </a:solidFill>
+                        <a:latin typeface="微软雅黑" panose="020B0503020204020204" pitchFamily="34" charset="-122"/>
+                        <a:ea typeface="微软雅黑" panose="020B0503020204020204" pitchFamily="34" charset="-122"/>
+                        <a:cs typeface="+mn-cs"/>
+                      </a:endParaRPr>
+                    </a:p>
+                  </a:txBody>
+                  <a:tcPr marL="9525" marR="9525" marT="9525" marB="0" anchor="ctr"/>
+                </a:tc>
+                <a:tc>
+                  <a:txBody>
+                    <a:bodyPr/>
+                    <a:p>
+                      <a:pPr marL="0" algn="ctr" defTabSz="914400" rtl="0" eaLnBrk="1" fontAlgn="ctr" latinLnBrk="0" hangingPunct="1">
+                        <a:buNone/>
+                      </a:pPr>
+                      <a:endParaRPr lang="zh-CN" altLang="en-US" sz="1200" b="0" kern="1200" dirty="0">
+                        <a:solidFill>
+                          <a:schemeClr val="tx1"/>
+                        </a:solidFill>
+                        <a:latin typeface="微软雅黑" panose="020B0503020204020204" pitchFamily="34" charset="-122"/>
+                        <a:ea typeface="微软雅黑" panose="020B0503020204020204" pitchFamily="34" charset="-122"/>
+                        <a:cs typeface="+mn-cs"/>
+                      </a:endParaRPr>
+                    </a:p>
+                  </a:txBody>
+                  <a:tcPr marL="9525" marR="9525" marT="9525" marB="0" anchor="ctr"/>
+                </a:tc>
+                <a:tc>
+                  <a:txBody>
+                    <a:bodyPr/>
+                    <a:p>
+                      <a:pPr marL="0" marR="0" indent="0" algn="ctr" defTabSz="914400" rtl="0" eaLnBrk="1" fontAlgn="auto" latinLnBrk="0" hangingPunct="1">
+                        <a:lnSpc>
+                          <a:spcPct val="100000"/>
+                        </a:lnSpc>
+                        <a:spcBef>
+                          <a:spcPts val="0"/>
+                        </a:spcBef>
+                        <a:spcAft>
+                          <a:spcPts val="0"/>
+                        </a:spcAft>
+                        <a:buClrTx/>
+                        <a:buSzTx/>
+                        <a:buFontTx/>
+                        <a:buNone/>
+                        <a:defRPr/>
+                      </a:pPr>
+                      <a:endParaRPr lang="zh-CN" altLang="en-US" sz="1200" b="0" kern="1200" dirty="0" smtClean="0">
+                        <a:solidFill>
+                          <a:schemeClr val="tx1"/>
+                        </a:solidFill>
+                        <a:latin typeface="微软雅黑" panose="020B0503020204020204" pitchFamily="34" charset="-122"/>
+                        <a:ea typeface="微软雅黑" panose="020B0503020204020204" pitchFamily="34" charset="-122"/>
+                        <a:cs typeface="+mn-cs"/>
+                      </a:endParaRPr>
+                    </a:p>
+                  </a:txBody>
+                  <a:tcPr marL="9525" marR="9525" marT="9525" marB="0" anchor="ctr"/>
+                </a:tc>
+                <a:tc>
+                  <a:txBody>
+                    <a:bodyPr/>
+                    <a:p>
+                      <a:pPr marL="0" marR="0" indent="0" algn="ctr" defTabSz="914400" rtl="0" eaLnBrk="1" fontAlgn="auto" latinLnBrk="0" hangingPunct="1">
+                        <a:lnSpc>
+                          <a:spcPct val="100000"/>
+                        </a:lnSpc>
+                        <a:spcBef>
+                          <a:spcPts val="0"/>
+                        </a:spcBef>
+                        <a:spcAft>
+                          <a:spcPts val="0"/>
+                        </a:spcAft>
+                        <a:buClrTx/>
+                        <a:buSzTx/>
+                        <a:buFontTx/>
+                        <a:buNone/>
+                        <a:defRPr/>
+                      </a:pPr>
+                      <a:endParaRPr lang="zh-CN" altLang="en-US" sz="1200" b="0" kern="1200" dirty="0">
+                        <a:solidFill>
+                          <a:schemeClr val="tx1"/>
+                        </a:solidFill>
+                        <a:latin typeface="微软雅黑" panose="020B0503020204020204" pitchFamily="34" charset="-122"/>
+                        <a:ea typeface="微软雅黑" panose="020B0503020204020204" pitchFamily="34" charset="-122"/>
+                        <a:cs typeface="+mn-cs"/>
+                      </a:endParaRPr>
+                    </a:p>
+                  </a:txBody>
+                  <a:tcPr marL="12700" marR="12700" marT="12700" anchor="ctr"/>
+                </a:tc>
+              </a:tr>
+              <a:tr h="474760">
+                <a:tc>
+                  <a:txBody>
+                    <a:bodyPr/>
+                    <a:p>
+                      <a:pPr algn="ctr" rtl="0" fontAlgn="ctr">
+                        <a:buNone/>
+                      </a:pPr>
+                      <a:r>
+                        <a:rPr lang="en-US" altLang="en-US" sz="1200" kern="1200" dirty="0">
+                          <a:solidFill>
+                            <a:schemeClr val="tx1"/>
+                          </a:solidFill>
+                          <a:latin typeface="微软雅黑" panose="020B0503020204020204" pitchFamily="34" charset="-122"/>
+                          <a:ea typeface="微软雅黑" panose="020B0503020204020204" pitchFamily="34" charset="-122"/>
+                          <a:cs typeface="+mn-cs"/>
+                        </a:rPr>
+                        <a:t>4</a:t>
+                      </a:r>
+                      <a:endParaRPr lang="en-US" altLang="en-US" sz="1200" kern="1200" dirty="0">
+                        <a:solidFill>
+                          <a:schemeClr val="tx1"/>
+                        </a:solidFill>
+                        <a:latin typeface="微软雅黑" panose="020B0503020204020204" pitchFamily="34" charset="-122"/>
+                        <a:ea typeface="微软雅黑" panose="020B0503020204020204" pitchFamily="34" charset="-122"/>
+                        <a:cs typeface="+mn-cs"/>
+                      </a:endParaRPr>
+                    </a:p>
+                  </a:txBody>
+                  <a:tcPr marL="9525" marR="9525" marT="9525" marB="0" anchor="ctr"/>
+                </a:tc>
+                <a:tc>
+                  <a:txBody>
+                    <a:bodyPr/>
+                    <a:p>
+                      <a:pPr algn="ctr">
+                        <a:buNone/>
+                      </a:pPr>
+                      <a:endParaRPr lang="zh-CN" altLang="en-US" sz="1200" b="0" kern="1200" dirty="0">
+                        <a:solidFill>
+                          <a:schemeClr val="tx1"/>
+                        </a:solidFill>
+                        <a:latin typeface="微软雅黑" panose="020B0503020204020204" pitchFamily="34" charset="-122"/>
+                        <a:ea typeface="微软雅黑" panose="020B0503020204020204" pitchFamily="34" charset="-122"/>
+                        <a:cs typeface="+mn-cs"/>
+                      </a:endParaRPr>
+                    </a:p>
+                  </a:txBody>
+                  <a:tcPr marL="12700" marR="12700" marT="12700" anchor="ctr"/>
+                </a:tc>
+                <a:tc>
+                  <a:txBody>
+                    <a:bodyPr/>
+                    <a:p>
+                      <a:pPr algn="ctr" rtl="0" fontAlgn="ctr"/>
+                      <a:r>
+                        <a:rPr sz="1200" dirty="0" smtClean="0">
+                          <a:solidFill>
+                            <a:srgbClr val="000000"/>
+                          </a:solidFill>
+                          <a:latin typeface="微软雅黑" panose="020B0503020204020204" pitchFamily="34" charset="-122"/>
+                          <a:ea typeface="微软雅黑" panose="020B0503020204020204" pitchFamily="34" charset="-122"/>
+                          <a:sym typeface="+mn-ea"/>
+                        </a:rPr>
+                        <a:t>组员</a:t>
+                      </a:r>
+                      <a:endParaRPr sz="1200" u="none" strike="noStrike" dirty="0" smtClean="0">
+                        <a:solidFill>
+                          <a:srgbClr val="000000"/>
+                        </a:solidFill>
+                        <a:latin typeface="微软雅黑" panose="020B0503020204020204" pitchFamily="34" charset="-122"/>
+                        <a:ea typeface="微软雅黑" panose="020B0503020204020204" pitchFamily="34" charset="-122"/>
+                      </a:endParaRPr>
+                    </a:p>
+                    <a:p>
+                      <a:pPr algn="ctr" rtl="0" fontAlgn="ctr"/>
+                      <a:r>
+                        <a:rPr sz="1200" dirty="0" smtClean="0">
+                          <a:solidFill>
+                            <a:srgbClr val="000000"/>
+                          </a:solidFill>
+                          <a:latin typeface="微软雅黑" panose="020B0503020204020204" pitchFamily="34" charset="-122"/>
+                          <a:ea typeface="微软雅黑" panose="020B0503020204020204" pitchFamily="34" charset="-122"/>
+                          <a:sym typeface="+mn-ea"/>
+                        </a:rPr>
+                        <a:t>(Team </a:t>
+                      </a:r>
+                      <a:r>
+                        <a:rPr lang="en-US" sz="1200" dirty="0" smtClean="0">
+                          <a:solidFill>
+                            <a:srgbClr val="000000"/>
+                          </a:solidFill>
+                          <a:latin typeface="微软雅黑" panose="020B0503020204020204" pitchFamily="34" charset="-122"/>
+                          <a:ea typeface="微软雅黑" panose="020B0503020204020204" pitchFamily="34" charset="-122"/>
+                          <a:sym typeface="+mn-ea"/>
+                        </a:rPr>
+                        <a:t>lead</a:t>
+                      </a:r>
+                      <a:r>
+                        <a:rPr sz="1200" dirty="0" smtClean="0">
+                          <a:solidFill>
+                            <a:srgbClr val="000000"/>
+                          </a:solidFill>
+                          <a:latin typeface="微软雅黑" panose="020B0503020204020204" pitchFamily="34" charset="-122"/>
+                          <a:ea typeface="微软雅黑" panose="020B0503020204020204" pitchFamily="34" charset="-122"/>
+                          <a:sym typeface="+mn-ea"/>
+                        </a:rPr>
+                        <a:t>er)</a:t>
+                      </a:r>
+                      <a:endParaRPr lang="en-US" altLang="zh-CN" sz="1200" b="0" kern="1200" dirty="0" smtClean="0">
+                        <a:solidFill>
+                          <a:schemeClr val="tx1"/>
+                        </a:solidFill>
+                        <a:latin typeface="微软雅黑" panose="020B0503020204020204" pitchFamily="34" charset="-122"/>
+                        <a:ea typeface="微软雅黑" panose="020B0503020204020204" pitchFamily="34" charset="-122"/>
+                        <a:cs typeface="+mn-cs"/>
+                      </a:endParaRPr>
+                    </a:p>
+                  </a:txBody>
+                  <a:tcPr marL="9525" marR="9525" marT="9525" marB="0" anchor="ctr"/>
+                </a:tc>
+                <a:tc>
+                  <a:txBody>
+                    <a:bodyPr/>
+                    <a:p>
+                      <a:pPr marL="0" algn="ctr" defTabSz="914400" rtl="0" eaLnBrk="1" fontAlgn="ctr" latinLnBrk="0" hangingPunct="1">
+                        <a:buNone/>
+                      </a:pPr>
+                      <a:endParaRPr lang="zh-CN" altLang="en-US" sz="1200" b="0" kern="1200" dirty="0">
+                        <a:solidFill>
+                          <a:schemeClr val="tx1"/>
+                        </a:solidFill>
+                        <a:latin typeface="微软雅黑" panose="020B0503020204020204" pitchFamily="34" charset="-122"/>
+                        <a:ea typeface="微软雅黑" panose="020B0503020204020204" pitchFamily="34" charset="-122"/>
+                        <a:cs typeface="+mn-cs"/>
+                      </a:endParaRPr>
+                    </a:p>
+                  </a:txBody>
+                  <a:tcPr marL="9525" marR="9525" marT="9525" marB="0" anchor="ctr"/>
+                </a:tc>
+                <a:tc>
+                  <a:txBody>
+                    <a:bodyPr/>
+                    <a:p>
+                      <a:pPr marL="0" marR="0" indent="0" algn="ctr" defTabSz="914400" rtl="0" eaLnBrk="1" fontAlgn="auto" latinLnBrk="0" hangingPunct="1">
+                        <a:lnSpc>
+                          <a:spcPct val="100000"/>
+                        </a:lnSpc>
+                        <a:spcBef>
+                          <a:spcPts val="0"/>
+                        </a:spcBef>
+                        <a:spcAft>
+                          <a:spcPts val="0"/>
+                        </a:spcAft>
+                        <a:buClrTx/>
+                        <a:buSzTx/>
+                        <a:buFontTx/>
+                        <a:buNone/>
+                        <a:defRPr/>
+                      </a:pPr>
+                      <a:endParaRPr lang="zh-CN" altLang="en-US" sz="1200" b="0" kern="1200" dirty="0" smtClean="0">
+                        <a:solidFill>
+                          <a:schemeClr val="tx1"/>
+                        </a:solidFill>
+                        <a:latin typeface="微软雅黑" panose="020B0503020204020204" pitchFamily="34" charset="-122"/>
+                        <a:ea typeface="微软雅黑" panose="020B0503020204020204" pitchFamily="34" charset="-122"/>
+                        <a:cs typeface="+mn-cs"/>
+                      </a:endParaRPr>
+                    </a:p>
+                  </a:txBody>
+                  <a:tcPr marL="9525" marR="9525" marT="9525" marB="0" anchor="ctr"/>
+                </a:tc>
+                <a:tc>
+                  <a:txBody>
+                    <a:bodyPr/>
+                    <a:p>
+                      <a:pPr marL="0" marR="0" indent="0" algn="ctr" defTabSz="914400" rtl="0" eaLnBrk="1" fontAlgn="auto" latinLnBrk="0" hangingPunct="1">
+                        <a:lnSpc>
+                          <a:spcPct val="100000"/>
+                        </a:lnSpc>
+                        <a:spcBef>
+                          <a:spcPts val="0"/>
+                        </a:spcBef>
+                        <a:spcAft>
+                          <a:spcPts val="0"/>
+                        </a:spcAft>
+                        <a:buClrTx/>
+                        <a:buSzTx/>
+                        <a:buFontTx/>
+                        <a:buNone/>
+                        <a:defRPr/>
+                      </a:pPr>
+                      <a:endParaRPr lang="zh-CN" altLang="en-US" sz="1200" b="0" kern="1200" dirty="0">
+                        <a:solidFill>
+                          <a:schemeClr val="tx1"/>
+                        </a:solidFill>
+                        <a:latin typeface="微软雅黑" panose="020B0503020204020204" pitchFamily="34" charset="-122"/>
+                        <a:ea typeface="微软雅黑" panose="020B0503020204020204" pitchFamily="34" charset="-122"/>
+                        <a:cs typeface="+mn-cs"/>
+                      </a:endParaRPr>
+                    </a:p>
+                  </a:txBody>
+                  <a:tcPr marL="12700" marR="12700" marT="12700" anchor="ctr"/>
+                </a:tc>
+              </a:tr>
+              <a:tr h="474760">
+                <a:tc>
+                  <a:txBody>
+                    <a:bodyPr/>
+                    <a:p>
+                      <a:pPr algn="ctr" rtl="0" fontAlgn="ctr">
+                        <a:buNone/>
+                      </a:pPr>
+                      <a:r>
+                        <a:rPr lang="en-US" altLang="en-US" sz="1200" kern="1200" dirty="0">
+                          <a:solidFill>
+                            <a:schemeClr val="tx1"/>
+                          </a:solidFill>
+                          <a:latin typeface="微软雅黑" panose="020B0503020204020204" pitchFamily="34" charset="-122"/>
+                          <a:ea typeface="微软雅黑" panose="020B0503020204020204" pitchFamily="34" charset="-122"/>
+                          <a:cs typeface="+mn-cs"/>
+                        </a:rPr>
+                        <a:t>5</a:t>
+                      </a:r>
+                      <a:endParaRPr lang="en-US" altLang="en-US" sz="1200" kern="1200" dirty="0">
+                        <a:solidFill>
+                          <a:schemeClr val="tx1"/>
+                        </a:solidFill>
+                        <a:latin typeface="微软雅黑" panose="020B0503020204020204" pitchFamily="34" charset="-122"/>
+                        <a:ea typeface="微软雅黑" panose="020B0503020204020204" pitchFamily="34" charset="-122"/>
+                        <a:cs typeface="+mn-cs"/>
+                      </a:endParaRPr>
+                    </a:p>
+                  </a:txBody>
+                  <a:tcPr marL="9525" marR="9525" marT="9525" marB="0" anchor="ctr"/>
+                </a:tc>
+                <a:tc>
+                  <a:txBody>
+                    <a:bodyPr/>
+                    <a:p>
+                      <a:pPr algn="ctr">
+                        <a:buNone/>
+                      </a:pPr>
+                      <a:endParaRPr lang="zh-CN" altLang="en-US" sz="1200" b="0" kern="1200" dirty="0">
+                        <a:solidFill>
+                          <a:schemeClr val="tx1"/>
+                        </a:solidFill>
+                        <a:latin typeface="微软雅黑" panose="020B0503020204020204" pitchFamily="34" charset="-122"/>
+                        <a:ea typeface="微软雅黑" panose="020B0503020204020204" pitchFamily="34" charset="-122"/>
+                        <a:cs typeface="+mn-cs"/>
+                      </a:endParaRPr>
+                    </a:p>
+                  </a:txBody>
+                  <a:tcPr marL="12700" marR="12700" marT="12700" anchor="ctr"/>
+                </a:tc>
+                <a:tc>
+                  <a:txBody>
+                    <a:bodyPr/>
+                    <a:p>
+                      <a:pPr algn="ctr" rtl="0" fontAlgn="ctr"/>
+                      <a:r>
+                        <a:rPr sz="1200" dirty="0" smtClean="0">
+                          <a:solidFill>
+                            <a:srgbClr val="000000"/>
+                          </a:solidFill>
+                          <a:latin typeface="微软雅黑" panose="020B0503020204020204" pitchFamily="34" charset="-122"/>
+                          <a:ea typeface="微软雅黑" panose="020B0503020204020204" pitchFamily="34" charset="-122"/>
+                          <a:sym typeface="+mn-ea"/>
+                        </a:rPr>
+                        <a:t>组员</a:t>
+                      </a:r>
+                      <a:endParaRPr sz="1200" u="none" strike="noStrike" dirty="0" smtClean="0">
+                        <a:solidFill>
+                          <a:srgbClr val="000000"/>
+                        </a:solidFill>
+                        <a:latin typeface="微软雅黑" panose="020B0503020204020204" pitchFamily="34" charset="-122"/>
+                        <a:ea typeface="微软雅黑" panose="020B0503020204020204" pitchFamily="34" charset="-122"/>
+                      </a:endParaRPr>
+                    </a:p>
+                    <a:p>
+                      <a:pPr algn="ctr" rtl="0" fontAlgn="ctr"/>
+                      <a:r>
+                        <a:rPr sz="1200" dirty="0" smtClean="0">
+                          <a:solidFill>
+                            <a:srgbClr val="000000"/>
+                          </a:solidFill>
+                          <a:latin typeface="微软雅黑" panose="020B0503020204020204" pitchFamily="34" charset="-122"/>
+                          <a:ea typeface="微软雅黑" panose="020B0503020204020204" pitchFamily="34" charset="-122"/>
+                          <a:sym typeface="+mn-ea"/>
+                        </a:rPr>
+                        <a:t>(Team </a:t>
+                      </a:r>
+                      <a:r>
+                        <a:rPr lang="en-US" sz="1200" dirty="0" smtClean="0">
+                          <a:solidFill>
+                            <a:srgbClr val="000000"/>
+                          </a:solidFill>
+                          <a:latin typeface="微软雅黑" panose="020B0503020204020204" pitchFamily="34" charset="-122"/>
+                          <a:ea typeface="微软雅黑" panose="020B0503020204020204" pitchFamily="34" charset="-122"/>
+                          <a:sym typeface="+mn-ea"/>
+                        </a:rPr>
+                        <a:t>lead</a:t>
+                      </a:r>
+                      <a:r>
+                        <a:rPr sz="1200" dirty="0" smtClean="0">
+                          <a:solidFill>
+                            <a:srgbClr val="000000"/>
+                          </a:solidFill>
+                          <a:latin typeface="微软雅黑" panose="020B0503020204020204" pitchFamily="34" charset="-122"/>
+                          <a:ea typeface="微软雅黑" panose="020B0503020204020204" pitchFamily="34" charset="-122"/>
+                          <a:sym typeface="+mn-ea"/>
+                        </a:rPr>
+                        <a:t>er)</a:t>
+                      </a:r>
+                      <a:endParaRPr lang="en-US" altLang="zh-CN" sz="1200" b="0" kern="1200" dirty="0" smtClean="0">
+                        <a:solidFill>
+                          <a:schemeClr val="tx1"/>
+                        </a:solidFill>
+                        <a:latin typeface="微软雅黑" panose="020B0503020204020204" pitchFamily="34" charset="-122"/>
+                        <a:ea typeface="微软雅黑" panose="020B0503020204020204" pitchFamily="34" charset="-122"/>
+                        <a:cs typeface="+mn-cs"/>
+                      </a:endParaRPr>
+                    </a:p>
+                  </a:txBody>
+                  <a:tcPr marL="9525" marR="9525" marT="9525" marB="0" anchor="ctr"/>
+                </a:tc>
+                <a:tc>
+                  <a:txBody>
+                    <a:bodyPr/>
+                    <a:p>
+                      <a:pPr marL="0" algn="ctr" defTabSz="914400" rtl="0" eaLnBrk="1" fontAlgn="ctr" latinLnBrk="0" hangingPunct="1">
+                        <a:buNone/>
+                      </a:pPr>
+                      <a:endParaRPr lang="zh-CN" altLang="en-US" sz="1200" b="0" kern="1200" dirty="0">
+                        <a:solidFill>
+                          <a:schemeClr val="tx1"/>
+                        </a:solidFill>
+                        <a:latin typeface="微软雅黑" panose="020B0503020204020204" pitchFamily="34" charset="-122"/>
+                        <a:ea typeface="微软雅黑" panose="020B0503020204020204" pitchFamily="34" charset="-122"/>
+                        <a:cs typeface="+mn-cs"/>
+                      </a:endParaRPr>
+                    </a:p>
+                  </a:txBody>
+                  <a:tcPr marL="9525" marR="9525" marT="9525" marB="0" anchor="ctr"/>
+                </a:tc>
+                <a:tc>
+                  <a:txBody>
+                    <a:bodyPr/>
+                    <a:p>
+                      <a:pPr marL="0" marR="0" indent="0" algn="ctr" defTabSz="914400" rtl="0" eaLnBrk="1" fontAlgn="auto" latinLnBrk="0" hangingPunct="1">
+                        <a:lnSpc>
+                          <a:spcPct val="100000"/>
+                        </a:lnSpc>
+                        <a:spcBef>
+                          <a:spcPts val="0"/>
+                        </a:spcBef>
+                        <a:spcAft>
+                          <a:spcPts val="0"/>
+                        </a:spcAft>
+                        <a:buClrTx/>
+                        <a:buSzTx/>
+                        <a:buFontTx/>
+                        <a:buNone/>
+                        <a:defRPr/>
+                      </a:pPr>
+                      <a:endParaRPr lang="zh-CN" altLang="en-US" sz="1200" b="0" kern="1200" dirty="0" smtClean="0">
+                        <a:solidFill>
+                          <a:schemeClr val="tx1"/>
+                        </a:solidFill>
+                        <a:latin typeface="微软雅黑" panose="020B0503020204020204" pitchFamily="34" charset="-122"/>
+                        <a:ea typeface="微软雅黑" panose="020B0503020204020204" pitchFamily="34" charset="-122"/>
+                        <a:cs typeface="+mn-cs"/>
+                      </a:endParaRPr>
+                    </a:p>
+                  </a:txBody>
+                  <a:tcPr marL="9525" marR="9525" marT="9525" marB="0" anchor="ctr"/>
+                </a:tc>
+                <a:tc>
+                  <a:txBody>
+                    <a:bodyPr/>
+                    <a:p>
+                      <a:pPr marL="0" marR="0" indent="0" algn="ctr" defTabSz="914400" rtl="0" eaLnBrk="1" fontAlgn="auto" latinLnBrk="0" hangingPunct="1">
+                        <a:lnSpc>
+                          <a:spcPct val="100000"/>
+                        </a:lnSpc>
+                        <a:spcBef>
+                          <a:spcPts val="0"/>
+                        </a:spcBef>
+                        <a:spcAft>
+                          <a:spcPts val="0"/>
+                        </a:spcAft>
+                        <a:buClrTx/>
+                        <a:buSzTx/>
+                        <a:buFontTx/>
+                        <a:buNone/>
+                        <a:defRPr/>
+                      </a:pPr>
+                      <a:endParaRPr lang="zh-CN" altLang="en-US" sz="1200" b="0" kern="1200" dirty="0">
+                        <a:solidFill>
+                          <a:schemeClr val="tx1"/>
+                        </a:solidFill>
+                        <a:latin typeface="微软雅黑" panose="020B0503020204020204" pitchFamily="34" charset="-122"/>
+                        <a:ea typeface="微软雅黑" panose="020B0503020204020204" pitchFamily="34" charset="-122"/>
+                        <a:cs typeface="+mn-cs"/>
+                      </a:endParaRPr>
+                    </a:p>
+                  </a:txBody>
+                  <a:tcPr marL="12700" marR="12700" marT="12700" anchor="ctr"/>
+                </a:tc>
+              </a:tr>
+              <a:tr h="474760">
+                <a:tc>
+                  <a:txBody>
+                    <a:bodyPr/>
+                    <a:p>
+                      <a:pPr algn="ctr" rtl="0" fontAlgn="ctr">
+                        <a:buNone/>
+                      </a:pPr>
+                      <a:r>
+                        <a:rPr lang="en-US" altLang="en-US" sz="1200" kern="1200" dirty="0">
+                          <a:solidFill>
+                            <a:schemeClr val="tx1"/>
+                          </a:solidFill>
+                          <a:latin typeface="微软雅黑" panose="020B0503020204020204" pitchFamily="34" charset="-122"/>
+                          <a:ea typeface="微软雅黑" panose="020B0503020204020204" pitchFamily="34" charset="-122"/>
+                          <a:cs typeface="+mn-cs"/>
+                        </a:rPr>
+                        <a:t>6</a:t>
+                      </a:r>
+                      <a:endParaRPr lang="en-US" altLang="en-US" sz="1200" kern="1200" dirty="0">
+                        <a:solidFill>
+                          <a:schemeClr val="tx1"/>
+                        </a:solidFill>
+                        <a:latin typeface="微软雅黑" panose="020B0503020204020204" pitchFamily="34" charset="-122"/>
+                        <a:ea typeface="微软雅黑" panose="020B0503020204020204" pitchFamily="34" charset="-122"/>
+                        <a:cs typeface="+mn-cs"/>
+                      </a:endParaRPr>
+                    </a:p>
+                  </a:txBody>
+                  <a:tcPr marL="9525" marR="9525" marT="9525" marB="0" anchor="ctr"/>
+                </a:tc>
+                <a:tc>
+                  <a:txBody>
+                    <a:bodyPr/>
+                    <a:p>
+                      <a:pPr algn="ctr">
+                        <a:buNone/>
+                      </a:pPr>
+                      <a:endParaRPr lang="zh-CN" altLang="en-US" sz="1200" b="0" kern="1200" dirty="0">
+                        <a:solidFill>
+                          <a:schemeClr val="tx1"/>
+                        </a:solidFill>
+                        <a:latin typeface="微软雅黑" panose="020B0503020204020204" pitchFamily="34" charset="-122"/>
+                        <a:ea typeface="微软雅黑" panose="020B0503020204020204" pitchFamily="34" charset="-122"/>
+                        <a:cs typeface="+mn-cs"/>
+                      </a:endParaRPr>
+                    </a:p>
+                  </a:txBody>
+                  <a:tcPr marL="12700" marR="12700" marT="12700" anchor="ctr"/>
+                </a:tc>
+                <a:tc>
+                  <a:txBody>
+                    <a:bodyPr/>
+                    <a:p>
+                      <a:pPr algn="ctr" rtl="0" fontAlgn="ctr"/>
+                      <a:r>
+                        <a:rPr sz="1200" dirty="0" smtClean="0">
+                          <a:solidFill>
+                            <a:srgbClr val="000000"/>
+                          </a:solidFill>
+                          <a:latin typeface="微软雅黑" panose="020B0503020204020204" pitchFamily="34" charset="-122"/>
+                          <a:ea typeface="微软雅黑" panose="020B0503020204020204" pitchFamily="34" charset="-122"/>
+                          <a:sym typeface="+mn-ea"/>
+                        </a:rPr>
+                        <a:t>组员</a:t>
+                      </a:r>
+                      <a:endParaRPr sz="1200" u="none" strike="noStrike" dirty="0" smtClean="0">
+                        <a:solidFill>
+                          <a:srgbClr val="000000"/>
+                        </a:solidFill>
+                        <a:latin typeface="微软雅黑" panose="020B0503020204020204" pitchFamily="34" charset="-122"/>
+                        <a:ea typeface="微软雅黑" panose="020B0503020204020204" pitchFamily="34" charset="-122"/>
+                      </a:endParaRPr>
+                    </a:p>
+                    <a:p>
+                      <a:pPr algn="ctr" rtl="0" fontAlgn="ctr"/>
+                      <a:r>
+                        <a:rPr sz="1200" dirty="0" smtClean="0">
+                          <a:solidFill>
+                            <a:srgbClr val="000000"/>
+                          </a:solidFill>
+                          <a:latin typeface="微软雅黑" panose="020B0503020204020204" pitchFamily="34" charset="-122"/>
+                          <a:ea typeface="微软雅黑" panose="020B0503020204020204" pitchFamily="34" charset="-122"/>
+                          <a:sym typeface="+mn-ea"/>
+                        </a:rPr>
+                        <a:t>(Team </a:t>
+                      </a:r>
+                      <a:r>
+                        <a:rPr lang="en-US" sz="1200" dirty="0" smtClean="0">
+                          <a:solidFill>
+                            <a:srgbClr val="000000"/>
+                          </a:solidFill>
+                          <a:latin typeface="微软雅黑" panose="020B0503020204020204" pitchFamily="34" charset="-122"/>
+                          <a:ea typeface="微软雅黑" panose="020B0503020204020204" pitchFamily="34" charset="-122"/>
+                          <a:sym typeface="+mn-ea"/>
+                        </a:rPr>
+                        <a:t>lead</a:t>
+                      </a:r>
+                      <a:r>
+                        <a:rPr sz="1200" dirty="0" smtClean="0">
+                          <a:solidFill>
+                            <a:srgbClr val="000000"/>
+                          </a:solidFill>
+                          <a:latin typeface="微软雅黑" panose="020B0503020204020204" pitchFamily="34" charset="-122"/>
+                          <a:ea typeface="微软雅黑" panose="020B0503020204020204" pitchFamily="34" charset="-122"/>
+                          <a:sym typeface="+mn-ea"/>
+                        </a:rPr>
+                        <a:t>er)</a:t>
+                      </a:r>
+                      <a:endParaRPr lang="en-US" altLang="zh-CN" sz="1200" b="0" kern="1200" dirty="0" smtClean="0">
+                        <a:solidFill>
+                          <a:schemeClr val="tx1"/>
+                        </a:solidFill>
+                        <a:latin typeface="微软雅黑" panose="020B0503020204020204" pitchFamily="34" charset="-122"/>
+                        <a:ea typeface="微软雅黑" panose="020B0503020204020204" pitchFamily="34" charset="-122"/>
+                        <a:cs typeface="+mn-cs"/>
+                      </a:endParaRPr>
+                    </a:p>
+                  </a:txBody>
+                  <a:tcPr marL="9525" marR="9525" marT="9525" marB="0" anchor="ctr"/>
+                </a:tc>
+                <a:tc>
+                  <a:txBody>
+                    <a:bodyPr/>
+                    <a:p>
+                      <a:pPr marL="0" algn="ctr" defTabSz="914400" rtl="0" eaLnBrk="1" fontAlgn="ctr" latinLnBrk="0" hangingPunct="1">
+                        <a:buNone/>
+                      </a:pPr>
+                      <a:endParaRPr lang="zh-CN" altLang="en-US" sz="1200" b="0" kern="1200" dirty="0">
+                        <a:solidFill>
+                          <a:schemeClr val="tx1"/>
+                        </a:solidFill>
+                        <a:latin typeface="微软雅黑" panose="020B0503020204020204" pitchFamily="34" charset="-122"/>
+                        <a:ea typeface="微软雅黑" panose="020B0503020204020204" pitchFamily="34" charset="-122"/>
+                        <a:cs typeface="+mn-cs"/>
+                      </a:endParaRPr>
+                    </a:p>
+                  </a:txBody>
+                  <a:tcPr marL="9525" marR="9525" marT="9525" marB="0" anchor="ctr"/>
+                </a:tc>
+                <a:tc>
+                  <a:txBody>
+                    <a:bodyPr/>
+                    <a:p>
+                      <a:pPr marL="0" marR="0" indent="0" algn="ctr" defTabSz="914400" rtl="0" eaLnBrk="1" fontAlgn="auto" latinLnBrk="0" hangingPunct="1">
+                        <a:lnSpc>
+                          <a:spcPct val="100000"/>
+                        </a:lnSpc>
+                        <a:spcBef>
+                          <a:spcPts val="0"/>
+                        </a:spcBef>
+                        <a:spcAft>
+                          <a:spcPts val="0"/>
+                        </a:spcAft>
+                        <a:buClrTx/>
+                        <a:buSzTx/>
+                        <a:buFontTx/>
+                        <a:buNone/>
+                        <a:defRPr/>
+                      </a:pPr>
+                      <a:endParaRPr lang="zh-CN" altLang="en-US" sz="1200" b="0" kern="1200" dirty="0" smtClean="0">
+                        <a:solidFill>
+                          <a:schemeClr val="tx1"/>
+                        </a:solidFill>
+                        <a:latin typeface="微软雅黑" panose="020B0503020204020204" pitchFamily="34" charset="-122"/>
+                        <a:ea typeface="微软雅黑" panose="020B0503020204020204" pitchFamily="34" charset="-122"/>
+                        <a:cs typeface="+mn-cs"/>
+                      </a:endParaRPr>
+                    </a:p>
+                  </a:txBody>
+                  <a:tcPr marL="9525" marR="9525" marT="9525" marB="0" anchor="ctr"/>
+                </a:tc>
+                <a:tc>
+                  <a:txBody>
+                    <a:bodyPr/>
                     <a:p>
                       <a:pPr marL="0" marR="0" indent="0" algn="ctr" defTabSz="914400" rtl="0" eaLnBrk="1" fontAlgn="auto" latinLnBrk="0" hangingPunct="1">
                         <a:lnSpc>
@@ -24876,6 +26791,61 @@
           </p:txBody>
         </p:sp>
       </p:grpSp>
+      <p:sp>
+        <p:nvSpPr>
+          <p:cNvPr id="12290" name="AI_DYNAMIC"/>
+          <p:cNvSpPr txBox="1"/>
+          <p:nvPr/>
+        </p:nvSpPr>
+        <p:spPr>
+          <a:xfrm>
+            <a:off x="502920" y="4599432"/>
+            <a:ext cx="8138160" cy="245110"/>
+          </a:xfrm>
+          <a:prstGeom prst="rect">
+            <a:avLst/>
+          </a:prstGeom>
+          <a:noFill/>
+        </p:spPr>
+        <p:txBody>
+          <a:bodyPr wrap="square">
+            <a:spAutoFit/>
+          </a:bodyPr>
+          <a:p>
+            <a:r>
+              <a:rPr lang="zh-CN" sz="1000">
+                <a:latin typeface="微软雅黑" panose="020B0503020204020204" pitchFamily="34" charset="-122"/>
+              </a:rPr>
+              <a:t>小结：此图片为示例图</a:t>
+            </a:r>
+            <a:endParaRPr sz="1000">
+              <a:latin typeface="微软雅黑" panose="020B0503020204020204" pitchFamily="34" charset="-122"/>
+            </a:endParaRPr>
+          </a:p>
+        </p:txBody>
+      </p:sp>
+      <p:pic>
+        <p:nvPicPr>
+          <p:cNvPr id="6" name="图片 5"/>
+          <p:cNvPicPr/>
+          <p:nvPr/>
+        </p:nvPicPr>
+        <p:blipFill>
+          <a:blip r:embed="rId1"/>
+          <a:stretch>
+            <a:fillRect/>
+          </a:stretch>
+        </p:blipFill>
+        <p:spPr>
+          <a:xfrm>
+            <a:off x="2242185" y="1193165"/>
+            <a:ext cx="4659630" cy="3266440"/>
+          </a:xfrm>
+          <a:prstGeom prst="rect">
+            <a:avLst/>
+          </a:prstGeom>
+        </p:spPr>
+      </p:pic>
     </p:spTree>
   </p:cSld>
   <p:clrMapOvr>
@@ -24893,6 +26863,410 @@
 </file>
 
 <file path=ppt/slides/slide8.xml><?xml version="1.0" encoding="utf-8"?>
+<p:sld xmlns:a="http://schemas.openxmlformats.org/drawingml/2006/main" xmlns:r="http://schemas.openxmlformats.org/officeDocument/2006/relationships" xmlns:p="http://schemas.openxmlformats.org/presentationml/2006/main">
+  <p:cSld>
+    <p:spTree>
+      <p:nvGrpSpPr>
+        <p:cNvPr id="1" name=""/>
+        <p:cNvGrpSpPr/>
+        <p:nvPr/>
+      </p:nvGrpSpPr>
+      <p:grpSpPr>
+        <a:xfrm>
+          <a:off x="0" y="0"/>
+          <a:ext cx="0" cy="0"/>
+          <a:chOff x="0" y="0"/>
+          <a:chExt cx="0" cy="0"/>
+        </a:xfrm>
+      </p:grpSpPr>
+      <p:sp>
+        <p:nvSpPr>
+          <p:cNvPr id="18433" name="灯片编号占位符 1"/>
+          <p:cNvSpPr>
+            <a:spLocks noGrp="1"/>
+          </p:cNvSpPr>
+          <p:nvPr>
+            <p:ph type="sldNum" sz="quarter" idx="10"/>
+          </p:nvPr>
+        </p:nvSpPr>
+        <p:spPr>
+          <a:xfrm>
+            <a:off x="8388350" y="4691063"/>
+            <a:ext cx="360363" cy="112712"/>
+          </a:xfrm>
+          <a:noFill/>
+          <a:ln>
+            <a:noFill/>
+          </a:ln>
+        </p:spPr>
+        <p:txBody>
+          <a:bodyPr wrap="none" lIns="0" tIns="0" rIns="0" bIns="0" anchor="t"/>
+          <a:lstStyle>
+            <a:lvl1pPr marL="0" lvl="0" indent="0" algn="l" defTabSz="914400" rtl="0" eaLnBrk="1" fontAlgn="base" latinLnBrk="0" hangingPunct="1">
+              <a:lnSpc>
+                <a:spcPct val="100000"/>
+              </a:lnSpc>
+              <a:spcBef>
+                <a:spcPct val="0"/>
+              </a:spcBef>
+              <a:spcAft>
+                <a:spcPct val="0"/>
+              </a:spcAft>
+              <a:buNone/>
+              <a:defRPr sz="1800" kern="1200">
+                <a:solidFill>
+                  <a:schemeClr val="tx1"/>
+                </a:solidFill>
+                <a:latin typeface="Calibri" panose="020F0502020204030204" pitchFamily="34" charset="0"/>
+                <a:ea typeface="宋体" panose="02010600030101010101" pitchFamily="2" charset="-122"/>
+              </a:defRPr>
+            </a:lvl1pPr>
+            <a:lvl2pPr marL="457200" lvl="1" indent="0" algn="l" defTabSz="914400" rtl="0" eaLnBrk="1" fontAlgn="base" latinLnBrk="0" hangingPunct="1">
+              <a:lnSpc>
+                <a:spcPct val="100000"/>
+              </a:lnSpc>
+              <a:spcBef>
+                <a:spcPct val="0"/>
+              </a:spcBef>
+              <a:spcAft>
+                <a:spcPct val="0"/>
+              </a:spcAft>
+              <a:buFont typeface="Arial" panose="020B0604020202020204" pitchFamily="34" charset="0"/>
+              <a:buNone/>
+              <a:defRPr kern="1200">
+                <a:solidFill>
+                  <a:schemeClr val="tx1"/>
+                </a:solidFill>
+                <a:latin typeface="Calibri" panose="020F0502020204030204" pitchFamily="34" charset="0"/>
+                <a:ea typeface="宋体" panose="02010600030101010101" pitchFamily="2" charset="-122"/>
+                <a:cs typeface="+mn-cs"/>
+              </a:defRPr>
+            </a:lvl2pPr>
+            <a:lvl3pPr marL="914400" lvl="2" indent="0" algn="l" defTabSz="914400" rtl="0" eaLnBrk="1" fontAlgn="base" latinLnBrk="0" hangingPunct="1">
+              <a:lnSpc>
+                <a:spcPct val="100000"/>
+              </a:lnSpc>
+              <a:spcBef>
+                <a:spcPct val="0"/>
+              </a:spcBef>
+              <a:spcAft>
+                <a:spcPct val="0"/>
+              </a:spcAft>
+              <a:buFontTx/>
+              <a:buNone/>
+              <a:defRPr kern="1200">
+                <a:solidFill>
+                  <a:schemeClr val="tx1"/>
+                </a:solidFill>
+                <a:latin typeface="Calibri" panose="020F0502020204030204" pitchFamily="34" charset="0"/>
+                <a:ea typeface="宋体" panose="02010600030101010101" pitchFamily="2" charset="-122"/>
+                <a:cs typeface="+mn-cs"/>
+              </a:defRPr>
+            </a:lvl3pPr>
+            <a:lvl4pPr marL="1371600" lvl="3" indent="0" algn="l" defTabSz="914400" rtl="0" eaLnBrk="1" fontAlgn="base" latinLnBrk="0" hangingPunct="1">
+              <a:lnSpc>
+                <a:spcPct val="100000"/>
+              </a:lnSpc>
+              <a:spcBef>
+                <a:spcPct val="0"/>
+              </a:spcBef>
+              <a:spcAft>
+                <a:spcPct val="0"/>
+              </a:spcAft>
+              <a:buFont typeface="Arial" panose="020B0604020202020204" pitchFamily="34" charset="0"/>
+              <a:buNone/>
+              <a:defRPr kern="1200">
+                <a:solidFill>
+                  <a:schemeClr val="tx1"/>
+                </a:solidFill>
+                <a:latin typeface="Calibri" panose="020F0502020204030204" pitchFamily="34" charset="0"/>
+                <a:ea typeface="宋体" panose="02010600030101010101" pitchFamily="2" charset="-122"/>
+                <a:cs typeface="+mn-cs"/>
+              </a:defRPr>
+            </a:lvl4pPr>
+            <a:lvl5pPr marL="1828800" lvl="4" indent="0" algn="l" defTabSz="914400" rtl="0" eaLnBrk="1" fontAlgn="base" latinLnBrk="0" hangingPunct="1">
+              <a:lnSpc>
+                <a:spcPct val="100000"/>
+              </a:lnSpc>
+              <a:spcBef>
+                <a:spcPct val="0"/>
+              </a:spcBef>
+              <a:spcAft>
+                <a:spcPct val="0"/>
+              </a:spcAft>
+              <a:buFontTx/>
+              <a:buNone/>
+              <a:defRPr kern="1200">
+                <a:solidFill>
+                  <a:schemeClr val="tx1"/>
+                </a:solidFill>
+                <a:latin typeface="Calibri" panose="020F0502020204030204" pitchFamily="34" charset="0"/>
+                <a:ea typeface="宋体" panose="02010600030101010101" pitchFamily="2" charset="-122"/>
+                <a:cs typeface="+mn-cs"/>
+              </a:defRPr>
+            </a:lvl5pPr>
+          </a:lstStyle>
+          <a:p>
+            <a:pPr lvl="0" algn="r"/>
+            <a:fld id="{9A0DB2DC-4C9A-4742-B13C-FB6460FD3503}" type="slidenum">
+              <a:rPr lang="en-US" altLang="zh-CN" sz="1000" b="1">
+                <a:solidFill>
+                  <a:schemeClr val="bg1"/>
+                </a:solidFill>
+                <a:latin typeface="Arial" panose="020B0604020202020204" pitchFamily="34" charset="0"/>
+              </a:rPr>
+            </a:fld>
+            <a:endParaRPr lang="en-US" altLang="zh-CN" sz="1000" b="1">
+              <a:solidFill>
+                <a:schemeClr val="bg1"/>
+              </a:solidFill>
+              <a:latin typeface="Arial" panose="020B0604020202020204" pitchFamily="34" charset="0"/>
+            </a:endParaRPr>
+          </a:p>
+        </p:txBody>
+      </p:sp>
+      <p:grpSp>
+        <p:nvGrpSpPr>
+          <p:cNvPr id="3" name="组合 2"/>
+          <p:cNvGrpSpPr/>
+          <p:nvPr/>
+        </p:nvGrpSpPr>
+        <p:grpSpPr>
+          <a:xfrm>
+            <a:off x="467360" y="808990"/>
+            <a:ext cx="2835910" cy="245110"/>
+            <a:chOff x="736" y="1274"/>
+            <a:chExt cx="4466" cy="386"/>
+          </a:xfrm>
+        </p:grpSpPr>
+        <p:sp>
+          <p:nvSpPr>
+            <p:cNvPr id="4" name="TextBox 2"/>
+            <p:cNvSpPr/>
+            <p:nvPr/>
+          </p:nvSpPr>
+          <p:spPr>
+            <a:xfrm>
+              <a:off x="963" y="1274"/>
+              <a:ext cx="4239" cy="386"/>
+            </a:xfrm>
+            <a:prstGeom prst="rect">
+              <a:avLst/>
+            </a:prstGeom>
+            <a:noFill/>
+            <a:ln w="9525">
+              <a:noFill/>
+            </a:ln>
+          </p:spPr>
+          <p:txBody>
+            <a:bodyPr wrap="square" anchor="t">
+              <a:spAutoFit/>
+            </a:bodyPr>
+            <a:p>
+              <a:pPr>
+                <a:lnSpc>
+                  <a:spcPts val="1200"/>
+                </a:lnSpc>
+                <a:spcBef>
+                  <a:spcPts val="600"/>
+                </a:spcBef>
+              </a:pPr>
+              <a:r>
+                <a:rPr lang="en-US" altLang="zh-CN" sz="1400" b="1" dirty="0" smtClean="0">
+                  <a:solidFill>
+                    <a:srgbClr val="000000"/>
+                  </a:solidFill>
+                  <a:latin typeface="微软雅黑" panose="020B0503020204020204" pitchFamily="34" charset="-122"/>
+                  <a:ea typeface="微软雅黑" panose="020B0503020204020204" pitchFamily="34" charset="-122"/>
+                  <a:sym typeface="微软雅黑" panose="020B0503020204020204" pitchFamily="34" charset="-122"/>
+                </a:rPr>
+                <a:t>D4  </a:t>
+              </a:r>
+              <a:r>
+                <a:rPr lang="zh-CN" altLang="en-US" sz="1400" b="1" dirty="0" smtClean="0">
+                  <a:solidFill>
+                    <a:srgbClr val="000000"/>
+                  </a:solidFill>
+                  <a:latin typeface="微软雅黑" panose="020B0503020204020204" pitchFamily="34" charset="-122"/>
+                  <a:ea typeface="微软雅黑" panose="020B0503020204020204" pitchFamily="34" charset="-122"/>
+                  <a:sym typeface="微软雅黑" panose="020B0503020204020204" pitchFamily="34" charset="-122"/>
+                </a:rPr>
+                <a:t>原因</a:t>
+              </a:r>
+              <a:r>
+                <a:rPr lang="zh-CN" altLang="en-US" sz="1400" b="1" dirty="0">
+                  <a:solidFill>
+                    <a:srgbClr val="000000"/>
+                  </a:solidFill>
+                  <a:latin typeface="微软雅黑" panose="020B0503020204020204" pitchFamily="34" charset="-122"/>
+                  <a:ea typeface="微软雅黑" panose="020B0503020204020204" pitchFamily="34" charset="-122"/>
+                  <a:sym typeface="微软雅黑" panose="020B0503020204020204" pitchFamily="34" charset="-122"/>
+                </a:rPr>
+                <a:t>分析</a:t>
+              </a:r>
+              <a:endParaRPr lang="zh-CN" altLang="en-US" sz="1400" b="1">
+                <a:solidFill>
+                  <a:srgbClr val="000000"/>
+                </a:solidFill>
+                <a:latin typeface="微软雅黑" panose="020B0503020204020204" pitchFamily="34" charset="-122"/>
+                <a:ea typeface="微软雅黑" panose="020B0503020204020204" pitchFamily="34" charset="-122"/>
+                <a:sym typeface="微软雅黑" panose="020B0503020204020204" pitchFamily="34" charset="-122"/>
+              </a:endParaRPr>
+            </a:p>
+          </p:txBody>
+        </p:sp>
+        <p:sp>
+          <p:nvSpPr>
+            <p:cNvPr id="5" name="矩形 4"/>
+            <p:cNvSpPr/>
+            <p:nvPr/>
+          </p:nvSpPr>
+          <p:spPr>
+            <a:xfrm>
+              <a:off x="736" y="1313"/>
+              <a:ext cx="227" cy="229"/>
+            </a:xfrm>
+            <a:prstGeom prst="rect">
+              <a:avLst/>
+            </a:prstGeom>
+            <a:solidFill>
+              <a:srgbClr val="E62135"/>
+            </a:solidFill>
+            <a:ln w="9525">
+              <a:noFill/>
+            </a:ln>
+          </p:spPr>
+          <p:style>
+            <a:lnRef idx="1">
+              <a:schemeClr val="accent1"/>
+            </a:lnRef>
+            <a:fillRef idx="0">
+              <a:schemeClr val="accent1"/>
+            </a:fillRef>
+            <a:effectRef idx="0">
+              <a:schemeClr val="accent1"/>
+            </a:effectRef>
+            <a:fontRef idx="minor">
+              <a:schemeClr val="tx1"/>
+            </a:fontRef>
+          </p:style>
+          <p:txBody>
+            <a:bodyPr anchor="ctr"/>
+            <a:p>
+              <a:pPr algn="ctr" fontAlgn="auto">
+                <a:defRPr/>
+              </a:pPr>
+              <a:endParaRPr lang="zh-CN" altLang="en-US" sz="1600" noProof="1">
+                <a:solidFill>
+                  <a:srgbClr val="EBEBEB">
+                    <a:lumMod val="10000"/>
+                  </a:srgbClr>
+                </a:solidFill>
+              </a:endParaRPr>
+            </a:p>
+          </p:txBody>
+        </p:sp>
+      </p:grpSp>
+      <p:sp>
+        <p:nvSpPr>
+          <p:cNvPr id="12290" name="AI_DYNAMIC"/>
+          <p:cNvSpPr txBox="1"/>
+          <p:nvPr/>
+        </p:nvSpPr>
+        <p:spPr>
+          <a:xfrm>
+            <a:off x="502920" y="4599432"/>
+            <a:ext cx="8138160" cy="245110"/>
+          </a:xfrm>
+          <a:prstGeom prst="rect">
+            <a:avLst/>
+          </a:prstGeom>
+          <a:noFill/>
+        </p:spPr>
+        <p:txBody>
+          <a:bodyPr wrap="square">
+            <a:spAutoFit/>
+          </a:bodyPr>
+          <a:p>
+            <a:r>
+              <a:rPr lang="zh-CN" sz="1000">
+                <a:latin typeface="微软雅黑" panose="020B0503020204020204" pitchFamily="34" charset="-122"/>
+              </a:rPr>
+              <a:t>小结：图一为示</a:t>
+            </a:r>
+            <a:r>
+              <a:rPr lang="zh-CN" altLang="en-US" sz="1000">
+                <a:latin typeface="微软雅黑" panose="020B0503020204020204" pitchFamily="34" charset="-122"/>
+              </a:rPr>
+              <a:t>例图，图二为示例图</a:t>
+            </a:r>
+            <a:endParaRPr lang="zh-CN" altLang="en-US" sz="1000">
+              <a:latin typeface="微软雅黑" panose="020B0503020204020204" pitchFamily="34" charset="-122"/>
+            </a:endParaRPr>
+          </a:p>
+        </p:txBody>
+      </p:sp>
+      <p:pic>
+        <p:nvPicPr>
+          <p:cNvPr id="6" name="图片 5"/>
+          <p:cNvPicPr/>
+          <p:nvPr/>
+        </p:nvPicPr>
+        <p:blipFill>
+          <a:blip r:embed="rId1"/>
+          <a:stretch>
+            <a:fillRect/>
+          </a:stretch>
+        </p:blipFill>
+        <p:spPr>
+          <a:xfrm>
+            <a:off x="1043305" y="1707515"/>
+            <a:ext cx="2692400" cy="1887220"/>
+          </a:xfrm>
+          <a:prstGeom prst="rect">
+            <a:avLst/>
+          </a:prstGeom>
+        </p:spPr>
+      </p:pic>
+      <p:pic>
+        <p:nvPicPr>
+          <p:cNvPr id="7" name="图片 6"/>
+          <p:cNvPicPr/>
+          <p:nvPr/>
+        </p:nvPicPr>
+        <p:blipFill>
+          <a:blip r:embed="rId1"/>
+          <a:stretch>
+            <a:fillRect/>
+          </a:stretch>
+        </p:blipFill>
+        <p:spPr>
+          <a:xfrm>
+            <a:off x="4572000" y="1707515"/>
+            <a:ext cx="2692400" cy="1887220"/>
+          </a:xfrm>
+          <a:prstGeom prst="rect">
+            <a:avLst/>
+          </a:prstGeom>
+        </p:spPr>
+      </p:pic>
+    </p:spTree>
+  </p:cSld>
+  <p:clrMapOvr>
+    <a:masterClrMapping/>
+  </p:clrMapOvr>
+  <p:transition/>
+  <p:timing>
+    <p:tnLst>
+      <p:par>
+        <p:cTn id="1" dur="indefinite" restart="never" nodeType="tmRoot"/>
+      </p:par>
+    </p:tnLst>
+  </p:timing>
+</p:sld>
+</file>
+
+<file path=ppt/slides/slide9.xml><?xml version="1.0" encoding="utf-8"?>
 <p:sld xmlns:a="http://schemas.openxmlformats.org/drawingml/2006/main" xmlns:r="http://schemas.openxmlformats.org/officeDocument/2006/relationships" xmlns:p="http://schemas.openxmlformats.org/presentationml/2006/main">
   <p:cSld>
     <p:spTree>
@@ -25628,665 +28002,6 @@
                 <a:cs typeface="微软雅黑" panose="020B0503020204020204" pitchFamily="34" charset="-122"/>
               </a:rPr>
               <a:t>发生原因分析：</a:t>
-            </a:r>
-            <a:endParaRPr lang="zh-CN" altLang="en-US" sz="1000">
-              <a:latin typeface="微软雅黑" panose="020B0503020204020204" pitchFamily="34" charset="-122"/>
-              <a:ea typeface="微软雅黑" panose="020B0503020204020204" pitchFamily="34" charset="-122"/>
-              <a:cs typeface="微软雅黑" panose="020B0503020204020204" pitchFamily="34" charset="-122"/>
-            </a:endParaRPr>
-          </a:p>
-        </p:txBody>
-      </p:sp>
-    </p:spTree>
-  </p:cSld>
-  <p:clrMapOvr>
-    <a:masterClrMapping/>
-  </p:clrMapOvr>
-  <p:transition/>
-  <p:timing>
-    <p:tnLst>
-      <p:par>
-        <p:cTn id="1" dur="indefinite" restart="never" nodeType="tmRoot"/>
-      </p:par>
-    </p:tnLst>
-  </p:timing>
-</p:sld>
-</file>
-
-<file path=ppt/slides/slide9.xml><?xml version="1.0" encoding="utf-8"?>
-<p:sld xmlns:a="http://schemas.openxmlformats.org/drawingml/2006/main" xmlns:r="http://schemas.openxmlformats.org/officeDocument/2006/relationships" xmlns:p="http://schemas.openxmlformats.org/presentationml/2006/main">
-  <p:cSld>
-    <p:spTree>
-      <p:nvGrpSpPr>
-        <p:cNvPr id="1" name=""/>
-        <p:cNvGrpSpPr/>
-        <p:nvPr/>
-      </p:nvGrpSpPr>
-      <p:grpSpPr>
-        <a:xfrm>
-          <a:off x="0" y="0"/>
-          <a:ext cx="0" cy="0"/>
-          <a:chOff x="0" y="0"/>
-          <a:chExt cx="0" cy="0"/>
-        </a:xfrm>
-      </p:grpSpPr>
-      <p:graphicFrame>
-        <p:nvGraphicFramePr>
-          <p:cNvPr id="9" name="表格 8"/>
-          <p:cNvGraphicFramePr/>
-          <p:nvPr>
-            <p:custDataLst>
-              <p:tags r:id="rId1"/>
-            </p:custDataLst>
-          </p:nvPr>
-        </p:nvGraphicFramePr>
-        <p:xfrm>
-          <a:off x="683260" y="1385570"/>
-          <a:ext cx="7987665" cy="3379470"/>
-        </p:xfrm>
-        <a:graphic>
-          <a:graphicData uri="http://schemas.openxmlformats.org/drawingml/2006/table">
-            <a:tbl>
-              <a:tblPr firstRow="1" bandRow="1">
-                <a:tableStyleId>{5940675A-B579-460E-94D1-54222C63F5DA}</a:tableStyleId>
-              </a:tblPr>
-              <a:tblGrid>
-                <a:gridCol w="633095"/>
-                <a:gridCol w="3912870"/>
-                <a:gridCol w="3441700"/>
-              </a:tblGrid>
-              <a:tr h="396000">
-                <a:tc>
-                  <a:txBody>
-                    <a:bodyPr/>
-                    <a:p>
-                      <a:pPr algn="ctr">
-                        <a:buNone/>
-                      </a:pPr>
-                      <a:r>
-                        <a:rPr lang="zh-CN" altLang="en-US" sz="1100" b="1" dirty="0">
-                          <a:effectLst/>
-                          <a:latin typeface="微软雅黑" panose="020B0503020204020204" pitchFamily="34" charset="-122"/>
-                          <a:ea typeface="微软雅黑" panose="020B0503020204020204" pitchFamily="34" charset="-122"/>
-                        </a:rPr>
-                        <a:t>层次</a:t>
-                      </a:r>
-                      <a:endParaRPr lang="zh-CN" altLang="en-US" sz="1100" b="1" dirty="0">
-                        <a:effectLst/>
-                        <a:latin typeface="微软雅黑" panose="020B0503020204020204" pitchFamily="34" charset="-122"/>
-                        <a:ea typeface="微软雅黑" panose="020B0503020204020204" pitchFamily="34" charset="-122"/>
-                      </a:endParaRPr>
-                    </a:p>
-                  </a:txBody>
-                  <a:tcPr anchor="ctr" anchorCtr="0">
-                    <a:solidFill>
-                      <a:schemeClr val="bg1">
-                        <a:lumMod val="85000"/>
-                      </a:schemeClr>
-                    </a:solidFill>
-                  </a:tcPr>
-                </a:tc>
-                <a:tc>
-                  <a:txBody>
-                    <a:bodyPr/>
-                    <a:p>
-                      <a:pPr algn="ctr">
-                        <a:buNone/>
-                      </a:pPr>
-                      <a:r>
-                        <a:rPr lang="zh-CN" altLang="en-US" sz="1100" b="1" dirty="0">
-                          <a:effectLst/>
-                          <a:latin typeface="微软雅黑" panose="020B0503020204020204" pitchFamily="34" charset="-122"/>
-                          <a:ea typeface="微软雅黑" panose="020B0503020204020204" pitchFamily="34" charset="-122"/>
-                        </a:rPr>
-                        <a:t>问题</a:t>
-                      </a:r>
-                      <a:endParaRPr lang="zh-CN" altLang="en-US" sz="1100" b="1" dirty="0">
-                        <a:effectLst/>
-                        <a:latin typeface="微软雅黑" panose="020B0503020204020204" pitchFamily="34" charset="-122"/>
-                        <a:ea typeface="微软雅黑" panose="020B0503020204020204" pitchFamily="34" charset="-122"/>
-                      </a:endParaRPr>
-                    </a:p>
-                  </a:txBody>
-                  <a:tcPr anchor="ctr" anchorCtr="0">
-                    <a:solidFill>
-                      <a:schemeClr val="bg1">
-                        <a:lumMod val="85000"/>
-                      </a:schemeClr>
-                    </a:solidFill>
-                  </a:tcPr>
-                </a:tc>
-                <a:tc>
-                  <a:txBody>
-                    <a:bodyPr/>
-                    <a:p>
-                      <a:pPr algn="ctr">
-                        <a:buNone/>
-                      </a:pPr>
-                      <a:r>
-                        <a:rPr lang="zh-CN" altLang="en-US" sz="1100" b="1" dirty="0">
-                          <a:effectLst/>
-                          <a:latin typeface="微软雅黑" panose="020B0503020204020204" pitchFamily="34" charset="-122"/>
-                          <a:ea typeface="微软雅黑" panose="020B0503020204020204" pitchFamily="34" charset="-122"/>
-                        </a:rPr>
-                        <a:t>原因</a:t>
-                      </a:r>
-                      <a:endParaRPr lang="zh-CN" altLang="en-US" sz="1100" b="1" dirty="0">
-                        <a:effectLst/>
-                        <a:latin typeface="微软雅黑" panose="020B0503020204020204" pitchFamily="34" charset="-122"/>
-                        <a:ea typeface="微软雅黑" panose="020B0503020204020204" pitchFamily="34" charset="-122"/>
-                      </a:endParaRPr>
-                    </a:p>
-                  </a:txBody>
-                  <a:tcPr anchor="ctr" anchorCtr="0">
-                    <a:solidFill>
-                      <a:schemeClr val="bg1">
-                        <a:lumMod val="85000"/>
-                      </a:schemeClr>
-                    </a:solidFill>
-                  </a:tcPr>
-                </a:tc>
-              </a:tr>
-              <a:tr h="396000">
-                <a:tc>
-                  <a:txBody>
-                    <a:bodyPr/>
-                    <a:p>
-                      <a:pPr algn="ctr">
-                        <a:buNone/>
-                      </a:pPr>
-                      <a:r>
-                        <a:rPr lang="en-US" altLang="zh-CN" sz="1000">
-                          <a:latin typeface="微软雅黑" panose="020B0503020204020204" pitchFamily="34" charset="-122"/>
-                          <a:ea typeface="微软雅黑" panose="020B0503020204020204" pitchFamily="34" charset="-122"/>
-                        </a:rPr>
-                        <a:t>Why1</a:t>
-                      </a:r>
-                      <a:endParaRPr lang="en-US" altLang="zh-CN" sz="1000">
-                        <a:latin typeface="微软雅黑" panose="020B0503020204020204" pitchFamily="34" charset="-122"/>
-                        <a:ea typeface="微软雅黑" panose="020B0503020204020204" pitchFamily="34" charset="-122"/>
-                      </a:endParaRPr>
-                    </a:p>
-                  </a:txBody>
-                  <a:tcPr anchor="ctr" anchorCtr="0"/>
-                </a:tc>
-                <a:tc>
-                  <a:txBody>
-                    <a:bodyPr/>
-                    <a:p>
-                      <a:pPr algn="ctr">
-                        <a:buNone/>
-                      </a:pPr>
-                      <a:endParaRPr lang="zh-CN" altLang="en-US" sz="1000">
-                        <a:latin typeface="微软雅黑" panose="020B0503020204020204" pitchFamily="34" charset="-122"/>
-                        <a:ea typeface="微软雅黑" panose="020B0503020204020204" pitchFamily="34" charset="-122"/>
-                      </a:endParaRPr>
-                    </a:p>
-                  </a:txBody>
-                  <a:tcPr anchor="ctr" anchorCtr="0"/>
-                </a:tc>
-                <a:tc>
-                  <a:txBody>
-                    <a:bodyPr/>
-                    <a:p>
-                      <a:pPr algn="ctr">
-                        <a:buNone/>
-                      </a:pPr>
-                      <a:endParaRPr lang="zh-CN" altLang="en-US" sz="1000">
-                        <a:latin typeface="微软雅黑" panose="020B0503020204020204" pitchFamily="34" charset="-122"/>
-                        <a:ea typeface="微软雅黑" panose="020B0503020204020204" pitchFamily="34" charset="-122"/>
-                      </a:endParaRPr>
-                    </a:p>
-                  </a:txBody>
-                  <a:tcPr anchor="ctr" anchorCtr="0"/>
-                </a:tc>
-              </a:tr>
-              <a:tr h="396000">
-                <a:tc>
-                  <a:txBody>
-                    <a:bodyPr/>
-                    <a:p>
-                      <a:pPr algn="ctr">
-                        <a:buNone/>
-                      </a:pPr>
-                      <a:r>
-                        <a:rPr lang="en-US" altLang="zh-CN" sz="1000">
-                          <a:latin typeface="微软雅黑" panose="020B0503020204020204" pitchFamily="34" charset="-122"/>
-                          <a:ea typeface="微软雅黑" panose="020B0503020204020204" pitchFamily="34" charset="-122"/>
-                          <a:sym typeface="+mn-ea"/>
-                        </a:rPr>
-                        <a:t>Why2</a:t>
-                      </a:r>
-                      <a:endParaRPr lang="zh-CN" altLang="en-US" sz="1000">
-                        <a:latin typeface="微软雅黑" panose="020B0503020204020204" pitchFamily="34" charset="-122"/>
-                        <a:ea typeface="微软雅黑" panose="020B0503020204020204" pitchFamily="34" charset="-122"/>
-                      </a:endParaRPr>
-                    </a:p>
-                  </a:txBody>
-                  <a:tcPr anchor="ctr" anchorCtr="0"/>
-                </a:tc>
-                <a:tc>
-                  <a:txBody>
-                    <a:bodyPr/>
-                    <a:p>
-                      <a:pPr algn="ctr">
-                        <a:buNone/>
-                      </a:pPr>
-                      <a:endParaRPr lang="zh-CN" altLang="en-US" sz="1000">
-                        <a:latin typeface="微软雅黑" panose="020B0503020204020204" pitchFamily="34" charset="-122"/>
-                        <a:ea typeface="微软雅黑" panose="020B0503020204020204" pitchFamily="34" charset="-122"/>
-                      </a:endParaRPr>
-                    </a:p>
-                  </a:txBody>
-                  <a:tcPr anchor="ctr" anchorCtr="0"/>
-                </a:tc>
-                <a:tc>
-                  <a:txBody>
-                    <a:bodyPr/>
-                    <a:p>
-                      <a:pPr algn="ctr">
-                        <a:buNone/>
-                      </a:pPr>
-                      <a:endParaRPr lang="zh-CN" altLang="en-US" sz="1000">
-                        <a:latin typeface="微软雅黑" panose="020B0503020204020204" pitchFamily="34" charset="-122"/>
-                        <a:ea typeface="微软雅黑" panose="020B0503020204020204" pitchFamily="34" charset="-122"/>
-                      </a:endParaRPr>
-                    </a:p>
-                  </a:txBody>
-                  <a:tcPr anchor="ctr" anchorCtr="0"/>
-                </a:tc>
-              </a:tr>
-              <a:tr h="396000">
-                <a:tc>
-                  <a:txBody>
-                    <a:bodyPr/>
-                    <a:p>
-                      <a:pPr algn="ctr">
-                        <a:buNone/>
-                      </a:pPr>
-                      <a:r>
-                        <a:rPr lang="en-US" altLang="zh-CN" sz="1000">
-                          <a:latin typeface="微软雅黑" panose="020B0503020204020204" pitchFamily="34" charset="-122"/>
-                          <a:ea typeface="微软雅黑" panose="020B0503020204020204" pitchFamily="34" charset="-122"/>
-                          <a:sym typeface="+mn-ea"/>
-                        </a:rPr>
-                        <a:t>Why3</a:t>
-                      </a:r>
-                      <a:endParaRPr lang="zh-CN" altLang="en-US" sz="1000">
-                        <a:latin typeface="微软雅黑" panose="020B0503020204020204" pitchFamily="34" charset="-122"/>
-                        <a:ea typeface="微软雅黑" panose="020B0503020204020204" pitchFamily="34" charset="-122"/>
-                      </a:endParaRPr>
-                    </a:p>
-                  </a:txBody>
-                  <a:tcPr anchor="ctr" anchorCtr="0"/>
-                </a:tc>
-                <a:tc>
-                  <a:txBody>
-                    <a:bodyPr/>
-                    <a:p>
-                      <a:pPr algn="ctr">
-                        <a:buNone/>
-                      </a:pPr>
-                      <a:endParaRPr lang="zh-CN" altLang="en-US" sz="1000">
-                        <a:latin typeface="微软雅黑" panose="020B0503020204020204" pitchFamily="34" charset="-122"/>
-                        <a:ea typeface="微软雅黑" panose="020B0503020204020204" pitchFamily="34" charset="-122"/>
-                      </a:endParaRPr>
-                    </a:p>
-                  </a:txBody>
-                  <a:tcPr anchor="ctr" anchorCtr="0"/>
-                </a:tc>
-                <a:tc>
-                  <a:txBody>
-                    <a:bodyPr/>
-                    <a:p>
-                      <a:pPr algn="ctr">
-                        <a:buNone/>
-                      </a:pPr>
-                      <a:endParaRPr lang="zh-CN" altLang="en-US" sz="1000">
-                        <a:latin typeface="微软雅黑" panose="020B0503020204020204" pitchFamily="34" charset="-122"/>
-                        <a:ea typeface="微软雅黑" panose="020B0503020204020204" pitchFamily="34" charset="-122"/>
-                      </a:endParaRPr>
-                    </a:p>
-                  </a:txBody>
-                  <a:tcPr anchor="ctr" anchorCtr="0"/>
-                </a:tc>
-              </a:tr>
-            </a:tbl>
-          </a:graphicData>
-        </a:graphic>
-      </p:graphicFrame>
-      <p:sp>
-        <p:nvSpPr>
-          <p:cNvPr id="18433" name="灯片编号占位符 1"/>
-          <p:cNvSpPr>
-            <a:spLocks noGrp="1"/>
-          </p:cNvSpPr>
-          <p:nvPr>
-            <p:ph type="sldNum" sz="quarter" idx="10"/>
-          </p:nvPr>
-        </p:nvSpPr>
-        <p:spPr>
-          <a:xfrm>
-            <a:off x="8388350" y="4691063"/>
-            <a:ext cx="360363" cy="112712"/>
-          </a:xfrm>
-          <a:noFill/>
-          <a:ln>
-            <a:noFill/>
-          </a:ln>
-        </p:spPr>
-        <p:txBody>
-          <a:bodyPr wrap="none" lIns="0" tIns="0" rIns="0" bIns="0" anchor="t"/>
-          <a:lstStyle>
-            <a:lvl1pPr marL="0" lvl="0" indent="0" algn="l" defTabSz="914400" rtl="0" eaLnBrk="1" fontAlgn="base" latinLnBrk="0" hangingPunct="1">
-              <a:lnSpc>
-                <a:spcPct val="100000"/>
-              </a:lnSpc>
-              <a:spcBef>
-                <a:spcPct val="0"/>
-              </a:spcBef>
-              <a:spcAft>
-                <a:spcPct val="0"/>
-              </a:spcAft>
-              <a:buNone/>
-              <a:defRPr sz="1800" kern="1200">
-                <a:solidFill>
-                  <a:schemeClr val="tx1"/>
-                </a:solidFill>
-                <a:latin typeface="Calibri" panose="020F0502020204030204" pitchFamily="34" charset="0"/>
-                <a:ea typeface="宋体" panose="02010600030101010101" pitchFamily="2" charset="-122"/>
-              </a:defRPr>
-            </a:lvl1pPr>
-            <a:lvl2pPr marL="457200" lvl="1" indent="0" algn="l" defTabSz="914400" rtl="0" eaLnBrk="1" fontAlgn="base" latinLnBrk="0" hangingPunct="1">
-              <a:lnSpc>
-                <a:spcPct val="100000"/>
-              </a:lnSpc>
-              <a:spcBef>
-                <a:spcPct val="0"/>
-              </a:spcBef>
-              <a:spcAft>
-                <a:spcPct val="0"/>
-              </a:spcAft>
-              <a:buFont typeface="Arial" panose="020B0604020202020204" pitchFamily="34" charset="0"/>
-              <a:buNone/>
-              <a:defRPr kern="1200">
-                <a:solidFill>
-                  <a:schemeClr val="tx1"/>
-                </a:solidFill>
-                <a:latin typeface="Calibri" panose="020F0502020204030204" pitchFamily="34" charset="0"/>
-                <a:ea typeface="宋体" panose="02010600030101010101" pitchFamily="2" charset="-122"/>
-                <a:cs typeface="+mn-cs"/>
-              </a:defRPr>
-            </a:lvl2pPr>
-            <a:lvl3pPr marL="914400" lvl="2" indent="0" algn="l" defTabSz="914400" rtl="0" eaLnBrk="1" fontAlgn="base" latinLnBrk="0" hangingPunct="1">
-              <a:lnSpc>
-                <a:spcPct val="100000"/>
-              </a:lnSpc>
-              <a:spcBef>
-                <a:spcPct val="0"/>
-              </a:spcBef>
-              <a:spcAft>
-                <a:spcPct val="0"/>
-              </a:spcAft>
-              <a:buFontTx/>
-              <a:buNone/>
-              <a:defRPr kern="1200">
-                <a:solidFill>
-                  <a:schemeClr val="tx1"/>
-                </a:solidFill>
-                <a:latin typeface="Calibri" panose="020F0502020204030204" pitchFamily="34" charset="0"/>
-                <a:ea typeface="宋体" panose="02010600030101010101" pitchFamily="2" charset="-122"/>
-                <a:cs typeface="+mn-cs"/>
-              </a:defRPr>
-            </a:lvl3pPr>
-            <a:lvl4pPr marL="1371600" lvl="3" indent="0" algn="l" defTabSz="914400" rtl="0" eaLnBrk="1" fontAlgn="base" latinLnBrk="0" hangingPunct="1">
-              <a:lnSpc>
-                <a:spcPct val="100000"/>
-              </a:lnSpc>
-              <a:spcBef>
-                <a:spcPct val="0"/>
-              </a:spcBef>
-              <a:spcAft>
-                <a:spcPct val="0"/>
-              </a:spcAft>
-              <a:buFont typeface="Arial" panose="020B0604020202020204" pitchFamily="34" charset="0"/>
-              <a:buNone/>
-              <a:defRPr kern="1200">
-                <a:solidFill>
-                  <a:schemeClr val="tx1"/>
-                </a:solidFill>
-                <a:latin typeface="Calibri" panose="020F0502020204030204" pitchFamily="34" charset="0"/>
-                <a:ea typeface="宋体" panose="02010600030101010101" pitchFamily="2" charset="-122"/>
-                <a:cs typeface="+mn-cs"/>
-              </a:defRPr>
-            </a:lvl4pPr>
-            <a:lvl5pPr marL="1828800" lvl="4" indent="0" algn="l" defTabSz="914400" rtl="0" eaLnBrk="1" fontAlgn="base" latinLnBrk="0" hangingPunct="1">
-              <a:lnSpc>
-                <a:spcPct val="100000"/>
-              </a:lnSpc>
-              <a:spcBef>
-                <a:spcPct val="0"/>
-              </a:spcBef>
-              <a:spcAft>
-                <a:spcPct val="0"/>
-              </a:spcAft>
-              <a:buFontTx/>
-              <a:buNone/>
-              <a:defRPr kern="1200">
-                <a:solidFill>
-                  <a:schemeClr val="tx1"/>
-                </a:solidFill>
-                <a:latin typeface="Calibri" panose="020F0502020204030204" pitchFamily="34" charset="0"/>
-                <a:ea typeface="宋体" panose="02010600030101010101" pitchFamily="2" charset="-122"/>
-                <a:cs typeface="+mn-cs"/>
-              </a:defRPr>
-            </a:lvl5pPr>
-          </a:lstStyle>
-          <a:p>
-            <a:pPr lvl="0" algn="r"/>
-            <a:fld id="{9A0DB2DC-4C9A-4742-B13C-FB6460FD3503}" type="slidenum">
-              <a:rPr lang="en-US" altLang="zh-CN" sz="1000" b="1">
-                <a:solidFill>
-                  <a:schemeClr val="bg1"/>
-                </a:solidFill>
-                <a:latin typeface="Arial" panose="020B0604020202020204" pitchFamily="34" charset="0"/>
-              </a:rPr>
-            </a:fld>
-            <a:endParaRPr lang="en-US" altLang="zh-CN" sz="1000" b="1">
-              <a:solidFill>
-                <a:schemeClr val="bg1"/>
-              </a:solidFill>
-              <a:latin typeface="Arial" panose="020B0604020202020204" pitchFamily="34" charset="0"/>
-            </a:endParaRPr>
-          </a:p>
-        </p:txBody>
-      </p:sp>
-      <p:grpSp>
-        <p:nvGrpSpPr>
-          <p:cNvPr id="3" name="组合 2"/>
-          <p:cNvGrpSpPr/>
-          <p:nvPr/>
-        </p:nvGrpSpPr>
-        <p:grpSpPr>
-          <a:xfrm>
-            <a:off x="467360" y="808990"/>
-            <a:ext cx="2835910" cy="245110"/>
-            <a:chOff x="736" y="1274"/>
-            <a:chExt cx="4466" cy="386"/>
-          </a:xfrm>
-        </p:grpSpPr>
-        <p:sp>
-          <p:nvSpPr>
-            <p:cNvPr id="4" name="TextBox 2"/>
-            <p:cNvSpPr/>
-            <p:nvPr/>
-          </p:nvSpPr>
-          <p:spPr>
-            <a:xfrm>
-              <a:off x="963" y="1274"/>
-              <a:ext cx="4239" cy="386"/>
-            </a:xfrm>
-            <a:prstGeom prst="rect">
-              <a:avLst/>
-            </a:prstGeom>
-            <a:noFill/>
-            <a:ln w="9525">
-              <a:noFill/>
-            </a:ln>
-          </p:spPr>
-          <p:txBody>
-            <a:bodyPr wrap="square" anchor="t">
-              <a:spAutoFit/>
-            </a:bodyPr>
-            <a:p>
-              <a:pPr>
-                <a:lnSpc>
-                  <a:spcPts val="1200"/>
-                </a:lnSpc>
-                <a:spcBef>
-                  <a:spcPts val="600"/>
-                </a:spcBef>
-              </a:pPr>
-              <a:r>
-                <a:rPr lang="en-US" altLang="zh-CN" sz="1400" b="1" dirty="0" smtClean="0">
-                  <a:solidFill>
-                    <a:srgbClr val="000000"/>
-                  </a:solidFill>
-                  <a:latin typeface="微软雅黑" panose="020B0503020204020204" pitchFamily="34" charset="-122"/>
-                  <a:ea typeface="微软雅黑" panose="020B0503020204020204" pitchFamily="34" charset="-122"/>
-                  <a:sym typeface="微软雅黑" panose="020B0503020204020204" pitchFamily="34" charset="-122"/>
-                </a:rPr>
-                <a:t>D4  </a:t>
-              </a:r>
-              <a:r>
-                <a:rPr lang="zh-CN" altLang="en-US" sz="1400" b="1" dirty="0" smtClean="0">
-                  <a:solidFill>
-                    <a:srgbClr val="000000"/>
-                  </a:solidFill>
-                  <a:latin typeface="微软雅黑" panose="020B0503020204020204" pitchFamily="34" charset="-122"/>
-                  <a:ea typeface="微软雅黑" panose="020B0503020204020204" pitchFamily="34" charset="-122"/>
-                  <a:sym typeface="微软雅黑" panose="020B0503020204020204" pitchFamily="34" charset="-122"/>
-                </a:rPr>
-                <a:t>原因</a:t>
-              </a:r>
-              <a:r>
-                <a:rPr lang="zh-CN" altLang="en-US" sz="1400" b="1" dirty="0">
-                  <a:solidFill>
-                    <a:srgbClr val="000000"/>
-                  </a:solidFill>
-                  <a:latin typeface="微软雅黑" panose="020B0503020204020204" pitchFamily="34" charset="-122"/>
-                  <a:ea typeface="微软雅黑" panose="020B0503020204020204" pitchFamily="34" charset="-122"/>
-                  <a:sym typeface="微软雅黑" panose="020B0503020204020204" pitchFamily="34" charset="-122"/>
-                </a:rPr>
-                <a:t>分析</a:t>
-              </a:r>
-              <a:endParaRPr lang="zh-CN" altLang="en-US" sz="1400" b="1">
-                <a:solidFill>
-                  <a:srgbClr val="000000"/>
-                </a:solidFill>
-                <a:latin typeface="微软雅黑" panose="020B0503020204020204" pitchFamily="34" charset="-122"/>
-                <a:ea typeface="微软雅黑" panose="020B0503020204020204" pitchFamily="34" charset="-122"/>
-                <a:sym typeface="微软雅黑" panose="020B0503020204020204" pitchFamily="34" charset="-122"/>
-              </a:endParaRPr>
-            </a:p>
-          </p:txBody>
-        </p:sp>
-        <p:sp>
-          <p:nvSpPr>
-            <p:cNvPr id="5" name="矩形 4"/>
-            <p:cNvSpPr/>
-            <p:nvPr/>
-          </p:nvSpPr>
-          <p:spPr>
-            <a:xfrm>
-              <a:off x="736" y="1313"/>
-              <a:ext cx="227" cy="229"/>
-            </a:xfrm>
-            <a:prstGeom prst="rect">
-              <a:avLst/>
-            </a:prstGeom>
-            <a:solidFill>
-              <a:srgbClr val="E62135"/>
-            </a:solidFill>
-            <a:ln w="9525">
-              <a:noFill/>
-            </a:ln>
-          </p:spPr>
-          <p:style>
-            <a:lnRef idx="1">
-              <a:schemeClr val="accent1"/>
-            </a:lnRef>
-            <a:fillRef idx="0">
-              <a:schemeClr val="accent1"/>
-            </a:fillRef>
-            <a:effectRef idx="0">
-              <a:schemeClr val="accent1"/>
-            </a:effectRef>
-            <a:fontRef idx="minor">
-              <a:schemeClr val="tx1"/>
-            </a:fontRef>
-          </p:style>
-          <p:txBody>
-            <a:bodyPr anchor="ctr"/>
-            <a:p>
-              <a:pPr algn="ctr" fontAlgn="auto">
-                <a:defRPr/>
-              </a:pPr>
-              <a:endParaRPr lang="zh-CN" altLang="en-US" sz="1600" noProof="1">
-                <a:solidFill>
-                  <a:srgbClr val="EBEBEB">
-                    <a:lumMod val="10000"/>
-                  </a:srgbClr>
-                </a:solidFill>
-              </a:endParaRPr>
-            </a:p>
-          </p:txBody>
-        </p:sp>
-      </p:grpSp>
-      <p:sp>
-        <p:nvSpPr>
-          <p:cNvPr id="7" name="文本框 6"/>
-          <p:cNvSpPr txBox="1"/>
-          <p:nvPr/>
-        </p:nvSpPr>
-        <p:spPr>
-          <a:xfrm>
-            <a:off x="611505" y="1059815"/>
-            <a:ext cx="3048000" cy="245110"/>
-          </a:xfrm>
-          <a:prstGeom prst="rect">
-            <a:avLst/>
-          </a:prstGeom>
-          <a:noFill/>
-        </p:spPr>
-        <p:txBody>
-          <a:bodyPr wrap="square" rtlCol="0">
-            <a:spAutoFit/>
-          </a:bodyPr>
-          <a:p>
-            <a:r>
-              <a:rPr lang="en-US" altLang="zh-CN" sz="1000">
-                <a:latin typeface="微软雅黑" panose="020B0503020204020204" pitchFamily="34" charset="-122"/>
-                <a:ea typeface="微软雅黑" panose="020B0503020204020204" pitchFamily="34" charset="-122"/>
-                <a:cs typeface="微软雅黑" panose="020B0503020204020204" pitchFamily="34" charset="-122"/>
-              </a:rPr>
-              <a:t>5WHY</a:t>
-            </a:r>
-            <a:r>
-              <a:rPr lang="zh-CN" altLang="en-US" sz="1000">
-                <a:latin typeface="微软雅黑" panose="020B0503020204020204" pitchFamily="34" charset="-122"/>
-                <a:ea typeface="微软雅黑" panose="020B0503020204020204" pitchFamily="34" charset="-122"/>
-                <a:cs typeface="微软雅黑" panose="020B0503020204020204" pitchFamily="34" charset="-122"/>
-              </a:rPr>
-              <a:t>流出</a:t>
-            </a:r>
-            <a:r>
-              <a:rPr lang="zh-CN" altLang="en-US" sz="1000">
-                <a:latin typeface="微软雅黑" panose="020B0503020204020204" pitchFamily="34" charset="-122"/>
-                <a:ea typeface="微软雅黑" panose="020B0503020204020204" pitchFamily="34" charset="-122"/>
-                <a:cs typeface="微软雅黑" panose="020B0503020204020204" pitchFamily="34" charset="-122"/>
-              </a:rPr>
-              <a:t>原因分析：</a:t>
             </a:r>
             <a:endParaRPr lang="zh-CN" altLang="en-US" sz="1000">
               <a:latin typeface="微软雅黑" panose="020B0503020204020204" pitchFamily="34" charset="-122"/>

--- a/8D模板.pptx
+++ b/8D模板.pptx
@@ -9,7 +9,7 @@
     <p:notesMasterId r:id="rId5"/>
   </p:notesMasterIdLst>
   <p:handoutMasterIdLst>
-    <p:handoutMasterId r:id="rId20"/>
+    <p:handoutMasterId r:id="rId19"/>
   </p:handoutMasterIdLst>
   <p:sldIdLst>
     <p:sldId id="353" r:id="rId4"/>
@@ -19,19 +19,18 @@
     <p:sldId id="531" r:id="rId9"/>
     <p:sldId id="412" r:id="rId10"/>
     <p:sldId id="613" r:id="rId11"/>
-    <p:sldId id="626" r:id="rId12"/>
-    <p:sldId id="619" r:id="rId13"/>
-    <p:sldId id="620" r:id="rId14"/>
-    <p:sldId id="577" r:id="rId15"/>
-    <p:sldId id="579" r:id="rId16"/>
-    <p:sldId id="580" r:id="rId17"/>
-    <p:sldId id="582" r:id="rId18"/>
-    <p:sldId id="411" r:id="rId19"/>
+    <p:sldId id="619" r:id="rId12"/>
+    <p:sldId id="620" r:id="rId13"/>
+    <p:sldId id="577" r:id="rId14"/>
+    <p:sldId id="579" r:id="rId15"/>
+    <p:sldId id="580" r:id="rId16"/>
+    <p:sldId id="582" r:id="rId17"/>
+    <p:sldId id="411" r:id="rId18"/>
   </p:sldIdLst>
   <p:sldSz cx="9144000" cy="5143500" type="screen16x9"/>
   <p:notesSz cx="6797675" cy="9926320"/>
   <p:custDataLst>
-    <p:tags r:id="rId25"/>
+    <p:tags r:id="rId24"/>
   </p:custDataLst>
   <p:defaultTextStyle>
     <a:defPPr>
@@ -979,7 +978,7 @@
       </p:grpSpPr>
       <p:sp>
         <p:nvSpPr>
-          <p:cNvPr id="19457" name="幻灯片图像占位符 1"/>
+          <p:cNvPr id="25601" name="幻灯片图像占位符 1"/>
           <p:cNvSpPr>
             <a:spLocks noGrp="1" noRot="1" noChangeAspect="1"/>
           </p:cNvSpPr>
@@ -991,7 +990,7 @@
       </p:sp>
       <p:sp>
         <p:nvSpPr>
-          <p:cNvPr id="19458" name="备注占位符 2"/>
+          <p:cNvPr id="25602" name="备注占位符 2"/>
           <p:cNvSpPr>
             <a:spLocks noGrp="1"/>
           </p:cNvSpPr>
@@ -1004,57 +1003,6 @@
           <a:bodyPr wrap="square" lIns="91440" tIns="45720" rIns="91440" bIns="45720" anchor="t"/>
           <a:lstStyle/>
           <a:p>
-            <a:pPr marL="0" marR="0" lvl="0" indent="0" algn="l" defTabSz="914400" rtl="0" eaLnBrk="1" fontAlgn="base" latinLnBrk="0" hangingPunct="1">
-              <a:lnSpc>
-                <a:spcPct val="100000"/>
-              </a:lnSpc>
-              <a:spcBef>
-                <a:spcPct val="0"/>
-              </a:spcBef>
-              <a:spcAft>
-                <a:spcPct val="0"/>
-              </a:spcAft>
-              <a:buClrTx/>
-              <a:buSzTx/>
-              <a:buFontTx/>
-              <a:buNone/>
-              <a:defRPr/>
-            </a:pPr>
-            <a:r>
-              <a:rPr lang="en-US" altLang="zh-CN" dirty="0" smtClean="0"/>
-              <a:t>1</a:t>
-            </a:r>
-            <a:r>
-              <a:rPr lang="zh-CN" altLang="en-US" dirty="0" smtClean="0"/>
-              <a:t>、产生原因分析；</a:t>
-            </a:r>
-            <a:r>
-              <a:rPr lang="en-US" altLang="zh-CN" dirty="0" smtClean="0"/>
-              <a:t>2</a:t>
-            </a:r>
-            <a:r>
-              <a:rPr lang="zh-CN" altLang="en-US" dirty="0" smtClean="0"/>
-              <a:t>、流出原因分析；</a:t>
-            </a:r>
-            <a:r>
-              <a:rPr lang="en-US" altLang="zh-CN" dirty="0" smtClean="0"/>
-              <a:t>3</a:t>
-            </a:r>
-            <a:r>
-              <a:rPr lang="zh-CN" altLang="en-US" dirty="0" smtClean="0"/>
-              <a:t>、使用</a:t>
-            </a:r>
-            <a:r>
-              <a:rPr lang="en-US" altLang="zh-CN" dirty="0" smtClean="0"/>
-              <a:t>5WHY</a:t>
-            </a:r>
-            <a:r>
-              <a:rPr lang="zh-CN" altLang="en-US" dirty="0" smtClean="0"/>
-              <a:t>或鱼骨图等质量工具</a:t>
-            </a:r>
-            <a:endParaRPr lang="en-US" altLang="zh-CN" dirty="0" smtClean="0"/>
-          </a:p>
-          <a:p>
             <a:pPr lvl="0">
               <a:spcBef>
                 <a:spcPct val="0"/>
@@ -1066,7 +1014,7 @@
       </p:sp>
       <p:sp>
         <p:nvSpPr>
-          <p:cNvPr id="19459" name="灯片编号占位符 3"/>
+          <p:cNvPr id="25603" name="灯片编号占位符 3"/>
           <p:cNvSpPr>
             <a:spLocks noGrp="1"/>
           </p:cNvSpPr>
@@ -1132,7 +1080,7 @@
       </p:grpSpPr>
       <p:sp>
         <p:nvSpPr>
-          <p:cNvPr id="25601" name="幻灯片图像占位符 1"/>
+          <p:cNvPr id="29697" name="幻灯片图像占位符 1"/>
           <p:cNvSpPr>
             <a:spLocks noGrp="1" noRot="1" noChangeAspect="1"/>
           </p:cNvSpPr>
@@ -1144,7 +1092,7 @@
       </p:sp>
       <p:sp>
         <p:nvSpPr>
-          <p:cNvPr id="25602" name="备注占位符 2"/>
+          <p:cNvPr id="29698" name="备注占位符 2"/>
           <p:cNvSpPr>
             <a:spLocks noGrp="1"/>
           </p:cNvSpPr>
@@ -1168,7 +1116,7 @@
       </p:sp>
       <p:sp>
         <p:nvSpPr>
-          <p:cNvPr id="25603" name="灯片编号占位符 3"/>
+          <p:cNvPr id="29699" name="灯片编号占位符 3"/>
           <p:cNvSpPr>
             <a:spLocks noGrp="1"/>
           </p:cNvSpPr>
@@ -1336,108 +1284,6 @@
       </p:grpSpPr>
       <p:sp>
         <p:nvSpPr>
-          <p:cNvPr id="29697" name="幻灯片图像占位符 1"/>
-          <p:cNvSpPr>
-            <a:spLocks noGrp="1" noRot="1" noChangeAspect="1"/>
-          </p:cNvSpPr>
-          <p:nvPr>
-            <p:ph type="sldImg"/>
-          </p:nvPr>
-        </p:nvSpPr>
-        <p:spPr/>
-      </p:sp>
-      <p:sp>
-        <p:nvSpPr>
-          <p:cNvPr id="29698" name="备注占位符 2"/>
-          <p:cNvSpPr>
-            <a:spLocks noGrp="1"/>
-          </p:cNvSpPr>
-          <p:nvPr>
-            <p:ph type="body"/>
-          </p:nvPr>
-        </p:nvSpPr>
-        <p:spPr/>
-        <p:txBody>
-          <a:bodyPr wrap="square" lIns="91440" tIns="45720" rIns="91440" bIns="45720" anchor="t"/>
-          <a:lstStyle/>
-          <a:p>
-            <a:pPr lvl="0">
-              <a:spcBef>
-                <a:spcPct val="0"/>
-              </a:spcBef>
-            </a:pPr>
-            <a:endParaRPr lang="en-US" altLang="zh-CN" dirty="0"/>
-          </a:p>
-        </p:txBody>
-      </p:sp>
-      <p:sp>
-        <p:nvSpPr>
-          <p:cNvPr id="29699" name="灯片编号占位符 3"/>
-          <p:cNvSpPr>
-            <a:spLocks noGrp="1"/>
-          </p:cNvSpPr>
-          <p:nvPr>
-            <p:ph type="sldNum" sz="quarter"/>
-          </p:nvPr>
-        </p:nvSpPr>
-        <p:spPr>
-          <a:xfrm>
-            <a:off x="3849688" y="9428163"/>
-            <a:ext cx="2946400" cy="496887"/>
-          </a:xfrm>
-          <a:prstGeom prst="rect">
-            <a:avLst/>
-          </a:prstGeom>
-          <a:noFill/>
-          <a:ln w="9525">
-            <a:noFill/>
-          </a:ln>
-        </p:spPr>
-        <p:txBody>
-          <a:bodyPr vert="horz" wrap="square" lIns="91440" tIns="45720" rIns="91440" bIns="45720" anchor="b"/>
-          <a:lstStyle/>
-          <a:p>
-            <a:pPr lvl="0" algn="r"/>
-            <a:fld id="{9A0DB2DC-4C9A-4742-B13C-FB6460FD3503}" type="slidenum">
-              <a:rPr lang="en-US" altLang="zh-CN" sz="1200">
-                <a:latin typeface="Calibri" panose="020F0502020204030204" pitchFamily="34" charset="0"/>
-                <a:ea typeface="宋体" panose="02010600030101010101" pitchFamily="2" charset="-122"/>
-              </a:rPr>
-            </a:fld>
-            <a:endParaRPr lang="en-US" altLang="zh-CN" sz="1200">
-              <a:latin typeface="Calibri" panose="020F0502020204030204" pitchFamily="34" charset="0"/>
-              <a:ea typeface="宋体" panose="02010600030101010101" pitchFamily="2" charset="-122"/>
-            </a:endParaRPr>
-          </a:p>
-        </p:txBody>
-      </p:sp>
-    </p:spTree>
-  </p:cSld>
-  <p:clrMapOvr>
-    <a:masterClrMapping/>
-  </p:clrMapOvr>
-</p:notes>
-</file>
-
-<file path=ppt/notesSlides/notesSlide14.xml><?xml version="1.0" encoding="utf-8"?>
-<p:notes xmlns:a="http://schemas.openxmlformats.org/drawingml/2006/main" xmlns:r="http://schemas.openxmlformats.org/officeDocument/2006/relationships" xmlns:p="http://schemas.openxmlformats.org/presentationml/2006/main">
-  <p:cSld>
-    <p:spTree>
-      <p:nvGrpSpPr>
-        <p:cNvPr id="1" name=""/>
-        <p:cNvGrpSpPr/>
-        <p:nvPr/>
-      </p:nvGrpSpPr>
-      <p:grpSpPr>
-        <a:xfrm>
-          <a:off x="0" y="0"/>
-          <a:ext cx="0" cy="0"/>
-          <a:chOff x="0" y="0"/>
-          <a:chExt cx="0" cy="0"/>
-        </a:xfrm>
-      </p:grpSpPr>
-      <p:sp>
-        <p:nvSpPr>
           <p:cNvPr id="17409" name="幻灯片图像占位符 1"/>
           <p:cNvSpPr>
             <a:spLocks noGrp="1" noRot="1" noChangeAspect="1"/>
@@ -1521,7 +1367,7 @@
 </p:notes>
 </file>
 
-<file path=ppt/notesSlides/notesSlide15.xml><?xml version="1.0" encoding="utf-8"?>
+<file path=ppt/notesSlides/notesSlide14.xml><?xml version="1.0" encoding="utf-8"?>
 <p:notes xmlns:a="http://schemas.openxmlformats.org/drawingml/2006/main" xmlns:r="http://schemas.openxmlformats.org/officeDocument/2006/relationships" xmlns:p="http://schemas.openxmlformats.org/presentationml/2006/main">
   <p:cSld>
     <p:spTree>
@@ -4315,6 +4161,17 @@
               </a:rPr>
               <a:t>编制：</a:t>
             </a:r>
+            <a:r>
+              <a:rPr lang="en-US" sz="1400" dirty="0">
+                <a:solidFill>
+                  <a:srgbClr val="000000"/>
+                </a:solidFill>
+                <a:latin typeface="微软雅黑" panose="020B0503020204020204" pitchFamily="34" charset="-122"/>
+                <a:ea typeface="微软雅黑" panose="020B0503020204020204" pitchFamily="34" charset="-122"/>
+                <a:sym typeface="+mn-ea"/>
+              </a:rPr>
+              <a:t>{{content}}</a:t>
+            </a:r>
             <a:endParaRPr lang="en-US" altLang="zh-CN" sz="1400" dirty="0" smtClean="0">
               <a:latin typeface="微软雅黑" panose="020B0503020204020204" pitchFamily="34" charset="-122"/>
               <a:ea typeface="微软雅黑" panose="020B0503020204020204" pitchFamily="34" charset="-122"/>
@@ -4332,6 +4189,17 @@
                 <a:ea typeface="微软雅黑" panose="020B0503020204020204" pitchFamily="34" charset="-122"/>
               </a:rPr>
               <a:t>审核：</a:t>
+            </a:r>
+            <a:r>
+              <a:rPr lang="en-US" sz="1400" dirty="0">
+                <a:solidFill>
+                  <a:srgbClr val="000000"/>
+                </a:solidFill>
+                <a:latin typeface="微软雅黑" panose="020B0503020204020204" pitchFamily="34" charset="-122"/>
+                <a:ea typeface="微软雅黑" panose="020B0503020204020204" pitchFamily="34" charset="-122"/>
+                <a:sym typeface="+mn-ea"/>
+              </a:rPr>
+              <a:t>{{content}}</a:t>
             </a:r>
             <a:endParaRPr lang="en-US" altLang="zh-CN" sz="1400" dirty="0">
               <a:latin typeface="微软雅黑" panose="020B0503020204020204" pitchFamily="34" charset="-122"/>
@@ -4358,6 +4226,17 @@
               </a:rPr>
               <a:t>：</a:t>
             </a:r>
+            <a:r>
+              <a:rPr lang="en-US" sz="1400" dirty="0">
+                <a:solidFill>
+                  <a:srgbClr val="000000"/>
+                </a:solidFill>
+                <a:latin typeface="微软雅黑" panose="020B0503020204020204" pitchFamily="34" charset="-122"/>
+                <a:ea typeface="微软雅黑" panose="020B0503020204020204" pitchFamily="34" charset="-122"/>
+                <a:sym typeface="+mn-ea"/>
+              </a:rPr>
+              <a:t>{{content}}</a:t>
+            </a:r>
             <a:endParaRPr lang="en-US" altLang="zh-CN" sz="1400" dirty="0">
               <a:latin typeface="微软雅黑" panose="020B0503020204020204" pitchFamily="34" charset="-122"/>
               <a:ea typeface="微软雅黑" panose="020B0503020204020204" pitchFamily="34" charset="-122"/>
@@ -4375,6 +4254,17 @@
                 <a:ea typeface="微软雅黑" panose="020B0503020204020204" pitchFamily="34" charset="-122"/>
               </a:rPr>
               <a:t>日期：</a:t>
+            </a:r>
+            <a:r>
+              <a:rPr lang="en-US" sz="1400" dirty="0">
+                <a:solidFill>
+                  <a:srgbClr val="000000"/>
+                </a:solidFill>
+                <a:latin typeface="微软雅黑" panose="020B0503020204020204" pitchFamily="34" charset="-122"/>
+                <a:ea typeface="微软雅黑" panose="020B0503020204020204" pitchFamily="34" charset="-122"/>
+                <a:sym typeface="+mn-ea"/>
+              </a:rPr>
+              <a:t>{{content}}</a:t>
             </a:r>
             <a:endParaRPr lang="en-US" altLang="zh-CN" sz="1400" dirty="0" smtClean="0">
               <a:latin typeface="微软雅黑" panose="020B0503020204020204" pitchFamily="34" charset="-122"/>
@@ -4403,665 +4293,6 @@
 </file>
 
 <file path=ppt/slides/slide10.xml><?xml version="1.0" encoding="utf-8"?>
-<p:sld xmlns:a="http://schemas.openxmlformats.org/drawingml/2006/main" xmlns:r="http://schemas.openxmlformats.org/officeDocument/2006/relationships" xmlns:p="http://schemas.openxmlformats.org/presentationml/2006/main">
-  <p:cSld>
-    <p:spTree>
-      <p:nvGrpSpPr>
-        <p:cNvPr id="1" name=""/>
-        <p:cNvGrpSpPr/>
-        <p:nvPr/>
-      </p:nvGrpSpPr>
-      <p:grpSpPr>
-        <a:xfrm>
-          <a:off x="0" y="0"/>
-          <a:ext cx="0" cy="0"/>
-          <a:chOff x="0" y="0"/>
-          <a:chExt cx="0" cy="0"/>
-        </a:xfrm>
-      </p:grpSpPr>
-      <p:graphicFrame>
-        <p:nvGraphicFramePr>
-          <p:cNvPr id="9" name="表格 8"/>
-          <p:cNvGraphicFramePr/>
-          <p:nvPr>
-            <p:custDataLst>
-              <p:tags r:id="rId1"/>
-            </p:custDataLst>
-          </p:nvPr>
-        </p:nvGraphicFramePr>
-        <p:xfrm>
-          <a:off x="683260" y="1385570"/>
-          <a:ext cx="7987665" cy="3379470"/>
-        </p:xfrm>
-        <a:graphic>
-          <a:graphicData uri="http://schemas.openxmlformats.org/drawingml/2006/table">
-            <a:tbl>
-              <a:tblPr firstRow="1" bandRow="1">
-                <a:tableStyleId>{5940675A-B579-460E-94D1-54222C63F5DA}</a:tableStyleId>
-              </a:tblPr>
-              <a:tblGrid>
-                <a:gridCol w="633095"/>
-                <a:gridCol w="3912870"/>
-                <a:gridCol w="3441700"/>
-              </a:tblGrid>
-              <a:tr h="396000">
-                <a:tc>
-                  <a:txBody>
-                    <a:bodyPr/>
-                    <a:p>
-                      <a:pPr algn="ctr">
-                        <a:buNone/>
-                      </a:pPr>
-                      <a:r>
-                        <a:rPr lang="zh-CN" altLang="en-US" sz="1100" b="1" dirty="0">
-                          <a:effectLst/>
-                          <a:latin typeface="微软雅黑" panose="020B0503020204020204" pitchFamily="34" charset="-122"/>
-                          <a:ea typeface="微软雅黑" panose="020B0503020204020204" pitchFamily="34" charset="-122"/>
-                        </a:rPr>
-                        <a:t>层次</a:t>
-                      </a:r>
-                      <a:endParaRPr lang="zh-CN" altLang="en-US" sz="1100" b="1" dirty="0">
-                        <a:effectLst/>
-                        <a:latin typeface="微软雅黑" panose="020B0503020204020204" pitchFamily="34" charset="-122"/>
-                        <a:ea typeface="微软雅黑" panose="020B0503020204020204" pitchFamily="34" charset="-122"/>
-                      </a:endParaRPr>
-                    </a:p>
-                  </a:txBody>
-                  <a:tcPr anchor="ctr" anchorCtr="0">
-                    <a:solidFill>
-                      <a:schemeClr val="bg1">
-                        <a:lumMod val="85000"/>
-                      </a:schemeClr>
-                    </a:solidFill>
-                  </a:tcPr>
-                </a:tc>
-                <a:tc>
-                  <a:txBody>
-                    <a:bodyPr/>
-                    <a:p>
-                      <a:pPr algn="ctr">
-                        <a:buNone/>
-                      </a:pPr>
-                      <a:r>
-                        <a:rPr lang="zh-CN" altLang="en-US" sz="1100" b="1" dirty="0">
-                          <a:effectLst/>
-                          <a:latin typeface="微软雅黑" panose="020B0503020204020204" pitchFamily="34" charset="-122"/>
-                          <a:ea typeface="微软雅黑" panose="020B0503020204020204" pitchFamily="34" charset="-122"/>
-                        </a:rPr>
-                        <a:t>问题</a:t>
-                      </a:r>
-                      <a:endParaRPr lang="zh-CN" altLang="en-US" sz="1100" b="1" dirty="0">
-                        <a:effectLst/>
-                        <a:latin typeface="微软雅黑" panose="020B0503020204020204" pitchFamily="34" charset="-122"/>
-                        <a:ea typeface="微软雅黑" panose="020B0503020204020204" pitchFamily="34" charset="-122"/>
-                      </a:endParaRPr>
-                    </a:p>
-                  </a:txBody>
-                  <a:tcPr anchor="ctr" anchorCtr="0">
-                    <a:solidFill>
-                      <a:schemeClr val="bg1">
-                        <a:lumMod val="85000"/>
-                      </a:schemeClr>
-                    </a:solidFill>
-                  </a:tcPr>
-                </a:tc>
-                <a:tc>
-                  <a:txBody>
-                    <a:bodyPr/>
-                    <a:p>
-                      <a:pPr algn="ctr">
-                        <a:buNone/>
-                      </a:pPr>
-                      <a:r>
-                        <a:rPr lang="zh-CN" altLang="en-US" sz="1100" b="1" dirty="0">
-                          <a:effectLst/>
-                          <a:latin typeface="微软雅黑" panose="020B0503020204020204" pitchFamily="34" charset="-122"/>
-                          <a:ea typeface="微软雅黑" panose="020B0503020204020204" pitchFamily="34" charset="-122"/>
-                        </a:rPr>
-                        <a:t>原因</a:t>
-                      </a:r>
-                      <a:endParaRPr lang="zh-CN" altLang="en-US" sz="1100" b="1" dirty="0">
-                        <a:effectLst/>
-                        <a:latin typeface="微软雅黑" panose="020B0503020204020204" pitchFamily="34" charset="-122"/>
-                        <a:ea typeface="微软雅黑" panose="020B0503020204020204" pitchFamily="34" charset="-122"/>
-                      </a:endParaRPr>
-                    </a:p>
-                  </a:txBody>
-                  <a:tcPr anchor="ctr" anchorCtr="0">
-                    <a:solidFill>
-                      <a:schemeClr val="bg1">
-                        <a:lumMod val="85000"/>
-                      </a:schemeClr>
-                    </a:solidFill>
-                  </a:tcPr>
-                </a:tc>
-              </a:tr>
-              <a:tr h="396000">
-                <a:tc>
-                  <a:txBody>
-                    <a:bodyPr/>
-                    <a:p>
-                      <a:pPr algn="ctr">
-                        <a:buNone/>
-                      </a:pPr>
-                      <a:r>
-                        <a:rPr lang="en-US" altLang="zh-CN" sz="1000">
-                          <a:latin typeface="微软雅黑" panose="020B0503020204020204" pitchFamily="34" charset="-122"/>
-                          <a:ea typeface="微软雅黑" panose="020B0503020204020204" pitchFamily="34" charset="-122"/>
-                        </a:rPr>
-                        <a:t>Why1</a:t>
-                      </a:r>
-                      <a:endParaRPr lang="en-US" altLang="zh-CN" sz="1000">
-                        <a:latin typeface="微软雅黑" panose="020B0503020204020204" pitchFamily="34" charset="-122"/>
-                        <a:ea typeface="微软雅黑" panose="020B0503020204020204" pitchFamily="34" charset="-122"/>
-                      </a:endParaRPr>
-                    </a:p>
-                  </a:txBody>
-                  <a:tcPr anchor="ctr" anchorCtr="0"/>
-                </a:tc>
-                <a:tc>
-                  <a:txBody>
-                    <a:bodyPr/>
-                    <a:p>
-                      <a:pPr algn="ctr">
-                        <a:buNone/>
-                      </a:pPr>
-                      <a:endParaRPr lang="zh-CN" altLang="en-US" sz="1000">
-                        <a:latin typeface="微软雅黑" panose="020B0503020204020204" pitchFamily="34" charset="-122"/>
-                        <a:ea typeface="微软雅黑" panose="020B0503020204020204" pitchFamily="34" charset="-122"/>
-                      </a:endParaRPr>
-                    </a:p>
-                  </a:txBody>
-                  <a:tcPr anchor="ctr" anchorCtr="0"/>
-                </a:tc>
-                <a:tc>
-                  <a:txBody>
-                    <a:bodyPr/>
-                    <a:p>
-                      <a:pPr algn="ctr">
-                        <a:buNone/>
-                      </a:pPr>
-                      <a:endParaRPr lang="zh-CN" altLang="en-US" sz="1000">
-                        <a:latin typeface="微软雅黑" panose="020B0503020204020204" pitchFamily="34" charset="-122"/>
-                        <a:ea typeface="微软雅黑" panose="020B0503020204020204" pitchFamily="34" charset="-122"/>
-                      </a:endParaRPr>
-                    </a:p>
-                  </a:txBody>
-                  <a:tcPr anchor="ctr" anchorCtr="0"/>
-                </a:tc>
-              </a:tr>
-              <a:tr h="396000">
-                <a:tc>
-                  <a:txBody>
-                    <a:bodyPr/>
-                    <a:p>
-                      <a:pPr algn="ctr">
-                        <a:buNone/>
-                      </a:pPr>
-                      <a:r>
-                        <a:rPr lang="en-US" altLang="zh-CN" sz="1000">
-                          <a:latin typeface="微软雅黑" panose="020B0503020204020204" pitchFamily="34" charset="-122"/>
-                          <a:ea typeface="微软雅黑" panose="020B0503020204020204" pitchFamily="34" charset="-122"/>
-                          <a:sym typeface="+mn-ea"/>
-                        </a:rPr>
-                        <a:t>Why2</a:t>
-                      </a:r>
-                      <a:endParaRPr lang="zh-CN" altLang="en-US" sz="1000">
-                        <a:latin typeface="微软雅黑" panose="020B0503020204020204" pitchFamily="34" charset="-122"/>
-                        <a:ea typeface="微软雅黑" panose="020B0503020204020204" pitchFamily="34" charset="-122"/>
-                      </a:endParaRPr>
-                    </a:p>
-                  </a:txBody>
-                  <a:tcPr anchor="ctr" anchorCtr="0"/>
-                </a:tc>
-                <a:tc>
-                  <a:txBody>
-                    <a:bodyPr/>
-                    <a:p>
-                      <a:pPr algn="ctr">
-                        <a:buNone/>
-                      </a:pPr>
-                      <a:endParaRPr lang="zh-CN" altLang="en-US" sz="1000">
-                        <a:latin typeface="微软雅黑" panose="020B0503020204020204" pitchFamily="34" charset="-122"/>
-                        <a:ea typeface="微软雅黑" panose="020B0503020204020204" pitchFamily="34" charset="-122"/>
-                      </a:endParaRPr>
-                    </a:p>
-                  </a:txBody>
-                  <a:tcPr anchor="ctr" anchorCtr="0"/>
-                </a:tc>
-                <a:tc>
-                  <a:txBody>
-                    <a:bodyPr/>
-                    <a:p>
-                      <a:pPr algn="ctr">
-                        <a:buNone/>
-                      </a:pPr>
-                      <a:endParaRPr lang="zh-CN" altLang="en-US" sz="1000">
-                        <a:latin typeface="微软雅黑" panose="020B0503020204020204" pitchFamily="34" charset="-122"/>
-                        <a:ea typeface="微软雅黑" panose="020B0503020204020204" pitchFamily="34" charset="-122"/>
-                      </a:endParaRPr>
-                    </a:p>
-                  </a:txBody>
-                  <a:tcPr anchor="ctr" anchorCtr="0"/>
-                </a:tc>
-              </a:tr>
-              <a:tr h="396000">
-                <a:tc>
-                  <a:txBody>
-                    <a:bodyPr/>
-                    <a:p>
-                      <a:pPr algn="ctr">
-                        <a:buNone/>
-                      </a:pPr>
-                      <a:r>
-                        <a:rPr lang="en-US" altLang="zh-CN" sz="1000">
-                          <a:latin typeface="微软雅黑" panose="020B0503020204020204" pitchFamily="34" charset="-122"/>
-                          <a:ea typeface="微软雅黑" panose="020B0503020204020204" pitchFamily="34" charset="-122"/>
-                          <a:sym typeface="+mn-ea"/>
-                        </a:rPr>
-                        <a:t>Why3</a:t>
-                      </a:r>
-                      <a:endParaRPr lang="zh-CN" altLang="en-US" sz="1000">
-                        <a:latin typeface="微软雅黑" panose="020B0503020204020204" pitchFamily="34" charset="-122"/>
-                        <a:ea typeface="微软雅黑" panose="020B0503020204020204" pitchFamily="34" charset="-122"/>
-                      </a:endParaRPr>
-                    </a:p>
-                  </a:txBody>
-                  <a:tcPr anchor="ctr" anchorCtr="0"/>
-                </a:tc>
-                <a:tc>
-                  <a:txBody>
-                    <a:bodyPr/>
-                    <a:p>
-                      <a:pPr algn="ctr">
-                        <a:buNone/>
-                      </a:pPr>
-                      <a:endParaRPr lang="zh-CN" altLang="en-US" sz="1000">
-                        <a:latin typeface="微软雅黑" panose="020B0503020204020204" pitchFamily="34" charset="-122"/>
-                        <a:ea typeface="微软雅黑" panose="020B0503020204020204" pitchFamily="34" charset="-122"/>
-                      </a:endParaRPr>
-                    </a:p>
-                  </a:txBody>
-                  <a:tcPr anchor="ctr" anchorCtr="0"/>
-                </a:tc>
-                <a:tc>
-                  <a:txBody>
-                    <a:bodyPr/>
-                    <a:p>
-                      <a:pPr algn="ctr">
-                        <a:buNone/>
-                      </a:pPr>
-                      <a:endParaRPr lang="zh-CN" altLang="en-US" sz="1000">
-                        <a:latin typeface="微软雅黑" panose="020B0503020204020204" pitchFamily="34" charset="-122"/>
-                        <a:ea typeface="微软雅黑" panose="020B0503020204020204" pitchFamily="34" charset="-122"/>
-                      </a:endParaRPr>
-                    </a:p>
-                  </a:txBody>
-                  <a:tcPr anchor="ctr" anchorCtr="0"/>
-                </a:tc>
-              </a:tr>
-            </a:tbl>
-          </a:graphicData>
-        </a:graphic>
-      </p:graphicFrame>
-      <p:sp>
-        <p:nvSpPr>
-          <p:cNvPr id="18433" name="灯片编号占位符 1"/>
-          <p:cNvSpPr>
-            <a:spLocks noGrp="1"/>
-          </p:cNvSpPr>
-          <p:nvPr>
-            <p:ph type="sldNum" sz="quarter" idx="10"/>
-          </p:nvPr>
-        </p:nvSpPr>
-        <p:spPr>
-          <a:xfrm>
-            <a:off x="8388350" y="4691063"/>
-            <a:ext cx="360363" cy="112712"/>
-          </a:xfrm>
-          <a:noFill/>
-          <a:ln>
-            <a:noFill/>
-          </a:ln>
-        </p:spPr>
-        <p:txBody>
-          <a:bodyPr wrap="none" lIns="0" tIns="0" rIns="0" bIns="0" anchor="t"/>
-          <a:lstStyle>
-            <a:lvl1pPr marL="0" lvl="0" indent="0" algn="l" defTabSz="914400" rtl="0" eaLnBrk="1" fontAlgn="base" latinLnBrk="0" hangingPunct="1">
-              <a:lnSpc>
-                <a:spcPct val="100000"/>
-              </a:lnSpc>
-              <a:spcBef>
-                <a:spcPct val="0"/>
-              </a:spcBef>
-              <a:spcAft>
-                <a:spcPct val="0"/>
-              </a:spcAft>
-              <a:buNone/>
-              <a:defRPr sz="1800" kern="1200">
-                <a:solidFill>
-                  <a:schemeClr val="tx1"/>
-                </a:solidFill>
-                <a:latin typeface="Calibri" panose="020F0502020204030204" pitchFamily="34" charset="0"/>
-                <a:ea typeface="宋体" panose="02010600030101010101" pitchFamily="2" charset="-122"/>
-              </a:defRPr>
-            </a:lvl1pPr>
-            <a:lvl2pPr marL="457200" lvl="1" indent="0" algn="l" defTabSz="914400" rtl="0" eaLnBrk="1" fontAlgn="base" latinLnBrk="0" hangingPunct="1">
-              <a:lnSpc>
-                <a:spcPct val="100000"/>
-              </a:lnSpc>
-              <a:spcBef>
-                <a:spcPct val="0"/>
-              </a:spcBef>
-              <a:spcAft>
-                <a:spcPct val="0"/>
-              </a:spcAft>
-              <a:buFont typeface="Arial" panose="020B0604020202020204" pitchFamily="34" charset="0"/>
-              <a:buNone/>
-              <a:defRPr kern="1200">
-                <a:solidFill>
-                  <a:schemeClr val="tx1"/>
-                </a:solidFill>
-                <a:latin typeface="Calibri" panose="020F0502020204030204" pitchFamily="34" charset="0"/>
-                <a:ea typeface="宋体" panose="02010600030101010101" pitchFamily="2" charset="-122"/>
-                <a:cs typeface="+mn-cs"/>
-              </a:defRPr>
-            </a:lvl2pPr>
-            <a:lvl3pPr marL="914400" lvl="2" indent="0" algn="l" defTabSz="914400" rtl="0" eaLnBrk="1" fontAlgn="base" latinLnBrk="0" hangingPunct="1">
-              <a:lnSpc>
-                <a:spcPct val="100000"/>
-              </a:lnSpc>
-              <a:spcBef>
-                <a:spcPct val="0"/>
-              </a:spcBef>
-              <a:spcAft>
-                <a:spcPct val="0"/>
-              </a:spcAft>
-              <a:buFontTx/>
-              <a:buNone/>
-              <a:defRPr kern="1200">
-                <a:solidFill>
-                  <a:schemeClr val="tx1"/>
-                </a:solidFill>
-                <a:latin typeface="Calibri" panose="020F0502020204030204" pitchFamily="34" charset="0"/>
-                <a:ea typeface="宋体" panose="02010600030101010101" pitchFamily="2" charset="-122"/>
-                <a:cs typeface="+mn-cs"/>
-              </a:defRPr>
-            </a:lvl3pPr>
-            <a:lvl4pPr marL="1371600" lvl="3" indent="0" algn="l" defTabSz="914400" rtl="0" eaLnBrk="1" fontAlgn="base" latinLnBrk="0" hangingPunct="1">
-              <a:lnSpc>
-                <a:spcPct val="100000"/>
-              </a:lnSpc>
-              <a:spcBef>
-                <a:spcPct val="0"/>
-              </a:spcBef>
-              <a:spcAft>
-                <a:spcPct val="0"/>
-              </a:spcAft>
-              <a:buFont typeface="Arial" panose="020B0604020202020204" pitchFamily="34" charset="0"/>
-              <a:buNone/>
-              <a:defRPr kern="1200">
-                <a:solidFill>
-                  <a:schemeClr val="tx1"/>
-                </a:solidFill>
-                <a:latin typeface="Calibri" panose="020F0502020204030204" pitchFamily="34" charset="0"/>
-                <a:ea typeface="宋体" panose="02010600030101010101" pitchFamily="2" charset="-122"/>
-                <a:cs typeface="+mn-cs"/>
-              </a:defRPr>
-            </a:lvl4pPr>
-            <a:lvl5pPr marL="1828800" lvl="4" indent="0" algn="l" defTabSz="914400" rtl="0" eaLnBrk="1" fontAlgn="base" latinLnBrk="0" hangingPunct="1">
-              <a:lnSpc>
-                <a:spcPct val="100000"/>
-              </a:lnSpc>
-              <a:spcBef>
-                <a:spcPct val="0"/>
-              </a:spcBef>
-              <a:spcAft>
-                <a:spcPct val="0"/>
-              </a:spcAft>
-              <a:buFontTx/>
-              <a:buNone/>
-              <a:defRPr kern="1200">
-                <a:solidFill>
-                  <a:schemeClr val="tx1"/>
-                </a:solidFill>
-                <a:latin typeface="Calibri" panose="020F0502020204030204" pitchFamily="34" charset="0"/>
-                <a:ea typeface="宋体" panose="02010600030101010101" pitchFamily="2" charset="-122"/>
-                <a:cs typeface="+mn-cs"/>
-              </a:defRPr>
-            </a:lvl5pPr>
-          </a:lstStyle>
-          <a:p>
-            <a:pPr lvl="0" algn="r"/>
-            <a:fld id="{9A0DB2DC-4C9A-4742-B13C-FB6460FD3503}" type="slidenum">
-              <a:rPr lang="en-US" altLang="zh-CN" sz="1000" b="1">
-                <a:solidFill>
-                  <a:schemeClr val="bg1"/>
-                </a:solidFill>
-                <a:latin typeface="Arial" panose="020B0604020202020204" pitchFamily="34" charset="0"/>
-              </a:rPr>
-            </a:fld>
-            <a:endParaRPr lang="en-US" altLang="zh-CN" sz="1000" b="1">
-              <a:solidFill>
-                <a:schemeClr val="bg1"/>
-              </a:solidFill>
-              <a:latin typeface="Arial" panose="020B0604020202020204" pitchFamily="34" charset="0"/>
-            </a:endParaRPr>
-          </a:p>
-        </p:txBody>
-      </p:sp>
-      <p:grpSp>
-        <p:nvGrpSpPr>
-          <p:cNvPr id="3" name="组合 2"/>
-          <p:cNvGrpSpPr/>
-          <p:nvPr/>
-        </p:nvGrpSpPr>
-        <p:grpSpPr>
-          <a:xfrm>
-            <a:off x="467360" y="808990"/>
-            <a:ext cx="2835910" cy="245110"/>
-            <a:chOff x="736" y="1274"/>
-            <a:chExt cx="4466" cy="386"/>
-          </a:xfrm>
-        </p:grpSpPr>
-        <p:sp>
-          <p:nvSpPr>
-            <p:cNvPr id="4" name="TextBox 2"/>
-            <p:cNvSpPr/>
-            <p:nvPr/>
-          </p:nvSpPr>
-          <p:spPr>
-            <a:xfrm>
-              <a:off x="963" y="1274"/>
-              <a:ext cx="4239" cy="386"/>
-            </a:xfrm>
-            <a:prstGeom prst="rect">
-              <a:avLst/>
-            </a:prstGeom>
-            <a:noFill/>
-            <a:ln w="9525">
-              <a:noFill/>
-            </a:ln>
-          </p:spPr>
-          <p:txBody>
-            <a:bodyPr wrap="square" anchor="t">
-              <a:spAutoFit/>
-            </a:bodyPr>
-            <a:p>
-              <a:pPr>
-                <a:lnSpc>
-                  <a:spcPts val="1200"/>
-                </a:lnSpc>
-                <a:spcBef>
-                  <a:spcPts val="600"/>
-                </a:spcBef>
-              </a:pPr>
-              <a:r>
-                <a:rPr lang="en-US" altLang="zh-CN" sz="1400" b="1" dirty="0" smtClean="0">
-                  <a:solidFill>
-                    <a:srgbClr val="000000"/>
-                  </a:solidFill>
-                  <a:latin typeface="微软雅黑" panose="020B0503020204020204" pitchFamily="34" charset="-122"/>
-                  <a:ea typeface="微软雅黑" panose="020B0503020204020204" pitchFamily="34" charset="-122"/>
-                  <a:sym typeface="微软雅黑" panose="020B0503020204020204" pitchFamily="34" charset="-122"/>
-                </a:rPr>
-                <a:t>D4  </a:t>
-              </a:r>
-              <a:r>
-                <a:rPr lang="zh-CN" altLang="en-US" sz="1400" b="1" dirty="0" smtClean="0">
-                  <a:solidFill>
-                    <a:srgbClr val="000000"/>
-                  </a:solidFill>
-                  <a:latin typeface="微软雅黑" panose="020B0503020204020204" pitchFamily="34" charset="-122"/>
-                  <a:ea typeface="微软雅黑" panose="020B0503020204020204" pitchFamily="34" charset="-122"/>
-                  <a:sym typeface="微软雅黑" panose="020B0503020204020204" pitchFamily="34" charset="-122"/>
-                </a:rPr>
-                <a:t>原因</a:t>
-              </a:r>
-              <a:r>
-                <a:rPr lang="zh-CN" altLang="en-US" sz="1400" b="1" dirty="0">
-                  <a:solidFill>
-                    <a:srgbClr val="000000"/>
-                  </a:solidFill>
-                  <a:latin typeface="微软雅黑" panose="020B0503020204020204" pitchFamily="34" charset="-122"/>
-                  <a:ea typeface="微软雅黑" panose="020B0503020204020204" pitchFamily="34" charset="-122"/>
-                  <a:sym typeface="微软雅黑" panose="020B0503020204020204" pitchFamily="34" charset="-122"/>
-                </a:rPr>
-                <a:t>分析</a:t>
-              </a:r>
-              <a:endParaRPr lang="zh-CN" altLang="en-US" sz="1400" b="1">
-                <a:solidFill>
-                  <a:srgbClr val="000000"/>
-                </a:solidFill>
-                <a:latin typeface="微软雅黑" panose="020B0503020204020204" pitchFamily="34" charset="-122"/>
-                <a:ea typeface="微软雅黑" panose="020B0503020204020204" pitchFamily="34" charset="-122"/>
-                <a:sym typeface="微软雅黑" panose="020B0503020204020204" pitchFamily="34" charset="-122"/>
-              </a:endParaRPr>
-            </a:p>
-          </p:txBody>
-        </p:sp>
-        <p:sp>
-          <p:nvSpPr>
-            <p:cNvPr id="5" name="矩形 4"/>
-            <p:cNvSpPr/>
-            <p:nvPr/>
-          </p:nvSpPr>
-          <p:spPr>
-            <a:xfrm>
-              <a:off x="736" y="1313"/>
-              <a:ext cx="227" cy="229"/>
-            </a:xfrm>
-            <a:prstGeom prst="rect">
-              <a:avLst/>
-            </a:prstGeom>
-            <a:solidFill>
-              <a:srgbClr val="E62135"/>
-            </a:solidFill>
-            <a:ln w="9525">
-              <a:noFill/>
-            </a:ln>
-          </p:spPr>
-          <p:style>
-            <a:lnRef idx="1">
-              <a:schemeClr val="accent1"/>
-            </a:lnRef>
-            <a:fillRef idx="0">
-              <a:schemeClr val="accent1"/>
-            </a:fillRef>
-            <a:effectRef idx="0">
-              <a:schemeClr val="accent1"/>
-            </a:effectRef>
-            <a:fontRef idx="minor">
-              <a:schemeClr val="tx1"/>
-            </a:fontRef>
-          </p:style>
-          <p:txBody>
-            <a:bodyPr anchor="ctr"/>
-            <a:p>
-              <a:pPr algn="ctr" fontAlgn="auto">
-                <a:defRPr/>
-              </a:pPr>
-              <a:endParaRPr lang="zh-CN" altLang="en-US" sz="1600" noProof="1">
-                <a:solidFill>
-                  <a:srgbClr val="EBEBEB">
-                    <a:lumMod val="10000"/>
-                  </a:srgbClr>
-                </a:solidFill>
-              </a:endParaRPr>
-            </a:p>
-          </p:txBody>
-        </p:sp>
-      </p:grpSp>
-      <p:sp>
-        <p:nvSpPr>
-          <p:cNvPr id="7" name="文本框 6"/>
-          <p:cNvSpPr txBox="1"/>
-          <p:nvPr/>
-        </p:nvSpPr>
-        <p:spPr>
-          <a:xfrm>
-            <a:off x="611505" y="1059815"/>
-            <a:ext cx="3048000" cy="245110"/>
-          </a:xfrm>
-          <a:prstGeom prst="rect">
-            <a:avLst/>
-          </a:prstGeom>
-          <a:noFill/>
-        </p:spPr>
-        <p:txBody>
-          <a:bodyPr wrap="square" rtlCol="0">
-            <a:spAutoFit/>
-          </a:bodyPr>
-          <a:p>
-            <a:r>
-              <a:rPr lang="en-US" altLang="zh-CN" sz="1000">
-                <a:latin typeface="微软雅黑" panose="020B0503020204020204" pitchFamily="34" charset="-122"/>
-                <a:ea typeface="微软雅黑" panose="020B0503020204020204" pitchFamily="34" charset="-122"/>
-                <a:cs typeface="微软雅黑" panose="020B0503020204020204" pitchFamily="34" charset="-122"/>
-              </a:rPr>
-              <a:t>5WHY</a:t>
-            </a:r>
-            <a:r>
-              <a:rPr lang="zh-CN" altLang="en-US" sz="1000">
-                <a:latin typeface="微软雅黑" panose="020B0503020204020204" pitchFamily="34" charset="-122"/>
-                <a:ea typeface="微软雅黑" panose="020B0503020204020204" pitchFamily="34" charset="-122"/>
-                <a:cs typeface="微软雅黑" panose="020B0503020204020204" pitchFamily="34" charset="-122"/>
-              </a:rPr>
-              <a:t>流出</a:t>
-            </a:r>
-            <a:r>
-              <a:rPr lang="zh-CN" altLang="en-US" sz="1000">
-                <a:latin typeface="微软雅黑" panose="020B0503020204020204" pitchFamily="34" charset="-122"/>
-                <a:ea typeface="微软雅黑" panose="020B0503020204020204" pitchFamily="34" charset="-122"/>
-                <a:cs typeface="微软雅黑" panose="020B0503020204020204" pitchFamily="34" charset="-122"/>
-              </a:rPr>
-              <a:t>原因分析：</a:t>
-            </a:r>
-            <a:endParaRPr lang="zh-CN" altLang="en-US" sz="1000">
-              <a:latin typeface="微软雅黑" panose="020B0503020204020204" pitchFamily="34" charset="-122"/>
-              <a:ea typeface="微软雅黑" panose="020B0503020204020204" pitchFamily="34" charset="-122"/>
-              <a:cs typeface="微软雅黑" panose="020B0503020204020204" pitchFamily="34" charset="-122"/>
-            </a:endParaRPr>
-          </a:p>
-        </p:txBody>
-      </p:sp>
-    </p:spTree>
-  </p:cSld>
-  <p:clrMapOvr>
-    <a:masterClrMapping/>
-  </p:clrMapOvr>
-  <p:transition/>
-  <p:timing>
-    <p:tnLst>
-      <p:par>
-        <p:cTn id="1" dur="indefinite" restart="never" nodeType="tmRoot"/>
-      </p:par>
-    </p:tnLst>
-  </p:timing>
-</p:sld>
-</file>
-
-<file path=ppt/slides/slide11.xml><?xml version="1.0" encoding="utf-8"?>
 <p:sld xmlns:a="http://schemas.openxmlformats.org/drawingml/2006/main" xmlns:r="http://schemas.openxmlformats.org/officeDocument/2006/relationships" xmlns:p="http://schemas.openxmlformats.org/presentationml/2006/main">
   <p:cSld>
     <p:spTree>
@@ -6121,50 +5352,6 @@
           </p:txBody>
         </p:sp>
       </p:grpSp>
-      <p:pic>
-        <p:nvPicPr>
-          <p:cNvPr id="6" name="图片 5"/>
-          <p:cNvPicPr/>
-          <p:nvPr/>
-        </p:nvPicPr>
-        <p:blipFill>
-          <a:blip r:embed="rId1"/>
-          <a:stretch>
-            <a:fillRect/>
-          </a:stretch>
-        </p:blipFill>
-        <p:spPr>
-          <a:xfrm>
-            <a:off x="971550" y="2284095"/>
-            <a:ext cx="2692400" cy="1887220"/>
-          </a:xfrm>
-          <a:prstGeom prst="rect">
-            <a:avLst/>
-          </a:prstGeom>
-        </p:spPr>
-      </p:pic>
-      <p:pic>
-        <p:nvPicPr>
-          <p:cNvPr id="8" name="图片 7"/>
-          <p:cNvPicPr/>
-          <p:nvPr/>
-        </p:nvPicPr>
-        <p:blipFill>
-          <a:blip r:embed="rId1"/>
-          <a:stretch>
-            <a:fillRect/>
-          </a:stretch>
-        </p:blipFill>
-        <p:spPr>
-          <a:xfrm>
-            <a:off x="4716145" y="2284095"/>
-            <a:ext cx="2692400" cy="1887220"/>
-          </a:xfrm>
-          <a:prstGeom prst="rect">
-            <a:avLst/>
-          </a:prstGeom>
-        </p:spPr>
-      </p:pic>
     </p:spTree>
   </p:cSld>
   <p:clrMapOvr>
@@ -6181,7 +5368,7 @@
 </p:sld>
 </file>
 
-<file path=ppt/slides/slide12.xml><?xml version="1.0" encoding="utf-8"?>
+<file path=ppt/slides/slide11.xml><?xml version="1.0" encoding="utf-8"?>
 <p:sld xmlns:a="http://schemas.openxmlformats.org/drawingml/2006/main" xmlns:r="http://schemas.openxmlformats.org/officeDocument/2006/relationships" xmlns:p="http://schemas.openxmlformats.org/presentationml/2006/main">
   <p:cSld>
     <p:spTree>
@@ -7207,7 +6394,7 @@
 </p:sld>
 </file>
 
-<file path=ppt/slides/slide13.xml><?xml version="1.0" encoding="utf-8"?>
+<file path=ppt/slides/slide12.xml><?xml version="1.0" encoding="utf-8"?>
 <p:sld xmlns:a="http://schemas.openxmlformats.org/drawingml/2006/main" xmlns:r="http://schemas.openxmlformats.org/officeDocument/2006/relationships" xmlns:p="http://schemas.openxmlformats.org/presentationml/2006/main">
   <p:cSld>
     <p:spTree>
@@ -11708,7 +10895,7 @@
 </p:sld>
 </file>
 
-<file path=ppt/slides/slide14.xml><?xml version="1.0" encoding="utf-8"?>
+<file path=ppt/slides/slide13.xml><?xml version="1.0" encoding="utf-8"?>
 <p:sld xmlns:a="http://schemas.openxmlformats.org/drawingml/2006/main" xmlns:r="http://schemas.openxmlformats.org/officeDocument/2006/relationships" xmlns:p="http://schemas.openxmlformats.org/presentationml/2006/main">
   <p:cSld>
     <p:spTree>
@@ -11941,6 +11128,17 @@
                 <a:ea typeface="微软雅黑" panose="020B0503020204020204" pitchFamily="34" charset="-122"/>
                 <a:sym typeface="+mn-ea"/>
               </a:rPr>
+              <a:t>{{content}}</a:t>
+            </a:r>
+            <a:r>
+              <a:rPr lang="en-US" sz="1200" dirty="0">
+                <a:solidFill>
+                  <a:srgbClr val="000000"/>
+                </a:solidFill>
+                <a:latin typeface="微软雅黑" panose="020B0503020204020204" pitchFamily="34" charset="-122"/>
+                <a:ea typeface="微软雅黑" panose="020B0503020204020204" pitchFamily="34" charset="-122"/>
+                <a:sym typeface="+mn-ea"/>
+              </a:rPr>
               <a:t>  </a:t>
             </a:r>
             <a:endParaRPr sz="1200" dirty="0" smtClean="0">
@@ -11984,6 +11182,17 @@
                 <a:sym typeface="+mn-ea"/>
               </a:rPr>
               <a:t>：</a:t>
+            </a:r>
+            <a:r>
+              <a:rPr lang="en-US" sz="1200" dirty="0">
+                <a:solidFill>
+                  <a:srgbClr val="000000"/>
+                </a:solidFill>
+                <a:latin typeface="微软雅黑" panose="020B0503020204020204" pitchFamily="34" charset="-122"/>
+                <a:ea typeface="微软雅黑" panose="020B0503020204020204" pitchFamily="34" charset="-122"/>
+                <a:sym typeface="+mn-ea"/>
+              </a:rPr>
+              <a:t>{{content}}</a:t>
             </a:r>
             <a:r>
               <a:rPr lang="en-US" altLang="zh-CN" sz="1200" dirty="0">
@@ -12038,6 +11247,17 @@
               </a:rPr>
               <a:t>：</a:t>
             </a:r>
+            <a:r>
+              <a:rPr lang="en-US" sz="1200" dirty="0">
+                <a:solidFill>
+                  <a:srgbClr val="000000"/>
+                </a:solidFill>
+                <a:latin typeface="微软雅黑" panose="020B0503020204020204" pitchFamily="34" charset="-122"/>
+                <a:ea typeface="微软雅黑" panose="020B0503020204020204" pitchFamily="34" charset="-122"/>
+                <a:sym typeface="+mn-ea"/>
+              </a:rPr>
+              <a:t>{{content}}</a:t>
+            </a:r>
             <a:endParaRPr lang="en-US" altLang="zh-CN" sz="1200" dirty="0" smtClean="0">
               <a:latin typeface="微软雅黑" panose="020B0503020204020204" pitchFamily="34" charset="-122"/>
               <a:ea typeface="微软雅黑" panose="020B0503020204020204" pitchFamily="34" charset="-122"/>
@@ -12079,6 +11299,17 @@
                 <a:sym typeface="+mn-ea"/>
               </a:rPr>
               <a:t>：</a:t>
+            </a:r>
+            <a:r>
+              <a:rPr lang="en-US" sz="1200" dirty="0">
+                <a:solidFill>
+                  <a:srgbClr val="000000"/>
+                </a:solidFill>
+                <a:latin typeface="微软雅黑" panose="020B0503020204020204" pitchFamily="34" charset="-122"/>
+                <a:ea typeface="微软雅黑" panose="020B0503020204020204" pitchFamily="34" charset="-122"/>
+                <a:sym typeface="+mn-ea"/>
+              </a:rPr>
+              <a:t>{{content}}</a:t>
             </a:r>
             <a:endParaRPr lang="zh-CN" altLang="en-US" sz="1200" dirty="0">
               <a:latin typeface="微软雅黑" panose="020B0503020204020204" pitchFamily="34" charset="-122"/>
@@ -12234,7 +11465,7 @@
 </p:sld>
 </file>
 
-<file path=ppt/slides/slide15.xml><?xml version="1.0" encoding="utf-8"?>
+<file path=ppt/slides/slide14.xml><?xml version="1.0" encoding="utf-8"?>
 <p:sld xmlns:a="http://schemas.openxmlformats.org/drawingml/2006/main" xmlns:r="http://schemas.openxmlformats.org/officeDocument/2006/relationships" xmlns:p="http://schemas.openxmlformats.org/presentationml/2006/main">
   <p:cSld>
     <p:spTree>
@@ -14579,6 +13810,17 @@
                 </a:solidFill>
                 <a:latin typeface="微软雅黑" panose="020B0503020204020204" pitchFamily="34" charset="-122"/>
                 <a:ea typeface="微软雅黑" panose="020B0503020204020204" pitchFamily="34" charset="-122"/>
+                <a:sym typeface="+mn-ea"/>
+              </a:rPr>
+              <a:t>{{content}}</a:t>
+            </a:r>
+            <a:r>
+              <a:rPr lang="en-US" sz="1200" dirty="0">
+                <a:solidFill>
+                  <a:srgbClr val="000000"/>
+                </a:solidFill>
+                <a:latin typeface="微软雅黑" panose="020B0503020204020204" pitchFamily="34" charset="-122"/>
+                <a:ea typeface="微软雅黑" panose="020B0503020204020204" pitchFamily="34" charset="-122"/>
               </a:rPr>
               <a:t>  </a:t>
             </a:r>
@@ -14621,6 +13863,17 @@
                 <a:ea typeface="微软雅黑" panose="020B0503020204020204" pitchFamily="34" charset="-122"/>
               </a:rPr>
               <a:t>：</a:t>
+            </a:r>
+            <a:r>
+              <a:rPr lang="en-US" sz="1200" dirty="0">
+                <a:solidFill>
+                  <a:srgbClr val="000000"/>
+                </a:solidFill>
+                <a:latin typeface="微软雅黑" panose="020B0503020204020204" pitchFamily="34" charset="-122"/>
+                <a:ea typeface="微软雅黑" panose="020B0503020204020204" pitchFamily="34" charset="-122"/>
+                <a:sym typeface="+mn-ea"/>
+              </a:rPr>
+              <a:t>{{content}}</a:t>
             </a:r>
             <a:r>
               <a:rPr lang="en-US" altLang="zh-CN" sz="1200" dirty="0">
@@ -14689,6 +13942,17 @@
               </a:rPr>
               <a:t>：</a:t>
             </a:r>
+            <a:r>
+              <a:rPr lang="en-US" sz="1200" dirty="0">
+                <a:solidFill>
+                  <a:srgbClr val="000000"/>
+                </a:solidFill>
+                <a:latin typeface="微软雅黑" panose="020B0503020204020204" pitchFamily="34" charset="-122"/>
+                <a:ea typeface="微软雅黑" panose="020B0503020204020204" pitchFamily="34" charset="-122"/>
+                <a:sym typeface="+mn-ea"/>
+              </a:rPr>
+              <a:t>{{content}}</a:t>
+            </a:r>
             <a:endParaRPr lang="en-US" altLang="zh-CN" sz="1200" dirty="0" smtClean="0">
               <a:latin typeface="微软雅黑" panose="020B0503020204020204" pitchFamily="34" charset="-122"/>
               <a:ea typeface="微软雅黑" panose="020B0503020204020204" pitchFamily="34" charset="-122"/>
@@ -14728,6 +13992,17 @@
                 <a:ea typeface="微软雅黑" panose="020B0503020204020204" pitchFamily="34" charset="-122"/>
               </a:rPr>
               <a:t>：</a:t>
+            </a:r>
+            <a:r>
+              <a:rPr lang="en-US" sz="1200" dirty="0">
+                <a:solidFill>
+                  <a:srgbClr val="000000"/>
+                </a:solidFill>
+                <a:latin typeface="微软雅黑" panose="020B0503020204020204" pitchFamily="34" charset="-122"/>
+                <a:ea typeface="微软雅黑" panose="020B0503020204020204" pitchFamily="34" charset="-122"/>
+                <a:sym typeface="+mn-ea"/>
+              </a:rPr>
+              <a:t>{{content}}</a:t>
             </a:r>
             <a:endParaRPr lang="zh-CN" altLang="en-US" sz="1200" dirty="0" smtClean="0">
               <a:solidFill>
@@ -14771,6 +14046,17 @@
                 <a:ea typeface="微软雅黑" panose="020B0503020204020204" pitchFamily="34" charset="-122"/>
               </a:rPr>
               <a:t>：</a:t>
+            </a:r>
+            <a:r>
+              <a:rPr lang="en-US" sz="1200" dirty="0">
+                <a:solidFill>
+                  <a:srgbClr val="000000"/>
+                </a:solidFill>
+                <a:latin typeface="微软雅黑" panose="020B0503020204020204" pitchFamily="34" charset="-122"/>
+                <a:ea typeface="微软雅黑" panose="020B0503020204020204" pitchFamily="34" charset="-122"/>
+                <a:sym typeface="+mn-ea"/>
+              </a:rPr>
+              <a:t>{{content}}</a:t>
             </a:r>
             <a:endParaRPr sz="1200" dirty="0">
               <a:solidFill>
@@ -26791,61 +26077,6 @@
           </p:txBody>
         </p:sp>
       </p:grpSp>
-      <p:sp>
-        <p:nvSpPr>
-          <p:cNvPr id="12290" name="AI_DYNAMIC"/>
-          <p:cNvSpPr txBox="1"/>
-          <p:nvPr/>
-        </p:nvSpPr>
-        <p:spPr>
-          <a:xfrm>
-            <a:off x="502920" y="4599432"/>
-            <a:ext cx="8138160" cy="245110"/>
-          </a:xfrm>
-          <a:prstGeom prst="rect">
-            <a:avLst/>
-          </a:prstGeom>
-          <a:noFill/>
-        </p:spPr>
-        <p:txBody>
-          <a:bodyPr wrap="square">
-            <a:spAutoFit/>
-          </a:bodyPr>
-          <a:p>
-            <a:r>
-              <a:rPr lang="zh-CN" sz="1000">
-                <a:latin typeface="微软雅黑" panose="020B0503020204020204" pitchFamily="34" charset="-122"/>
-              </a:rPr>
-              <a:t>小结：此图片为示例图</a:t>
-            </a:r>
-            <a:endParaRPr sz="1000">
-              <a:latin typeface="微软雅黑" panose="020B0503020204020204" pitchFamily="34" charset="-122"/>
-            </a:endParaRPr>
-          </a:p>
-        </p:txBody>
-      </p:sp>
-      <p:pic>
-        <p:nvPicPr>
-          <p:cNvPr id="6" name="图片 5"/>
-          <p:cNvPicPr/>
-          <p:nvPr/>
-        </p:nvPicPr>
-        <p:blipFill>
-          <a:blip r:embed="rId1"/>
-          <a:stretch>
-            <a:fillRect/>
-          </a:stretch>
-        </p:blipFill>
-        <p:spPr>
-          <a:xfrm>
-            <a:off x="2242185" y="1193165"/>
-            <a:ext cx="4659630" cy="3266440"/>
-          </a:xfrm>
-          <a:prstGeom prst="rect">
-            <a:avLst/>
-          </a:prstGeom>
-        </p:spPr>
-      </p:pic>
     </p:spTree>
   </p:cSld>
   <p:clrMapOvr>
@@ -26863,410 +26094,6 @@
 </file>
 
 <file path=ppt/slides/slide8.xml><?xml version="1.0" encoding="utf-8"?>
-<p:sld xmlns:a="http://schemas.openxmlformats.org/drawingml/2006/main" xmlns:r="http://schemas.openxmlformats.org/officeDocument/2006/relationships" xmlns:p="http://schemas.openxmlformats.org/presentationml/2006/main">
-  <p:cSld>
-    <p:spTree>
-      <p:nvGrpSpPr>
-        <p:cNvPr id="1" name=""/>
-        <p:cNvGrpSpPr/>
-        <p:nvPr/>
-      </p:nvGrpSpPr>
-      <p:grpSpPr>
-        <a:xfrm>
-          <a:off x="0" y="0"/>
-          <a:ext cx="0" cy="0"/>
-          <a:chOff x="0" y="0"/>
-          <a:chExt cx="0" cy="0"/>
-        </a:xfrm>
-      </p:grpSpPr>
-      <p:sp>
-        <p:nvSpPr>
-          <p:cNvPr id="18433" name="灯片编号占位符 1"/>
-          <p:cNvSpPr>
-            <a:spLocks noGrp="1"/>
-          </p:cNvSpPr>
-          <p:nvPr>
-            <p:ph type="sldNum" sz="quarter" idx="10"/>
-          </p:nvPr>
-        </p:nvSpPr>
-        <p:spPr>
-          <a:xfrm>
-            <a:off x="8388350" y="4691063"/>
-            <a:ext cx="360363" cy="112712"/>
-          </a:xfrm>
-          <a:noFill/>
-          <a:ln>
-            <a:noFill/>
-          </a:ln>
-        </p:spPr>
-        <p:txBody>
-          <a:bodyPr wrap="none" lIns="0" tIns="0" rIns="0" bIns="0" anchor="t"/>
-          <a:lstStyle>
-            <a:lvl1pPr marL="0" lvl="0" indent="0" algn="l" defTabSz="914400" rtl="0" eaLnBrk="1" fontAlgn="base" latinLnBrk="0" hangingPunct="1">
-              <a:lnSpc>
-                <a:spcPct val="100000"/>
-              </a:lnSpc>
-              <a:spcBef>
-                <a:spcPct val="0"/>
-              </a:spcBef>
-              <a:spcAft>
-                <a:spcPct val="0"/>
-              </a:spcAft>
-              <a:buNone/>
-              <a:defRPr sz="1800" kern="1200">
-                <a:solidFill>
-                  <a:schemeClr val="tx1"/>
-                </a:solidFill>
-                <a:latin typeface="Calibri" panose="020F0502020204030204" pitchFamily="34" charset="0"/>
-                <a:ea typeface="宋体" panose="02010600030101010101" pitchFamily="2" charset="-122"/>
-              </a:defRPr>
-            </a:lvl1pPr>
-            <a:lvl2pPr marL="457200" lvl="1" indent="0" algn="l" defTabSz="914400" rtl="0" eaLnBrk="1" fontAlgn="base" latinLnBrk="0" hangingPunct="1">
-              <a:lnSpc>
-                <a:spcPct val="100000"/>
-              </a:lnSpc>
-              <a:spcBef>
-                <a:spcPct val="0"/>
-              </a:spcBef>
-              <a:spcAft>
-                <a:spcPct val="0"/>
-              </a:spcAft>
-              <a:buFont typeface="Arial" panose="020B0604020202020204" pitchFamily="34" charset="0"/>
-              <a:buNone/>
-              <a:defRPr kern="1200">
-                <a:solidFill>
-                  <a:schemeClr val="tx1"/>
-                </a:solidFill>
-                <a:latin typeface="Calibri" panose="020F0502020204030204" pitchFamily="34" charset="0"/>
-                <a:ea typeface="宋体" panose="02010600030101010101" pitchFamily="2" charset="-122"/>
-                <a:cs typeface="+mn-cs"/>
-              </a:defRPr>
-            </a:lvl2pPr>
-            <a:lvl3pPr marL="914400" lvl="2" indent="0" algn="l" defTabSz="914400" rtl="0" eaLnBrk="1" fontAlgn="base" latinLnBrk="0" hangingPunct="1">
-              <a:lnSpc>
-                <a:spcPct val="100000"/>
-              </a:lnSpc>
-              <a:spcBef>
-                <a:spcPct val="0"/>
-              </a:spcBef>
-              <a:spcAft>
-                <a:spcPct val="0"/>
-              </a:spcAft>
-              <a:buFontTx/>
-              <a:buNone/>
-              <a:defRPr kern="1200">
-                <a:solidFill>
-                  <a:schemeClr val="tx1"/>
-                </a:solidFill>
-                <a:latin typeface="Calibri" panose="020F0502020204030204" pitchFamily="34" charset="0"/>
-                <a:ea typeface="宋体" panose="02010600030101010101" pitchFamily="2" charset="-122"/>
-                <a:cs typeface="+mn-cs"/>
-              </a:defRPr>
-            </a:lvl3pPr>
-            <a:lvl4pPr marL="1371600" lvl="3" indent="0" algn="l" defTabSz="914400" rtl="0" eaLnBrk="1" fontAlgn="base" latinLnBrk="0" hangingPunct="1">
-              <a:lnSpc>
-                <a:spcPct val="100000"/>
-              </a:lnSpc>
-              <a:spcBef>
-                <a:spcPct val="0"/>
-              </a:spcBef>
-              <a:spcAft>
-                <a:spcPct val="0"/>
-              </a:spcAft>
-              <a:buFont typeface="Arial" panose="020B0604020202020204" pitchFamily="34" charset="0"/>
-              <a:buNone/>
-              <a:defRPr kern="1200">
-                <a:solidFill>
-                  <a:schemeClr val="tx1"/>
-                </a:solidFill>
-                <a:latin typeface="Calibri" panose="020F0502020204030204" pitchFamily="34" charset="0"/>
-                <a:ea typeface="宋体" panose="02010600030101010101" pitchFamily="2" charset="-122"/>
-                <a:cs typeface="+mn-cs"/>
-              </a:defRPr>
-            </a:lvl4pPr>
-            <a:lvl5pPr marL="1828800" lvl="4" indent="0" algn="l" defTabSz="914400" rtl="0" eaLnBrk="1" fontAlgn="base" latinLnBrk="0" hangingPunct="1">
-              <a:lnSpc>
-                <a:spcPct val="100000"/>
-              </a:lnSpc>
-              <a:spcBef>
-                <a:spcPct val="0"/>
-              </a:spcBef>
-              <a:spcAft>
-                <a:spcPct val="0"/>
-              </a:spcAft>
-              <a:buFontTx/>
-              <a:buNone/>
-              <a:defRPr kern="1200">
-                <a:solidFill>
-                  <a:schemeClr val="tx1"/>
-                </a:solidFill>
-                <a:latin typeface="Calibri" panose="020F0502020204030204" pitchFamily="34" charset="0"/>
-                <a:ea typeface="宋体" panose="02010600030101010101" pitchFamily="2" charset="-122"/>
-                <a:cs typeface="+mn-cs"/>
-              </a:defRPr>
-            </a:lvl5pPr>
-          </a:lstStyle>
-          <a:p>
-            <a:pPr lvl="0" algn="r"/>
-            <a:fld id="{9A0DB2DC-4C9A-4742-B13C-FB6460FD3503}" type="slidenum">
-              <a:rPr lang="en-US" altLang="zh-CN" sz="1000" b="1">
-                <a:solidFill>
-                  <a:schemeClr val="bg1"/>
-                </a:solidFill>
-                <a:latin typeface="Arial" panose="020B0604020202020204" pitchFamily="34" charset="0"/>
-              </a:rPr>
-            </a:fld>
-            <a:endParaRPr lang="en-US" altLang="zh-CN" sz="1000" b="1">
-              <a:solidFill>
-                <a:schemeClr val="bg1"/>
-              </a:solidFill>
-              <a:latin typeface="Arial" panose="020B0604020202020204" pitchFamily="34" charset="0"/>
-            </a:endParaRPr>
-          </a:p>
-        </p:txBody>
-      </p:sp>
-      <p:grpSp>
-        <p:nvGrpSpPr>
-          <p:cNvPr id="3" name="组合 2"/>
-          <p:cNvGrpSpPr/>
-          <p:nvPr/>
-        </p:nvGrpSpPr>
-        <p:grpSpPr>
-          <a:xfrm>
-            <a:off x="467360" y="808990"/>
-            <a:ext cx="2835910" cy="245110"/>
-            <a:chOff x="736" y="1274"/>
-            <a:chExt cx="4466" cy="386"/>
-          </a:xfrm>
-        </p:grpSpPr>
-        <p:sp>
-          <p:nvSpPr>
-            <p:cNvPr id="4" name="TextBox 2"/>
-            <p:cNvSpPr/>
-            <p:nvPr/>
-          </p:nvSpPr>
-          <p:spPr>
-            <a:xfrm>
-              <a:off x="963" y="1274"/>
-              <a:ext cx="4239" cy="386"/>
-            </a:xfrm>
-            <a:prstGeom prst="rect">
-              <a:avLst/>
-            </a:prstGeom>
-            <a:noFill/>
-            <a:ln w="9525">
-              <a:noFill/>
-            </a:ln>
-          </p:spPr>
-          <p:txBody>
-            <a:bodyPr wrap="square" anchor="t">
-              <a:spAutoFit/>
-            </a:bodyPr>
-            <a:p>
-              <a:pPr>
-                <a:lnSpc>
-                  <a:spcPts val="1200"/>
-                </a:lnSpc>
-                <a:spcBef>
-                  <a:spcPts val="600"/>
-                </a:spcBef>
-              </a:pPr>
-              <a:r>
-                <a:rPr lang="en-US" altLang="zh-CN" sz="1400" b="1" dirty="0" smtClean="0">
-                  <a:solidFill>
-                    <a:srgbClr val="000000"/>
-                  </a:solidFill>
-                  <a:latin typeface="微软雅黑" panose="020B0503020204020204" pitchFamily="34" charset="-122"/>
-                  <a:ea typeface="微软雅黑" panose="020B0503020204020204" pitchFamily="34" charset="-122"/>
-                  <a:sym typeface="微软雅黑" panose="020B0503020204020204" pitchFamily="34" charset="-122"/>
-                </a:rPr>
-                <a:t>D4  </a:t>
-              </a:r>
-              <a:r>
-                <a:rPr lang="zh-CN" altLang="en-US" sz="1400" b="1" dirty="0" smtClean="0">
-                  <a:solidFill>
-                    <a:srgbClr val="000000"/>
-                  </a:solidFill>
-                  <a:latin typeface="微软雅黑" panose="020B0503020204020204" pitchFamily="34" charset="-122"/>
-                  <a:ea typeface="微软雅黑" panose="020B0503020204020204" pitchFamily="34" charset="-122"/>
-                  <a:sym typeface="微软雅黑" panose="020B0503020204020204" pitchFamily="34" charset="-122"/>
-                </a:rPr>
-                <a:t>原因</a:t>
-              </a:r>
-              <a:r>
-                <a:rPr lang="zh-CN" altLang="en-US" sz="1400" b="1" dirty="0">
-                  <a:solidFill>
-                    <a:srgbClr val="000000"/>
-                  </a:solidFill>
-                  <a:latin typeface="微软雅黑" panose="020B0503020204020204" pitchFamily="34" charset="-122"/>
-                  <a:ea typeface="微软雅黑" panose="020B0503020204020204" pitchFamily="34" charset="-122"/>
-                  <a:sym typeface="微软雅黑" panose="020B0503020204020204" pitchFamily="34" charset="-122"/>
-                </a:rPr>
-                <a:t>分析</a:t>
-              </a:r>
-              <a:endParaRPr lang="zh-CN" altLang="en-US" sz="1400" b="1">
-                <a:solidFill>
-                  <a:srgbClr val="000000"/>
-                </a:solidFill>
-                <a:latin typeface="微软雅黑" panose="020B0503020204020204" pitchFamily="34" charset="-122"/>
-                <a:ea typeface="微软雅黑" panose="020B0503020204020204" pitchFamily="34" charset="-122"/>
-                <a:sym typeface="微软雅黑" panose="020B0503020204020204" pitchFamily="34" charset="-122"/>
-              </a:endParaRPr>
-            </a:p>
-          </p:txBody>
-        </p:sp>
-        <p:sp>
-          <p:nvSpPr>
-            <p:cNvPr id="5" name="矩形 4"/>
-            <p:cNvSpPr/>
-            <p:nvPr/>
-          </p:nvSpPr>
-          <p:spPr>
-            <a:xfrm>
-              <a:off x="736" y="1313"/>
-              <a:ext cx="227" cy="229"/>
-            </a:xfrm>
-            <a:prstGeom prst="rect">
-              <a:avLst/>
-            </a:prstGeom>
-            <a:solidFill>
-              <a:srgbClr val="E62135"/>
-            </a:solidFill>
-            <a:ln w="9525">
-              <a:noFill/>
-            </a:ln>
-          </p:spPr>
-          <p:style>
-            <a:lnRef idx="1">
-              <a:schemeClr val="accent1"/>
-            </a:lnRef>
-            <a:fillRef idx="0">
-              <a:schemeClr val="accent1"/>
-            </a:fillRef>
-            <a:effectRef idx="0">
-              <a:schemeClr val="accent1"/>
-            </a:effectRef>
-            <a:fontRef idx="minor">
-              <a:schemeClr val="tx1"/>
-            </a:fontRef>
-          </p:style>
-          <p:txBody>
-            <a:bodyPr anchor="ctr"/>
-            <a:p>
-              <a:pPr algn="ctr" fontAlgn="auto">
-                <a:defRPr/>
-              </a:pPr>
-              <a:endParaRPr lang="zh-CN" altLang="en-US" sz="1600" noProof="1">
-                <a:solidFill>
-                  <a:srgbClr val="EBEBEB">
-                    <a:lumMod val="10000"/>
-                  </a:srgbClr>
-                </a:solidFill>
-              </a:endParaRPr>
-            </a:p>
-          </p:txBody>
-        </p:sp>
-      </p:grpSp>
-      <p:sp>
-        <p:nvSpPr>
-          <p:cNvPr id="12290" name="AI_DYNAMIC"/>
-          <p:cNvSpPr txBox="1"/>
-          <p:nvPr/>
-        </p:nvSpPr>
-        <p:spPr>
-          <a:xfrm>
-            <a:off x="502920" y="4599432"/>
-            <a:ext cx="8138160" cy="245110"/>
-          </a:xfrm>
-          <a:prstGeom prst="rect">
-            <a:avLst/>
-          </a:prstGeom>
-          <a:noFill/>
-        </p:spPr>
-        <p:txBody>
-          <a:bodyPr wrap="square">
-            <a:spAutoFit/>
-          </a:bodyPr>
-          <a:p>
-            <a:r>
-              <a:rPr lang="zh-CN" sz="1000">
-                <a:latin typeface="微软雅黑" panose="020B0503020204020204" pitchFamily="34" charset="-122"/>
-              </a:rPr>
-              <a:t>小结：图一为示</a:t>
-            </a:r>
-            <a:r>
-              <a:rPr lang="zh-CN" altLang="en-US" sz="1000">
-                <a:latin typeface="微软雅黑" panose="020B0503020204020204" pitchFamily="34" charset="-122"/>
-              </a:rPr>
-              <a:t>例图，图二为示例图</a:t>
-            </a:r>
-            <a:endParaRPr lang="zh-CN" altLang="en-US" sz="1000">
-              <a:latin typeface="微软雅黑" panose="020B0503020204020204" pitchFamily="34" charset="-122"/>
-            </a:endParaRPr>
-          </a:p>
-        </p:txBody>
-      </p:sp>
-      <p:pic>
-        <p:nvPicPr>
-          <p:cNvPr id="6" name="图片 5"/>
-          <p:cNvPicPr/>
-          <p:nvPr/>
-        </p:nvPicPr>
-        <p:blipFill>
-          <a:blip r:embed="rId1"/>
-          <a:stretch>
-            <a:fillRect/>
-          </a:stretch>
-        </p:blipFill>
-        <p:spPr>
-          <a:xfrm>
-            <a:off x="1043305" y="1707515"/>
-            <a:ext cx="2692400" cy="1887220"/>
-          </a:xfrm>
-          <a:prstGeom prst="rect">
-            <a:avLst/>
-          </a:prstGeom>
-        </p:spPr>
-      </p:pic>
-      <p:pic>
-        <p:nvPicPr>
-          <p:cNvPr id="7" name="图片 6"/>
-          <p:cNvPicPr/>
-          <p:nvPr/>
-        </p:nvPicPr>
-        <p:blipFill>
-          <a:blip r:embed="rId1"/>
-          <a:stretch>
-            <a:fillRect/>
-          </a:stretch>
-        </p:blipFill>
-        <p:spPr>
-          <a:xfrm>
-            <a:off x="4572000" y="1707515"/>
-            <a:ext cx="2692400" cy="1887220"/>
-          </a:xfrm>
-          <a:prstGeom prst="rect">
-            <a:avLst/>
-          </a:prstGeom>
-        </p:spPr>
-      </p:pic>
-    </p:spTree>
-  </p:cSld>
-  <p:clrMapOvr>
-    <a:masterClrMapping/>
-  </p:clrMapOvr>
-  <p:transition/>
-  <p:timing>
-    <p:tnLst>
-      <p:par>
-        <p:cTn id="1" dur="indefinite" restart="never" nodeType="tmRoot"/>
-      </p:par>
-    </p:tnLst>
-  </p:timing>
-</p:sld>
-</file>
-
-<file path=ppt/slides/slide9.xml><?xml version="1.0" encoding="utf-8"?>
 <p:sld xmlns:a="http://schemas.openxmlformats.org/drawingml/2006/main" xmlns:r="http://schemas.openxmlformats.org/officeDocument/2006/relationships" xmlns:p="http://schemas.openxmlformats.org/presentationml/2006/main">
   <p:cSld>
     <p:spTree>
@@ -28002,6 +26829,665 @@
                 <a:cs typeface="微软雅黑" panose="020B0503020204020204" pitchFamily="34" charset="-122"/>
               </a:rPr>
               <a:t>发生原因分析：</a:t>
+            </a:r>
+            <a:endParaRPr lang="zh-CN" altLang="en-US" sz="1000">
+              <a:latin typeface="微软雅黑" panose="020B0503020204020204" pitchFamily="34" charset="-122"/>
+              <a:ea typeface="微软雅黑" panose="020B0503020204020204" pitchFamily="34" charset="-122"/>
+              <a:cs typeface="微软雅黑" panose="020B0503020204020204" pitchFamily="34" charset="-122"/>
+            </a:endParaRPr>
+          </a:p>
+        </p:txBody>
+      </p:sp>
+    </p:spTree>
+  </p:cSld>
+  <p:clrMapOvr>
+    <a:masterClrMapping/>
+  </p:clrMapOvr>
+  <p:transition/>
+  <p:timing>
+    <p:tnLst>
+      <p:par>
+        <p:cTn id="1" dur="indefinite" restart="never" nodeType="tmRoot"/>
+      </p:par>
+    </p:tnLst>
+  </p:timing>
+</p:sld>
+</file>
+
+<file path=ppt/slides/slide9.xml><?xml version="1.0" encoding="utf-8"?>
+<p:sld xmlns:a="http://schemas.openxmlformats.org/drawingml/2006/main" xmlns:r="http://schemas.openxmlformats.org/officeDocument/2006/relationships" xmlns:p="http://schemas.openxmlformats.org/presentationml/2006/main">
+  <p:cSld>
+    <p:spTree>
+      <p:nvGrpSpPr>
+        <p:cNvPr id="1" name=""/>
+        <p:cNvGrpSpPr/>
+        <p:nvPr/>
+      </p:nvGrpSpPr>
+      <p:grpSpPr>
+        <a:xfrm>
+          <a:off x="0" y="0"/>
+          <a:ext cx="0" cy="0"/>
+          <a:chOff x="0" y="0"/>
+          <a:chExt cx="0" cy="0"/>
+        </a:xfrm>
+      </p:grpSpPr>
+      <p:graphicFrame>
+        <p:nvGraphicFramePr>
+          <p:cNvPr id="9" name="表格 8"/>
+          <p:cNvGraphicFramePr/>
+          <p:nvPr>
+            <p:custDataLst>
+              <p:tags r:id="rId1"/>
+            </p:custDataLst>
+          </p:nvPr>
+        </p:nvGraphicFramePr>
+        <p:xfrm>
+          <a:off x="683260" y="1385570"/>
+          <a:ext cx="7987665" cy="3379470"/>
+        </p:xfrm>
+        <a:graphic>
+          <a:graphicData uri="http://schemas.openxmlformats.org/drawingml/2006/table">
+            <a:tbl>
+              <a:tblPr firstRow="1" bandRow="1">
+                <a:tableStyleId>{5940675A-B579-460E-94D1-54222C63F5DA}</a:tableStyleId>
+              </a:tblPr>
+              <a:tblGrid>
+                <a:gridCol w="633095"/>
+                <a:gridCol w="3912870"/>
+                <a:gridCol w="3441700"/>
+              </a:tblGrid>
+              <a:tr h="396000">
+                <a:tc>
+                  <a:txBody>
+                    <a:bodyPr/>
+                    <a:p>
+                      <a:pPr algn="ctr">
+                        <a:buNone/>
+                      </a:pPr>
+                      <a:r>
+                        <a:rPr lang="zh-CN" altLang="en-US" sz="1100" b="1" dirty="0">
+                          <a:effectLst/>
+                          <a:latin typeface="微软雅黑" panose="020B0503020204020204" pitchFamily="34" charset="-122"/>
+                          <a:ea typeface="微软雅黑" panose="020B0503020204020204" pitchFamily="34" charset="-122"/>
+                        </a:rPr>
+                        <a:t>层次</a:t>
+                      </a:r>
+                      <a:endParaRPr lang="zh-CN" altLang="en-US" sz="1100" b="1" dirty="0">
+                        <a:effectLst/>
+                        <a:latin typeface="微软雅黑" panose="020B0503020204020204" pitchFamily="34" charset="-122"/>
+                        <a:ea typeface="微软雅黑" panose="020B0503020204020204" pitchFamily="34" charset="-122"/>
+                      </a:endParaRPr>
+                    </a:p>
+                  </a:txBody>
+                  <a:tcPr anchor="ctr" anchorCtr="0">
+                    <a:solidFill>
+                      <a:schemeClr val="bg1">
+                        <a:lumMod val="85000"/>
+                      </a:schemeClr>
+                    </a:solidFill>
+                  </a:tcPr>
+                </a:tc>
+                <a:tc>
+                  <a:txBody>
+                    <a:bodyPr/>
+                    <a:p>
+                      <a:pPr algn="ctr">
+                        <a:buNone/>
+                      </a:pPr>
+                      <a:r>
+                        <a:rPr lang="zh-CN" altLang="en-US" sz="1100" b="1" dirty="0">
+                          <a:effectLst/>
+                          <a:latin typeface="微软雅黑" panose="020B0503020204020204" pitchFamily="34" charset="-122"/>
+                          <a:ea typeface="微软雅黑" panose="020B0503020204020204" pitchFamily="34" charset="-122"/>
+                        </a:rPr>
+                        <a:t>问题</a:t>
+                      </a:r>
+                      <a:endParaRPr lang="zh-CN" altLang="en-US" sz="1100" b="1" dirty="0">
+                        <a:effectLst/>
+                        <a:latin typeface="微软雅黑" panose="020B0503020204020204" pitchFamily="34" charset="-122"/>
+                        <a:ea typeface="微软雅黑" panose="020B0503020204020204" pitchFamily="34" charset="-122"/>
+                      </a:endParaRPr>
+                    </a:p>
+                  </a:txBody>
+                  <a:tcPr anchor="ctr" anchorCtr="0">
+                    <a:solidFill>
+                      <a:schemeClr val="bg1">
+                        <a:lumMod val="85000"/>
+                      </a:schemeClr>
+                    </a:solidFill>
+                  </a:tcPr>
+                </a:tc>
+                <a:tc>
+                  <a:txBody>
+                    <a:bodyPr/>
+                    <a:p>
+                      <a:pPr algn="ctr">
+                        <a:buNone/>
+                      </a:pPr>
+                      <a:r>
+                        <a:rPr lang="zh-CN" altLang="en-US" sz="1100" b="1" dirty="0">
+                          <a:effectLst/>
+                          <a:latin typeface="微软雅黑" panose="020B0503020204020204" pitchFamily="34" charset="-122"/>
+                          <a:ea typeface="微软雅黑" panose="020B0503020204020204" pitchFamily="34" charset="-122"/>
+                        </a:rPr>
+                        <a:t>原因</a:t>
+                      </a:r>
+                      <a:endParaRPr lang="zh-CN" altLang="en-US" sz="1100" b="1" dirty="0">
+                        <a:effectLst/>
+                        <a:latin typeface="微软雅黑" panose="020B0503020204020204" pitchFamily="34" charset="-122"/>
+                        <a:ea typeface="微软雅黑" panose="020B0503020204020204" pitchFamily="34" charset="-122"/>
+                      </a:endParaRPr>
+                    </a:p>
+                  </a:txBody>
+                  <a:tcPr anchor="ctr" anchorCtr="0">
+                    <a:solidFill>
+                      <a:schemeClr val="bg1">
+                        <a:lumMod val="85000"/>
+                      </a:schemeClr>
+                    </a:solidFill>
+                  </a:tcPr>
+                </a:tc>
+              </a:tr>
+              <a:tr h="396000">
+                <a:tc>
+                  <a:txBody>
+                    <a:bodyPr/>
+                    <a:p>
+                      <a:pPr algn="ctr">
+                        <a:buNone/>
+                      </a:pPr>
+                      <a:r>
+                        <a:rPr lang="en-US" altLang="zh-CN" sz="1000">
+                          <a:latin typeface="微软雅黑" panose="020B0503020204020204" pitchFamily="34" charset="-122"/>
+                          <a:ea typeface="微软雅黑" panose="020B0503020204020204" pitchFamily="34" charset="-122"/>
+                        </a:rPr>
+                        <a:t>Why1</a:t>
+                      </a:r>
+                      <a:endParaRPr lang="en-US" altLang="zh-CN" sz="1000">
+                        <a:latin typeface="微软雅黑" panose="020B0503020204020204" pitchFamily="34" charset="-122"/>
+                        <a:ea typeface="微软雅黑" panose="020B0503020204020204" pitchFamily="34" charset="-122"/>
+                      </a:endParaRPr>
+                    </a:p>
+                  </a:txBody>
+                  <a:tcPr anchor="ctr" anchorCtr="0"/>
+                </a:tc>
+                <a:tc>
+                  <a:txBody>
+                    <a:bodyPr/>
+                    <a:p>
+                      <a:pPr algn="ctr">
+                        <a:buNone/>
+                      </a:pPr>
+                      <a:endParaRPr lang="zh-CN" altLang="en-US" sz="1000">
+                        <a:latin typeface="微软雅黑" panose="020B0503020204020204" pitchFamily="34" charset="-122"/>
+                        <a:ea typeface="微软雅黑" panose="020B0503020204020204" pitchFamily="34" charset="-122"/>
+                      </a:endParaRPr>
+                    </a:p>
+                  </a:txBody>
+                  <a:tcPr anchor="ctr" anchorCtr="0"/>
+                </a:tc>
+                <a:tc>
+                  <a:txBody>
+                    <a:bodyPr/>
+                    <a:p>
+                      <a:pPr algn="ctr">
+                        <a:buNone/>
+                      </a:pPr>
+                      <a:endParaRPr lang="zh-CN" altLang="en-US" sz="1000">
+                        <a:latin typeface="微软雅黑" panose="020B0503020204020204" pitchFamily="34" charset="-122"/>
+                        <a:ea typeface="微软雅黑" panose="020B0503020204020204" pitchFamily="34" charset="-122"/>
+                      </a:endParaRPr>
+                    </a:p>
+                  </a:txBody>
+                  <a:tcPr anchor="ctr" anchorCtr="0"/>
+                </a:tc>
+              </a:tr>
+              <a:tr h="396000">
+                <a:tc>
+                  <a:txBody>
+                    <a:bodyPr/>
+                    <a:p>
+                      <a:pPr algn="ctr">
+                        <a:buNone/>
+                      </a:pPr>
+                      <a:r>
+                        <a:rPr lang="en-US" altLang="zh-CN" sz="1000">
+                          <a:latin typeface="微软雅黑" panose="020B0503020204020204" pitchFamily="34" charset="-122"/>
+                          <a:ea typeface="微软雅黑" panose="020B0503020204020204" pitchFamily="34" charset="-122"/>
+                          <a:sym typeface="+mn-ea"/>
+                        </a:rPr>
+                        <a:t>Why2</a:t>
+                      </a:r>
+                      <a:endParaRPr lang="zh-CN" altLang="en-US" sz="1000">
+                        <a:latin typeface="微软雅黑" panose="020B0503020204020204" pitchFamily="34" charset="-122"/>
+                        <a:ea typeface="微软雅黑" panose="020B0503020204020204" pitchFamily="34" charset="-122"/>
+                      </a:endParaRPr>
+                    </a:p>
+                  </a:txBody>
+                  <a:tcPr anchor="ctr" anchorCtr="0"/>
+                </a:tc>
+                <a:tc>
+                  <a:txBody>
+                    <a:bodyPr/>
+                    <a:p>
+                      <a:pPr algn="ctr">
+                        <a:buNone/>
+                      </a:pPr>
+                      <a:endParaRPr lang="zh-CN" altLang="en-US" sz="1000">
+                        <a:latin typeface="微软雅黑" panose="020B0503020204020204" pitchFamily="34" charset="-122"/>
+                        <a:ea typeface="微软雅黑" panose="020B0503020204020204" pitchFamily="34" charset="-122"/>
+                      </a:endParaRPr>
+                    </a:p>
+                  </a:txBody>
+                  <a:tcPr anchor="ctr" anchorCtr="0"/>
+                </a:tc>
+                <a:tc>
+                  <a:txBody>
+                    <a:bodyPr/>
+                    <a:p>
+                      <a:pPr algn="ctr">
+                        <a:buNone/>
+                      </a:pPr>
+                      <a:endParaRPr lang="zh-CN" altLang="en-US" sz="1000">
+                        <a:latin typeface="微软雅黑" panose="020B0503020204020204" pitchFamily="34" charset="-122"/>
+                        <a:ea typeface="微软雅黑" panose="020B0503020204020204" pitchFamily="34" charset="-122"/>
+                      </a:endParaRPr>
+                    </a:p>
+                  </a:txBody>
+                  <a:tcPr anchor="ctr" anchorCtr="0"/>
+                </a:tc>
+              </a:tr>
+              <a:tr h="396000">
+                <a:tc>
+                  <a:txBody>
+                    <a:bodyPr/>
+                    <a:p>
+                      <a:pPr algn="ctr">
+                        <a:buNone/>
+                      </a:pPr>
+                      <a:r>
+                        <a:rPr lang="en-US" altLang="zh-CN" sz="1000">
+                          <a:latin typeface="微软雅黑" panose="020B0503020204020204" pitchFamily="34" charset="-122"/>
+                          <a:ea typeface="微软雅黑" panose="020B0503020204020204" pitchFamily="34" charset="-122"/>
+                          <a:sym typeface="+mn-ea"/>
+                        </a:rPr>
+                        <a:t>Why3</a:t>
+                      </a:r>
+                      <a:endParaRPr lang="zh-CN" altLang="en-US" sz="1000">
+                        <a:latin typeface="微软雅黑" panose="020B0503020204020204" pitchFamily="34" charset="-122"/>
+                        <a:ea typeface="微软雅黑" panose="020B0503020204020204" pitchFamily="34" charset="-122"/>
+                      </a:endParaRPr>
+                    </a:p>
+                  </a:txBody>
+                  <a:tcPr anchor="ctr" anchorCtr="0"/>
+                </a:tc>
+                <a:tc>
+                  <a:txBody>
+                    <a:bodyPr/>
+                    <a:p>
+                      <a:pPr algn="ctr">
+                        <a:buNone/>
+                      </a:pPr>
+                      <a:endParaRPr lang="zh-CN" altLang="en-US" sz="1000">
+                        <a:latin typeface="微软雅黑" panose="020B0503020204020204" pitchFamily="34" charset="-122"/>
+                        <a:ea typeface="微软雅黑" panose="020B0503020204020204" pitchFamily="34" charset="-122"/>
+                      </a:endParaRPr>
+                    </a:p>
+                  </a:txBody>
+                  <a:tcPr anchor="ctr" anchorCtr="0"/>
+                </a:tc>
+                <a:tc>
+                  <a:txBody>
+                    <a:bodyPr/>
+                    <a:p>
+                      <a:pPr algn="ctr">
+                        <a:buNone/>
+                      </a:pPr>
+                      <a:endParaRPr lang="zh-CN" altLang="en-US" sz="1000">
+                        <a:latin typeface="微软雅黑" panose="020B0503020204020204" pitchFamily="34" charset="-122"/>
+                        <a:ea typeface="微软雅黑" panose="020B0503020204020204" pitchFamily="34" charset="-122"/>
+                      </a:endParaRPr>
+                    </a:p>
+                  </a:txBody>
+                  <a:tcPr anchor="ctr" anchorCtr="0"/>
+                </a:tc>
+              </a:tr>
+            </a:tbl>
+          </a:graphicData>
+        </a:graphic>
+      </p:graphicFrame>
+      <p:sp>
+        <p:nvSpPr>
+          <p:cNvPr id="18433" name="灯片编号占位符 1"/>
+          <p:cNvSpPr>
+            <a:spLocks noGrp="1"/>
+          </p:cNvSpPr>
+          <p:nvPr>
+            <p:ph type="sldNum" sz="quarter" idx="10"/>
+          </p:nvPr>
+        </p:nvSpPr>
+        <p:spPr>
+          <a:xfrm>
+            <a:off x="8388350" y="4691063"/>
+            <a:ext cx="360363" cy="112712"/>
+          </a:xfrm>
+          <a:noFill/>
+          <a:ln>
+            <a:noFill/>
+          </a:ln>
+        </p:spPr>
+        <p:txBody>
+          <a:bodyPr wrap="none" lIns="0" tIns="0" rIns="0" bIns="0" anchor="t"/>
+          <a:lstStyle>
+            <a:lvl1pPr marL="0" lvl="0" indent="0" algn="l" defTabSz="914400" rtl="0" eaLnBrk="1" fontAlgn="base" latinLnBrk="0" hangingPunct="1">
+              <a:lnSpc>
+                <a:spcPct val="100000"/>
+              </a:lnSpc>
+              <a:spcBef>
+                <a:spcPct val="0"/>
+              </a:spcBef>
+              <a:spcAft>
+                <a:spcPct val="0"/>
+              </a:spcAft>
+              <a:buNone/>
+              <a:defRPr sz="1800" kern="1200">
+                <a:solidFill>
+                  <a:schemeClr val="tx1"/>
+                </a:solidFill>
+                <a:latin typeface="Calibri" panose="020F0502020204030204" pitchFamily="34" charset="0"/>
+                <a:ea typeface="宋体" panose="02010600030101010101" pitchFamily="2" charset="-122"/>
+              </a:defRPr>
+            </a:lvl1pPr>
+            <a:lvl2pPr marL="457200" lvl="1" indent="0" algn="l" defTabSz="914400" rtl="0" eaLnBrk="1" fontAlgn="base" latinLnBrk="0" hangingPunct="1">
+              <a:lnSpc>
+                <a:spcPct val="100000"/>
+              </a:lnSpc>
+              <a:spcBef>
+                <a:spcPct val="0"/>
+              </a:spcBef>
+              <a:spcAft>
+                <a:spcPct val="0"/>
+              </a:spcAft>
+              <a:buFont typeface="Arial" panose="020B0604020202020204" pitchFamily="34" charset="0"/>
+              <a:buNone/>
+              <a:defRPr kern="1200">
+                <a:solidFill>
+                  <a:schemeClr val="tx1"/>
+                </a:solidFill>
+                <a:latin typeface="Calibri" panose="020F0502020204030204" pitchFamily="34" charset="0"/>
+                <a:ea typeface="宋体" panose="02010600030101010101" pitchFamily="2" charset="-122"/>
+                <a:cs typeface="+mn-cs"/>
+              </a:defRPr>
+            </a:lvl2pPr>
+            <a:lvl3pPr marL="914400" lvl="2" indent="0" algn="l" defTabSz="914400" rtl="0" eaLnBrk="1" fontAlgn="base" latinLnBrk="0" hangingPunct="1">
+              <a:lnSpc>
+                <a:spcPct val="100000"/>
+              </a:lnSpc>
+              <a:spcBef>
+                <a:spcPct val="0"/>
+              </a:spcBef>
+              <a:spcAft>
+                <a:spcPct val="0"/>
+              </a:spcAft>
+              <a:buFontTx/>
+              <a:buNone/>
+              <a:defRPr kern="1200">
+                <a:solidFill>
+                  <a:schemeClr val="tx1"/>
+                </a:solidFill>
+                <a:latin typeface="Calibri" panose="020F0502020204030204" pitchFamily="34" charset="0"/>
+                <a:ea typeface="宋体" panose="02010600030101010101" pitchFamily="2" charset="-122"/>
+                <a:cs typeface="+mn-cs"/>
+              </a:defRPr>
+            </a:lvl3pPr>
+            <a:lvl4pPr marL="1371600" lvl="3" indent="0" algn="l" defTabSz="914400" rtl="0" eaLnBrk="1" fontAlgn="base" latinLnBrk="0" hangingPunct="1">
+              <a:lnSpc>
+                <a:spcPct val="100000"/>
+              </a:lnSpc>
+              <a:spcBef>
+                <a:spcPct val="0"/>
+              </a:spcBef>
+              <a:spcAft>
+                <a:spcPct val="0"/>
+              </a:spcAft>
+              <a:buFont typeface="Arial" panose="020B0604020202020204" pitchFamily="34" charset="0"/>
+              <a:buNone/>
+              <a:defRPr kern="1200">
+                <a:solidFill>
+                  <a:schemeClr val="tx1"/>
+                </a:solidFill>
+                <a:latin typeface="Calibri" panose="020F0502020204030204" pitchFamily="34" charset="0"/>
+                <a:ea typeface="宋体" panose="02010600030101010101" pitchFamily="2" charset="-122"/>
+                <a:cs typeface="+mn-cs"/>
+              </a:defRPr>
+            </a:lvl4pPr>
+            <a:lvl5pPr marL="1828800" lvl="4" indent="0" algn="l" defTabSz="914400" rtl="0" eaLnBrk="1" fontAlgn="base" latinLnBrk="0" hangingPunct="1">
+              <a:lnSpc>
+                <a:spcPct val="100000"/>
+              </a:lnSpc>
+              <a:spcBef>
+                <a:spcPct val="0"/>
+              </a:spcBef>
+              <a:spcAft>
+                <a:spcPct val="0"/>
+              </a:spcAft>
+              <a:buFontTx/>
+              <a:buNone/>
+              <a:defRPr kern="1200">
+                <a:solidFill>
+                  <a:schemeClr val="tx1"/>
+                </a:solidFill>
+                <a:latin typeface="Calibri" panose="020F0502020204030204" pitchFamily="34" charset="0"/>
+                <a:ea typeface="宋体" panose="02010600030101010101" pitchFamily="2" charset="-122"/>
+                <a:cs typeface="+mn-cs"/>
+              </a:defRPr>
+            </a:lvl5pPr>
+          </a:lstStyle>
+          <a:p>
+            <a:pPr lvl="0" algn="r"/>
+            <a:fld id="{9A0DB2DC-4C9A-4742-B13C-FB6460FD3503}" type="slidenum">
+              <a:rPr lang="en-US" altLang="zh-CN" sz="1000" b="1">
+                <a:solidFill>
+                  <a:schemeClr val="bg1"/>
+                </a:solidFill>
+                <a:latin typeface="Arial" panose="020B0604020202020204" pitchFamily="34" charset="0"/>
+              </a:rPr>
+            </a:fld>
+            <a:endParaRPr lang="en-US" altLang="zh-CN" sz="1000" b="1">
+              <a:solidFill>
+                <a:schemeClr val="bg1"/>
+              </a:solidFill>
+              <a:latin typeface="Arial" panose="020B0604020202020204" pitchFamily="34" charset="0"/>
+            </a:endParaRPr>
+          </a:p>
+        </p:txBody>
+      </p:sp>
+      <p:grpSp>
+        <p:nvGrpSpPr>
+          <p:cNvPr id="3" name="组合 2"/>
+          <p:cNvGrpSpPr/>
+          <p:nvPr/>
+        </p:nvGrpSpPr>
+        <p:grpSpPr>
+          <a:xfrm>
+            <a:off x="467360" y="808990"/>
+            <a:ext cx="2835910" cy="245110"/>
+            <a:chOff x="736" y="1274"/>
+            <a:chExt cx="4466" cy="386"/>
+          </a:xfrm>
+        </p:grpSpPr>
+        <p:sp>
+          <p:nvSpPr>
+            <p:cNvPr id="4" name="TextBox 2"/>
+            <p:cNvSpPr/>
+            <p:nvPr/>
+          </p:nvSpPr>
+          <p:spPr>
+            <a:xfrm>
+              <a:off x="963" y="1274"/>
+              <a:ext cx="4239" cy="386"/>
+            </a:xfrm>
+            <a:prstGeom prst="rect">
+              <a:avLst/>
+            </a:prstGeom>
+            <a:noFill/>
+            <a:ln w="9525">
+              <a:noFill/>
+            </a:ln>
+          </p:spPr>
+          <p:txBody>
+            <a:bodyPr wrap="square" anchor="t">
+              <a:spAutoFit/>
+            </a:bodyPr>
+            <a:p>
+              <a:pPr>
+                <a:lnSpc>
+                  <a:spcPts val="1200"/>
+                </a:lnSpc>
+                <a:spcBef>
+                  <a:spcPts val="600"/>
+                </a:spcBef>
+              </a:pPr>
+              <a:r>
+                <a:rPr lang="en-US" altLang="zh-CN" sz="1400" b="1" dirty="0" smtClean="0">
+                  <a:solidFill>
+                    <a:srgbClr val="000000"/>
+                  </a:solidFill>
+                  <a:latin typeface="微软雅黑" panose="020B0503020204020204" pitchFamily="34" charset="-122"/>
+                  <a:ea typeface="微软雅黑" panose="020B0503020204020204" pitchFamily="34" charset="-122"/>
+                  <a:sym typeface="微软雅黑" panose="020B0503020204020204" pitchFamily="34" charset="-122"/>
+                </a:rPr>
+                <a:t>D4  </a:t>
+              </a:r>
+              <a:r>
+                <a:rPr lang="zh-CN" altLang="en-US" sz="1400" b="1" dirty="0" smtClean="0">
+                  <a:solidFill>
+                    <a:srgbClr val="000000"/>
+                  </a:solidFill>
+                  <a:latin typeface="微软雅黑" panose="020B0503020204020204" pitchFamily="34" charset="-122"/>
+                  <a:ea typeface="微软雅黑" panose="020B0503020204020204" pitchFamily="34" charset="-122"/>
+                  <a:sym typeface="微软雅黑" panose="020B0503020204020204" pitchFamily="34" charset="-122"/>
+                </a:rPr>
+                <a:t>原因</a:t>
+              </a:r>
+              <a:r>
+                <a:rPr lang="zh-CN" altLang="en-US" sz="1400" b="1" dirty="0">
+                  <a:solidFill>
+                    <a:srgbClr val="000000"/>
+                  </a:solidFill>
+                  <a:latin typeface="微软雅黑" panose="020B0503020204020204" pitchFamily="34" charset="-122"/>
+                  <a:ea typeface="微软雅黑" panose="020B0503020204020204" pitchFamily="34" charset="-122"/>
+                  <a:sym typeface="微软雅黑" panose="020B0503020204020204" pitchFamily="34" charset="-122"/>
+                </a:rPr>
+                <a:t>分析</a:t>
+              </a:r>
+              <a:endParaRPr lang="zh-CN" altLang="en-US" sz="1400" b="1">
+                <a:solidFill>
+                  <a:srgbClr val="000000"/>
+                </a:solidFill>
+                <a:latin typeface="微软雅黑" panose="020B0503020204020204" pitchFamily="34" charset="-122"/>
+                <a:ea typeface="微软雅黑" panose="020B0503020204020204" pitchFamily="34" charset="-122"/>
+                <a:sym typeface="微软雅黑" panose="020B0503020204020204" pitchFamily="34" charset="-122"/>
+              </a:endParaRPr>
+            </a:p>
+          </p:txBody>
+        </p:sp>
+        <p:sp>
+          <p:nvSpPr>
+            <p:cNvPr id="5" name="矩形 4"/>
+            <p:cNvSpPr/>
+            <p:nvPr/>
+          </p:nvSpPr>
+          <p:spPr>
+            <a:xfrm>
+              <a:off x="736" y="1313"/>
+              <a:ext cx="227" cy="229"/>
+            </a:xfrm>
+            <a:prstGeom prst="rect">
+              <a:avLst/>
+            </a:prstGeom>
+            <a:solidFill>
+              <a:srgbClr val="E62135"/>
+            </a:solidFill>
+            <a:ln w="9525">
+              <a:noFill/>
+            </a:ln>
+          </p:spPr>
+          <p:style>
+            <a:lnRef idx="1">
+              <a:schemeClr val="accent1"/>
+            </a:lnRef>
+            <a:fillRef idx="0">
+              <a:schemeClr val="accent1"/>
+            </a:fillRef>
+            <a:effectRef idx="0">
+              <a:schemeClr val="accent1"/>
+            </a:effectRef>
+            <a:fontRef idx="minor">
+              <a:schemeClr val="tx1"/>
+            </a:fontRef>
+          </p:style>
+          <p:txBody>
+            <a:bodyPr anchor="ctr"/>
+            <a:p>
+              <a:pPr algn="ctr" fontAlgn="auto">
+                <a:defRPr/>
+              </a:pPr>
+              <a:endParaRPr lang="zh-CN" altLang="en-US" sz="1600" noProof="1">
+                <a:solidFill>
+                  <a:srgbClr val="EBEBEB">
+                    <a:lumMod val="10000"/>
+                  </a:srgbClr>
+                </a:solidFill>
+              </a:endParaRPr>
+            </a:p>
+          </p:txBody>
+        </p:sp>
+      </p:grpSp>
+      <p:sp>
+        <p:nvSpPr>
+          <p:cNvPr id="7" name="文本框 6"/>
+          <p:cNvSpPr txBox="1"/>
+          <p:nvPr/>
+        </p:nvSpPr>
+        <p:spPr>
+          <a:xfrm>
+            <a:off x="611505" y="1059815"/>
+            <a:ext cx="3048000" cy="245110"/>
+          </a:xfrm>
+          <a:prstGeom prst="rect">
+            <a:avLst/>
+          </a:prstGeom>
+          <a:noFill/>
+        </p:spPr>
+        <p:txBody>
+          <a:bodyPr wrap="square" rtlCol="0">
+            <a:spAutoFit/>
+          </a:bodyPr>
+          <a:p>
+            <a:r>
+              <a:rPr lang="en-US" altLang="zh-CN" sz="1000">
+                <a:latin typeface="微软雅黑" panose="020B0503020204020204" pitchFamily="34" charset="-122"/>
+                <a:ea typeface="微软雅黑" panose="020B0503020204020204" pitchFamily="34" charset="-122"/>
+                <a:cs typeface="微软雅黑" panose="020B0503020204020204" pitchFamily="34" charset="-122"/>
+              </a:rPr>
+              <a:t>5WHY</a:t>
+            </a:r>
+            <a:r>
+              <a:rPr lang="zh-CN" altLang="en-US" sz="1000">
+                <a:latin typeface="微软雅黑" panose="020B0503020204020204" pitchFamily="34" charset="-122"/>
+                <a:ea typeface="微软雅黑" panose="020B0503020204020204" pitchFamily="34" charset="-122"/>
+                <a:cs typeface="微软雅黑" panose="020B0503020204020204" pitchFamily="34" charset="-122"/>
+              </a:rPr>
+              <a:t>流出</a:t>
+            </a:r>
+            <a:r>
+              <a:rPr lang="zh-CN" altLang="en-US" sz="1000">
+                <a:latin typeface="微软雅黑" panose="020B0503020204020204" pitchFamily="34" charset="-122"/>
+                <a:ea typeface="微软雅黑" panose="020B0503020204020204" pitchFamily="34" charset="-122"/>
+                <a:cs typeface="微软雅黑" panose="020B0503020204020204" pitchFamily="34" charset="-122"/>
+              </a:rPr>
+              <a:t>原因分析：</a:t>
             </a:r>
             <a:endParaRPr lang="zh-CN" altLang="en-US" sz="1000">
               <a:latin typeface="微软雅黑" panose="020B0503020204020204" pitchFamily="34" charset="-122"/>

--- a/8D模板.pptx
+++ b/8D模板.pptx
@@ -11098,7 +11098,7 @@
               <a:defRPr/>
             </a:pPr>
             <a:r>
-              <a:rPr lang="zh-CN" sz="1200" dirty="0">
+              <a:rPr lang="zh-CN" altLang="en-US" sz="1200" b="1" dirty="0" smtClean="0">
                 <a:solidFill>
                   <a:srgbClr val="000000"/>
                 </a:solidFill>
@@ -11106,18 +11106,7 @@
                 <a:ea typeface="微软雅黑" panose="020B0503020204020204" pitchFamily="34" charset="-122"/>
                 <a:sym typeface="+mn-ea"/>
               </a:rPr>
-              <a:t>背景</a:t>
-            </a:r>
-            <a:r>
-              <a:rPr sz="1200" dirty="0">
-                <a:solidFill>
-                  <a:srgbClr val="000000"/>
-                </a:solidFill>
-                <a:latin typeface="微软雅黑" panose="020B0503020204020204" pitchFamily="34" charset="-122"/>
-                <a:ea typeface="微软雅黑" panose="020B0503020204020204" pitchFamily="34" charset="-122"/>
-                <a:sym typeface="+mn-ea"/>
-              </a:rPr>
-              <a:t>：</a:t>
+              <a:t>背景：</a:t>
             </a:r>
             <a:r>
               <a:rPr lang="en-US" sz="1200" dirty="0">
@@ -11162,7 +11151,7 @@
               <a:defRPr/>
             </a:pPr>
             <a:r>
-              <a:rPr lang="zh-CN" sz="1200" dirty="0">
+              <a:rPr lang="zh-CN" altLang="en-US" sz="1200" b="1" dirty="0" smtClean="0">
                 <a:solidFill>
                   <a:srgbClr val="000000"/>
                 </a:solidFill>
@@ -11170,18 +11159,7 @@
                 <a:ea typeface="微软雅黑" panose="020B0503020204020204" pitchFamily="34" charset="-122"/>
                 <a:sym typeface="+mn-ea"/>
               </a:rPr>
-              <a:t>现状</a:t>
-            </a:r>
-            <a:r>
-              <a:rPr sz="1200" dirty="0">
-                <a:solidFill>
-                  <a:srgbClr val="000000"/>
-                </a:solidFill>
-                <a:latin typeface="微软雅黑" panose="020B0503020204020204" pitchFamily="34" charset="-122"/>
-                <a:ea typeface="微软雅黑" panose="020B0503020204020204" pitchFamily="34" charset="-122"/>
-                <a:sym typeface="+mn-ea"/>
-              </a:rPr>
-              <a:t>：</a:t>
+              <a:t>现状：</a:t>
             </a:r>
             <a:r>
               <a:rPr lang="en-US" sz="1200" dirty="0">
@@ -11229,7 +11207,7 @@
               <a:defRPr/>
             </a:pPr>
             <a:r>
-              <a:rPr lang="zh-CN" altLang="en-US" sz="1200" dirty="0" smtClean="0">
+              <a:rPr lang="zh-CN" altLang="en-US" sz="1200" b="1" dirty="0" smtClean="0">
                 <a:solidFill>
                   <a:srgbClr val="000000"/>
                 </a:solidFill>
@@ -11240,7 +11218,7 @@
               <a:t>系统策略</a:t>
             </a:r>
             <a:r>
-              <a:rPr lang="zh-CN" altLang="en-US" sz="1200" dirty="0" smtClean="0">
+              <a:rPr lang="zh-CN" altLang="en-US" sz="1200" b="1" dirty="0" smtClean="0">
                 <a:latin typeface="微软雅黑" panose="020B0503020204020204" pitchFamily="34" charset="-122"/>
                 <a:ea typeface="微软雅黑" panose="020B0503020204020204" pitchFamily="34" charset="-122"/>
                 <a:sym typeface="+mn-ea"/>
@@ -11279,7 +11257,7 @@
               <a:defRPr/>
             </a:pPr>
             <a:r>
-              <a:rPr lang="zh-CN" sz="1200" dirty="0" err="1" smtClean="0">
+              <a:rPr lang="zh-CN" sz="1200" b="1" dirty="0" err="1" smtClean="0">
                 <a:solidFill>
                   <a:srgbClr val="000000"/>
                 </a:solidFill>
@@ -11290,7 +11268,7 @@
               <a:t>策略逻辑</a:t>
             </a:r>
             <a:r>
-              <a:rPr lang="zh-CN" sz="1200" dirty="0" smtClean="0">
+              <a:rPr lang="zh-CN" sz="1200" b="1" dirty="0" smtClean="0">
                 <a:solidFill>
                   <a:srgbClr val="000000"/>
                 </a:solidFill>

--- a/8D模板.pptx
+++ b/8D模板.pptx
@@ -3,34 +3,34 @@
 <p:presentation xmlns:a="http://schemas.openxmlformats.org/drawingml/2006/main" xmlns:r="http://schemas.openxmlformats.org/officeDocument/2006/relationships" xmlns:p="http://schemas.openxmlformats.org/presentationml/2006/main" firstSlideNum="0">
   <p:sldMasterIdLst>
     <p:sldMasterId id="2147483648" r:id="rId1"/>
-    <p:sldMasterId id="2147483650" r:id="rId3"/>
+    <p:sldMasterId id="2147483650" r:id="rId2"/>
   </p:sldMasterIdLst>
   <p:notesMasterIdLst>
-    <p:notesMasterId r:id="rId5"/>
+    <p:notesMasterId r:id="rId17"/>
   </p:notesMasterIdLst>
   <p:handoutMasterIdLst>
-    <p:handoutMasterId r:id="rId19"/>
+    <p:handoutMasterId r:id="rId18"/>
   </p:handoutMasterIdLst>
   <p:sldIdLst>
-    <p:sldId id="353" r:id="rId4"/>
-    <p:sldId id="349" r:id="rId6"/>
-    <p:sldId id="567" r:id="rId7"/>
-    <p:sldId id="530" r:id="rId8"/>
-    <p:sldId id="531" r:id="rId9"/>
-    <p:sldId id="412" r:id="rId10"/>
-    <p:sldId id="613" r:id="rId11"/>
-    <p:sldId id="619" r:id="rId12"/>
-    <p:sldId id="620" r:id="rId13"/>
-    <p:sldId id="577" r:id="rId14"/>
-    <p:sldId id="579" r:id="rId15"/>
-    <p:sldId id="580" r:id="rId16"/>
-    <p:sldId id="582" r:id="rId17"/>
-    <p:sldId id="411" r:id="rId18"/>
+    <p:sldId id="353" r:id="rId3"/>
+    <p:sldId id="349" r:id="rId4"/>
+    <p:sldId id="567" r:id="rId5"/>
+    <p:sldId id="530" r:id="rId6"/>
+    <p:sldId id="531" r:id="rId7"/>
+    <p:sldId id="412" r:id="rId8"/>
+    <p:sldId id="613" r:id="rId9"/>
+    <p:sldId id="619" r:id="rId10"/>
+    <p:sldId id="620" r:id="rId11"/>
+    <p:sldId id="577" r:id="rId12"/>
+    <p:sldId id="579" r:id="rId13"/>
+    <p:sldId id="580" r:id="rId14"/>
+    <p:sldId id="582" r:id="rId15"/>
+    <p:sldId id="411" r:id="rId16"/>
   </p:sldIdLst>
   <p:sldSz cx="9144000" cy="5143500" type="screen16x9"/>
-  <p:notesSz cx="6797675" cy="9926320"/>
+  <p:notesSz cx="6797675" cy="9926638"/>
   <p:custDataLst>
-    <p:tags r:id="rId24"/>
+    <p:tags r:id="rId19"/>
   </p:custDataLst>
   <p:defaultTextStyle>
     <a:defPPr>
@@ -400,6 +400,7 @@
                 <a:ea typeface="+mn-ea"/>
                 <a:cs typeface="+mn-cs"/>
               </a:rPr>
+              <a:t>2026/8/10</a:t>
             </a:fld>
             <a:endParaRPr lang="zh-CN" altLang="en-US" strike="noStrike" noProof="1"/>
           </a:p>
@@ -480,12 +481,18 @@
                 <a:ea typeface="+mn-ea"/>
                 <a:cs typeface="+mn-cs"/>
               </a:rPr>
+              <a:t>‹#›</a:t>
             </a:fld>
             <a:endParaRPr lang="zh-CN" altLang="en-US" strike="noStrike" noProof="1"/>
           </a:p>
         </p:txBody>
       </p:sp>
     </p:spTree>
+    <p:extLst>
+      <p:ext uri="{BB962C8B-B14F-4D97-AF65-F5344CB8AC3E}">
+        <p14:creationId xmlns:p14="http://schemas.microsoft.com/office/powerpoint/2010/main" val="1229821591"/>
+      </p:ext>
+    </p:extLst>
   </p:cSld>
   <p:clrMap bg1="lt1" tx1="dk1" bg2="lt2" tx2="dk2" accent1="accent1" accent2="accent2" accent3="accent3" accent4="accent4" accent5="accent5" accent6="accent6" hlink="hlink" folHlink="folHlink"/>
 </p:handoutMaster>
@@ -591,6 +598,7 @@
                 <a:ea typeface="+mn-ea"/>
                 <a:cs typeface="+mn-cs"/>
               </a:rPr>
+              <a:t>8/10/2026</a:t>
             </a:fld>
             <a:endParaRPr lang="en-US" strike="noStrike" noProof="1"/>
           </a:p>
@@ -658,7 +666,6 @@
               <a:rPr lang="de-DE" altLang="zh-CN"/>
               <a:t>Textmasterformate durch Klicken bearbeiten</a:t>
             </a:r>
-            <a:endParaRPr lang="de-DE" altLang="zh-CN"/>
           </a:p>
           <a:p>
             <a:pPr lvl="1" indent="0"/>
@@ -666,7 +673,6 @@
               <a:rPr lang="de-DE" altLang="zh-CN"/>
               <a:t>Zweite Ebene</a:t>
             </a:r>
-            <a:endParaRPr lang="de-DE" altLang="zh-CN"/>
           </a:p>
           <a:p>
             <a:pPr lvl="2" indent="0"/>
@@ -674,7 +680,6 @@
               <a:rPr lang="de-DE" altLang="zh-CN"/>
               <a:t>Dritte Ebene</a:t>
             </a:r>
-            <a:endParaRPr lang="de-DE" altLang="zh-CN"/>
           </a:p>
           <a:p>
             <a:pPr lvl="3" indent="0"/>
@@ -682,7 +687,6 @@
               <a:rPr lang="de-DE" altLang="zh-CN"/>
               <a:t>Vierte Ebene</a:t>
             </a:r>
-            <a:endParaRPr lang="de-DE" altLang="zh-CN"/>
           </a:p>
           <a:p>
             <a:pPr lvl="4" indent="0"/>
@@ -769,12 +773,18 @@
                 <a:ea typeface="+mn-ea"/>
                 <a:cs typeface="+mn-cs"/>
               </a:rPr>
+              <a:t>‹#›</a:t>
             </a:fld>
             <a:endParaRPr lang="en-US" strike="noStrike" noProof="1"/>
           </a:p>
         </p:txBody>
       </p:sp>
     </p:spTree>
+    <p:extLst>
+      <p:ext uri="{BB962C8B-B14F-4D97-AF65-F5344CB8AC3E}">
+        <p14:creationId xmlns:p14="http://schemas.microsoft.com/office/powerpoint/2010/main" val="2676328575"/>
+      </p:ext>
+    </p:extLst>
   </p:cSld>
   <p:clrMap bg1="lt1" tx1="dk1" bg2="lt2" tx2="dk2" accent1="accent1" accent2="accent2" accent3="accent3" accent4="accent4" accent5="accent5" accent6="accent6" hlink="hlink" folHlink="folHlink"/>
   <p:hf sldNum="0" hdr="0" ftr="0" dt="0"/>
@@ -952,6 +962,11 @@
         </p:txBody>
       </p:sp>
     </p:spTree>
+    <p:extLst>
+      <p:ext uri="{BB962C8B-B14F-4D97-AF65-F5344CB8AC3E}">
+        <p14:creationId xmlns:p14="http://schemas.microsoft.com/office/powerpoint/2010/main" val="1032262745"/>
+      </p:ext>
+    </p:extLst>
   </p:cSld>
   <p:clrMapOvr>
     <a:masterClrMapping/>
@@ -1045,6 +1060,7 @@
                 <a:latin typeface="Calibri" panose="020F0502020204030204" pitchFamily="34" charset="0"/>
                 <a:ea typeface="宋体" panose="02010600030101010101" pitchFamily="2" charset="-122"/>
               </a:rPr>
+              <a:t>9</a:t>
             </a:fld>
             <a:endParaRPr lang="en-US" altLang="zh-CN" sz="1200">
               <a:latin typeface="Calibri" panose="020F0502020204030204" pitchFamily="34" charset="0"/>
@@ -1054,6 +1070,11 @@
         </p:txBody>
       </p:sp>
     </p:spTree>
+    <p:extLst>
+      <p:ext uri="{BB962C8B-B14F-4D97-AF65-F5344CB8AC3E}">
+        <p14:creationId xmlns:p14="http://schemas.microsoft.com/office/powerpoint/2010/main" val="2001487133"/>
+      </p:ext>
+    </p:extLst>
   </p:cSld>
   <p:clrMapOvr>
     <a:masterClrMapping/>
@@ -1147,6 +1168,7 @@
                 <a:latin typeface="Calibri" panose="020F0502020204030204" pitchFamily="34" charset="0"/>
                 <a:ea typeface="宋体" panose="02010600030101010101" pitchFamily="2" charset="-122"/>
               </a:rPr>
+              <a:t>10</a:t>
             </a:fld>
             <a:endParaRPr lang="en-US" altLang="zh-CN" sz="1200">
               <a:latin typeface="Calibri" panose="020F0502020204030204" pitchFamily="34" charset="0"/>
@@ -1156,6 +1178,11 @@
         </p:txBody>
       </p:sp>
     </p:spTree>
+    <p:extLst>
+      <p:ext uri="{BB962C8B-B14F-4D97-AF65-F5344CB8AC3E}">
+        <p14:creationId xmlns:p14="http://schemas.microsoft.com/office/powerpoint/2010/main" val="3428624375"/>
+      </p:ext>
+    </p:extLst>
   </p:cSld>
   <p:clrMapOvr>
     <a:masterClrMapping/>
@@ -1249,6 +1276,7 @@
                 <a:latin typeface="Calibri" panose="020F0502020204030204" pitchFamily="34" charset="0"/>
                 <a:ea typeface="宋体" panose="02010600030101010101" pitchFamily="2" charset="-122"/>
               </a:rPr>
+              <a:t>11</a:t>
             </a:fld>
             <a:endParaRPr lang="en-US" altLang="zh-CN" sz="1200">
               <a:latin typeface="Calibri" panose="020F0502020204030204" pitchFamily="34" charset="0"/>
@@ -1258,6 +1286,11 @@
         </p:txBody>
       </p:sp>
     </p:spTree>
+    <p:extLst>
+      <p:ext uri="{BB962C8B-B14F-4D97-AF65-F5344CB8AC3E}">
+        <p14:creationId xmlns:p14="http://schemas.microsoft.com/office/powerpoint/2010/main" val="3058953156"/>
+      </p:ext>
+    </p:extLst>
   </p:cSld>
   <p:clrMapOvr>
     <a:masterClrMapping/>
@@ -1351,6 +1384,7 @@
                 <a:latin typeface="Calibri" panose="020F0502020204030204" pitchFamily="34" charset="0"/>
                 <a:ea typeface="宋体" panose="02010600030101010101" pitchFamily="2" charset="-122"/>
               </a:rPr>
+              <a:t>12</a:t>
             </a:fld>
             <a:endParaRPr lang="en-US" altLang="zh-CN" sz="1200">
               <a:latin typeface="Calibri" panose="020F0502020204030204" pitchFamily="34" charset="0"/>
@@ -1360,6 +1394,11 @@
         </p:txBody>
       </p:sp>
     </p:spTree>
+    <p:extLst>
+      <p:ext uri="{BB962C8B-B14F-4D97-AF65-F5344CB8AC3E}">
+        <p14:creationId xmlns:p14="http://schemas.microsoft.com/office/powerpoint/2010/main" val="3172473969"/>
+      </p:ext>
+    </p:extLst>
   </p:cSld>
   <p:clrMapOvr>
     <a:masterClrMapping/>
@@ -1453,6 +1492,7 @@
                 <a:latin typeface="Calibri" panose="020F0502020204030204" pitchFamily="34" charset="0"/>
                 <a:ea typeface="宋体" panose="02010600030101010101" pitchFamily="2" charset="-122"/>
               </a:rPr>
+              <a:t>13</a:t>
             </a:fld>
             <a:endParaRPr lang="en-US" altLang="zh-CN" sz="1200" dirty="0">
               <a:latin typeface="Calibri" panose="020F0502020204030204" pitchFamily="34" charset="0"/>
@@ -1462,6 +1502,11 @@
         </p:txBody>
       </p:sp>
     </p:spTree>
+    <p:extLst>
+      <p:ext uri="{BB962C8B-B14F-4D97-AF65-F5344CB8AC3E}">
+        <p14:creationId xmlns:p14="http://schemas.microsoft.com/office/powerpoint/2010/main" val="3632135850"/>
+      </p:ext>
+    </p:extLst>
   </p:cSld>
   <p:clrMapOvr>
     <a:masterClrMapping/>
@@ -1555,6 +1600,7 @@
                 <a:latin typeface="Calibri" panose="020F0502020204030204" pitchFamily="34" charset="0"/>
                 <a:ea typeface="宋体" panose="02010600030101010101" pitchFamily="2" charset="-122"/>
               </a:rPr>
+              <a:t>1</a:t>
             </a:fld>
             <a:endParaRPr lang="en-US" altLang="zh-CN" sz="1200" dirty="0">
               <a:latin typeface="Calibri" panose="020F0502020204030204" pitchFamily="34" charset="0"/>
@@ -1564,6 +1610,11 @@
         </p:txBody>
       </p:sp>
     </p:spTree>
+    <p:extLst>
+      <p:ext uri="{BB962C8B-B14F-4D97-AF65-F5344CB8AC3E}">
+        <p14:creationId xmlns:p14="http://schemas.microsoft.com/office/powerpoint/2010/main" val="594905341"/>
+      </p:ext>
+    </p:extLst>
   </p:cSld>
   <p:clrMapOvr>
     <a:masterClrMapping/>
@@ -1657,6 +1708,7 @@
                 <a:latin typeface="Calibri" panose="020F0502020204030204" pitchFamily="34" charset="0"/>
                 <a:ea typeface="宋体" panose="02010600030101010101" pitchFamily="2" charset="-122"/>
               </a:rPr>
+              <a:t>2</a:t>
             </a:fld>
             <a:endParaRPr lang="en-US" altLang="zh-CN" sz="1200">
               <a:latin typeface="Calibri" panose="020F0502020204030204" pitchFamily="34" charset="0"/>
@@ -1666,6 +1718,11 @@
         </p:txBody>
       </p:sp>
     </p:spTree>
+    <p:extLst>
+      <p:ext uri="{BB962C8B-B14F-4D97-AF65-F5344CB8AC3E}">
+        <p14:creationId xmlns:p14="http://schemas.microsoft.com/office/powerpoint/2010/main" val="2219331233"/>
+      </p:ext>
+    </p:extLst>
   </p:cSld>
   <p:clrMapOvr>
     <a:masterClrMapping/>
@@ -1759,6 +1816,7 @@
                   <a:prstClr val="black"/>
                 </a:solidFill>
               </a:rPr>
+              <a:t>3</a:t>
             </a:fld>
             <a:endParaRPr lang="en-US" altLang="zh-CN" dirty="0">
               <a:solidFill>
@@ -1769,6 +1827,11 @@
         </p:txBody>
       </p:sp>
     </p:spTree>
+    <p:extLst>
+      <p:ext uri="{BB962C8B-B14F-4D97-AF65-F5344CB8AC3E}">
+        <p14:creationId xmlns:p14="http://schemas.microsoft.com/office/powerpoint/2010/main" val="829054319"/>
+      </p:ext>
+    </p:extLst>
   </p:cSld>
   <p:clrMapOvr>
     <a:masterClrMapping/>
@@ -1862,6 +1925,7 @@
                 <a:latin typeface="Calibri" panose="020F0502020204030204" pitchFamily="34" charset="0"/>
                 <a:ea typeface="宋体" panose="02010600030101010101" pitchFamily="2" charset="-122"/>
               </a:rPr>
+              <a:t>4</a:t>
             </a:fld>
             <a:endParaRPr lang="en-US" altLang="zh-CN" sz="1200" dirty="0">
               <a:latin typeface="Calibri" panose="020F0502020204030204" pitchFamily="34" charset="0"/>
@@ -1871,6 +1935,11 @@
         </p:txBody>
       </p:sp>
     </p:spTree>
+    <p:extLst>
+      <p:ext uri="{BB962C8B-B14F-4D97-AF65-F5344CB8AC3E}">
+        <p14:creationId xmlns:p14="http://schemas.microsoft.com/office/powerpoint/2010/main" val="2467223751"/>
+      </p:ext>
+    </p:extLst>
   </p:cSld>
   <p:clrMapOvr>
     <a:masterClrMapping/>
@@ -1964,6 +2033,7 @@
                 <a:latin typeface="Calibri" panose="020F0502020204030204" pitchFamily="34" charset="0"/>
                 <a:ea typeface="宋体" panose="02010600030101010101" pitchFamily="2" charset="-122"/>
               </a:rPr>
+              <a:t>5</a:t>
             </a:fld>
             <a:endParaRPr lang="en-US" altLang="zh-CN" sz="1200" dirty="0">
               <a:latin typeface="Calibri" panose="020F0502020204030204" pitchFamily="34" charset="0"/>
@@ -1973,6 +2043,11 @@
         </p:txBody>
       </p:sp>
     </p:spTree>
+    <p:extLst>
+      <p:ext uri="{BB962C8B-B14F-4D97-AF65-F5344CB8AC3E}">
+        <p14:creationId xmlns:p14="http://schemas.microsoft.com/office/powerpoint/2010/main" val="606699412"/>
+      </p:ext>
+    </p:extLst>
   </p:cSld>
   <p:clrMapOvr>
     <a:masterClrMapping/>
@@ -2117,6 +2192,7 @@
                 <a:latin typeface="Calibri" panose="020F0502020204030204" pitchFamily="34" charset="0"/>
                 <a:ea typeface="宋体" panose="02010600030101010101" pitchFamily="2" charset="-122"/>
               </a:rPr>
+              <a:t>6</a:t>
             </a:fld>
             <a:endParaRPr lang="en-US" altLang="zh-CN" sz="1200">
               <a:latin typeface="Calibri" panose="020F0502020204030204" pitchFamily="34" charset="0"/>
@@ -2126,6 +2202,11 @@
         </p:txBody>
       </p:sp>
     </p:spTree>
+    <p:extLst>
+      <p:ext uri="{BB962C8B-B14F-4D97-AF65-F5344CB8AC3E}">
+        <p14:creationId xmlns:p14="http://schemas.microsoft.com/office/powerpoint/2010/main" val="719769669"/>
+      </p:ext>
+    </p:extLst>
   </p:cSld>
   <p:clrMapOvr>
     <a:masterClrMapping/>
@@ -2270,6 +2351,7 @@
                 <a:latin typeface="Calibri" panose="020F0502020204030204" pitchFamily="34" charset="0"/>
                 <a:ea typeface="宋体" panose="02010600030101010101" pitchFamily="2" charset="-122"/>
               </a:rPr>
+              <a:t>7</a:t>
             </a:fld>
             <a:endParaRPr lang="en-US" altLang="zh-CN" sz="1200">
               <a:latin typeface="Calibri" panose="020F0502020204030204" pitchFamily="34" charset="0"/>
@@ -2279,6 +2361,11 @@
         </p:txBody>
       </p:sp>
     </p:spTree>
+    <p:extLst>
+      <p:ext uri="{BB962C8B-B14F-4D97-AF65-F5344CB8AC3E}">
+        <p14:creationId xmlns:p14="http://schemas.microsoft.com/office/powerpoint/2010/main" val="1987137654"/>
+      </p:ext>
+    </p:extLst>
   </p:cSld>
   <p:clrMapOvr>
     <a:masterClrMapping/>
@@ -2423,6 +2510,7 @@
                 <a:latin typeface="Calibri" panose="020F0502020204030204" pitchFamily="34" charset="0"/>
                 <a:ea typeface="宋体" panose="02010600030101010101" pitchFamily="2" charset="-122"/>
               </a:rPr>
+              <a:t>8</a:t>
             </a:fld>
             <a:endParaRPr lang="en-US" altLang="zh-CN" sz="1200">
               <a:latin typeface="Calibri" panose="020F0502020204030204" pitchFamily="34" charset="0"/>
@@ -2432,6 +2520,11 @@
         </p:txBody>
       </p:sp>
     </p:spTree>
+    <p:extLst>
+      <p:ext uri="{BB962C8B-B14F-4D97-AF65-F5344CB8AC3E}">
+        <p14:creationId xmlns:p14="http://schemas.microsoft.com/office/powerpoint/2010/main" val="3101506480"/>
+      </p:ext>
+    </p:extLst>
   </p:cSld>
   <p:clrMapOvr>
     <a:masterClrMapping/>
@@ -2461,6 +2554,13 @@
   <p:clrMapOvr>
     <a:masterClrMapping/>
   </p:clrMapOvr>
+  <p:timing>
+    <p:tnLst>
+      <p:par>
+        <p:cTn id="1" dur="indefinite" restart="never" nodeType="tmRoot"/>
+      </p:par>
+    </p:tnLst>
+  </p:timing>
 </p:sldLayout>
 </file>
 
@@ -2529,6 +2629,7 @@
                 <a:ea typeface="+mn-ea"/>
                 <a:cs typeface="+mn-cs"/>
               </a:rPr>
+              <a:t>‹#›</a:t>
             </a:fld>
             <a:endParaRPr lang="en-US" strike="noStrike" noProof="1"/>
           </a:p>
@@ -2542,6 +2643,13 @@
   <p:transition>
     <p:fade/>
   </p:transition>
+  <p:timing>
+    <p:tnLst>
+      <p:par>
+        <p:cTn id="1" dur="indefinite" restart="never" nodeType="tmRoot"/>
+      </p:par>
+    </p:tnLst>
+  </p:timing>
 </p:sldLayout>
 </file>
 
@@ -2654,6 +2762,7 @@
                 <a:ea typeface="+mn-ea"/>
                 <a:cs typeface="+mn-cs"/>
               </a:rPr>
+              <a:t>‹#›</a:t>
             </a:fld>
             <a:endParaRPr lang="en-US" strike="noStrike" noProof="1"/>
           </a:p>
@@ -2667,6 +2776,13 @@
   <p:transition>
     <p:fade/>
   </p:transition>
+  <p:timing>
+    <p:tnLst>
+      <p:par>
+        <p:cTn id="1" dur="indefinite" restart="never" nodeType="tmRoot"/>
+      </p:par>
+    </p:tnLst>
+  </p:timing>
 </p:sldLayout>
 </file>
 
@@ -2711,6 +2827,7 @@
                 <a:ea typeface="+mn-ea"/>
                 <a:cs typeface="+mn-cs"/>
               </a:rPr>
+              <a:t>‹#›</a:t>
             </a:fld>
             <a:endParaRPr lang="en-US" strike="noStrike" noProof="1"/>
           </a:p>
@@ -2724,6 +2841,13 @@
   <p:transition>
     <p:fade/>
   </p:transition>
+  <p:timing>
+    <p:tnLst>
+      <p:par>
+        <p:cTn id="1" dur="indefinite" restart="never" nodeType="tmRoot"/>
+      </p:par>
+    </p:tnLst>
+  </p:timing>
 </p:sldLayout>
 </file>
 
@@ -2787,12 +2911,6 @@
               </a:rPr>
               <a:t>                                </a:t>
             </a:r>
-            <a:endParaRPr lang="zh-CN" altLang="en-US">
-              <a:solidFill>
-                <a:schemeClr val="bg1"/>
-              </a:solidFill>
-              <a:latin typeface="Calibri" panose="020F0502020204030204" pitchFamily="34" charset="0"/>
-            </a:endParaRPr>
           </a:p>
           <a:p>
             <a:pPr lvl="0"/>
@@ -2805,12 +2923,6 @@
               </a:rPr>
               <a:t>                              </a:t>
             </a:r>
-            <a:endParaRPr lang="zh-CN" altLang="en-US">
-              <a:solidFill>
-                <a:schemeClr val="bg1"/>
-              </a:solidFill>
-              <a:latin typeface="Calibri" panose="020F0502020204030204" pitchFamily="34" charset="0"/>
-            </a:endParaRPr>
           </a:p>
         </p:txBody>
       </p:sp>
@@ -2968,13 +3080,6 @@
               </a:rPr>
               <a:t>www.foryouge.com</a:t>
             </a:r>
-            <a:endParaRPr lang="en-US" altLang="zh-CN" sz="1400" dirty="0">
-              <a:solidFill>
-                <a:schemeClr val="bg1"/>
-              </a:solidFill>
-              <a:latin typeface="Arial" panose="020B0604020202020204" pitchFamily="34" charset="0"/>
-              <a:ea typeface="微软雅黑" panose="020B0503020204020204" pitchFamily="34" charset="-122"/>
-            </a:endParaRPr>
           </a:p>
         </p:txBody>
       </p:sp>
@@ -2987,7 +3092,7 @@
           <p:nvPr userDrawn="1"/>
         </p:nvPicPr>
         <p:blipFill>
-          <a:blip r:embed="rId2"/>
+          <a:blip r:embed="rId3"/>
           <a:stretch>
             <a:fillRect/>
           </a:stretch>
@@ -3012,6 +3117,13 @@
   <p:sldLayoutIdLst>
     <p:sldLayoutId id="2147483649" r:id="rId1"/>
   </p:sldLayoutIdLst>
+  <p:timing>
+    <p:tnLst>
+      <p:par>
+        <p:cTn id="1" dur="indefinite" restart="never" nodeType="tmRoot"/>
+      </p:par>
+    </p:tnLst>
+  </p:timing>
   <p:hf sldNum="0" hdr="0" ftr="0" dt="0"/>
   <p:txStyles>
     <p:titleStyle>
@@ -3488,64 +3600,6 @@
           </a:fontRef>
         </p:style>
       </p:cxnSp>
-      <p:sp>
-        <p:nvSpPr>
-          <p:cNvPr id="4" name="Ellipse 3" hidden="1"/>
-          <p:cNvSpPr/>
-          <p:nvPr userDrawn="1">
-            <p:custDataLst>
-              <p:tags r:id="rId4"/>
-            </p:custDataLst>
-          </p:nvPr>
-        </p:nvSpPr>
-        <p:spPr>
-          <a:xfrm>
-            <a:off x="-1270000" y="-952500"/>
-            <a:ext cx="0" cy="0"/>
-          </a:xfrm>
-          <a:prstGeom prst="ellipse">
-            <a:avLst/>
-          </a:prstGeom>
-          <a:solidFill>
-            <a:schemeClr val="accent1"/>
-          </a:solidFill>
-          <a:ln w="9525">
-            <a:solidFill>
-              <a:schemeClr val="tx1"/>
-            </a:solidFill>
-          </a:ln>
-        </p:spPr>
-        <p:style>
-          <a:lnRef idx="1">
-            <a:schemeClr val="accent1"/>
-          </a:lnRef>
-          <a:fillRef idx="0">
-            <a:schemeClr val="accent1"/>
-          </a:fillRef>
-          <a:effectRef idx="0">
-            <a:schemeClr val="accent1"/>
-          </a:effectRef>
-          <a:fontRef idx="minor">
-            <a:schemeClr val="tx1"/>
-          </a:fontRef>
-        </p:style>
-        <p:txBody>
-          <a:bodyPr anchor="ctr"/>
-          <a:lstStyle/>
-          <a:p>
-            <a:pPr algn="ctr" fontAlgn="auto">
-              <a:defRPr/>
-            </a:pPr>
-            <a:endParaRPr lang="de-DE" sz="1600" strike="noStrike" noProof="1">
-              <a:solidFill>
-                <a:schemeClr val="bg2">
-                  <a:lumMod val="10000"/>
-                </a:schemeClr>
-              </a:solidFill>
-            </a:endParaRPr>
-          </a:p>
-        </p:txBody>
-      </p:sp>
       <p:pic>
         <p:nvPicPr>
           <p:cNvPr id="2053" name="Picture 2" descr="C:\Users\Administrator\Desktop\ADAYO+通用.png"/>
@@ -3616,6 +3670,7 @@
                 <a:ea typeface="+mn-ea"/>
                 <a:cs typeface="+mn-cs"/>
               </a:rPr>
+              <a:t>‹#›</a:t>
             </a:fld>
             <a:endParaRPr lang="en-US" strike="noStrike" noProof="1"/>
           </a:p>
@@ -3632,6 +3687,13 @@
   <p:transition>
     <p:fade/>
   </p:transition>
+  <p:timing>
+    <p:tnLst>
+      <p:par>
+        <p:cTn id="1" dur="indefinite" restart="never" nodeType="tmRoot"/>
+      </p:par>
+    </p:tnLst>
+  </p:timing>
   <p:hf sldNum="0" hdr="0" ftr="0" dt="0"/>
   <p:txStyles>
     <p:titleStyle>
@@ -4120,10 +4182,6 @@
               </a:rPr>
               <a:t>{{Content}}</a:t>
             </a:r>
-            <a:endParaRPr lang="en-US" b="1" dirty="0">
-              <a:latin typeface="微软雅黑" panose="020B0503020204020204" pitchFamily="34" charset="-122"/>
-              <a:ea typeface="微软雅黑" panose="020B0503020204020204" pitchFamily="34" charset="-122"/>
-            </a:endParaRPr>
           </a:p>
         </p:txBody>
       </p:sp>
@@ -4445,6 +4503,7 @@
                 </a:solidFill>
                 <a:latin typeface="Arial" panose="020B0604020202020204" pitchFamily="34" charset="0"/>
               </a:rPr>
+              <a:t>9</a:t>
             </a:fld>
             <a:endParaRPr lang="en-US" altLang="zh-CN" sz="1000" b="1">
               <a:solidFill>
@@ -4497,13 +4556,6 @@
                         </a:rPr>
                         <a:t>编号</a:t>
                       </a:r>
-                      <a:endParaRPr lang="zh-CN" altLang="en-US" sz="1200" b="1" dirty="0" smtClean="0">
-                        <a:solidFill>
-                          <a:srgbClr val="000000"/>
-                        </a:solidFill>
-                        <a:latin typeface="微软雅黑" panose="020B0503020204020204" pitchFamily="34" charset="-122"/>
-                        <a:ea typeface="微软雅黑" panose="020B0503020204020204" pitchFamily="34" charset="-122"/>
-                      </a:endParaRPr>
                     </a:p>
                   </a:txBody>
                   <a:tcPr marL="91433" marR="91433" marT="45716" marB="45716" anchor="ctr">
@@ -4678,14 +4730,6 @@
                         </a:rPr>
                         <a:t> </a:t>
                       </a:r>
-                      <a:endParaRPr lang="en-US" altLang="zh-CN" sz="1200" b="1" dirty="0" smtClean="0">
-                        <a:solidFill>
-                          <a:srgbClr val="000000"/>
-                        </a:solidFill>
-                        <a:latin typeface="微软雅黑" panose="020B0503020204020204" pitchFamily="34" charset="-122"/>
-                        <a:ea typeface="微软雅黑" panose="020B0503020204020204" pitchFamily="34" charset="-122"/>
-                        <a:cs typeface="微软雅黑" panose="020B0503020204020204" pitchFamily="34" charset="-122"/>
-                      </a:endParaRPr>
                     </a:p>
                   </a:txBody>
                   <a:tcPr marL="91433" marR="91433" marT="45716" marB="45716" anchor="ctr">
@@ -4748,13 +4792,6 @@
                         </a:rPr>
                         <a:t>日期</a:t>
                       </a:r>
-                      <a:endParaRPr lang="zh-CN" altLang="en-US" sz="1200" b="1" dirty="0" smtClean="0">
-                        <a:solidFill>
-                          <a:srgbClr val="000000"/>
-                        </a:solidFill>
-                        <a:latin typeface="微软雅黑" panose="020B0503020204020204" pitchFamily="34" charset="-122"/>
-                        <a:ea typeface="微软雅黑" panose="020B0503020204020204" pitchFamily="34" charset="-122"/>
-                      </a:endParaRPr>
                     </a:p>
                   </a:txBody>
                   <a:tcPr marL="91433" marR="91433" marT="45716" marB="45716" anchor="ctr">
@@ -4817,13 +4854,6 @@
                         </a:rPr>
                         <a:t>状态</a:t>
                       </a:r>
-                      <a:endParaRPr lang="zh-CN" altLang="en-US" sz="1200" b="1" dirty="0" smtClean="0">
-                        <a:solidFill>
-                          <a:srgbClr val="000000"/>
-                        </a:solidFill>
-                        <a:latin typeface="微软雅黑" panose="020B0503020204020204" pitchFamily="34" charset="-122"/>
-                        <a:ea typeface="微软雅黑" panose="020B0503020204020204" pitchFamily="34" charset="-122"/>
-                      </a:endParaRPr>
                     </a:p>
                   </a:txBody>
                   <a:tcPr marL="91433" marR="91433" marT="45716" marB="45716" anchor="ctr">
@@ -5258,6 +5288,7 @@
             <a:bodyPr wrap="square" anchor="t">
               <a:spAutoFit/>
             </a:bodyPr>
+            <a:lstStyle/>
             <a:p>
               <a:pPr>
                 <a:lnSpc>
@@ -5337,6 +5368,7 @@
           </p:style>
           <p:txBody>
             <a:bodyPr anchor="ctr"/>
+            <a:lstStyle/>
             <a:p>
               <a:pPr algn="ctr" fontAlgn="auto">
                 <a:defRPr/>
@@ -5521,6 +5553,7 @@
                 </a:solidFill>
                 <a:latin typeface="Arial" panose="020B0604020202020204" pitchFamily="34" charset="0"/>
               </a:rPr>
+              <a:t>10</a:t>
             </a:fld>
             <a:endParaRPr lang="en-US" altLang="zh-CN" sz="1000" b="1">
               <a:solidFill>
@@ -5572,14 +5605,6 @@
                         </a:rPr>
                         <a:t>编号</a:t>
                       </a:r>
-                      <a:endParaRPr lang="zh-CN" altLang="en-US" sz="1200" b="1" i="0" u="none" strike="noStrike" dirty="0">
-                        <a:solidFill>
-                          <a:srgbClr val="000000"/>
-                        </a:solidFill>
-                        <a:effectLst/>
-                        <a:latin typeface="微软雅黑" panose="020B0503020204020204" pitchFamily="34" charset="-122"/>
-                        <a:ea typeface="微软雅黑" panose="020B0503020204020204" pitchFamily="34" charset="-122"/>
-                      </a:endParaRPr>
                     </a:p>
                   </a:txBody>
                   <a:tcPr marL="72000" marR="72000" marT="6350" marB="0" anchor="ctr">
@@ -5643,14 +5668,6 @@
                         </a:rPr>
                         <a:t>验证方式</a:t>
                       </a:r>
-                      <a:endParaRPr lang="zh-CN" altLang="en-US" sz="1200" b="1" i="0" u="none" strike="noStrike" dirty="0">
-                        <a:solidFill>
-                          <a:srgbClr val="000000"/>
-                        </a:solidFill>
-                        <a:effectLst/>
-                        <a:latin typeface="微软雅黑" panose="020B0503020204020204" pitchFamily="34" charset="-122"/>
-                        <a:ea typeface="微软雅黑" panose="020B0503020204020204" pitchFamily="34" charset="-122"/>
-                      </a:endParaRPr>
                     </a:p>
                   </a:txBody>
                   <a:tcPr marL="72000" marR="72000" marT="6350" marB="0" anchor="ctr">
@@ -5714,14 +5731,6 @@
                         </a:rPr>
                         <a:t>结果</a:t>
                       </a:r>
-                      <a:endParaRPr lang="zh-CN" altLang="en-US" sz="1200" b="1" i="0" u="none" strike="noStrike">
-                        <a:solidFill>
-                          <a:srgbClr val="000000"/>
-                        </a:solidFill>
-                        <a:effectLst/>
-                        <a:latin typeface="微软雅黑" panose="020B0503020204020204" pitchFamily="34" charset="-122"/>
-                        <a:ea typeface="微软雅黑" panose="020B0503020204020204" pitchFamily="34" charset="-122"/>
-                      </a:endParaRPr>
                     </a:p>
                   </a:txBody>
                   <a:tcPr marL="72000" marR="72000" marT="6350" marB="0" anchor="ctr">
@@ -5807,14 +5816,6 @@
                         </a:rPr>
                         <a:t>负责人 </a:t>
                       </a:r>
-                      <a:endParaRPr lang="zh-CN" altLang="en-US" sz="1200" b="1" i="0" u="none" strike="noStrike">
-                        <a:solidFill>
-                          <a:srgbClr val="000000"/>
-                        </a:solidFill>
-                        <a:effectLst/>
-                        <a:latin typeface="微软雅黑" panose="020B0503020204020204" pitchFamily="34" charset="-122"/>
-                        <a:ea typeface="微软雅黑" panose="020B0503020204020204" pitchFamily="34" charset="-122"/>
-                      </a:endParaRPr>
                     </a:p>
                   </a:txBody>
                   <a:tcPr marL="72000" marR="72000" marT="6350" marB="0" anchor="ctr">
@@ -5878,14 +5879,6 @@
                         </a:rPr>
                         <a:t>日期</a:t>
                       </a:r>
-                      <a:endParaRPr lang="zh-CN" altLang="en-US" sz="1200" b="1" i="0" u="none" strike="noStrike" dirty="0">
-                        <a:solidFill>
-                          <a:srgbClr val="000000"/>
-                        </a:solidFill>
-                        <a:effectLst/>
-                        <a:latin typeface="微软雅黑" panose="020B0503020204020204" pitchFamily="34" charset="-122"/>
-                        <a:ea typeface="微软雅黑" panose="020B0503020204020204" pitchFamily="34" charset="-122"/>
-                      </a:endParaRPr>
                     </a:p>
                   </a:txBody>
                   <a:tcPr marL="72000" marR="72000" marT="6350" marB="0" anchor="ctr">
@@ -6284,6 +6277,7 @@
             <a:bodyPr wrap="square" anchor="t">
               <a:spAutoFit/>
             </a:bodyPr>
+            <a:lstStyle/>
             <a:p>
               <a:pPr>
                 <a:lnSpc>
@@ -6363,6 +6357,7 @@
           </p:style>
           <p:txBody>
             <a:bodyPr anchor="ctr"/>
+            <a:lstStyle/>
             <a:p>
               <a:pPr algn="ctr" fontAlgn="auto">
                 <a:defRPr/>
@@ -6547,6 +6542,7 @@
                 </a:solidFill>
                 <a:latin typeface="Arial" panose="020B0604020202020204" pitchFamily="34" charset="0"/>
               </a:rPr>
+              <a:t>11</a:t>
             </a:fld>
             <a:endParaRPr lang="en-US" altLang="zh-CN" sz="1000" b="1">
               <a:solidFill>
@@ -6612,14 +6608,6 @@
                         </a:rPr>
                         <a:t>行动</a:t>
                       </a:r>
-                      <a:endParaRPr lang="zh-CN" altLang="en-US" sz="1000" b="1" i="0" u="none" strike="noStrike" kern="1200" cap="none" spc="0" baseline="0" dirty="0">
-                        <a:solidFill>
-                          <a:srgbClr val="000000"/>
-                        </a:solidFill>
-                        <a:latin typeface="微软雅黑" panose="020B0503020204020204" pitchFamily="34" charset="-122"/>
-                        <a:ea typeface="微软雅黑" panose="020B0503020204020204" pitchFamily="34" charset="-122"/>
-                        <a:cs typeface="Droid Sans" charset="0"/>
-                      </a:endParaRPr>
                     </a:p>
                   </a:txBody>
                   <a:tcPr marL="91427" marR="91427" marT="45707" marB="45707" anchor="ctr">
@@ -6712,14 +6700,6 @@
                         </a:rPr>
                         <a:t>否</a:t>
                       </a:r>
-                      <a:endParaRPr lang="zh-CN" altLang="en-US" sz="1000" b="1" i="0" u="none" strike="noStrike" kern="1200" cap="none" spc="0" baseline="0">
-                        <a:solidFill>
-                          <a:srgbClr val="000000"/>
-                        </a:solidFill>
-                        <a:latin typeface="微软雅黑" panose="020B0503020204020204" pitchFamily="34" charset="-122"/>
-                        <a:ea typeface="微软雅黑" panose="020B0503020204020204" pitchFamily="34" charset="-122"/>
-                        <a:cs typeface="Droid Sans" charset="0"/>
-                      </a:endParaRPr>
                     </a:p>
                   </a:txBody>
                   <a:tcPr marL="91427" marR="91427" marT="45707" marB="45707" anchor="ctr">
@@ -6812,14 +6792,6 @@
                         </a:rPr>
                         <a:t>意见</a:t>
                       </a:r>
-                      <a:endParaRPr lang="zh-CN" altLang="en-US" sz="1000" b="1" i="0" u="none" strike="noStrike" kern="1200" cap="none" spc="0" baseline="0">
-                        <a:solidFill>
-                          <a:srgbClr val="000000"/>
-                        </a:solidFill>
-                        <a:latin typeface="微软雅黑" panose="020B0503020204020204" pitchFamily="34" charset="-122"/>
-                        <a:ea typeface="微软雅黑" panose="020B0503020204020204" pitchFamily="34" charset="-122"/>
-                        <a:cs typeface="Droid Sans" charset="0"/>
-                      </a:endParaRPr>
                     </a:p>
                   </a:txBody>
                   <a:tcPr marL="91427" marR="91427" marT="45707" marB="45707" anchor="ctr">
@@ -6912,14 +6884,6 @@
                         </a:rPr>
                         <a:t>负责人</a:t>
                       </a:r>
-                      <a:endParaRPr lang="zh-CN" altLang="en-US" sz="1000" b="1" i="0" u="none" strike="noStrike" kern="1200" cap="none" spc="0" baseline="0">
-                        <a:solidFill>
-                          <a:srgbClr val="000000"/>
-                        </a:solidFill>
-                        <a:latin typeface="微软雅黑" panose="020B0503020204020204" pitchFamily="34" charset="-122"/>
-                        <a:ea typeface="微软雅黑" panose="020B0503020204020204" pitchFamily="34" charset="-122"/>
-                        <a:cs typeface="Droid Sans" charset="0"/>
-                      </a:endParaRPr>
                     </a:p>
                   </a:txBody>
                   <a:tcPr marL="91427" marR="91427" marT="45707" marB="45707" anchor="ctr">
@@ -6990,14 +6954,6 @@
                         </a:rPr>
                         <a:t>日期</a:t>
                       </a:r>
-                      <a:endParaRPr lang="zh-CN" altLang="en-US" sz="1000" b="1" i="0" u="none" strike="noStrike" kern="1200" cap="none" spc="0" baseline="0">
-                        <a:solidFill>
-                          <a:srgbClr val="000000"/>
-                        </a:solidFill>
-                        <a:latin typeface="微软雅黑" panose="020B0503020204020204" pitchFamily="34" charset="-122"/>
-                        <a:ea typeface="微软雅黑" panose="020B0503020204020204" pitchFamily="34" charset="-122"/>
-                        <a:cs typeface="Droid Sans" charset="0"/>
-                      </a:endParaRPr>
                     </a:p>
                   </a:txBody>
                   <a:tcPr marL="91427" marR="91427" marT="45707" marB="45707" anchor="ctr">
@@ -7068,14 +7024,6 @@
                         </a:rPr>
                         <a:t>状态</a:t>
                       </a:r>
-                      <a:endParaRPr lang="zh-CN" altLang="en-US" sz="1000" b="1" i="0" u="none" strike="noStrike" kern="1200" cap="none" spc="0" baseline="0">
-                        <a:solidFill>
-                          <a:srgbClr val="000000"/>
-                        </a:solidFill>
-                        <a:latin typeface="微软雅黑" panose="020B0503020204020204" pitchFamily="34" charset="-122"/>
-                        <a:ea typeface="微软雅黑" panose="020B0503020204020204" pitchFamily="34" charset="-122"/>
-                        <a:cs typeface="Droid Sans" charset="0"/>
-                      </a:endParaRPr>
                     </a:p>
                   </a:txBody>
                   <a:tcPr marL="91427" marR="91427" marT="45707" marB="45707" anchor="ctr">
@@ -10785,6 +10733,7 @@
             <a:bodyPr wrap="square" anchor="t">
               <a:spAutoFit/>
             </a:bodyPr>
+            <a:lstStyle/>
             <a:p>
               <a:pPr>
                 <a:lnSpc>
@@ -10816,14 +10765,6 @@
                 </a:rPr>
                 <a:t>预防措施</a:t>
               </a:r>
-              <a:endParaRPr lang="zh-CN" altLang="en-US" sz="1400" b="1">
-                <a:solidFill>
-                  <a:srgbClr val="000000"/>
-                </a:solidFill>
-                <a:latin typeface="微软雅黑" panose="020B0503020204020204" pitchFamily="34" charset="-122"/>
-                <a:ea typeface="微软雅黑" panose="020B0503020204020204" pitchFamily="34" charset="-122"/>
-                <a:sym typeface="微软雅黑" panose="020B0503020204020204" pitchFamily="34" charset="-122"/>
-              </a:endParaRPr>
             </a:p>
           </p:txBody>
         </p:sp>
@@ -10864,6 +10805,7 @@
           </p:style>
           <p:txBody>
             <a:bodyPr anchor="ctr"/>
+            <a:lstStyle/>
             <a:p>
               <a:pPr algn="ctr" fontAlgn="auto">
                 <a:defRPr/>
@@ -11048,6 +10990,7 @@
                 </a:solidFill>
                 <a:latin typeface="Arial" panose="020B0604020202020204" pitchFamily="34" charset="0"/>
               </a:rPr>
+              <a:t>12</a:t>
             </a:fld>
             <a:endParaRPr lang="en-US" altLang="zh-CN" sz="1000" b="1">
               <a:solidFill>
@@ -11117,18 +11060,7 @@
                 <a:ea typeface="微软雅黑" panose="020B0503020204020204" pitchFamily="34" charset="-122"/>
                 <a:sym typeface="+mn-ea"/>
               </a:rPr>
-              <a:t>{{content}}</a:t>
-            </a:r>
-            <a:r>
-              <a:rPr lang="en-US" sz="1200" dirty="0">
-                <a:solidFill>
-                  <a:srgbClr val="000000"/>
-                </a:solidFill>
-                <a:latin typeface="微软雅黑" panose="020B0503020204020204" pitchFamily="34" charset="-122"/>
-                <a:ea typeface="微软雅黑" panose="020B0503020204020204" pitchFamily="34" charset="-122"/>
-                <a:sym typeface="+mn-ea"/>
-              </a:rPr>
-              <a:t>  </a:t>
+              <a:t>{{content}}  </a:t>
             </a:r>
             <a:endParaRPr sz="1200" dirty="0" smtClean="0">
               <a:latin typeface="微软雅黑" panose="020B0503020204020204" pitchFamily="34" charset="-122"/>
@@ -11333,6 +11265,7 @@
             <a:bodyPr wrap="square" anchor="t">
               <a:spAutoFit/>
             </a:bodyPr>
+            <a:lstStyle/>
             <a:p>
               <a:pPr>
                 <a:lnSpc>
@@ -11412,6 +11345,7 @@
           </p:style>
           <p:txBody>
             <a:bodyPr anchor="ctr"/>
+            <a:lstStyle/>
             <a:p>
               <a:pPr algn="ctr" fontAlgn="auto">
                 <a:defRPr/>
@@ -11519,7 +11453,7 @@
           <p:nvPr/>
         </p:nvPicPr>
         <p:blipFill>
-          <a:blip r:embed="rId1"/>
+          <a:blip r:embed="rId3"/>
           <a:stretch>
             <a:fillRect/>
           </a:stretch>
@@ -11582,14 +11516,6 @@
               </a:rPr>
               <a:t>谢 谢</a:t>
             </a:r>
-            <a:endParaRPr lang="zh-CN" altLang="en-US" sz="2800">
-              <a:solidFill>
-                <a:schemeClr val="bg1"/>
-              </a:solidFill>
-              <a:latin typeface="微软雅黑" panose="020B0503020204020204" pitchFamily="34" charset="-122"/>
-              <a:ea typeface="微软雅黑" panose="020B0503020204020204" pitchFamily="34" charset="-122"/>
-              <a:sym typeface="宋体" panose="02010600030101010101" pitchFamily="2" charset="-122"/>
-            </a:endParaRPr>
           </a:p>
         </p:txBody>
       </p:sp>
@@ -11602,7 +11528,7 @@
           <p:nvPr/>
         </p:nvPicPr>
         <p:blipFill>
-          <a:blip r:embed="rId2"/>
+          <a:blip r:embed="rId4"/>
           <a:stretch>
             <a:fillRect/>
           </a:stretch>
@@ -11654,10 +11580,6 @@
               </a:rPr>
               <a:t>华阳汽车电子公众号</a:t>
             </a:r>
-            <a:endParaRPr lang="zh-CN" altLang="zh-CN" sz="900">
-              <a:latin typeface="微软雅黑" panose="020B0503020204020204" pitchFamily="34" charset="-122"/>
-              <a:ea typeface="微软雅黑" panose="020B0503020204020204" pitchFamily="34" charset="-122"/>
-            </a:endParaRPr>
           </a:p>
         </p:txBody>
       </p:sp>
@@ -11670,7 +11592,7 @@
           <p:nvPr/>
         </p:nvPicPr>
         <p:blipFill>
-          <a:blip r:embed="rId3"/>
+          <a:blip r:embed="rId5"/>
           <a:stretch>
             <a:fillRect/>
           </a:stretch>
@@ -11858,6 +11780,7 @@
                 </a:solidFill>
                 <a:latin typeface="Arial" panose="020B0604020202020204" pitchFamily="34" charset="0"/>
               </a:rPr>
+              <a:t>1</a:t>
             </a:fld>
             <a:endParaRPr lang="en-US" altLang="zh-CN" sz="1000" b="1" dirty="0">
               <a:solidFill>
@@ -11902,11 +11825,6 @@
               </a:rPr>
               <a:t>目录</a:t>
             </a:r>
-            <a:endParaRPr lang="zh-CN" altLang="en-US" sz="1200">
-              <a:latin typeface="微软雅黑" panose="020B0503020204020204" pitchFamily="34" charset="-122"/>
-              <a:ea typeface="微软雅黑" panose="020B0503020204020204" pitchFamily="34" charset="-122"/>
-              <a:sym typeface="黑体" panose="02010609060101010101" pitchFamily="49" charset="-122"/>
-            </a:endParaRPr>
           </a:p>
         </p:txBody>
       </p:sp>
@@ -12103,14 +12021,6 @@
                     </a:rPr>
                     <a:t>D1</a:t>
                   </a:r>
-                  <a:endParaRPr lang="en-US" altLang="zh-CN" sz="2100" strike="noStrike" noProof="1">
-                    <a:solidFill>
-                      <a:schemeClr val="bg1"/>
-                    </a:solidFill>
-                    <a:latin typeface="微软雅黑" panose="020B0503020204020204" pitchFamily="34" charset="-122"/>
-                    <a:ea typeface="微软雅黑" panose="020B0503020204020204" pitchFamily="34" charset="-122"/>
-                    <a:cs typeface="+mn-ea"/>
-                  </a:endParaRPr>
                 </a:p>
               </p:txBody>
             </p:sp>
@@ -12292,14 +12202,6 @@
                     </a:rPr>
                     <a:t>D2</a:t>
                   </a:r>
-                  <a:endParaRPr lang="en-US" altLang="zh-CN" sz="2100" strike="noStrike" noProof="1">
-                    <a:solidFill>
-                      <a:srgbClr val="FFFFFF"/>
-                    </a:solidFill>
-                    <a:latin typeface="微软雅黑" panose="020B0503020204020204" pitchFamily="34" charset="-122"/>
-                    <a:ea typeface="微软雅黑" panose="020B0503020204020204" pitchFamily="34" charset="-122"/>
-                    <a:cs typeface="+mn-ea"/>
-                  </a:endParaRPr>
                 </a:p>
               </p:txBody>
             </p:sp>
@@ -12469,14 +12371,6 @@
                     </a:rPr>
                     <a:t>D3</a:t>
                   </a:r>
-                  <a:endParaRPr lang="en-US" altLang="zh-CN" sz="2100" strike="noStrike" noProof="1">
-                    <a:solidFill>
-                      <a:schemeClr val="bg1"/>
-                    </a:solidFill>
-                    <a:latin typeface="微软雅黑" panose="020B0503020204020204" pitchFamily="34" charset="-122"/>
-                    <a:ea typeface="微软雅黑" panose="020B0503020204020204" pitchFamily="34" charset="-122"/>
-                    <a:cs typeface="+mn-ea"/>
-                  </a:endParaRPr>
                 </a:p>
               </p:txBody>
             </p:sp>
@@ -12550,14 +12444,6 @@
                     </a:rPr>
                     <a:t>原因分析</a:t>
                   </a:r>
-                  <a:endParaRPr lang="zh-CN" altLang="en-US" sz="1000" strike="noStrike" noProof="1" smtClean="0">
-                    <a:solidFill>
-                      <a:schemeClr val="bg1"/>
-                    </a:solidFill>
-                    <a:latin typeface="微软雅黑" panose="020B0503020204020204" pitchFamily="34" charset="-122"/>
-                    <a:ea typeface="微软雅黑" panose="020B0503020204020204" pitchFamily="34" charset="-122"/>
-                    <a:sym typeface="+mn-ea"/>
-                  </a:endParaRPr>
                 </a:p>
               </p:txBody>
             </p:sp>
@@ -12649,14 +12535,6 @@
                     </a:rPr>
                     <a:t>D4</a:t>
                   </a:r>
-                  <a:endParaRPr lang="en-US" altLang="zh-CN" sz="2100" strike="noStrike" noProof="1">
-                    <a:solidFill>
-                      <a:schemeClr val="bg1"/>
-                    </a:solidFill>
-                    <a:latin typeface="微软雅黑" panose="020B0503020204020204" pitchFamily="34" charset="-122"/>
-                    <a:ea typeface="微软雅黑" panose="020B0503020204020204" pitchFamily="34" charset="-122"/>
-                    <a:cs typeface="+mn-ea"/>
-                  </a:endParaRPr>
                 </a:p>
               </p:txBody>
             </p:sp>
@@ -12726,15 +12604,6 @@
                     </a:rPr>
                     <a:t>长期对策</a:t>
                   </a:r>
-                  <a:endParaRPr lang="zh-CN" altLang="en-US" sz="1000" strike="noStrike" noProof="1" smtClean="0">
-                    <a:solidFill>
-                      <a:schemeClr val="bg1"/>
-                    </a:solidFill>
-                    <a:latin typeface="微软雅黑" panose="020B0503020204020204" pitchFamily="34" charset="-122"/>
-                    <a:ea typeface="微软雅黑" panose="020B0503020204020204" pitchFamily="34" charset="-122"/>
-                    <a:cs typeface="+mn-cs"/>
-                    <a:sym typeface="+mn-ea"/>
-                  </a:endParaRPr>
                 </a:p>
               </p:txBody>
             </p:sp>
@@ -12826,14 +12695,6 @@
                     </a:rPr>
                     <a:t>D5</a:t>
                   </a:r>
-                  <a:endParaRPr lang="en-US" altLang="zh-CN" sz="2100" strike="noStrike" noProof="1">
-                    <a:solidFill>
-                      <a:schemeClr val="bg1"/>
-                    </a:solidFill>
-                    <a:latin typeface="微软雅黑" panose="020B0503020204020204" pitchFamily="34" charset="-122"/>
-                    <a:ea typeface="微软雅黑" panose="020B0503020204020204" pitchFamily="34" charset="-122"/>
-                    <a:cs typeface="+mn-ea"/>
-                  </a:endParaRPr>
                 </a:p>
               </p:txBody>
             </p:sp>
@@ -13007,14 +12868,6 @@
                     </a:rPr>
                     <a:t>D6</a:t>
                   </a:r>
-                  <a:endParaRPr lang="en-US" altLang="zh-CN" sz="2100" strike="noStrike" noProof="1">
-                    <a:solidFill>
-                      <a:schemeClr val="bg1"/>
-                    </a:solidFill>
-                    <a:latin typeface="微软雅黑" panose="020B0503020204020204" pitchFamily="34" charset="-122"/>
-                    <a:ea typeface="微软雅黑" panose="020B0503020204020204" pitchFamily="34" charset="-122"/>
-                    <a:cs typeface="+mn-ea"/>
-                  </a:endParaRPr>
                 </a:p>
               </p:txBody>
             </p:sp>
@@ -13185,14 +13038,6 @@
                     </a:rPr>
                     <a:t>D7</a:t>
                   </a:r>
-                  <a:endParaRPr lang="en-US" altLang="zh-CN" sz="2100" strike="noStrike" noProof="1">
-                    <a:solidFill>
-                      <a:schemeClr val="bg1"/>
-                    </a:solidFill>
-                    <a:latin typeface="微软雅黑" panose="020B0503020204020204" pitchFamily="34" charset="-122"/>
-                    <a:ea typeface="微软雅黑" panose="020B0503020204020204" pitchFamily="34" charset="-122"/>
-                    <a:cs typeface="+mn-ea"/>
-                  </a:endParaRPr>
                 </a:p>
               </p:txBody>
             </p:sp>
@@ -13366,14 +13211,6 @@
                     </a:rPr>
                     <a:t>D8</a:t>
                   </a:r>
-                  <a:endParaRPr lang="en-US" altLang="zh-CN" sz="2100" strike="noStrike" noProof="1">
-                    <a:solidFill>
-                      <a:schemeClr val="bg1"/>
-                    </a:solidFill>
-                    <a:latin typeface="微软雅黑" panose="020B0503020204020204" pitchFamily="34" charset="-122"/>
-                    <a:ea typeface="微软雅黑" panose="020B0503020204020204" pitchFamily="34" charset="-122"/>
-                    <a:cs typeface="+mn-ea"/>
-                  </a:endParaRPr>
                 </a:p>
               </p:txBody>
             </p:sp>
@@ -13726,6 +13563,7 @@
                 </a:solidFill>
                 <a:latin typeface="Arial" panose="020B0604020202020204" pitchFamily="34" charset="0"/>
               </a:rPr>
+              <a:t>2</a:t>
             </a:fld>
             <a:endParaRPr lang="en-US" altLang="zh-CN" sz="1000" b="1">
               <a:solidFill>
@@ -13863,13 +13701,6 @@
               </a:rPr>
               <a:t> </a:t>
             </a:r>
-            <a:endParaRPr lang="en-US" altLang="zh-CN" sz="1200" dirty="0">
-              <a:solidFill>
-                <a:srgbClr val="000000"/>
-              </a:solidFill>
-              <a:latin typeface="微软雅黑" panose="020B0503020204020204" pitchFamily="34" charset="-122"/>
-              <a:ea typeface="微软雅黑" panose="020B0503020204020204" pitchFamily="34" charset="-122"/>
-            </a:endParaRPr>
           </a:p>
           <a:p>
             <a:pPr indent="-171450" fontAlgn="auto">
@@ -14115,14 +13946,6 @@
                 </a:rPr>
                 <a:t>问题了解</a:t>
               </a:r>
-              <a:endParaRPr lang="zh-CN" altLang="en-US" sz="1400" b="1" dirty="0">
-                <a:solidFill>
-                  <a:srgbClr val="000000"/>
-                </a:solidFill>
-                <a:latin typeface="微软雅黑" panose="020B0503020204020204" pitchFamily="34" charset="-122"/>
-                <a:ea typeface="微软雅黑" panose="020B0503020204020204" pitchFamily="34" charset="-122"/>
-                <a:sym typeface="微软雅黑" panose="020B0503020204020204" pitchFamily="34" charset="-122"/>
-              </a:endParaRPr>
             </a:p>
           </p:txBody>
         </p:sp>
@@ -14430,6 +14253,7 @@
                 </a:solidFill>
                 <a:latin typeface="Arial" panose="020B0604020202020204" pitchFamily="34" charset="0"/>
               </a:rPr>
+              <a:t>3</a:t>
             </a:fld>
             <a:endParaRPr lang="en-US" altLang="zh-CN" sz="1000" dirty="0">
               <a:solidFill>
@@ -14487,13 +14311,6 @@
                         </a:rPr>
                         <a:t>序号</a:t>
                       </a:r>
-                      <a:endParaRPr sz="1200" u="none" strike="noStrike" dirty="0">
-                        <a:solidFill>
-                          <a:srgbClr val="000000"/>
-                        </a:solidFill>
-                        <a:latin typeface="微软雅黑" panose="020B0503020204020204" pitchFamily="34" charset="-122"/>
-                        <a:ea typeface="微软雅黑" panose="020B0503020204020204" pitchFamily="34" charset="-122"/>
-                      </a:endParaRPr>
                     </a:p>
                     <a:p>
                       <a:pPr algn="ctr" rtl="0" fontAlgn="ctr"/>
@@ -14540,13 +14357,6 @@
                         </a:rPr>
                         <a:t>团队成员</a:t>
                       </a:r>
-                      <a:endParaRPr sz="1200" u="none" strike="noStrike" dirty="0">
-                        <a:solidFill>
-                          <a:srgbClr val="000000"/>
-                        </a:solidFill>
-                        <a:latin typeface="微软雅黑" panose="020B0503020204020204" pitchFamily="34" charset="-122"/>
-                        <a:ea typeface="微软雅黑" panose="020B0503020204020204" pitchFamily="34" charset="-122"/>
-                      </a:endParaRPr>
                     </a:p>
                     <a:p>
                       <a:pPr algn="ctr" rtl="0" fontAlgn="ctr"/>
@@ -14593,13 +14403,6 @@
                         </a:rPr>
                         <a:t>角色</a:t>
                       </a:r>
-                      <a:endParaRPr sz="1200" u="none" strike="noStrike" dirty="0">
-                        <a:solidFill>
-                          <a:srgbClr val="000000"/>
-                        </a:solidFill>
-                        <a:latin typeface="微软雅黑" panose="020B0503020204020204" pitchFamily="34" charset="-122"/>
-                        <a:ea typeface="微软雅黑" panose="020B0503020204020204" pitchFamily="34" charset="-122"/>
-                      </a:endParaRPr>
                     </a:p>
                     <a:p>
                       <a:pPr algn="ctr" rtl="0" fontAlgn="ctr"/>
@@ -14613,13 +14416,6 @@
                         </a:rPr>
                         <a:t>(Character)</a:t>
                       </a:r>
-                      <a:endParaRPr sz="1200" b="0" i="0" u="none" strike="noStrike" dirty="0">
-                        <a:solidFill>
-                          <a:srgbClr val="000000"/>
-                        </a:solidFill>
-                        <a:latin typeface="微软雅黑" panose="020B0503020204020204" pitchFamily="34" charset="-122"/>
-                        <a:ea typeface="微软雅黑" panose="020B0503020204020204" pitchFamily="34" charset="-122"/>
-                      </a:endParaRPr>
                     </a:p>
                   </a:txBody>
                   <a:tcPr marL="9525" marR="9525" marT="9525" marB="0" anchor="ctr">
@@ -14646,13 +14442,6 @@
                         </a:rPr>
                         <a:t>职责</a:t>
                       </a:r>
-                      <a:endParaRPr sz="1200" u="none" strike="noStrike" dirty="0">
-                        <a:solidFill>
-                          <a:srgbClr val="000000"/>
-                        </a:solidFill>
-                        <a:latin typeface="微软雅黑" panose="020B0503020204020204" pitchFamily="34" charset="-122"/>
-                        <a:ea typeface="微软雅黑" panose="020B0503020204020204" pitchFamily="34" charset="-122"/>
-                      </a:endParaRPr>
                     </a:p>
                     <a:p>
                       <a:pPr algn="ctr" rtl="0" fontAlgn="ctr"/>
@@ -14678,6 +14467,65 @@
                       </a:r>
                       <a:r>
                         <a:rPr sz="1200" b="0" i="0" u="none" strike="noStrike" dirty="0">
+                          <a:solidFill>
+                            <a:srgbClr val="000000"/>
+                          </a:solidFill>
+                          <a:latin typeface="微软雅黑" panose="020B0503020204020204" pitchFamily="34" charset="-122"/>
+                          <a:ea typeface="微软雅黑" panose="020B0503020204020204" pitchFamily="34" charset="-122"/>
+                        </a:rPr>
+                        <a:t>)</a:t>
+                      </a:r>
+                    </a:p>
+                  </a:txBody>
+                  <a:tcPr marL="9525" marR="9525" marT="9525" marB="0" anchor="ctr">
+                    <a:solidFill>
+                      <a:schemeClr val="bg1">
+                        <a:lumMod val="85000"/>
+                      </a:schemeClr>
+                    </a:solidFill>
+                  </a:tcPr>
+                </a:tc>
+                <a:tc>
+                  <a:txBody>
+                    <a:bodyPr/>
+                    <a:lstStyle/>
+                    <a:p>
+                      <a:pPr algn="ctr" rtl="0" fontAlgn="ctr"/>
+                      <a:r>
+                        <a:rPr sz="1200" u="none" strike="noStrike" dirty="0">
+                          <a:solidFill>
+                            <a:srgbClr val="000000"/>
+                          </a:solidFill>
+                          <a:latin typeface="微软雅黑" panose="020B0503020204020204" pitchFamily="34" charset="-122"/>
+                          <a:ea typeface="微软雅黑" panose="020B0503020204020204" pitchFamily="34" charset="-122"/>
+                        </a:rPr>
+                        <a:t>联系电话&amp;邮箱</a:t>
+                      </a:r>
+                    </a:p>
+                    <a:p>
+                      <a:pPr algn="ctr" rtl="0" fontAlgn="ctr"/>
+                      <a:r>
+                        <a:rPr sz="1200" u="none" strike="noStrike" dirty="0">
+                          <a:solidFill>
+                            <a:srgbClr val="000000"/>
+                          </a:solidFill>
+                          <a:latin typeface="微软雅黑" panose="020B0503020204020204" pitchFamily="34" charset="-122"/>
+                          <a:ea typeface="微软雅黑" panose="020B0503020204020204" pitchFamily="34" charset="-122"/>
+                        </a:rPr>
+                        <a:t>(</a:t>
+                      </a:r>
+                      <a:r>
+                        <a:rPr sz="1200" b="0" i="0" u="none" strike="noStrike" kern="1200" dirty="0">
+                          <a:solidFill>
+                            <a:srgbClr val="000000"/>
+                          </a:solidFill>
+                          <a:latin typeface="微软雅黑" panose="020B0503020204020204" pitchFamily="34" charset="-122"/>
+                          <a:ea typeface="微软雅黑" panose="020B0503020204020204" pitchFamily="34" charset="-122"/>
+                        </a:rPr>
+                        <a:t>TEL</a:t>
+                      </a:r>
+                      <a:r>
+                        <a:rPr sz="1200" u="none" strike="noStrike" dirty="0">
                           <a:solidFill>
                             <a:srgbClr val="000000"/>
                           </a:solidFill>
@@ -14717,20 +14565,13 @@
                           <a:latin typeface="微软雅黑" panose="020B0503020204020204" pitchFamily="34" charset="-122"/>
                           <a:ea typeface="微软雅黑" panose="020B0503020204020204" pitchFamily="34" charset="-122"/>
                         </a:rPr>
-                        <a:t>联系电话&amp;邮箱</a:t>
+                        <a:t>主要负责模块</a:t>
                       </a:r>
-                      <a:endParaRPr sz="1200" u="none" strike="noStrike" dirty="0">
-                        <a:solidFill>
-                          <a:srgbClr val="000000"/>
-                        </a:solidFill>
-                        <a:latin typeface="微软雅黑" panose="020B0503020204020204" pitchFamily="34" charset="-122"/>
-                        <a:ea typeface="微软雅黑" panose="020B0503020204020204" pitchFamily="34" charset="-122"/>
-                      </a:endParaRPr>
                     </a:p>
                     <a:p>
                       <a:pPr algn="ctr" rtl="0" fontAlgn="ctr"/>
                       <a:r>
-                        <a:rPr sz="1200" u="none" strike="noStrike" dirty="0">
+                        <a:rPr sz="1200" b="0" i="0" u="none" strike="noStrike" dirty="0">
                           <a:solidFill>
                             <a:srgbClr val="000000"/>
                           </a:solidFill>
@@ -14747,10 +14588,10 @@
                           <a:latin typeface="微软雅黑" panose="020B0503020204020204" pitchFamily="34" charset="-122"/>
                           <a:ea typeface="微软雅黑" panose="020B0503020204020204" pitchFamily="34" charset="-122"/>
                         </a:rPr>
-                        <a:t>TEL</a:t>
+                        <a:t>Mainly responsible for content</a:t>
                       </a:r>
                       <a:r>
-                        <a:rPr sz="1200" u="none" strike="noStrike" dirty="0">
+                        <a:rPr sz="1200" b="0" i="0" u="none" strike="noStrike" dirty="0">
                           <a:solidFill>
                             <a:srgbClr val="000000"/>
                           </a:solidFill>
@@ -14759,86 +14600,6 @@
                         </a:rPr>
                         <a:t>)</a:t>
                       </a:r>
-                      <a:endParaRPr sz="1200" b="0" i="0" u="none" strike="noStrike" dirty="0">
-                        <a:solidFill>
-                          <a:srgbClr val="000000"/>
-                        </a:solidFill>
-                        <a:latin typeface="微软雅黑" panose="020B0503020204020204" pitchFamily="34" charset="-122"/>
-                        <a:ea typeface="微软雅黑" panose="020B0503020204020204" pitchFamily="34" charset="-122"/>
-                      </a:endParaRPr>
-                    </a:p>
-                  </a:txBody>
-                  <a:tcPr marL="9525" marR="9525" marT="9525" marB="0" anchor="ctr">
-                    <a:solidFill>
-                      <a:schemeClr val="bg1">
-                        <a:lumMod val="85000"/>
-                      </a:schemeClr>
-                    </a:solidFill>
-                  </a:tcPr>
-                </a:tc>
-                <a:tc>
-                  <a:txBody>
-                    <a:bodyPr/>
-                    <a:lstStyle/>
-                    <a:p>
-                      <a:pPr algn="ctr" rtl="0" fontAlgn="ctr"/>
-                      <a:r>
-                        <a:rPr sz="1200" u="none" strike="noStrike" dirty="0">
-                          <a:solidFill>
-                            <a:srgbClr val="000000"/>
-                          </a:solidFill>
-                          <a:latin typeface="微软雅黑" panose="020B0503020204020204" pitchFamily="34" charset="-122"/>
-                          <a:ea typeface="微软雅黑" panose="020B0503020204020204" pitchFamily="34" charset="-122"/>
-                        </a:rPr>
-                        <a:t>主要负责模块</a:t>
-                      </a:r>
-                      <a:endParaRPr sz="1200" u="none" strike="noStrike" dirty="0">
-                        <a:solidFill>
-                          <a:srgbClr val="000000"/>
-                        </a:solidFill>
-                        <a:latin typeface="微软雅黑" panose="020B0503020204020204" pitchFamily="34" charset="-122"/>
-                        <a:ea typeface="微软雅黑" panose="020B0503020204020204" pitchFamily="34" charset="-122"/>
-                      </a:endParaRPr>
-                    </a:p>
-                    <a:p>
-                      <a:pPr algn="ctr" rtl="0" fontAlgn="ctr"/>
-                      <a:r>
-                        <a:rPr sz="1200" b="0" i="0" u="none" strike="noStrike" dirty="0">
-                          <a:solidFill>
-                            <a:srgbClr val="000000"/>
-                          </a:solidFill>
-                          <a:latin typeface="微软雅黑" panose="020B0503020204020204" pitchFamily="34" charset="-122"/>
-                          <a:ea typeface="微软雅黑" panose="020B0503020204020204" pitchFamily="34" charset="-122"/>
-                        </a:rPr>
-                        <a:t>(</a:t>
-                      </a:r>
-                      <a:r>
-                        <a:rPr sz="1200" b="0" i="0" u="none" strike="noStrike" kern="1200" dirty="0">
-                          <a:solidFill>
-                            <a:srgbClr val="000000"/>
-                          </a:solidFill>
-                          <a:latin typeface="微软雅黑" panose="020B0503020204020204" pitchFamily="34" charset="-122"/>
-                          <a:ea typeface="微软雅黑" panose="020B0503020204020204" pitchFamily="34" charset="-122"/>
-                        </a:rPr>
-                        <a:t>Mainly responsible for content</a:t>
-                      </a:r>
-                      <a:r>
-                        <a:rPr sz="1200" b="0" i="0" u="none" strike="noStrike" dirty="0">
-                          <a:solidFill>
-                            <a:srgbClr val="000000"/>
-                          </a:solidFill>
-                          <a:latin typeface="微软雅黑" panose="020B0503020204020204" pitchFamily="34" charset="-122"/>
-                          <a:ea typeface="微软雅黑" panose="020B0503020204020204" pitchFamily="34" charset="-122"/>
-                        </a:rPr>
-                        <a:t>)</a:t>
-                      </a:r>
-                      <a:endParaRPr sz="1200" b="0" i="0" u="none" strike="noStrike" dirty="0">
-                        <a:solidFill>
-                          <a:srgbClr val="000000"/>
-                        </a:solidFill>
-                        <a:latin typeface="微软雅黑" panose="020B0503020204020204" pitchFamily="34" charset="-122"/>
-                        <a:ea typeface="微软雅黑" panose="020B0503020204020204" pitchFamily="34" charset="-122"/>
-                      </a:endParaRPr>
                     </a:p>
                   </a:txBody>
                   <a:tcPr marL="9525" marR="9525" marT="9525" marB="0" anchor="ctr">
@@ -14868,14 +14629,6 @@
                         </a:rPr>
                         <a:t>1</a:t>
                       </a:r>
-                      <a:endParaRPr sz="1200" kern="1200" dirty="0">
-                        <a:solidFill>
-                          <a:schemeClr val="tx1"/>
-                        </a:solidFill>
-                        <a:latin typeface="微软雅黑" panose="020B0503020204020204" pitchFamily="34" charset="-122"/>
-                        <a:ea typeface="微软雅黑" panose="020B0503020204020204" pitchFamily="34" charset="-122"/>
-                        <a:cs typeface="+mn-cs"/>
-                      </a:endParaRPr>
                     </a:p>
                   </a:txBody>
                   <a:tcPr marL="9525" marR="9525" marT="9525" marB="0" anchor="ctr"/>
@@ -15072,14 +14825,6 @@
                         </a:rPr>
                         <a:t>2</a:t>
                       </a:r>
-                      <a:endParaRPr lang="en-US" sz="1200" kern="1200" dirty="0">
-                        <a:solidFill>
-                          <a:schemeClr val="tx1"/>
-                        </a:solidFill>
-                        <a:latin typeface="微软雅黑" panose="020B0503020204020204" pitchFamily="34" charset="-122"/>
-                        <a:ea typeface="微软雅黑" panose="020B0503020204020204" pitchFamily="34" charset="-122"/>
-                        <a:cs typeface="+mn-cs"/>
-                      </a:endParaRPr>
                     </a:p>
                   </a:txBody>
                   <a:tcPr marL="9525" marR="9525" marT="9525" marB="0" anchor="ctr"/>
@@ -15263,6 +15008,7 @@
                 <a:tc>
                   <a:txBody>
                     <a:bodyPr/>
+                    <a:lstStyle/>
                     <a:p>
                       <a:pPr algn="ctr" rtl="0" fontAlgn="ctr">
                         <a:buNone/>
@@ -15278,14 +15024,6 @@
                         </a:rPr>
                         <a:t>3</a:t>
                       </a:r>
-                      <a:endParaRPr lang="en-US" altLang="en-US" sz="1200" kern="1200" dirty="0">
-                        <a:solidFill>
-                          <a:schemeClr val="tx1"/>
-                        </a:solidFill>
-                        <a:latin typeface="微软雅黑" panose="020B0503020204020204" pitchFamily="34" charset="-122"/>
-                        <a:ea typeface="微软雅黑" panose="020B0503020204020204" pitchFamily="34" charset="-122"/>
-                        <a:cs typeface="+mn-cs"/>
-                      </a:endParaRPr>
                     </a:p>
                   </a:txBody>
                   <a:tcPr marL="9525" marR="9525" marT="9525" marB="0" anchor="ctr"/>
@@ -15293,6 +15031,7 @@
                 <a:tc>
                   <a:txBody>
                     <a:bodyPr/>
+                    <a:lstStyle/>
                     <a:p>
                       <a:pPr algn="ctr">
                         <a:buNone/>
@@ -15312,6 +15051,7 @@
                 <a:tc>
                   <a:txBody>
                     <a:bodyPr/>
+                    <a:lstStyle/>
                     <a:p>
                       <a:pPr algn="ctr" rtl="0" fontAlgn="ctr"/>
                       <a:r>
@@ -15383,6 +15123,7 @@
                 <a:tc>
                   <a:txBody>
                     <a:bodyPr/>
+                    <a:lstStyle/>
                     <a:p>
                       <a:pPr marL="0" algn="ctr" defTabSz="914400" rtl="0" eaLnBrk="1" fontAlgn="ctr" latinLnBrk="0" hangingPunct="1">
                         <a:buNone/>
@@ -15402,6 +15143,7 @@
                 <a:tc>
                   <a:txBody>
                     <a:bodyPr/>
+                    <a:lstStyle/>
                     <a:p>
                       <a:pPr marL="0" marR="0" indent="0" algn="ctr" defTabSz="914400" rtl="0" eaLnBrk="1" fontAlgn="auto" latinLnBrk="0" hangingPunct="1">
                         <a:lnSpc>
@@ -15434,6 +15176,7 @@
                 <a:tc>
                   <a:txBody>
                     <a:bodyPr/>
+                    <a:lstStyle/>
                     <a:p>
                       <a:pPr marL="0" marR="0" indent="0" algn="ctr" defTabSz="914400" rtl="0" eaLnBrk="1" fontAlgn="auto" latinLnBrk="0" hangingPunct="1">
                         <a:lnSpc>
@@ -15468,6 +15211,7 @@
                 <a:tc>
                   <a:txBody>
                     <a:bodyPr/>
+                    <a:lstStyle/>
                     <a:p>
                       <a:pPr algn="ctr" rtl="0" fontAlgn="ctr">
                         <a:buNone/>
@@ -15483,14 +15227,6 @@
                         </a:rPr>
                         <a:t>4</a:t>
                       </a:r>
-                      <a:endParaRPr lang="en-US" altLang="en-US" sz="1200" kern="1200" dirty="0">
-                        <a:solidFill>
-                          <a:schemeClr val="tx1"/>
-                        </a:solidFill>
-                        <a:latin typeface="微软雅黑" panose="020B0503020204020204" pitchFamily="34" charset="-122"/>
-                        <a:ea typeface="微软雅黑" panose="020B0503020204020204" pitchFamily="34" charset="-122"/>
-                        <a:cs typeface="+mn-cs"/>
-                      </a:endParaRPr>
                     </a:p>
                   </a:txBody>
                   <a:tcPr marL="9525" marR="9525" marT="9525" marB="0" anchor="ctr"/>
@@ -15498,6 +15234,7 @@
                 <a:tc>
                   <a:txBody>
                     <a:bodyPr/>
+                    <a:lstStyle/>
                     <a:p>
                       <a:pPr algn="ctr">
                         <a:buNone/>
@@ -15517,6 +15254,7 @@
                 <a:tc>
                   <a:txBody>
                     <a:bodyPr/>
+                    <a:lstStyle/>
                     <a:p>
                       <a:pPr algn="ctr" rtl="0" fontAlgn="ctr"/>
                       <a:r>
@@ -15588,6 +15326,7 @@
                 <a:tc>
                   <a:txBody>
                     <a:bodyPr/>
+                    <a:lstStyle/>
                     <a:p>
                       <a:pPr marL="0" algn="ctr" defTabSz="914400" rtl="0" eaLnBrk="1" fontAlgn="ctr" latinLnBrk="0" hangingPunct="1">
                         <a:buNone/>
@@ -15607,6 +15346,7 @@
                 <a:tc>
                   <a:txBody>
                     <a:bodyPr/>
+                    <a:lstStyle/>
                     <a:p>
                       <a:pPr marL="0" marR="0" indent="0" algn="ctr" defTabSz="914400" rtl="0" eaLnBrk="1" fontAlgn="auto" latinLnBrk="0" hangingPunct="1">
                         <a:lnSpc>
@@ -15639,6 +15379,7 @@
                 <a:tc>
                   <a:txBody>
                     <a:bodyPr/>
+                    <a:lstStyle/>
                     <a:p>
                       <a:pPr marL="0" marR="0" indent="0" algn="ctr" defTabSz="914400" rtl="0" eaLnBrk="1" fontAlgn="auto" latinLnBrk="0" hangingPunct="1">
                         <a:lnSpc>
@@ -15673,6 +15414,7 @@
                 <a:tc>
                   <a:txBody>
                     <a:bodyPr/>
+                    <a:lstStyle/>
                     <a:p>
                       <a:pPr algn="ctr" rtl="0" fontAlgn="ctr">
                         <a:buNone/>
@@ -15688,14 +15430,6 @@
                         </a:rPr>
                         <a:t>5</a:t>
                       </a:r>
-                      <a:endParaRPr lang="en-US" altLang="en-US" sz="1200" kern="1200" dirty="0">
-                        <a:solidFill>
-                          <a:schemeClr val="tx1"/>
-                        </a:solidFill>
-                        <a:latin typeface="微软雅黑" panose="020B0503020204020204" pitchFamily="34" charset="-122"/>
-                        <a:ea typeface="微软雅黑" panose="020B0503020204020204" pitchFamily="34" charset="-122"/>
-                        <a:cs typeface="+mn-cs"/>
-                      </a:endParaRPr>
                     </a:p>
                   </a:txBody>
                   <a:tcPr marL="9525" marR="9525" marT="9525" marB="0" anchor="ctr"/>
@@ -15703,6 +15437,7 @@
                 <a:tc>
                   <a:txBody>
                     <a:bodyPr/>
+                    <a:lstStyle/>
                     <a:p>
                       <a:pPr algn="ctr">
                         <a:buNone/>
@@ -15722,6 +15457,7 @@
                 <a:tc>
                   <a:txBody>
                     <a:bodyPr/>
+                    <a:lstStyle/>
                     <a:p>
                       <a:pPr algn="ctr" rtl="0" fontAlgn="ctr"/>
                       <a:r>
@@ -15793,6 +15529,7 @@
                 <a:tc>
                   <a:txBody>
                     <a:bodyPr/>
+                    <a:lstStyle/>
                     <a:p>
                       <a:pPr marL="0" algn="ctr" defTabSz="914400" rtl="0" eaLnBrk="1" fontAlgn="ctr" latinLnBrk="0" hangingPunct="1">
                         <a:buNone/>
@@ -15812,6 +15549,7 @@
                 <a:tc>
                   <a:txBody>
                     <a:bodyPr/>
+                    <a:lstStyle/>
                     <a:p>
                       <a:pPr marL="0" marR="0" indent="0" algn="ctr" defTabSz="914400" rtl="0" eaLnBrk="1" fontAlgn="auto" latinLnBrk="0" hangingPunct="1">
                         <a:lnSpc>
@@ -15844,6 +15582,7 @@
                 <a:tc>
                   <a:txBody>
                     <a:bodyPr/>
+                    <a:lstStyle/>
                     <a:p>
                       <a:pPr marL="0" marR="0" indent="0" algn="ctr" defTabSz="914400" rtl="0" eaLnBrk="1" fontAlgn="auto" latinLnBrk="0" hangingPunct="1">
                         <a:lnSpc>
@@ -15878,6 +15617,7 @@
                 <a:tc>
                   <a:txBody>
                     <a:bodyPr/>
+                    <a:lstStyle/>
                     <a:p>
                       <a:pPr algn="ctr" rtl="0" fontAlgn="ctr">
                         <a:buNone/>
@@ -15893,14 +15633,6 @@
                         </a:rPr>
                         <a:t>6</a:t>
                       </a:r>
-                      <a:endParaRPr lang="en-US" altLang="en-US" sz="1200" kern="1200" dirty="0">
-                        <a:solidFill>
-                          <a:schemeClr val="tx1"/>
-                        </a:solidFill>
-                        <a:latin typeface="微软雅黑" panose="020B0503020204020204" pitchFamily="34" charset="-122"/>
-                        <a:ea typeface="微软雅黑" panose="020B0503020204020204" pitchFamily="34" charset="-122"/>
-                        <a:cs typeface="+mn-cs"/>
-                      </a:endParaRPr>
                     </a:p>
                   </a:txBody>
                   <a:tcPr marL="9525" marR="9525" marT="9525" marB="0" anchor="ctr"/>
@@ -15908,6 +15640,7 @@
                 <a:tc>
                   <a:txBody>
                     <a:bodyPr/>
+                    <a:lstStyle/>
                     <a:p>
                       <a:pPr algn="ctr">
                         <a:buNone/>
@@ -15927,6 +15660,7 @@
                 <a:tc>
                   <a:txBody>
                     <a:bodyPr/>
+                    <a:lstStyle/>
                     <a:p>
                       <a:pPr algn="ctr" rtl="0" fontAlgn="ctr"/>
                       <a:r>
@@ -15998,6 +15732,7 @@
                 <a:tc>
                   <a:txBody>
                     <a:bodyPr/>
+                    <a:lstStyle/>
                     <a:p>
                       <a:pPr marL="0" algn="ctr" defTabSz="914400" rtl="0" eaLnBrk="1" fontAlgn="ctr" latinLnBrk="0" hangingPunct="1">
                         <a:buNone/>
@@ -16017,6 +15752,7 @@
                 <a:tc>
                   <a:txBody>
                     <a:bodyPr/>
+                    <a:lstStyle/>
                     <a:p>
                       <a:pPr marL="0" marR="0" indent="0" algn="ctr" defTabSz="914400" rtl="0" eaLnBrk="1" fontAlgn="auto" latinLnBrk="0" hangingPunct="1">
                         <a:lnSpc>
@@ -16049,6 +15785,7 @@
                 <a:tc>
                   <a:txBody>
                     <a:bodyPr/>
+                    <a:lstStyle/>
                     <a:p>
                       <a:pPr marL="0" marR="0" indent="0" algn="ctr" defTabSz="914400" rtl="0" eaLnBrk="1" fontAlgn="auto" latinLnBrk="0" hangingPunct="1">
                         <a:lnSpc>
@@ -16120,6 +15857,7 @@
             <a:bodyPr wrap="square" anchor="t">
               <a:spAutoFit/>
             </a:bodyPr>
+            <a:lstStyle/>
             <a:p>
               <a:pPr>
                 <a:lnSpc>
@@ -16217,6 +15955,7 @@
           </p:style>
           <p:txBody>
             <a:bodyPr anchor="ctr"/>
+            <a:lstStyle/>
             <a:p>
               <a:pPr algn="ctr" fontAlgn="auto">
                 <a:defRPr/>
@@ -16401,6 +16140,7 @@
                 </a:solidFill>
                 <a:latin typeface="Arial" panose="020B0604020202020204" pitchFamily="34" charset="0"/>
               </a:rPr>
+              <a:t>4</a:t>
             </a:fld>
             <a:endParaRPr lang="en-US" altLang="zh-CN" sz="1000" b="1" dirty="0">
               <a:solidFill>
@@ -16498,14 +16238,6 @@
                         </a:rPr>
                         <a:t>)</a:t>
                       </a:r>
-                      <a:endParaRPr lang="en-US" altLang="zh-CN" sz="1000" kern="1200" dirty="0" smtClean="0">
-                        <a:solidFill>
-                          <a:schemeClr val="tx1"/>
-                        </a:solidFill>
-                        <a:latin typeface="微软雅黑" panose="020B0503020204020204" pitchFamily="34" charset="-122"/>
-                        <a:ea typeface="微软雅黑" panose="020B0503020204020204" pitchFamily="34" charset="-122"/>
-                        <a:cs typeface="+mn-cs"/>
-                      </a:endParaRPr>
                     </a:p>
                   </a:txBody>
                   <a:tcPr marL="0" marR="0" marT="0" marB="0" anchor="ctr">
@@ -16649,14 +16381,6 @@
                         </a:rPr>
                         <a:t>(time)</a:t>
                       </a:r>
-                      <a:endParaRPr lang="en-US" altLang="zh-CN" sz="1000" kern="1200" dirty="0" smtClean="0">
-                        <a:solidFill>
-                          <a:schemeClr val="tx1"/>
-                        </a:solidFill>
-                        <a:latin typeface="微软雅黑" panose="020B0503020204020204" pitchFamily="34" charset="-122"/>
-                        <a:ea typeface="微软雅黑" panose="020B0503020204020204" pitchFamily="34" charset="-122"/>
-                        <a:cs typeface="+mn-cs"/>
-                      </a:endParaRPr>
                     </a:p>
                   </a:txBody>
                   <a:tcPr marL="0" marR="0" marT="0" marB="0" anchor="ctr">
@@ -16820,14 +16544,6 @@
                         </a:rPr>
                         <a:t>(supplier)</a:t>
                       </a:r>
-                      <a:endParaRPr lang="en-US" altLang="zh-CN" sz="1000" kern="1200" dirty="0" smtClean="0">
-                        <a:solidFill>
-                          <a:schemeClr val="tx1"/>
-                        </a:solidFill>
-                        <a:latin typeface="微软雅黑" panose="020B0503020204020204" pitchFamily="34" charset="-122"/>
-                        <a:ea typeface="微软雅黑" panose="020B0503020204020204" pitchFamily="34" charset="-122"/>
-                        <a:cs typeface="+mn-cs"/>
-                      </a:endParaRPr>
                     </a:p>
                   </a:txBody>
                   <a:tcPr marL="0" marR="0" marT="0" marB="0" anchor="ctr">
@@ -16891,14 +16607,6 @@
                         </a:rPr>
                         <a:t>惠州华阳通用电子有限公司</a:t>
                       </a:r>
-                      <a:endParaRPr lang="zh-CN" altLang="en-US" sz="1000" kern="1200" dirty="0" smtClean="0">
-                        <a:solidFill>
-                          <a:schemeClr val="tx1"/>
-                        </a:solidFill>
-                        <a:latin typeface="微软雅黑" panose="020B0503020204020204" pitchFamily="34" charset="-122"/>
-                        <a:ea typeface="微软雅黑" panose="020B0503020204020204" pitchFamily="34" charset="-122"/>
-                        <a:cs typeface="+mn-cs"/>
-                      </a:endParaRPr>
                     </a:p>
                   </a:txBody>
                   <a:tcPr marL="0" marR="0" marT="0" marB="0" anchor="ctr">
@@ -16984,14 +16692,6 @@
                         </a:rPr>
                         <a:t>(type)</a:t>
                       </a:r>
-                      <a:endParaRPr lang="en-US" altLang="zh-CN" sz="1000" kern="1200" dirty="0" smtClean="0">
-                        <a:solidFill>
-                          <a:schemeClr val="tx1"/>
-                        </a:solidFill>
-                        <a:latin typeface="微软雅黑" panose="020B0503020204020204" pitchFamily="34" charset="-122"/>
-                        <a:ea typeface="微软雅黑" panose="020B0503020204020204" pitchFamily="34" charset="-122"/>
-                        <a:cs typeface="+mn-cs"/>
-                      </a:endParaRPr>
                     </a:p>
                   </a:txBody>
                   <a:tcPr marL="0" marR="0" marT="0" marB="0" anchor="ctr">
@@ -17149,14 +16849,6 @@
                         </a:rPr>
                         <a:t>(model)</a:t>
                       </a:r>
-                      <a:endParaRPr lang="en-US" altLang="zh-CN" sz="1000" kern="1200" dirty="0" smtClean="0">
-                        <a:solidFill>
-                          <a:schemeClr val="tx1"/>
-                        </a:solidFill>
-                        <a:latin typeface="微软雅黑" panose="020B0503020204020204" pitchFamily="34" charset="-122"/>
-                        <a:ea typeface="微软雅黑" panose="020B0503020204020204" pitchFamily="34" charset="-122"/>
-                        <a:cs typeface="+mn-cs"/>
-                      </a:endParaRPr>
                     </a:p>
                   </a:txBody>
                   <a:tcPr marL="0" marR="0" marT="0" marB="0" anchor="ctr">
@@ -17326,14 +17018,6 @@
                         </a:rPr>
                         <a:t>(Material name)</a:t>
                       </a:r>
-                      <a:endParaRPr lang="en-US" altLang="zh-CN" sz="1000" kern="1200" dirty="0" smtClean="0">
-                        <a:solidFill>
-                          <a:schemeClr val="tx1"/>
-                        </a:solidFill>
-                        <a:latin typeface="微软雅黑" panose="020B0503020204020204" pitchFamily="34" charset="-122"/>
-                        <a:ea typeface="微软雅黑" panose="020B0503020204020204" pitchFamily="34" charset="-122"/>
-                        <a:cs typeface="+mn-cs"/>
-                      </a:endParaRPr>
                     </a:p>
                   </a:txBody>
                   <a:tcPr marL="0" marR="0" marT="0" marB="0" anchor="ctr">
@@ -17494,14 +17178,6 @@
                         </a:rPr>
                         <a:t>(Quantity)</a:t>
                       </a:r>
-                      <a:endParaRPr lang="en-US" altLang="zh-CN" sz="1000" kern="1200" dirty="0" smtClean="0">
-                        <a:solidFill>
-                          <a:schemeClr val="tx1"/>
-                        </a:solidFill>
-                        <a:latin typeface="微软雅黑" panose="020B0503020204020204" pitchFamily="34" charset="-122"/>
-                        <a:ea typeface="微软雅黑" panose="020B0503020204020204" pitchFamily="34" charset="-122"/>
-                        <a:cs typeface="+mn-cs"/>
-                      </a:endParaRPr>
                     </a:p>
                   </a:txBody>
                   <a:tcPr marL="0" marR="0" marT="0" marB="0" anchor="ctr">
@@ -17645,14 +17321,6 @@
                         </a:rPr>
                         <a:t>(failure type)</a:t>
                       </a:r>
-                      <a:endParaRPr lang="en-US" altLang="zh-CN" sz="1000" kern="1200" dirty="0" smtClean="0">
-                        <a:solidFill>
-                          <a:schemeClr val="tx1"/>
-                        </a:solidFill>
-                        <a:latin typeface="微软雅黑" panose="020B0503020204020204" pitchFamily="34" charset="-122"/>
-                        <a:ea typeface="微软雅黑" panose="020B0503020204020204" pitchFamily="34" charset="-122"/>
-                        <a:cs typeface="+mn-cs"/>
-                      </a:endParaRPr>
                     </a:p>
                   </a:txBody>
                   <a:tcPr marL="0" marR="0" marT="0" marB="0" anchor="ctr">
@@ -17808,14 +17476,6 @@
                         </a:rPr>
                         <a:t>(LOT No.)</a:t>
                       </a:r>
-                      <a:endParaRPr lang="en-US" altLang="zh-CN" sz="1000" kern="1200" dirty="0" smtClean="0">
-                        <a:solidFill>
-                          <a:schemeClr val="tx1"/>
-                        </a:solidFill>
-                        <a:latin typeface="微软雅黑" panose="020B0503020204020204" pitchFamily="34" charset="-122"/>
-                        <a:ea typeface="微软雅黑" panose="020B0503020204020204" pitchFamily="34" charset="-122"/>
-                        <a:cs typeface="+mn-cs"/>
-                      </a:endParaRPr>
                     </a:p>
                   </a:txBody>
                   <a:tcPr marL="0" marR="0" marT="0" marB="0" anchor="ctr">
@@ -17950,14 +17610,6 @@
                         </a:rPr>
                         <a:t>发现地点</a:t>
                       </a:r>
-                      <a:endParaRPr lang="zh-CN" altLang="en-US" sz="1000" kern="1200" dirty="0" smtClean="0">
-                        <a:solidFill>
-                          <a:schemeClr val="tx1"/>
-                        </a:solidFill>
-                        <a:latin typeface="微软雅黑" panose="020B0503020204020204" pitchFamily="34" charset="-122"/>
-                        <a:ea typeface="微软雅黑" panose="020B0503020204020204" pitchFamily="34" charset="-122"/>
-                        <a:cs typeface="+mn-cs"/>
-                      </a:endParaRPr>
                     </a:p>
                   </a:txBody>
                   <a:tcPr marL="0" marR="0" marT="0" marB="0" anchor="ctr">
@@ -18091,14 +17743,6 @@
                         </a:rPr>
                         <a:t>生产日期</a:t>
                       </a:r>
-                      <a:endParaRPr lang="zh-CN" altLang="en-US" sz="1000" kern="1200" dirty="0" smtClean="0">
-                        <a:solidFill>
-                          <a:schemeClr val="tx1"/>
-                        </a:solidFill>
-                        <a:latin typeface="微软雅黑" panose="020B0503020204020204" pitchFamily="34" charset="-122"/>
-                        <a:ea typeface="微软雅黑" panose="020B0503020204020204" pitchFamily="34" charset="-122"/>
-                        <a:cs typeface="+mn-cs"/>
-                      </a:endParaRPr>
                     </a:p>
                   </a:txBody>
                   <a:tcPr marL="0" marR="0" marT="0" marB="0" anchor="ctr">
@@ -18220,14 +17864,6 @@
                         </a:rPr>
                         <a:t>底盘号</a:t>
                       </a:r>
-                      <a:endParaRPr lang="zh-CN" altLang="en-US" sz="1000" kern="1200" dirty="0" smtClean="0">
-                        <a:solidFill>
-                          <a:schemeClr val="tx1"/>
-                        </a:solidFill>
-                        <a:latin typeface="微软雅黑" panose="020B0503020204020204" pitchFamily="34" charset="-122"/>
-                        <a:ea typeface="微软雅黑" panose="020B0503020204020204" pitchFamily="34" charset="-122"/>
-                        <a:cs typeface="+mn-cs"/>
-                      </a:endParaRPr>
                     </a:p>
                   </a:txBody>
                   <a:tcPr marL="0" marR="0" marT="0" marB="0" anchor="ctr">
@@ -18388,14 +18024,6 @@
                         </a:rPr>
                         <a:t>(Complaint Source)</a:t>
                       </a:r>
-                      <a:endParaRPr lang="en-US" altLang="zh-CN" sz="1000" kern="1200" dirty="0" smtClean="0">
-                        <a:solidFill>
-                          <a:schemeClr val="tx1"/>
-                        </a:solidFill>
-                        <a:latin typeface="微软雅黑" panose="020B0503020204020204" pitchFamily="34" charset="-122"/>
-                        <a:ea typeface="微软雅黑" panose="020B0503020204020204" pitchFamily="34" charset="-122"/>
-                        <a:cs typeface="+mn-cs"/>
-                      </a:endParaRPr>
                     </a:p>
                   </a:txBody>
                   <a:tcPr marL="0" marR="0" marT="0" marB="0" anchor="ctr">
@@ -18516,9 +18144,23 @@
                   </a:tcPr>
                 </a:tc>
                 <a:tc hMerge="1">
+                  <a:txBody>
+                    <a:bodyPr/>
+                    <a:lstStyle/>
+                    <a:p>
+                      <a:endParaRPr lang="zh-CN"/>
+                    </a:p>
+                  </a:txBody>
                   <a:tcPr/>
                 </a:tc>
                 <a:tc hMerge="1">
+                  <a:txBody>
+                    <a:bodyPr/>
+                    <a:lstStyle/>
+                    <a:p>
+                      <a:endParaRPr lang="zh-CN"/>
+                    </a:p>
+                  </a:txBody>
                   <a:tcPr marL="0" marR="0" marT="0" marB="0" anchor="ctr">
                     <a:lnL w="6350" cap="flat" cmpd="sng" algn="ctr">
                       <a:solidFill>
@@ -18564,6 +18206,13 @@
                   </a:tcPr>
                 </a:tc>
                 <a:tc hMerge="1">
+                  <a:txBody>
+                    <a:bodyPr/>
+                    <a:lstStyle/>
+                    <a:p>
+                      <a:endParaRPr lang="zh-CN"/>
+                    </a:p>
+                  </a:txBody>
                   <a:tcPr marL="0" marR="0" marT="0" marB="0" anchor="ctr">
                     <a:lnL w="6350" cap="flat" cmpd="sng" algn="ctr">
                       <a:solidFill>
@@ -18607,6 +18256,13 @@
                   </a:tcPr>
                 </a:tc>
                 <a:tc hMerge="1">
+                  <a:txBody>
+                    <a:bodyPr/>
+                    <a:lstStyle/>
+                    <a:p>
+                      <a:endParaRPr lang="zh-CN"/>
+                    </a:p>
+                  </a:txBody>
                   <a:tcPr/>
                 </a:tc>
               </a:tr>
@@ -18661,14 +18317,6 @@
                         </a:rPr>
                         <a:t>(Symptom description)</a:t>
                       </a:r>
-                      <a:endParaRPr lang="en-US" altLang="zh-CN" sz="1000" kern="1200" dirty="0" smtClean="0">
-                        <a:solidFill>
-                          <a:schemeClr val="tx1"/>
-                        </a:solidFill>
-                        <a:latin typeface="微软雅黑" panose="020B0503020204020204" pitchFamily="34" charset="-122"/>
-                        <a:ea typeface="微软雅黑" panose="020B0503020204020204" pitchFamily="34" charset="-122"/>
-                        <a:cs typeface="+mn-cs"/>
-                      </a:endParaRPr>
                     </a:p>
                   </a:txBody>
                   <a:tcPr marL="0" marR="0" marT="0" marB="0" anchor="ctr">
@@ -18786,15 +18434,43 @@
                   </a:tcPr>
                 </a:tc>
                 <a:tc hMerge="1">
+                  <a:txBody>
+                    <a:bodyPr/>
+                    <a:lstStyle/>
+                    <a:p>
+                      <a:endParaRPr lang="zh-CN"/>
+                    </a:p>
+                  </a:txBody>
                   <a:tcPr/>
                 </a:tc>
                 <a:tc hMerge="1">
+                  <a:txBody>
+                    <a:bodyPr/>
+                    <a:lstStyle/>
+                    <a:p>
+                      <a:endParaRPr lang="zh-CN"/>
+                    </a:p>
+                  </a:txBody>
                   <a:tcPr/>
                 </a:tc>
                 <a:tc hMerge="1">
+                  <a:txBody>
+                    <a:bodyPr/>
+                    <a:lstStyle/>
+                    <a:p>
+                      <a:endParaRPr lang="zh-CN"/>
+                    </a:p>
+                  </a:txBody>
                   <a:tcPr/>
                 </a:tc>
                 <a:tc hMerge="1">
+                  <a:txBody>
+                    <a:bodyPr/>
+                    <a:lstStyle/>
+                    <a:p>
+                      <a:endParaRPr lang="zh-CN"/>
+                    </a:p>
+                  </a:txBody>
                   <a:tcPr/>
                 </a:tc>
               </a:tr>
@@ -18849,14 +18525,6 @@
                         </a:rPr>
                         <a:t>(Confirm the malfunction)</a:t>
                       </a:r>
-                      <a:endParaRPr lang="en-US" altLang="zh-CN" sz="1000" kern="1200" dirty="0" smtClean="0">
-                        <a:solidFill>
-                          <a:schemeClr val="tx1"/>
-                        </a:solidFill>
-                        <a:latin typeface="微软雅黑" panose="020B0503020204020204" pitchFamily="34" charset="-122"/>
-                        <a:ea typeface="微软雅黑" panose="020B0503020204020204" pitchFamily="34" charset="-122"/>
-                        <a:cs typeface="+mn-cs"/>
-                      </a:endParaRPr>
                     </a:p>
                   </a:txBody>
                   <a:tcPr marL="0" marR="0" marT="0" marB="0" anchor="ctr">
@@ -18974,15 +18642,43 @@
                   </a:tcPr>
                 </a:tc>
                 <a:tc hMerge="1">
+                  <a:txBody>
+                    <a:bodyPr/>
+                    <a:lstStyle/>
+                    <a:p>
+                      <a:endParaRPr lang="zh-CN"/>
+                    </a:p>
+                  </a:txBody>
                   <a:tcPr/>
                 </a:tc>
                 <a:tc hMerge="1">
+                  <a:txBody>
+                    <a:bodyPr/>
+                    <a:lstStyle/>
+                    <a:p>
+                      <a:endParaRPr lang="zh-CN"/>
+                    </a:p>
+                  </a:txBody>
                   <a:tcPr/>
                 </a:tc>
                 <a:tc hMerge="1">
+                  <a:txBody>
+                    <a:bodyPr/>
+                    <a:lstStyle/>
+                    <a:p>
+                      <a:endParaRPr lang="zh-CN"/>
+                    </a:p>
+                  </a:txBody>
                   <a:tcPr/>
                 </a:tc>
                 <a:tc hMerge="1">
+                  <a:txBody>
+                    <a:bodyPr/>
+                    <a:lstStyle/>
+                    <a:p>
+                      <a:endParaRPr lang="zh-CN"/>
+                    </a:p>
+                  </a:txBody>
                   <a:tcPr/>
                 </a:tc>
               </a:tr>
@@ -19037,14 +18733,6 @@
                         </a:rPr>
                         <a:t>(Failure picture)</a:t>
                       </a:r>
-                      <a:endParaRPr lang="en-US" altLang="zh-CN" sz="1000" kern="1200" dirty="0" smtClean="0">
-                        <a:solidFill>
-                          <a:schemeClr val="tx1"/>
-                        </a:solidFill>
-                        <a:latin typeface="微软雅黑" panose="020B0503020204020204" pitchFamily="34" charset="-122"/>
-                        <a:ea typeface="微软雅黑" panose="020B0503020204020204" pitchFamily="34" charset="-122"/>
-                        <a:cs typeface="+mn-cs"/>
-                      </a:endParaRPr>
                     </a:p>
                   </a:txBody>
                   <a:tcPr marL="0" marR="0" marT="0" marB="0" anchor="ctr">
@@ -19147,15 +18835,43 @@
                   </a:tcPr>
                 </a:tc>
                 <a:tc hMerge="1">
+                  <a:txBody>
+                    <a:bodyPr/>
+                    <a:lstStyle/>
+                    <a:p>
+                      <a:endParaRPr lang="zh-CN"/>
+                    </a:p>
+                  </a:txBody>
                   <a:tcPr/>
                 </a:tc>
                 <a:tc hMerge="1">
+                  <a:txBody>
+                    <a:bodyPr/>
+                    <a:lstStyle/>
+                    <a:p>
+                      <a:endParaRPr lang="zh-CN"/>
+                    </a:p>
+                  </a:txBody>
                   <a:tcPr/>
                 </a:tc>
                 <a:tc hMerge="1">
+                  <a:txBody>
+                    <a:bodyPr/>
+                    <a:lstStyle/>
+                    <a:p>
+                      <a:endParaRPr lang="zh-CN"/>
+                    </a:p>
+                  </a:txBody>
                   <a:tcPr/>
                 </a:tc>
                 <a:tc hMerge="1">
+                  <a:txBody>
+                    <a:bodyPr/>
+                    <a:lstStyle/>
+                    <a:p>
+                      <a:endParaRPr lang="zh-CN"/>
+                    </a:p>
+                  </a:txBody>
                   <a:tcPr/>
                 </a:tc>
               </a:tr>
@@ -19200,6 +18916,7 @@
             <a:bodyPr wrap="square" anchor="t">
               <a:spAutoFit/>
             </a:bodyPr>
+            <a:lstStyle/>
             <a:p>
               <a:pPr>
                 <a:lnSpc>
@@ -19276,6 +18993,7 @@
           </p:style>
           <p:txBody>
             <a:bodyPr anchor="ctr"/>
+            <a:lstStyle/>
             <a:p>
               <a:pPr algn="ctr" fontAlgn="auto">
                 <a:defRPr/>
@@ -19460,6 +19178,7 @@
                 </a:solidFill>
                 <a:latin typeface="Arial" panose="020B0604020202020204" pitchFamily="34" charset="0"/>
               </a:rPr>
+              <a:t>5</a:t>
             </a:fld>
             <a:endParaRPr lang="en-US" altLang="zh-CN" sz="1000" b="1" dirty="0">
               <a:solidFill>
@@ -19648,14 +19367,6 @@
                         </a:rPr>
                         <a:t>NO</a:t>
                       </a:r>
-                      <a:endParaRPr kumimoji="0" lang="zh-CN" altLang="en-US" sz="1100" b="1" u="none" strike="noStrike" cap="none" normalizeH="0" baseline="0" dirty="0">
-                        <a:solidFill>
-                          <a:schemeClr val="tx1"/>
-                        </a:solidFill>
-                        <a:effectLst/>
-                        <a:latin typeface="微软雅黑" panose="020B0503020204020204" pitchFamily="34" charset="-122"/>
-                        <a:ea typeface="微软雅黑" panose="020B0503020204020204" pitchFamily="34" charset="-122"/>
-                      </a:endParaRPr>
                     </a:p>
                   </a:txBody>
                   <a:tcPr marT="45725" marB="45725" anchor="ctr" horzOverflow="overflow">
@@ -19694,14 +19405,6 @@
                         </a:rPr>
                         <a:t>类别</a:t>
                       </a:r>
-                      <a:endParaRPr kumimoji="0" lang="zh-CN" altLang="en-US" sz="1100" b="1" u="none" strike="noStrike" cap="none" normalizeH="0" baseline="0" dirty="0">
-                        <a:solidFill>
-                          <a:schemeClr val="tx1"/>
-                        </a:solidFill>
-                        <a:effectLst/>
-                        <a:latin typeface="微软雅黑" panose="020B0503020204020204" pitchFamily="34" charset="-122"/>
-                        <a:ea typeface="微软雅黑" panose="020B0503020204020204" pitchFamily="34" charset="-122"/>
-                      </a:endParaRPr>
                     </a:p>
                   </a:txBody>
                   <a:tcPr marT="45725" marB="45725" anchor="ctr" horzOverflow="overflow">
@@ -19861,14 +19564,6 @@
                         </a:rPr>
                         <a:t>行动</a:t>
                       </a:r>
-                      <a:endParaRPr kumimoji="0" lang="zh-CN" altLang="en-US" sz="1100" b="1" u="none" strike="noStrike" cap="none" normalizeH="0" baseline="0" dirty="0">
-                        <a:solidFill>
-                          <a:schemeClr val="tx1"/>
-                        </a:solidFill>
-                        <a:effectLst/>
-                        <a:latin typeface="微软雅黑" panose="020B0503020204020204" pitchFamily="34" charset="-122"/>
-                        <a:ea typeface="微软雅黑" panose="020B0503020204020204" pitchFamily="34" charset="-122"/>
-                      </a:endParaRPr>
                     </a:p>
                   </a:txBody>
                   <a:tcPr marT="45725" marB="45725" anchor="ctr" horzOverflow="overflow">
@@ -20029,15 +19724,6 @@
                         </a:rPr>
                         <a:t>部门/负责人</a:t>
                       </a:r>
-                      <a:endParaRPr kumimoji="0" lang="zh-CN" altLang="en-US" sz="1100" b="1" u="none" strike="noStrike" cap="none" normalizeH="0" baseline="0" dirty="0">
-                        <a:solidFill>
-                          <a:schemeClr val="tx1"/>
-                        </a:solidFill>
-                        <a:effectLst/>
-                        <a:latin typeface="微软雅黑" panose="020B0503020204020204" pitchFamily="34" charset="-122"/>
-                        <a:ea typeface="微软雅黑" panose="020B0503020204020204" pitchFamily="34" charset="-122"/>
-                        <a:cs typeface="微软雅黑" panose="020B0503020204020204" pitchFamily="34" charset="-122"/>
-                      </a:endParaRPr>
                     </a:p>
                   </a:txBody>
                   <a:tcPr marT="45725" marB="45725" anchor="ctr" horzOverflow="overflow">
@@ -20197,14 +19883,6 @@
                         </a:rPr>
                         <a:t>日期</a:t>
                       </a:r>
-                      <a:endParaRPr kumimoji="0" lang="zh-CN" altLang="en-US" sz="1100" b="1" u="none" strike="noStrike" cap="none" normalizeH="0" baseline="0" dirty="0">
-                        <a:solidFill>
-                          <a:schemeClr val="tx1"/>
-                        </a:solidFill>
-                        <a:effectLst/>
-                        <a:latin typeface="微软雅黑" panose="020B0503020204020204" pitchFamily="34" charset="-122"/>
-                        <a:ea typeface="微软雅黑" panose="020B0503020204020204" pitchFamily="34" charset="-122"/>
-                      </a:endParaRPr>
                     </a:p>
                   </a:txBody>
                   <a:tcPr marT="45725" marB="45725" anchor="ctr" horzOverflow="overflow">
@@ -20364,14 +20042,6 @@
                         </a:rPr>
                         <a:t>状态</a:t>
                       </a:r>
-                      <a:endParaRPr kumimoji="0" lang="zh-CN" altLang="en-US" sz="1100" b="1" u="none" strike="noStrike" cap="none" normalizeH="0" baseline="0" dirty="0">
-                        <a:solidFill>
-                          <a:schemeClr val="tx1"/>
-                        </a:solidFill>
-                        <a:effectLst/>
-                        <a:latin typeface="微软雅黑" panose="020B0503020204020204" pitchFamily="34" charset="-122"/>
-                        <a:ea typeface="微软雅黑" panose="020B0503020204020204" pitchFamily="34" charset="-122"/>
-                      </a:endParaRPr>
                     </a:p>
                   </a:txBody>
                   <a:tcPr marT="45725" marB="45725" anchor="ctr" horzOverflow="overflow">
@@ -20539,17 +20209,6 @@
                         </a:rPr>
                         <a:t>1</a:t>
                       </a:r>
-                      <a:endParaRPr kumimoji="0" lang="en-US" altLang="zh-CN" sz="1000" u="none" strike="noStrike" cap="none" normalizeH="0" baseline="0" dirty="0" smtClean="0">
-                        <a:ln>
-                          <a:noFill/>
-                        </a:ln>
-                        <a:solidFill>
-                          <a:schemeClr val="tx1"/>
-                        </a:solidFill>
-                        <a:effectLst/>
-                        <a:latin typeface="微软雅黑" panose="020B0503020204020204" pitchFamily="34" charset="-122"/>
-                        <a:ea typeface="微软雅黑" panose="020B0503020204020204" pitchFamily="34" charset="-122"/>
-                      </a:endParaRPr>
                     </a:p>
                   </a:txBody>
                   <a:tcPr marT="45725" marB="45725" anchor="ctr" horzOverflow="overflow"/>
@@ -21383,17 +21042,6 @@
                         </a:rPr>
                         <a:t>2</a:t>
                       </a:r>
-                      <a:endParaRPr kumimoji="0" lang="en-US" altLang="zh-CN" sz="1000" u="none" strike="noStrike" cap="none" normalizeH="0" baseline="0" dirty="0" smtClean="0">
-                        <a:ln>
-                          <a:noFill/>
-                        </a:ln>
-                        <a:solidFill>
-                          <a:schemeClr val="tx1"/>
-                        </a:solidFill>
-                        <a:effectLst/>
-                        <a:latin typeface="微软雅黑" panose="020B0503020204020204" pitchFamily="34" charset="-122"/>
-                        <a:ea typeface="微软雅黑" panose="020B0503020204020204" pitchFamily="34" charset="-122"/>
-                      </a:endParaRPr>
                     </a:p>
                   </a:txBody>
                   <a:tcPr marT="45725" marB="45725" anchor="ctr" horzOverflow="overflow"/>
@@ -22233,17 +21881,6 @@
                         </a:rPr>
                         <a:t>3</a:t>
                       </a:r>
-                      <a:endParaRPr kumimoji="0" lang="en-US" altLang="zh-CN" sz="1000" u="none" strike="noStrike" cap="none" normalizeH="0" baseline="0" dirty="0" smtClean="0">
-                        <a:ln>
-                          <a:noFill/>
-                        </a:ln>
-                        <a:solidFill>
-                          <a:schemeClr val="tx1"/>
-                        </a:solidFill>
-                        <a:effectLst/>
-                        <a:latin typeface="微软雅黑" panose="020B0503020204020204" pitchFamily="34" charset="-122"/>
-                        <a:ea typeface="微软雅黑" panose="020B0503020204020204" pitchFamily="34" charset="-122"/>
-                      </a:endParaRPr>
                     </a:p>
                   </a:txBody>
                   <a:tcPr marT="45725" marB="45725" anchor="ctr" horzOverflow="overflow"/>
@@ -22962,17 +22599,6 @@
                         </a:rPr>
                         <a:t>4</a:t>
                       </a:r>
-                      <a:endParaRPr kumimoji="0" lang="en-US" altLang="zh-CN" sz="1000" u="none" strike="noStrike" cap="none" normalizeH="0" baseline="0" dirty="0" smtClean="0">
-                        <a:ln>
-                          <a:noFill/>
-                        </a:ln>
-                        <a:solidFill>
-                          <a:schemeClr val="tx1"/>
-                        </a:solidFill>
-                        <a:effectLst/>
-                        <a:latin typeface="微软雅黑" panose="020B0503020204020204" pitchFamily="34" charset="-122"/>
-                        <a:ea typeface="微软雅黑" panose="020B0503020204020204" pitchFamily="34" charset="-122"/>
-                      </a:endParaRPr>
                     </a:p>
                   </a:txBody>
                   <a:tcPr marT="45725" marB="45725" anchor="ctr" horzOverflow="overflow"/>
@@ -23570,17 +23196,6 @@
                         </a:rPr>
                         <a:t>5</a:t>
                       </a:r>
-                      <a:endParaRPr kumimoji="0" lang="en-US" altLang="zh-CN" sz="1000" u="none" strike="noStrike" cap="none" normalizeH="0" baseline="0" dirty="0" smtClean="0">
-                        <a:ln>
-                          <a:noFill/>
-                        </a:ln>
-                        <a:solidFill>
-                          <a:schemeClr val="tx1"/>
-                        </a:solidFill>
-                        <a:effectLst/>
-                        <a:latin typeface="微软雅黑" panose="020B0503020204020204" pitchFamily="34" charset="-122"/>
-                        <a:ea typeface="微软雅黑" panose="020B0503020204020204" pitchFamily="34" charset="-122"/>
-                      </a:endParaRPr>
                     </a:p>
                   </a:txBody>
                   <a:tcPr marT="45725" marB="45725" anchor="ctr" horzOverflow="overflow"/>
@@ -24178,17 +23793,6 @@
                         </a:rPr>
                         <a:t>6</a:t>
                       </a:r>
-                      <a:endParaRPr kumimoji="0" lang="en-US" altLang="zh-CN" sz="1000" u="none" strike="noStrike" cap="none" normalizeH="0" baseline="0" dirty="0" smtClean="0">
-                        <a:ln>
-                          <a:noFill/>
-                        </a:ln>
-                        <a:solidFill>
-                          <a:schemeClr val="tx1"/>
-                        </a:solidFill>
-                        <a:effectLst/>
-                        <a:latin typeface="微软雅黑" panose="020B0503020204020204" pitchFamily="34" charset="-122"/>
-                        <a:ea typeface="微软雅黑" panose="020B0503020204020204" pitchFamily="34" charset="-122"/>
-                      </a:endParaRPr>
                     </a:p>
                   </a:txBody>
                   <a:tcPr marT="45725" marB="45725" anchor="ctr" horzOverflow="overflow"/>
@@ -24907,17 +24511,6 @@
                         </a:rPr>
                         <a:t>7</a:t>
                       </a:r>
-                      <a:endParaRPr kumimoji="0" lang="en-US" altLang="zh-CN" sz="1000" u="none" strike="noStrike" cap="none" normalizeH="0" baseline="0" dirty="0" smtClean="0">
-                        <a:ln>
-                          <a:noFill/>
-                        </a:ln>
-                        <a:solidFill>
-                          <a:schemeClr val="tx1"/>
-                        </a:solidFill>
-                        <a:effectLst/>
-                        <a:latin typeface="微软雅黑" panose="020B0503020204020204" pitchFamily="34" charset="-122"/>
-                        <a:ea typeface="微软雅黑" panose="020B0503020204020204" pitchFamily="34" charset="-122"/>
-                      </a:endParaRPr>
                     </a:p>
                   </a:txBody>
                   <a:tcPr marT="45725" marB="45725" anchor="ctr" horzOverflow="overflow"/>
@@ -25643,6 +25236,7 @@
             <a:bodyPr wrap="square" anchor="t">
               <a:spAutoFit/>
             </a:bodyPr>
+            <a:lstStyle/>
             <a:p>
               <a:pPr>
                 <a:lnSpc>
@@ -25671,14 +25265,6 @@
                 </a:rPr>
                 <a:t>临时措施</a:t>
               </a:r>
-              <a:endParaRPr lang="zh-CN" altLang="en-US" sz="1400" b="1">
-                <a:solidFill>
-                  <a:srgbClr val="000000"/>
-                </a:solidFill>
-                <a:latin typeface="微软雅黑" panose="020B0503020204020204" pitchFamily="34" charset="-122"/>
-                <a:ea typeface="微软雅黑" panose="020B0503020204020204" pitchFamily="34" charset="-122"/>
-                <a:sym typeface="微软雅黑" panose="020B0503020204020204" pitchFamily="34" charset="-122"/>
-              </a:endParaRPr>
             </a:p>
           </p:txBody>
         </p:sp>
@@ -25719,6 +25305,7 @@
           </p:style>
           <p:txBody>
             <a:bodyPr anchor="ctr"/>
+            <a:lstStyle/>
             <a:p>
               <a:pPr algn="ctr" fontAlgn="auto">
                 <a:defRPr/>
@@ -25903,6 +25490,7 @@
                 </a:solidFill>
                 <a:latin typeface="Arial" panose="020B0604020202020204" pitchFamily="34" charset="0"/>
               </a:rPr>
+              <a:t>6</a:t>
             </a:fld>
             <a:endParaRPr lang="en-US" altLang="zh-CN" sz="1000" b="1">
               <a:solidFill>
@@ -25950,6 +25538,7 @@
             <a:bodyPr wrap="square" anchor="t">
               <a:spAutoFit/>
             </a:bodyPr>
+            <a:lstStyle/>
             <a:p>
               <a:pPr>
                 <a:lnSpc>
@@ -26040,6 +25629,7 @@
           </p:style>
           <p:txBody>
             <a:bodyPr anchor="ctr"/>
+            <a:lstStyle/>
             <a:p>
               <a:pPr algn="ctr" fontAlgn="auto">
                 <a:defRPr/>
@@ -26117,6 +25707,7 @@
                 <a:tc>
                   <a:txBody>
                     <a:bodyPr/>
+                    <a:lstStyle/>
                     <a:p>
                       <a:pPr algn="ctr">
                         <a:buNone/>
@@ -26129,14 +25720,9 @@
                         </a:rPr>
                         <a:t>层次</a:t>
                       </a:r>
-                      <a:endParaRPr lang="zh-CN" altLang="en-US" sz="1100" b="1" dirty="0">
-                        <a:effectLst/>
-                        <a:latin typeface="微软雅黑" panose="020B0503020204020204" pitchFamily="34" charset="-122"/>
-                        <a:ea typeface="微软雅黑" panose="020B0503020204020204" pitchFamily="34" charset="-122"/>
-                      </a:endParaRPr>
                     </a:p>
                   </a:txBody>
-                  <a:tcPr anchor="ctr" anchorCtr="0">
+                  <a:tcPr anchor="ctr">
                     <a:solidFill>
                       <a:schemeClr val="bg1">
                         <a:lumMod val="85000"/>
@@ -26147,6 +25733,7 @@
                 <a:tc>
                   <a:txBody>
                     <a:bodyPr/>
+                    <a:lstStyle/>
                     <a:p>
                       <a:pPr algn="ctr">
                         <a:buNone/>
@@ -26159,14 +25746,9 @@
                         </a:rPr>
                         <a:t>问题</a:t>
                       </a:r>
-                      <a:endParaRPr lang="zh-CN" altLang="en-US" sz="1100" b="1" dirty="0">
-                        <a:effectLst/>
-                        <a:latin typeface="微软雅黑" panose="020B0503020204020204" pitchFamily="34" charset="-122"/>
-                        <a:ea typeface="微软雅黑" panose="020B0503020204020204" pitchFamily="34" charset="-122"/>
-                      </a:endParaRPr>
                     </a:p>
                   </a:txBody>
-                  <a:tcPr anchor="ctr" anchorCtr="0">
+                  <a:tcPr anchor="ctr">
                     <a:solidFill>
                       <a:schemeClr val="bg1">
                         <a:lumMod val="85000"/>
@@ -26177,6 +25759,7 @@
                 <a:tc>
                   <a:txBody>
                     <a:bodyPr/>
+                    <a:lstStyle/>
                     <a:p>
                       <a:pPr algn="ctr">
                         <a:buNone/>
@@ -26189,14 +25772,9 @@
                         </a:rPr>
                         <a:t>原因</a:t>
                       </a:r>
-                      <a:endParaRPr lang="zh-CN" altLang="en-US" sz="1100" b="1" dirty="0">
-                        <a:effectLst/>
-                        <a:latin typeface="微软雅黑" panose="020B0503020204020204" pitchFamily="34" charset="-122"/>
-                        <a:ea typeface="微软雅黑" panose="020B0503020204020204" pitchFamily="34" charset="-122"/>
-                      </a:endParaRPr>
                     </a:p>
                   </a:txBody>
-                  <a:tcPr anchor="ctr" anchorCtr="0">
+                  <a:tcPr anchor="ctr">
                     <a:solidFill>
                       <a:schemeClr val="bg1">
                         <a:lumMod val="85000"/>
@@ -26209,6 +25787,7 @@
                 <a:tc>
                   <a:txBody>
                     <a:bodyPr/>
+                    <a:lstStyle/>
                     <a:p>
                       <a:pPr algn="ctr">
                         <a:buNone/>
@@ -26220,17 +25799,14 @@
                         </a:rPr>
                         <a:t>Why1</a:t>
                       </a:r>
-                      <a:endParaRPr lang="en-US" altLang="zh-CN" sz="1000">
-                        <a:latin typeface="微软雅黑" panose="020B0503020204020204" pitchFamily="34" charset="-122"/>
-                        <a:ea typeface="微软雅黑" panose="020B0503020204020204" pitchFamily="34" charset="-122"/>
-                      </a:endParaRPr>
                     </a:p>
                   </a:txBody>
-                  <a:tcPr anchor="ctr" anchorCtr="0"/>
+                  <a:tcPr anchor="ctr"/>
                 </a:tc>
                 <a:tc>
                   <a:txBody>
                     <a:bodyPr/>
+                    <a:lstStyle/>
                     <a:p>
                       <a:pPr algn="ctr">
                         <a:buNone/>
@@ -26241,11 +25817,12 @@
                       </a:endParaRPr>
                     </a:p>
                   </a:txBody>
-                  <a:tcPr anchor="ctr" anchorCtr="0"/>
+                  <a:tcPr anchor="ctr"/>
                 </a:tc>
                 <a:tc>
                   <a:txBody>
                     <a:bodyPr/>
+                    <a:lstStyle/>
                     <a:p>
                       <a:pPr algn="ctr">
                         <a:buNone/>
@@ -26256,13 +25833,14 @@
                       </a:endParaRPr>
                     </a:p>
                   </a:txBody>
-                  <a:tcPr anchor="ctr" anchorCtr="0"/>
+                  <a:tcPr anchor="ctr"/>
                 </a:tc>
               </a:tr>
               <a:tr h="396000">
                 <a:tc>
                   <a:txBody>
                     <a:bodyPr/>
+                    <a:lstStyle/>
                     <a:p>
                       <a:pPr algn="ctr">
                         <a:buNone/>
@@ -26281,11 +25859,12 @@
                       </a:endParaRPr>
                     </a:p>
                   </a:txBody>
-                  <a:tcPr anchor="ctr" anchorCtr="0"/>
+                  <a:tcPr anchor="ctr"/>
                 </a:tc>
                 <a:tc>
                   <a:txBody>
                     <a:bodyPr/>
+                    <a:lstStyle/>
                     <a:p>
                       <a:pPr algn="ctr">
                         <a:buNone/>
@@ -26296,11 +25875,12 @@
                       </a:endParaRPr>
                     </a:p>
                   </a:txBody>
-                  <a:tcPr anchor="ctr" anchorCtr="0"/>
+                  <a:tcPr anchor="ctr"/>
                 </a:tc>
                 <a:tc>
                   <a:txBody>
                     <a:bodyPr/>
+                    <a:lstStyle/>
                     <a:p>
                       <a:pPr algn="ctr">
                         <a:buNone/>
@@ -26311,13 +25891,14 @@
                       </a:endParaRPr>
                     </a:p>
                   </a:txBody>
-                  <a:tcPr anchor="ctr" anchorCtr="0"/>
+                  <a:tcPr anchor="ctr"/>
                 </a:tc>
               </a:tr>
               <a:tr h="396000">
                 <a:tc>
                   <a:txBody>
                     <a:bodyPr/>
+                    <a:lstStyle/>
                     <a:p>
                       <a:pPr algn="ctr">
                         <a:buNone/>
@@ -26336,11 +25917,12 @@
                       </a:endParaRPr>
                     </a:p>
                   </a:txBody>
-                  <a:tcPr anchor="ctr" anchorCtr="0"/>
+                  <a:tcPr anchor="ctr"/>
                 </a:tc>
                 <a:tc>
                   <a:txBody>
                     <a:bodyPr/>
+                    <a:lstStyle/>
                     <a:p>
                       <a:pPr algn="ctr">
                         <a:buNone/>
@@ -26351,11 +25933,12 @@
                       </a:endParaRPr>
                     </a:p>
                   </a:txBody>
-                  <a:tcPr anchor="ctr" anchorCtr="0"/>
+                  <a:tcPr anchor="ctr"/>
                 </a:tc>
                 <a:tc>
                   <a:txBody>
                     <a:bodyPr/>
+                    <a:lstStyle/>
                     <a:p>
                       <a:pPr algn="ctr">
                         <a:buNone/>
@@ -26366,13 +25949,14 @@
                       </a:endParaRPr>
                     </a:p>
                   </a:txBody>
-                  <a:tcPr anchor="ctr" anchorCtr="0"/>
+                  <a:tcPr anchor="ctr"/>
                 </a:tc>
               </a:tr>
               <a:tr h="396000">
                 <a:tc>
                   <a:txBody>
                     <a:bodyPr/>
+                    <a:lstStyle/>
                     <a:p>
                       <a:pPr algn="ctr">
                         <a:buNone/>
@@ -26391,11 +25975,12 @@
                       </a:endParaRPr>
                     </a:p>
                   </a:txBody>
-                  <a:tcPr anchor="ctr" anchorCtr="0"/>
+                  <a:tcPr anchor="ctr"/>
                 </a:tc>
                 <a:tc>
                   <a:txBody>
                     <a:bodyPr/>
+                    <a:lstStyle/>
                     <a:p>
                       <a:pPr algn="ctr">
                         <a:buNone/>
@@ -26406,11 +25991,12 @@
                       </a:endParaRPr>
                     </a:p>
                   </a:txBody>
-                  <a:tcPr anchor="ctr" anchorCtr="0"/>
+                  <a:tcPr anchor="ctr"/>
                 </a:tc>
                 <a:tc>
                   <a:txBody>
                     <a:bodyPr/>
+                    <a:lstStyle/>
                     <a:p>
                       <a:pPr algn="ctr">
                         <a:buNone/>
@@ -26421,13 +26007,14 @@
                       </a:endParaRPr>
                     </a:p>
                   </a:txBody>
-                  <a:tcPr anchor="ctr" anchorCtr="0"/>
+                  <a:tcPr anchor="ctr"/>
                 </a:tc>
               </a:tr>
               <a:tr h="396000">
                 <a:tc>
                   <a:txBody>
                     <a:bodyPr/>
+                    <a:lstStyle/>
                     <a:p>
                       <a:pPr algn="ctr">
                         <a:buNone/>
@@ -26446,11 +26033,12 @@
                       </a:endParaRPr>
                     </a:p>
                   </a:txBody>
-                  <a:tcPr anchor="ctr" anchorCtr="0"/>
+                  <a:tcPr anchor="ctr"/>
                 </a:tc>
                 <a:tc>
                   <a:txBody>
                     <a:bodyPr/>
+                    <a:lstStyle/>
                     <a:p>
                       <a:pPr algn="ctr">
                         <a:buNone/>
@@ -26461,11 +26049,12 @@
                       </a:endParaRPr>
                     </a:p>
                   </a:txBody>
-                  <a:tcPr anchor="ctr" anchorCtr="0"/>
+                  <a:tcPr anchor="ctr"/>
                 </a:tc>
                 <a:tc>
                   <a:txBody>
                     <a:bodyPr/>
+                    <a:lstStyle/>
                     <a:p>
                       <a:pPr algn="ctr">
                         <a:buNone/>
@@ -26476,7 +26065,7 @@
                       </a:endParaRPr>
                     </a:p>
                   </a:txBody>
-                  <a:tcPr anchor="ctr" anchorCtr="0"/>
+                  <a:tcPr anchor="ctr"/>
                 </a:tc>
               </a:tr>
             </a:tbl>
@@ -26619,6 +26208,7 @@
                 </a:solidFill>
                 <a:latin typeface="Arial" panose="020B0604020202020204" pitchFamily="34" charset="0"/>
               </a:rPr>
+              <a:t>7</a:t>
             </a:fld>
             <a:endParaRPr lang="en-US" altLang="zh-CN" sz="1000" b="1">
               <a:solidFill>
@@ -26666,6 +26256,7 @@
             <a:bodyPr wrap="square" anchor="t">
               <a:spAutoFit/>
             </a:bodyPr>
+            <a:lstStyle/>
             <a:p>
               <a:pPr>
                 <a:lnSpc>
@@ -26756,6 +26347,7 @@
           </p:style>
           <p:txBody>
             <a:bodyPr anchor="ctr"/>
+            <a:lstStyle/>
             <a:p>
               <a:pPr algn="ctr" fontAlgn="auto">
                 <a:defRPr/>
@@ -26791,6 +26383,7 @@
           <a:bodyPr wrap="square" rtlCol="0">
             <a:spAutoFit/>
           </a:bodyPr>
+          <a:lstStyle/>
           <a:p>
             <a:r>
               <a:rPr lang="en-US" altLang="zh-CN" sz="1000">
@@ -26808,11 +26401,6 @@
               </a:rPr>
               <a:t>发生原因分析：</a:t>
             </a:r>
-            <a:endParaRPr lang="zh-CN" altLang="en-US" sz="1000">
-              <a:latin typeface="微软雅黑" panose="020B0503020204020204" pitchFamily="34" charset="-122"/>
-              <a:ea typeface="微软雅黑" panose="020B0503020204020204" pitchFamily="34" charset="-122"/>
-              <a:cs typeface="微软雅黑" panose="020B0503020204020204" pitchFamily="34" charset="-122"/>
-            </a:endParaRPr>
           </a:p>
         </p:txBody>
       </p:sp>
@@ -26878,6 +26466,7 @@
                 <a:tc>
                   <a:txBody>
                     <a:bodyPr/>
+                    <a:lstStyle/>
                     <a:p>
                       <a:pPr algn="ctr">
                         <a:buNone/>
@@ -26890,14 +26479,9 @@
                         </a:rPr>
                         <a:t>层次</a:t>
                       </a:r>
-                      <a:endParaRPr lang="zh-CN" altLang="en-US" sz="1100" b="1" dirty="0">
-                        <a:effectLst/>
-                        <a:latin typeface="微软雅黑" panose="020B0503020204020204" pitchFamily="34" charset="-122"/>
-                        <a:ea typeface="微软雅黑" panose="020B0503020204020204" pitchFamily="34" charset="-122"/>
-                      </a:endParaRPr>
                     </a:p>
                   </a:txBody>
-                  <a:tcPr anchor="ctr" anchorCtr="0">
+                  <a:tcPr anchor="ctr">
                     <a:solidFill>
                       <a:schemeClr val="bg1">
                         <a:lumMod val="85000"/>
@@ -26908,6 +26492,7 @@
                 <a:tc>
                   <a:txBody>
                     <a:bodyPr/>
+                    <a:lstStyle/>
                     <a:p>
                       <a:pPr algn="ctr">
                         <a:buNone/>
@@ -26920,14 +26505,9 @@
                         </a:rPr>
                         <a:t>问题</a:t>
                       </a:r>
-                      <a:endParaRPr lang="zh-CN" altLang="en-US" sz="1100" b="1" dirty="0">
-                        <a:effectLst/>
-                        <a:latin typeface="微软雅黑" panose="020B0503020204020204" pitchFamily="34" charset="-122"/>
-                        <a:ea typeface="微软雅黑" panose="020B0503020204020204" pitchFamily="34" charset="-122"/>
-                      </a:endParaRPr>
                     </a:p>
                   </a:txBody>
-                  <a:tcPr anchor="ctr" anchorCtr="0">
+                  <a:tcPr anchor="ctr">
                     <a:solidFill>
                       <a:schemeClr val="bg1">
                         <a:lumMod val="85000"/>
@@ -26938,6 +26518,7 @@
                 <a:tc>
                   <a:txBody>
                     <a:bodyPr/>
+                    <a:lstStyle/>
                     <a:p>
                       <a:pPr algn="ctr">
                         <a:buNone/>
@@ -26950,14 +26531,9 @@
                         </a:rPr>
                         <a:t>原因</a:t>
                       </a:r>
-                      <a:endParaRPr lang="zh-CN" altLang="en-US" sz="1100" b="1" dirty="0">
-                        <a:effectLst/>
-                        <a:latin typeface="微软雅黑" panose="020B0503020204020204" pitchFamily="34" charset="-122"/>
-                        <a:ea typeface="微软雅黑" panose="020B0503020204020204" pitchFamily="34" charset="-122"/>
-                      </a:endParaRPr>
                     </a:p>
                   </a:txBody>
-                  <a:tcPr anchor="ctr" anchorCtr="0">
+                  <a:tcPr anchor="ctr">
                     <a:solidFill>
                       <a:schemeClr val="bg1">
                         <a:lumMod val="85000"/>
@@ -26970,6 +26546,7 @@
                 <a:tc>
                   <a:txBody>
                     <a:bodyPr/>
+                    <a:lstStyle/>
                     <a:p>
                       <a:pPr algn="ctr">
                         <a:buNone/>
@@ -26981,17 +26558,14 @@
                         </a:rPr>
                         <a:t>Why1</a:t>
                       </a:r>
-                      <a:endParaRPr lang="en-US" altLang="zh-CN" sz="1000">
-                        <a:latin typeface="微软雅黑" panose="020B0503020204020204" pitchFamily="34" charset="-122"/>
-                        <a:ea typeface="微软雅黑" panose="020B0503020204020204" pitchFamily="34" charset="-122"/>
-                      </a:endParaRPr>
                     </a:p>
                   </a:txBody>
-                  <a:tcPr anchor="ctr" anchorCtr="0"/>
+                  <a:tcPr anchor="ctr"/>
                 </a:tc>
                 <a:tc>
                   <a:txBody>
                     <a:bodyPr/>
+                    <a:lstStyle/>
                     <a:p>
                       <a:pPr algn="ctr">
                         <a:buNone/>
@@ -27002,11 +26576,12 @@
                       </a:endParaRPr>
                     </a:p>
                   </a:txBody>
-                  <a:tcPr anchor="ctr" anchorCtr="0"/>
+                  <a:tcPr anchor="ctr"/>
                 </a:tc>
                 <a:tc>
                   <a:txBody>
                     <a:bodyPr/>
+                    <a:lstStyle/>
                     <a:p>
                       <a:pPr algn="ctr">
                         <a:buNone/>
@@ -27017,13 +26592,14 @@
                       </a:endParaRPr>
                     </a:p>
                   </a:txBody>
-                  <a:tcPr anchor="ctr" anchorCtr="0"/>
+                  <a:tcPr anchor="ctr"/>
                 </a:tc>
               </a:tr>
               <a:tr h="396000">
                 <a:tc>
                   <a:txBody>
                     <a:bodyPr/>
+                    <a:lstStyle/>
                     <a:p>
                       <a:pPr algn="ctr">
                         <a:buNone/>
@@ -27042,11 +26618,12 @@
                       </a:endParaRPr>
                     </a:p>
                   </a:txBody>
-                  <a:tcPr anchor="ctr" anchorCtr="0"/>
+                  <a:tcPr anchor="ctr"/>
                 </a:tc>
                 <a:tc>
                   <a:txBody>
                     <a:bodyPr/>
+                    <a:lstStyle/>
                     <a:p>
                       <a:pPr algn="ctr">
                         <a:buNone/>
@@ -27057,11 +26634,12 @@
                       </a:endParaRPr>
                     </a:p>
                   </a:txBody>
-                  <a:tcPr anchor="ctr" anchorCtr="0"/>
+                  <a:tcPr anchor="ctr"/>
                 </a:tc>
                 <a:tc>
                   <a:txBody>
                     <a:bodyPr/>
+                    <a:lstStyle/>
                     <a:p>
                       <a:pPr algn="ctr">
                         <a:buNone/>
@@ -27072,13 +26650,14 @@
                       </a:endParaRPr>
                     </a:p>
                   </a:txBody>
-                  <a:tcPr anchor="ctr" anchorCtr="0"/>
+                  <a:tcPr anchor="ctr"/>
                 </a:tc>
               </a:tr>
               <a:tr h="396000">
                 <a:tc>
                   <a:txBody>
                     <a:bodyPr/>
+                    <a:lstStyle/>
                     <a:p>
                       <a:pPr algn="ctr">
                         <a:buNone/>
@@ -27097,11 +26676,12 @@
                       </a:endParaRPr>
                     </a:p>
                   </a:txBody>
-                  <a:tcPr anchor="ctr" anchorCtr="0"/>
+                  <a:tcPr anchor="ctr"/>
                 </a:tc>
                 <a:tc>
                   <a:txBody>
                     <a:bodyPr/>
+                    <a:lstStyle/>
                     <a:p>
                       <a:pPr algn="ctr">
                         <a:buNone/>
@@ -27112,11 +26692,12 @@
                       </a:endParaRPr>
                     </a:p>
                   </a:txBody>
-                  <a:tcPr anchor="ctr" anchorCtr="0"/>
+                  <a:tcPr anchor="ctr"/>
                 </a:tc>
                 <a:tc>
                   <a:txBody>
                     <a:bodyPr/>
+                    <a:lstStyle/>
                     <a:p>
                       <a:pPr algn="ctr">
                         <a:buNone/>
@@ -27127,7 +26708,7 @@
                       </a:endParaRPr>
                     </a:p>
                   </a:txBody>
-                  <a:tcPr anchor="ctr" anchorCtr="0"/>
+                  <a:tcPr anchor="ctr"/>
                 </a:tc>
               </a:tr>
             </a:tbl>
@@ -27270,6 +26851,7 @@
                 </a:solidFill>
                 <a:latin typeface="Arial" panose="020B0604020202020204" pitchFamily="34" charset="0"/>
               </a:rPr>
+              <a:t>8</a:t>
             </a:fld>
             <a:endParaRPr lang="en-US" altLang="zh-CN" sz="1000" b="1">
               <a:solidFill>
@@ -27317,6 +26899,7 @@
             <a:bodyPr wrap="square" anchor="t">
               <a:spAutoFit/>
             </a:bodyPr>
+            <a:lstStyle/>
             <a:p>
               <a:pPr>
                 <a:lnSpc>
@@ -27407,6 +26990,7 @@
           </p:style>
           <p:txBody>
             <a:bodyPr anchor="ctr"/>
+            <a:lstStyle/>
             <a:p>
               <a:pPr algn="ctr" fontAlgn="auto">
                 <a:defRPr/>
@@ -27442,6 +27026,7 @@
           <a:bodyPr wrap="square" rtlCol="0">
             <a:spAutoFit/>
           </a:bodyPr>
+          <a:lstStyle/>
           <a:p>
             <a:r>
               <a:rPr lang="en-US" altLang="zh-CN" sz="1000">
@@ -27457,21 +27042,8 @@
                 <a:ea typeface="微软雅黑" panose="020B0503020204020204" pitchFamily="34" charset="-122"/>
                 <a:cs typeface="微软雅黑" panose="020B0503020204020204" pitchFamily="34" charset="-122"/>
               </a:rPr>
-              <a:t>流出</a:t>
+              <a:t>流出原因分析：</a:t>
             </a:r>
-            <a:r>
-              <a:rPr lang="zh-CN" altLang="en-US" sz="1000">
-                <a:latin typeface="微软雅黑" panose="020B0503020204020204" pitchFamily="34" charset="-122"/>
-                <a:ea typeface="微软雅黑" panose="020B0503020204020204" pitchFamily="34" charset="-122"/>
-                <a:cs typeface="微软雅黑" panose="020B0503020204020204" pitchFamily="34" charset="-122"/>
-              </a:rPr>
-              <a:t>原因分析：</a:t>
-            </a:r>
-            <a:endParaRPr lang="zh-CN" altLang="en-US" sz="1000">
-              <a:latin typeface="微软雅黑" panose="020B0503020204020204" pitchFamily="34" charset="-122"/>
-              <a:ea typeface="微软雅黑" panose="020B0503020204020204" pitchFamily="34" charset="-122"/>
-              <a:cs typeface="微软雅黑" panose="020B0503020204020204" pitchFamily="34" charset="-122"/>
-            </a:endParaRPr>
           </a:p>
         </p:txBody>
       </p:sp>
@@ -27492,30 +27064,14 @@
 </file>
 
 <file path=ppt/tags/tag1.xml><?xml version="1.0" encoding="utf-8"?>
-<p:tagLst xmlns:p="http://schemas.openxmlformats.org/presentationml/2006/main">
-  <p:tag name="MIO_BULLET_IMAGE_BINARY_DATA" val="R0lGODlh4AHgAeZ/AP+WAf/Mk/2YAP+vOP3guf+rMf716vz///6cAP725f/VqP6aBP2rMP/fvP/Upfz++//nxf7q0P6YBf/69f+yQv+uMP+1TP/8/f+wOP3s0fyYAv6wOv768v/Tqfv//fvVpv6yRfyZAP+YBv388vyqMP6aBv/UqfyaA/+WBeGaAP/fwP/q0/+ZCP+0Rf/6+OKYAv7KkfyuMP/s1P6cBP/29f+4U/6ZAP6ZAf+YAf+aAP/+/////f+aAv+ZAv2aAP7///+YAP+sMP6bAP7+/v6sMP6sMf6aAP6ZA/+YA/2aAf/9/v7+/P+tMP+bAP6bAv/9///+/P7//f7+//7/+v//+/2tMP+bAfybAP/++v//+v+aBP2wOv3++fyaAf+bBP7/+/39/f/+/f2ZBf/n1v79///8///9+P2bBvnXp/v/+v3Xqv/37P39//78//2vOP/Xpv79+//Vqv2bBP+XA/+xOv+aAf/++/+3T/+ZBP2bAPqbAf/Ur//QmP////+ZAP///yH5BAEAAH8ALAAAAADgAeABAAf/gH+Cg4SFhoeIiYqLjI2Oj5CRkpOUlZaXmJmam5ydnp+goaKjpKWmp6ipqqusra6vsLGys7S1tre4ubq7vL2+v8DBwsPExcbHyMnKy8zNzs/Q0dLT1NXW19jZ2tvc3d7f4OHi4+Tl5ufopRQFBUEFRCDs8vP09fb0TAxERen9/v+CiggcOJCJDT85gPDwc6Ohw4cQI0p8iKTHgg1MCugjwoRCkA0AQ4qUxg5DlSJBBhCxwbKljRs9fPDoouWGy5s4c+p06SdJDh9GfPgI8TNHAQpEBrBLOrKpU14MKtTYV6AIjhA4gCDAoRPJkRw4klxZuLOsWZZ+DiK84afHERta//wIwPGThxEeQTDkdfe0r99U74hUJWLET1g/iG8cORJCLeLHfowI6GFDAEMeODJr3sy5s+fNTnLcuPvSDxDGPkRoeMlVy1sgSG5UGRCEY4G/uHNfUhqESRDHkIMLH068uPHjyJMHD8K8wAAGuqNLL4RhaYUbTSrjUM69u/fv3ZsAUbpuwPTzTgVGLfDyRogbQngkAU+/vn3uThD6EZKDSJUgVViA3oDmUBBDAb4Z0cMNom2HWUNc3SfhhBLiYIQQfhzRgxE51MREBUWYR+CI2xTBxBZFvOVDQvxZdgMPNiCBAIMU1mhjdw9mx6ENOPQgxA1AbEBESiQWKU0FBVSBQf8IfmAWF0NAKOaDDRy2FQJlN2appXBNOLGdFUAs0IMfXtwgghYCiBZiBRUIaOSbxgyAwZA4CLAQW6YhZpcNOWQHxHZHOEHUloRuCUQSDTkRY2k2CAFEDgeZycMATGDAD5yY8tJOkjjwACkPQODhxA1OvMWWlzROGRMQJTxZ6KsT3uDDo3HhIJ4IfPqwXQk2ZIfQQUUQQQRImRYrywbMBQHrsswym4MfGBFr7LSAMdfstdhuCR+flppI7behUMoEE/Fla+659y3UA11NGBFEEc6BKy8mHymLGRJdoKvvvspRBukROMzQQ6j+UTDvwY9UkE8QCeVHI78QRxwcEGck4UP/bAjFdGFS0CHssSFEUFBEmqBihsMVeLgq8cr6+oCHH1YAWVMXlAGhhQ3ddvzxwW4wUICXmDHkoh8zsGy0vndpAeqYC4UgxJg2LMBVbUzs/O07RWzgL48H5dcEdgIccfTY2MKIg0x2JoaDCC0ixAMSGRFhdaZMEFGBD2TnrTd3yc5dZIgperr34IQT546Ifk+3DhNATKnFs4VHHrkQQaCYuG6+MeGHFlfOOqbkoO/Npw1FVGDw5U9tMEARQtjAw7ZACIFE6LSTvYAYVuSQw7uIo/4PBky0kINdo2bWpA141648yxYSzRYTRejsOzrsANHrHCw9m/YCkC/v/b6x56Do/3aQUj29ORsUcJ2CNsx3AxJAMI3n9/SfKxNCdDU6PNzvnB8OipqrnwBr1zf/bcMC7WjSABdIu3cZMBsYYMBCpsTACkruXUF4IDWCsA62wKd7Fgxh3sSXvtNpsBntqMKLDpIEGwBBhDAkGw4qwgMQnZAZITrIW7YjhLPF8IcsuwEC/jSeFkjrhsRAShB8cASbjElXVQKiFPl1kJvJYVYYMCESg2ESwySkBz/hkQDQMsUynis+c8hBmsQWIultcRfJMqMcCZedKmjxjbhAyRz3uDcRPKo2dMDjLfIxAD4akmw5mAOTbsAUQc6CAUyA0SEnybImJA9GGHTkK1KCAZuIjf+SoOQXEuCSlSO0rgq30eQqKhCEmPhhAS8MpSzPxSMM9QABfkDCHDKnSlSEqAfvocssh5kt17HkCp9qiB+S1EtSvKMCrkuIH3RFzGouywZXekkO8DAaP4hAABZwYzM5YZLCWPOcLCvgODdRBAoADJ3wXFle1pkJSg1ACF+Lpz4hVgW50bMSeVGQGvdJUH31ACVH/KcjUAIXT/WwoBDNlhqZ0DuFKmIAGNEd/oQY0Y4uKyxiq4pFF6E+I8gKfziYgzk9ylItwciJDLjUSA2xgRiwZZQ2aGKT5tfSnlLIhS1pQhWqNlNC/IeMPk1qs9wBgqL+AV4o8IFllEpVZmVtpkX/IAGknrWAqnqVUHzioEKTVIAchMCh2/mqWm2EAy8VoQr0HJcfUGDMJuZnrXiV0E9i185xWmpKK8rBEazgqLwatj5cSQgOPtJL6CGAMpb5kexAeNjKJqdXyAtNEZrqSAT5wC2IkZoTHsVTy5q2OHjgEVgOUoCE3hBBnSrBaWdLIXZkEIl3qAIPfNAEYNL2t/W5QRJQ8toqDGxd1gOucr3DA0f1RoMIKpkPboCDTy73usfh0LogacBxnc2VusMQdsdLHBH0RFfMOd9fedAEHDCIScAhr3zTEqokDIy4qHNsD0owMGGuaL4AZsgQESKEJMQrcZ4FbWNMOboAz7chNhDB/12oW4GKegy2PJDttbQAhD+9CFIO7mh/iPqx3O62t0xq1op6mIMr+CTEEbUvOz6WpONmJb6vel9OgSAHGIsYAQLw58Giq5DpVvdas0OADXrQNB8XlLpeUMnBvPtZvIX3WnhjcpR06uR9xih2tZHXetv73rSU7Vc2wXGXrWkEsflACwXAwLf0y98/Peu/zfrRAkTAgzHVYc36VJARXGiFKnC2WAkW24JbB+JmiUABUCCArUoDaHiOMj+KOgITXGukKqRFzdlCwgd28AMqEIC6PBCAFqzgIpuYeSGiqbQs+YIpqEoVYj6Iww6U8AQp9GEFPsCe63SFhBxQ5gZzAEJoZP8dyoOm0khZ3eorIWaCKeygD32IwhP6EIGwQKrYPcDDimTiQmaDcj4Z6XRZz5qDh+4rBwqYwg/KUOowDGEI3K6IEWKDsrTM4HXmpmQTwHLbEdGGrjCyK79y4AAdRKEPO9gBvn8QhR/82gmMPsi/lRbwSfIgNBaAK4FqAM3ADraw+7rBHg4QcR3oYAdTGIIOLtAHi4/hCEm4WYe9AOqOT3GUh6pCIAeEgbREFj7F5lcPHHDtH7jc4lHYARR0IAWKT0EGbY3MT3xuyBfmQAM9CBl6aKMW0ZKWX0bQtQ4OAIWIS2HbfVACxK+thB9EgAU8Ki3Xy6iFLuABUjcQyHRM9L7/sd3ABNhOvOIXr4Ql6CALfciACF6kalYzxNUHgbXe987AeeqGOWE0POIXT/rE/8DXT/jBDjIQbJbsdobGfkmyl815GMr0L3Lik5mPdvjSl14HU+jDAbTNBR1w29sxMra461Lu2otQTrlhghHiIljR+570S7C40yEOhXvne0P8fpkN/r155wsQCFWowF9+6Sn3Wv/6it+BDpbwcChQ4QA1r/jFM040HnDc/BbkE0xwaE2RRfwBFmnFe6MHf9gmc0sgdcD3BDE3czXXBzeXcy4EBDwHgBYUEzlweyKRJEfQBALwI3OwEArIgIrnAUpwAKrXB1CQbRBYdVFwdVnHIcnD/4ELhCg4gCROQRjuhwMIYFLvp4JYYHwy1wdDoARvh21yF3FxZ3d45346uEAWggRCMCQjUTqR03sq+IWK13iPF3mTl2qr1moHkXlrUYWEcxArcgTBEhIV1nMpCIZ2WHOop3qsJ2yvB26yp2yUxYZj4xNGUCc8IGT9wBxM1oULeIcMCHzCR3zG120+kXzhNm4wEkuCmDe68joJsQ7/MADAFIh544WOyIDZV3PGJ3XeFwH6Fn7+BnCbmDfG80KKIVLpwAAYMF2aODimeIrXJ3/0B4P3l38WtwIY12Abh4KzODZU0gM1USUWNg7jwhYJSDi/CIyl54AQOAUSKHM0Z3M4p/9zGkiHzbhwWLEdn1UFLYAOEhQ1W1c42aiNpMeCLnhtMRh1U0eDNpgfOHiOY3MVs9MeLyF25ZBDR/BC17g380iPiXeESoiETAh3T0h3Uph3AHk0BxEC1mM91OUH0+gN1lI7DemQjiiGkCd5lHeGl5eGChRrGYku2wGK46AsylOSJnmHp9cHqbd6rTdssHdss0eKMcksjwIErCQOvrE8OJmTXwiJw/cExXd8lQhuy0duvViU11I8AgCC3OAGFOA9TemUqKh9q9h9+OaK4HcD/TZ+sqiV2HIVaqQR4MA4YtmIZHmHwlh/xUhxx5iMILaMcJktN8YSQUCA2uAz3zOWeen/e9w4dd44geFogeOYgRs4mNeCFlxhBF6JDQZhjr6Il40Jhvb4gvk4g1aHdf4Yj5jJLDHyOnThQNtQABaAAObFlKI5mgwIkUm4hE0Yd3MXhXeHka2ZmbrnA+JUDSLTVuXHiLr5nHHneCk5eZP3NTGRPz8hYTBZnDYSZtlQAAoyVbgJnc+5kz2ZAe41JrLiBQJgjXwSO/PBnTaiF9iAAaJ4BUewUiSZm+TpkFApiUsQAXhSfV+CFdbDjPI5ITggZ9cQBIciAgl5l/3ZmKm4fVInd09gADDgBGM0GtUHTKCZoNyRAwxQcNMQLEnwUNa1nxOal3tJjPjXB3DgdAYQAMbj/0TtFqIimhxjhCDU8A4M4gNdFZ83yZ8teoqPGYFSsAMHkAU6AAU/kAAw4BWjtSIIuqOIFRQkFg0VsC6q9h4rSjuMeaSk2YKm6XI68AAwuARKAAdS6gdNsBifg6X2cSFws6XOgBFiwwNMojIsSqYmyZsSSQVDIHUuCAX69wM1yhZESafckRWOInLQYJMLNKaASpZUIIM7oKESlgQAMxpckSva2ZxYyhgNUQQM6gyzUUGWeqk5aXFU8HRLIKXbMSN+gAdEmFjw6ajE0RhG8GzNQAR3ValG6qqNKX/XFpw7kAABwBJzwCAFemNXyquacRBJ2Qxkx6rFaqxkuQMPt4ouh/9vHqChXSBYHio2IMqrwmEZfIoDd5QMILAApFqk3DqhZPCA2dYHaxd31zYEGgoWDLFkOaquwbEQ22EDwsIMvTGv9Fqv5PmAO7AEHhAFOmBx8qcDShBxGkqljTM8BPsY2JQDscEjiIgMRAAqFtSqDnuKFfutShCDP+B4D9cHbCAFbgoDcCqnH5sYVAIWMJJuyVAV2BGm9aOyK6uNbdcHU+B4pAZxxqd9i6ofO5sYiFGIPlCyxUABYOQ62nq0R5upUbepMNCpn1qI2ZMaHMKwWil4xyAkeCAEXEasXruysCqrtOoHtoqr7skiRJqgRoEMRbBaG9K1c1uvyIptULiszWr/A88KsFZgoFy7oz0Ykr4gGNPETWobOkZbuC76rU6rA+JKrubKIejaGFjaEHgaDBSgWi7JQJvLuU55r9f2rfiXsUr4r9uBo62DpS60acSwD2lhSn9CuLB7qRArsRRrsS6XsWLLsVaKpaBiBVjrC3ZZiE1gF8RbvGTasvr6sjUns9hWszebsxqCpfEjAAOgfsEgJE6APZDTtwL0utrrlEm7tC+nvBWoqAHAqLxbiDeQurxAqTEkv/M7oWCrsWNrBJ7qXmYrqmkLkNWlEMgCDKgkRQRcwORZtxU7qzBQq2yht4bxngV2jtYzRB8IDBgwO0B0wRj8nIerrMzqrNAKM5A7/61VSF1A0AQGpr68oBIp9kMs3MKj6a36+rmhCwPl2kSkayU6uncUhEtC4Aa+MACTYcHbKsSXKrv5uq+2668wALC628Rc9xLrsh08vAtFMKdAfMVYTKbHO7EV+7nMu7GB0rE2rIMLIhTCBSCaUgBwa8VtPLfci7EwC740a7NvGqfl24w9ywMvIwbAigtMYF5iLKGBzLn1y7T4C7X7K7Wz+EnZAwTDogsAwhV3nL2XLMQHLLZky8BcgQM/QipCMCocCMCzELjTNUVBnMpkqsExe7d5awROIBN/QhlqXHszhgsroVqAzMtY/MKJG8OMSyOu0xDKtpCclwRnTAvx4DbYHP9Cu+zME0rE4Aq6fTCuSFx9PoAo3oQEOWh+Q2cLBWBKntTM4ozBWky7/Hq7X6whRbYgldxlOZB+tnASPtQj9nzP8/vGySvHGssHaNIDoxI2OogHkjoLAyACOZAEdTAUCa3QxTvI3huzDhe+UqADE/AG7JK5siYrtuwKRJAd1BUjHw3S85vJ9+u0iNsHHPAGIkCF5pcDC0BrsjCSchTONu2w8pcFSzoBDjA7dCEUYJGQTuATkEKEXZYVu0MLAmxGSJ3U9foE1/YEURAFIxAHx4YEsCwTYPETUL1mZ3UDBxYLXV1GXw3WrupwMcuTShAFSkADcSAACoIVSLBGY5Kia/b/IDZw0a7wH3x013h9qTtABUvga31wAUy6BC7w1LPTOjjwtiyBS1ltUjYQya3AAIYE2ZF9pDvwBPSHsfhW0kyY0hgiWM11nYDGOU7wXLBQAanNxqtdvFmgf8b3gE7n1xC3BBNgAhyGPM+iYU7GI2JzBKnaChSA2o8N3MGNyYi7BBAXBVTwADsQBix3bTvAAQpwA6wmAu8MY2yhZFv9CkVwSKq93RmsA3AQrtpHBXQXd7H9AxygBoUtXl3WQku2BaadCgbx2/Zt30vd1E/tRVIdwVWtO1Tiak2SPwHtUSxBXXLtCkjB0imr3Q2eymLNk2V91mm91u3n1oaBGCyy4R41/yt3wRDTewpFYARzwOAlvtp67d1P0Nd/HdiDPUOG3ROtcxAvhFSGxbp8WmGt4GnfrMsk3uNtPNmVjW2YfQCazdn7wSOgbQNA9izSJuMQ9Tlq3RAJXgpCIknZbeWR3dqvrQSx/XCz/Qa1fQS3rSvWsyIpZuYFxUS3BB9NYKKoUFbxw+NwntTDbXHFTWoO94TKzdx9/txy4UKhCugEpWzvsUIvPQoVkHWKvuggHYPJ/d3hPd7lDXHord4CwN54414hoCiavk8lcCVgkQQCQNSnAD0xMuU1TerO7HT5Dbr73d90rq8ALuAl6EJzkQJJkFyH9TguyRU3LgpMMNMijsrC3v/j8kcFEI4ESPACKcAa26FsVn3hlXXtoVAAQNYWo97tPf4DTxDHUfAFI4AGL/AC7CUAw9ziF/Pih5U+gIEQVnAC8S7vDS4FDwcHjqcDHvAEgD0aPZAmhS1Yh03geWUD2zwKICB9KXXMXl3lCi/OPzAES4BvvtZ4fr3Z75OiYJ7kom1YTkC5n1AFaaJkp7zCJF/yvJzfFOdyShhx9MbTCoBLtv001FRZ1U0KRMAgqkbfPe/zlzwF+sd9yBqrZL0Dy93c/wXdhkUBiCkKA2ATXjBJ9U31c7sDZPByyBp1GfvwFHve6b3e7b1WZtWZnzAAVdBe4lbrlqz2221xcKAETyv/BUNAcXG3pPhXsQE+4JWl5qagOWD0IlIv+IL/4Fwf4VG9IhSe7ljtUQLQ9KGQ40UTFzu/xpgv+CdO1maN1i+h1kLA1lH91h7FIK1VCkVAZueb8Ksv7D/O134N2IINTEaO8UjOUht9wqOwARggWLGhEL7/+6SO5Za95V0u7l/+2TLfUgux5pzABKvlA1awW9NP/VYu5xSb7LItBbSNEHqu9MAeTzOCBx3vCRsgsPOhBfMPCH6Cg4SFhoeIiYqLjIg3Jn2RkpOUlZaXmJmam5ydnp+goaJZUT99On1LOz86UUp9O0sTJlpANj45fiWNvL2+v8DBiTc3A3/HyMnKy8zN/0FCfjZneDw2wtfY2YqPot3e3+Dh4uOZUJGxsFFUDzthBzs7sBwKN1YCIj7a+vv8wFY4TogUaUawYDMmN3j0AOLDCI9+ECMOg0SuosWLGDNuYgVHh44hpn5QifdKyZBTPzioQSIAmsSXMLNdQWKNicGbBoMEickzJjeNQIMKHXox3pQ+WKI0EGGjhw8etnAAuSGEWDQbOHpqlZijRw4kFXCKZUZkq1l+P4mqXcu2LSUwfX4MQTWFQI8btprcOCJIQI8mPaydHZyNRw4BSIiMXYyMAuHHwdK6nUy5sjgdB3QoQfUFVpsGPZzYEHLLSQ8cQqbyhcyal48bOWzYZLy4QP/r24skW97Nu3emKKfMwTm5REoDvn9t5LjRY0E03NAP2QAg5AgRCrTH2o7OXZBu3+DDU0Yld9IPLDpU9SGQFUk0IThwNOnevUmOEDySzM5uEMR2+tB9J96ABAYFhRnxwLJKJFHsgIoOO6hwQxM8GOFHbAByZwMefnhhDH8GFZFPhrgJWOCJKIoz1wFzLfHgAUrEAw88P6igHA9HaEEidHqchsB+IDrz0I6tmZjikUh6EgUUqCzByjt9KAFcXJpRAVIDOChHZGs4GOFUMUEWhIFgWz5mZJJopumNUUgpxZRTUGE1VVU3XJVVmfzYYINoPhDxYZjLMDAfnoSdqeahiG7/ApdcdNmFlw16reYXYGQSqg0QeNziFQaAMoOBe5aeZWiipJZ6Smab9dHZDp+FNlppp6W2V6jaOAEECz7wVUWnylAwABC0mjWqqcQeCpwOwhFnHHJNKMecc5UGCwxUAsR2g2K8IlMBftJqNWyx4KZI3kmSnJdePOz54d5o8Q3abTA5HPEUEAVkiwwIOSTxLk/fhuvvgAcmSCODDp4S4YQVXhjtvo1MCBAOAlhg7zE73cmwRP3+q3FvK7b4YowK0mhjDjjqeHEveDThZQ54MDDxH0EYdjLGFG1sM4pLNvkkSVOyooSVP2Cp5cyN5FJdNFX8yesArxENUcY3R10gm0kt/9XUvHJSZZWeFjsdxMREYOg0WjVLbfahi87VR1135TWrH5MGNvYgX9tLAQ4azL0P1Gf3vRtmmnHmGWiikeaDaaippnfdvG5QwD1668O335RTdmyyqSzrR3LLNffc3Ix3GkQuI0aOzeSVp07UuOahp16668In3+J2+6BFCKZng7rqvGsU8DkL9tHggwdTaKHYY4cOKBOxrZa7MLv3Ln1FHaf3sYwz1nhjjrRnS0QIRwD7PPRlT28+WzmnsnOUPVd5ZZa5gG5vEDjw0PX4vkR//v5BUe3m1XGSitbqxDVLBQFbnaoAD0KwMPw1rHz8iyBv0taotkHqbXFrIJEQCCgQyP9Hgw7cBgQlSEK3AC5Vq2pV4WCVuLcRioNhGgAexBfC/I2whDhcy+X6MJzMHWdzzeoctEIFwyBVwAYnKF0NH5jDJrKFdeVyHbra8552ETFbBUjIEm3oxC4O5XcKMoXwCgYhCRlPYVfsVAGYkIQbmGyLjNCfF+eYieq56FQgm9EqRlayNC4PCTkgGRyZSMdCViR9TsIMzyLhM6AJLX4v5FUWCzjI3NzQkJjUiP+WIggt7MUGN2hKEo6QJUHo6zZF5M8ksVJJS2bylUSh4NoIgAcjAMEIFgICDgLpBxzg4Sm4SWV2Vnm/VhZCjrBMJiZOKLgn6AAC8amFFeyXBCQsgJT/kGSNMGlDTGNORJngxMgO4QCHWPwgArFxQhLwwEscKREy22RMN715CGSG855QjIQOpNAHKvQBChngUIWcEBsatiaetQklK+lpCHveE5xgpNEU2CSSIaxgcznIQ1dAaBaEakehxWSoQx+aTDuiop9PcEV6lhCJCIjgPp4MpiRBytCGXpKkOP0Nk9SHGSno4AdR+MgP4NGgJURACxzt6EwpWdNBjDSnUJXER55AhVZkQAJGwMENLFQn2PjhBg2xgS5fUi810rSpTr1pVNcKClVEYQoQGgIVZDAhEeirB3DDBRL4AsqXeFQs80TrV9XK1sJuwkEXWFsfniBGGWTpCL+0/0E1mFONU0YEAwMBVGDR+lTDPlQHHogLLOKyBA9ISQamiUYSvJKlTMEESCDabFM769l7guEJE+1DGMToTCzsIAJz6JAPhOADJHALYy7T7FkFS9vaKvMoQ3DQAYCDBVigYgjvWIEInCAAIByhCSGVHGxVuVzOEta56D1FFE7CjlLMiElTsIMBAuAwPBzBJRLpwV9vItuaNje9mYzRDpQgBShshgpPgEJQDQADJMAGNkbQU50kkoSwKJep5gUwgNHTB7UNgcBPiMQr4HGA6s43B0LIZk+KAAKzYni259UwTk17gKH+c4xMkgJQh5AA+uIAAaU0i/JiW14Yyxi9LdoBfP9xO5fEmmIMTQBAPgRA0PC+RGlB6q9IY3zkcDpoCcCBAhUOEJdS9GEFToAPD1LcEgFYWSLYcfFCmcvlLivTSVSCBRSGcJIIIKEHRnBwYGw5hyBvZcjkfbF/62xnWOrgKNN9AhdQEQEcJCE2gATCV3yQBKYkFSJYJrKit9xoz/6An4zdQQZ8MAc98cAHOEDCQ2wgASGobDDjTfScM1xqtirBRVnoQwZEkBABaMEeX60TZKMi2bOEmj9FSMhWBesdRvf6fBz2MIhFrKAonZMFWJkwgPZ7Eybgwc14pfZ/r30zGtvYHA3KMVCn4Fgn+MEIOXgnd8htkALsyQYCoPZg2V3/yCQveQpNFu0YjpAEpAIBCF74NDx5RQSAu5DXBPfil8M85jKbAs2kwdAMeKCFIY17aSKohYoXnfE54pkVeuZzH/wMaAdfgUM2GLm46cPvghSgCIEJuLqt3XLVPboPkZ70zC2N6a78Mt/VMGh3ei4m97gL40Vv4qkXO9RVt1qysAZkYG4wByAQlERUJ0gQqCFxOK4768X6tQ6CPexiHzvgxLCGNR6yHLRnqwh6EvjA4V65bF9321HqthK+He6LlbVTgG+724lOeFO5Ox7wVvI+513ve+fb8X8PvMDfXnnxGPzRTNaBk/uw8IaLFeKS31HamxF5wZO+9ODZ+D87DtSP/6dZOdYYeckZFoTHA6r2o6c87g/1clQoWeY0D/QNbh4NnRPfXsgf+vLPdvSkU5rpNhD7058i1uuHPvZLvP32ebP1VHvd1WHfKNnNvnJaIRpE2afz+qUmd7oTmwfGhmx59xx8t3PScn/8AQJVkFXJt3+HYngdhngjRhKMp1WRUyE+AAQ9wAM3kGtG1ANCp38OqCaXd2Pxtnlv1Xn4pm8zI1l4cAbWIAQIyB9H5DxYN4JHcnpTkHqr13oOB3uRgwM6cmmBsQETMzroF0Lqh4PjoHtiRma9d2a/J3IkZ3Jj8xRW4ANYkQMeCCJMEIIiyIRH0nwx12d/Jn3Ul3MceIFTsf9XOYABRmgvDPB52ieGR9J9USBp33dp4ed0uEB+Ukc0fjEV8pFZ9jIAyHODdlgg7dd1rAZ/sSZ/ZXd2evMQOjIDRmCI2cIEBWCFRraIKNJ/wvZ/AYh3oUSAF2KATsOBXeEHXWhElqWIoEgU8KBPi8dSAqYqFBgB4GaBxpQDzrFafrArL0ME6RaGs6gWO+BMjAVXDtJx/sRP9AYQnseCSxQYDCECODCDXqiKpJaMa0FgNQYHkfAE/LRYWDASEcBwPxhx3lQtCeEDFRBnE8MA3khPSwiOHbYDVOBbJ6EO5LIDK6BQVDh8xqQneoIHrxgkTGB7yqePobAZ5Ehg0cUKQ6D/Am7mB22UhtZnTEBGE0DwbJCHAQ0IkUNRYD4jBfCgAwQwXLngBHjQA+MXdd5kBMRADJzyMsdQFnVokkHhIh6QUnPRAH6ggQJQJ0glifTnTUiQKQmxkFlWkj4JFD8lCSpgafkBBA9BExiyd6noTfmSA7FGjDr5H7I4lZxQi6eweNflEdEVD6xAADRhP4J3CPaDbxsAlbEllWjpCcuoA80IIaaQBXDJT1BgF1rQI8dVl4SAAz5wGhKjkzvJl33JCeL4A+S4WKhwAFIQVEHTS0U5Q3DDmIVQQJr4MgWwE8hYmZsQXf24A/8oF+RCALERcGKZVQhwjKTZS3chBGQpmap5/5asaQkSGSVSEF2SIJfxMRqhdASBFAKgspsK80vGp5PB+YnDuQkoqRkqCQ/skWI3AD+75AS4YHbSKQjACARFoJdBcp0sl52bAJRCqQOg4QekJFmxUXahlC+kcZ69dGmztxg6sZrwaQlVGQlXeWmh5AQPFg1HoHen6J+BkQPcuDS2IFn140352GVqqRkwNxcfUYtxOZdv5p+GIATwYWGSiQwFsABZEica+pDL95eBuSCEGReGiZiK6Ykmqgi6xAQksKLJ0AKchhU8wCHGtKEydpmZ6UxI15k/RZRZgSnAAoY9qghaWJ0rygRbqCkxWpmu6Y/CI5uRQJsAdyFd8mO6ef+liZAVp7mibkABWDEH/ZmkMop7xUmRCbIeSLCcVWEDznkf0cmmiXBfOSmkyFAEOHAFN7CYlaSkGradBDYj37kc4pkD5JkD5kmoipAETVChmwhrWqAFJYo/kApg8rle9IlX92kYNqCfypEEdcqpiIADMdBiiIoMRFAF1mCTX9qXB9oHCboce9KggAqhSXieOCCSW0oTfmBvdsqEHcqWHeaWIsqSJEqr4pWrysAAeDU0rXSqXsaMP+CMg1mY/6SjPeCo2ioMBaCliEoEC6Av91hD4gpOTFqOmwmlnzmlomml7QoM8IqoRbABuWAh0TqCYQqbYypz61GbaIqbaxqwvwD/qi/DBLjAo1t0r8qUp8e5p8qZJX8aqNBJsdcwsIhaADaZrGPDsckkqd25A5UansoxnuUJrSZbsYfKrcjAAPlQr0p4p0eWqkPJqi+an1MRq7Oas71gscVYBRM7eTgYrMO6oMb6oNEQoUzrC057sV/1q9dmkQJzCtUaonCJrRi6tfogFSVgk05QBG/Ks39QADMAsBsrtDgFBbgVCUxyrjiarj2QmOuqsWr7C5I1iLIht8wwAAWAs4+Ktw9VVaGlBFOQh/vqmVIamlVauNngHuHpBwqpuMxgAaU6Pi4rQUOwBE9AHD8ABWT6sGd6m2rKudggL5tjA1XQtTpZBFc3SKcb/0GYgV0OUgYg26ci25zPOai0+wtZQay6q5MUwABg22tjVos/pQoze6mZuqnLCwxNIAQCUAI2oKKiqwzuKbXsNmAQwkj12apIu5+yyrLLiwfE4AMDEIflqwxFML2lJldOMg+2QqwM2nfHmrXyu7x6IQg7m7/IsAFVEEg9gAS4kH6Q60TI4gGmQC6Z0WGpsAMTNQEKYLsI270wYW84cAQxwMDMoEC1QBoLALRz87tS8wSZgR5hcBIxogp76gIdAEhfBYAk7BN+wANFQI8qrKsPmoEPQbiRI8Nmw1Kp4E9K8AQ7ACNLwMN4JQRaEHBHwMRBXCt1sgVHvAxMICJy48V64//EN6MDaYAsQyUjx9kHsyAAnKYybVQN9ffF+sAhIcCecvsrIQAffmGvFZxD1rO+F+BPOzABHZAEMsMD7iGWyuEcehwRWolZY7wM6+lJU0rInqUZQ3As+8QBHeBmCKAXYIUDIjAVz2q3lVwYAvCbmcyiQwwbyvs8ahw18QBaE/AGExoCp0EVONIh0ZChr9wPWIGyR0wBESYaMNyyhYxDQ7BnTzACbzAHsXHCpbQctjADfkCqSVC6x9wLFEq+s3wMFNCJNuhAuZwmF5zBkbDBxOHBixzC+TDC4/wSQOBJXrUhfhC35zwA0JAD3hy0sETDOmDDOBwLatkHPOzDxZbPMaH/BY8ZntVgAwxgxOeMDMUHZHncxNFcOVC8BFJMxVaMxX6gxVyMxhJ9Oj1wBVBhqea80cjAPCcgzjPTzknCxm5cizsQx3Ncx0Zwx+Da0k+TEF2QBBeaXDStDAMgAAhwwMGi00hyyPGQyLDAyI6cC5CMppNs1FwhFUnAQEQsy039B1vAqyztNFR9hyYhylJAyqaMyrC2ynXCXWAtEYZhCzThx0cMAqLhycm0yx7Qy78czEIwzF5QzGud174gYZJlA4x71syQl8/M1iHdN9M8BNV8zdl8n6nYzd9saTjt2I2QKVkCG8rc1PvrWsvhRoGY05ldKu/MwUh3XR38wfZ8b6b9/xhsliVE4NdjHL2uplVO8UbQLEEIrdBRwtA73MO5ENG9PRhIoBdAIAIzTdnJUAFapak8cAV3AdIlNNIlXcW/htIqbZ+NPd1ooQFIQBpmrd09qydAkARdwIGXLS1tPRk87bo+DdQmQMeeOtQJUdTs3ROBpJVMwKzaXQVFUA0hoNS7JN7A6yKIrMha/ciRDD+UfOBaIQYCMANAEKBHzKUgKUgUzj+gDNdy/WN0rcqsjNcerhX20QQDkN3yzaIDENkKleIRRNiGrRzArFWJzReLbaQzrhU+QL8LnOPLUADE2lo+fj6b3dnYjBWgzc05N9rhnOQ9UQsUgONOfgwDQARmN/+AaTzb4lHbGozbqqDbIuzl3BEbAD3muspKeDHlNrPcOnDDza3DkvDQ0Q3Ecg4dPBAETG3nzFB8NpBVYqDnN0PeUWLS590BWbzF6l3o0JEYit5vuZCImM19bezfcHwSQT3gRP3Rmm4WTCDc2q0TCwrpGmPVfYDVi9zIGu7VwLjqt7HanQ4zCACaac59b30Ko1zKLl6/MH7XrszrWnFAv24QjtO2sr4xQO7LQo7Yis3Yzg4Zz+vkA8CAw242VW7NV67N1qDl3gzOpd3t+6AT0X4TAxAEBaR3OYDc3bLfnBBiP5AqwaqSpnABHPAGmdIEsejut2Gpr3YD3z7mJAk34dz/FSGwCwyj75lwdKvAUhZ5EsTRBwbgABogyV+L8AFiwjxQBbga7wZRAxUQYfgdArZyMRaPCXPxBUH1VkMAF2WwWFywBjDQA0yBIXRI8gkPgtXg6p0+7997A7lpuxWv5kLBKB1xDnIBDwzWJSHwnLEhjER/GwH3cFVA4mOeReEJKlFLKzN/CamyA1EQWj6lAz5/Jy4KBNWiacbc9azBEE2wBb6u8slw4/hRs1IdIFDfPy7iIBCiA/OV9QhQHTagBxfiB2KQEL2L99R9C/Ht9wVBBHVSIQwh84UPFAewgw+AGQkAA1+VKcrRA0bepZFv+ZCRA0YwAE2u+T6nqD0O+qUi/wWl32MakCUUbUH+/KCvWgJnD/s9kRW1b/s+p1VHkN9botP87u9i1AcAnxk9BkpCgKTIDx3A5/i4YwNBwODMvwxl7gespuqEkssY/wMa/xEcnwoeHwDV1Evt3v0x8XliqYG7AAgYf4OEhYaHiImKi4yNjEUMQj1+lJWWl5iZmpucnZk3Jn2io6SlpqeoqalDOl9ROlFTQ2B9ZX1PXGswSDd+NjZCTb2exMXGx8jJysvMzc7ENn4hOTc4TTwVNY7b3N3e3ExJfk7P5c6gqunq66g/rHA6ojvuOzsGMDhGPjk+NkBAOKKZG0iwoMGDCJcJyZHDj48ePgoM+EaxokVHFf8G5BCXsKMldOxCikSlJN6OKB76SNGhQxcOSguMNOkhwUeTIzw86tzJs2fPIzhu+OABhAeTi0iTJmXSzydCkCOjjtyxRMcOllcNBJiGQMgRGzdsaMlBFM8Rp2jTql27yR+OHkB6VCmgtK5dbhYK5GRbDqrUv+oOTHnyQMeBBDD83MDzK0ePr15wCAnBw4cVvpgzazYYokeToVXu3B1NOlGVIJuZ+QXMGpWUwgkCaAio5eENIL/8COiBY46Pt6mDCx/eqQQPHDnoll7OnAhZGzmA7BNIHNPq1uqe9PlRso+OH6OkzDugIzZYIXiqq1/P/pOfJEWKMJ9PukARh0Js5KP/3v46dlQ6TNHHPEtsp8MQQ/SRYIFaJYGEHzi81N6EFAq3AFBAVEDfhndtgdoNSQiBgwAV+vefKay4AosstNiCiy68+AKMMBXWaONaAgjhwwBBcOijUnpV8luJoZyYjjs6wCMPPfbgow8//gDE341UVokQAkAQQcGPXF5kAQNhvTTleiYaOUp3J6W0Ukv4wCQTTTbhZOWcdBKUgyBd5kkRBnrZABGRZqpClVVY6aAVV16BJRZZQJhV56OQJgMEBvLpaWk3FNzwVUMUlhmoYIQZhphijEH3mA2RTVbZZZG26qomFRBx6azbBFGFYpN0WmSgrsEmG2224RbNbr39luur/8i6GsRRtDbLCAa3JsGYH9TcoAUQxHnKjnbcxfNdeOOVF8B56SVr7rmUTAMEP37g6ey7iRTQRBK/HHcDRFpku6tUAQ74Q4E/HJjggn00+GCE6CaM7BHUOJFPFczCK3EhdxTA2w3R8XBFD8MIp206Kb4Syyy13JLLLr38EkzHCrdc5w08HAHEAG5MbHMhGMTwCxBJdMHDDSyn9rEqSCrp7xD13JPPPv38E5DLUM8J3RFO+BDxzTdTUAQPNoSQBECcerxvVGiipBJLLrk5U0037RX12zVGZ4UTW0yE9d1M2ICEP2RVN3Qqg15F6KE5dPVVWGOVdRbcjE/ow4NMtHD35P8S2cB1WGNq9jcqoBZ2WGKLNXZqqpRZ1vjp6+VgAwVVTO56AUyEaUO5Yrf2mriziRVsbsT6BhzqwHucnOvEV0BBEk4Ao68pVID3w1VY9BHFEAEXiDR55t2AXvDcr/eL3k3kIEITfhhPPPFBENEDOcuXkmA8fVzQxxJksCSKHQgaDKGE3fcvHGUB8cEccGO+8xGPAUZwwhzaV4qrxGIHoqACBBU0BK3ESGU08p8GNdMDYORrGlXYkgGJNwAMIIeBZ+LODsIQsHpE4QdR0EW+mBalp23whmzJjYSCIMIREq8IQQhbcK7zAy4ETAoDY0UGEkMUK7yJbXLCoRTRcoONFeX/BrLyoQExwAQUiuIJ9XAeeVbAgnFoSnWIY5SjpshGnjAEAV8hAh20OEIPDYeIA9KBEn4QgR4kgWuKcUhASLeqNhrSI9MSQhDsRkcDoqZ2DTRQBCLkA4f4AQk+EBElemesQ3ryIDBDAhEq1UhHYgAYORDGgzAThx0oYQdTOMAesbCCCO3mk7jUCXSA8ZUQUOIG6SulFplAgegIAQhBS0sT3iAKKARMBysAQD78gAABuC2X2LRTJXOAg7iUAAdEYKQwR5g+ogQDMz7owBME1Icx9AIHIdAk/7JJz3JEYxrVuIYTlDNOLRKhCkQRolqAoAYo9GEFNnDCDYwQs8vlYHH1/4woMxbSkIf8Boj9bCQRnCMEzNjABDKwwREQQC+ivOQ2OeioRFeaDKAIhShGcVdGtcjDzDkFBzmhBg4UCIQZUIIoSBAoS4fKCbfARS78nCkdmYABzDDEBzcgRyZ9gKWXrA9bRM0qJzrzGR6ERqnjfGQO3wIQ7eEhqL/5Cli0ylZNGAcHTEgqWOm4gQL4AjkBoV1b9+pR1SXKl0eASFzn2k8QFCEHVbNBE2zK18b2hF3c9GYPEFCEqxG2lBsIQjdVN0/HerYn99TpNXxQBJleVphaO+Y+PsvanlDUIRCBq2VPK8wqFGGnnW2tbg3i0qEUZbC0VSoFgsjY3Rq3GUaNy/9cgjvXDdznuNAdCFdBIxrmzhUEdo2udp3xVuBat7kVsCYlcqCF4m53t7v8qx8CazW5flepQWiqBPjBzfPal1rb7GYPSjDZyr6XthADixasYN77fja0+axMaf8b3CDYlTcFNrBjX2tR2TKYuVWoQBGSIFQJ67a3MPXuhYNLqQh7eK/JReqI31uBLp74uNP1anVX/N3Mvvi43XUvjYNbABNa8sZZ7VoHMYaHXoQAdlvY8YWJUIFqKMbEQG6j5X5xBdVxrYBKvrBEgOCwSkZZovrp6GQvGYMNZJnGG6ADA77M0r1poZtHEAIRenTmHWOACGyW6Gd+aoMgkLLONB5lnuv/mYM5+BKL4gQ0jQsg1kHjUgTrSt8cFX3mIDTa0YdcbAgprWgiMGFrfjACMAKCBBHlYJWYfltOnEAvuIiDh5zmdHx9IAI/aOGPuDLCsVINNXEI4DaWK8AoYx3rTwtABAH0QjV4YARev+0lOIjJDYqQaGIregNMwHNYwjKHezk7anvLgQBsMIAZW5vYTAhvD0SAWB6Q6NsuC11c/3xuYnPRCL3QdW7hba4mCIECPax3vSlAhAIAB8r8plNEdCxwaw+ACAKYVsLRZWkGNPzihJAIEYLyldoYQa8TV096ewmhbfMgBwygN8YvHtcQ0CgoHAs5eyCr3xJUQw42KMKcV85z/0JgIH2UKAEQroBwmacFwdbgQU6aMIAk9/zpg2AAE7hJDlQbfTgUjq1sLQ71rrsBiL++unpAXJQcfL3raCcED8knduKkeC50TnvaCwCxtg8nxl+Vu94HkdlL2x0zxoEdw/fedQpsoZLItNxCw2QEjvxdGUDQAtAaMjt/iCGh+YhQOAdPeLQzIQgb8MG4RRrzojyeGbXhGE5/ATTkRKMERoBd52dvCAwMoArIyQ9jznl6ZdzrCgGtRr4VgwCJmJb2tLd0D/CAg30ApcO97wTQeNCFr/3CYdCxtJmRz/1CaMk5ELKBqKOPjMgmIQSKx00BGN399hvCuQUQyALJf4yT4/8m3BuNu/v3PwgtFYHL9GcMrDdlAyAR/HeAhuBpeBaAxMAYAXEDIoaAEvgHmTUAyTMMX5EEPUAZvoRVzqYFQvcQNlBJlod5RnBSTVAFwzaBLEgIKhgEC3Ab4fMSTrAuPANvORACTnAW3QQW1aA6fgB7pbV+LViEhTAAIMAEP1NfxzEDtAZvftIZ1CJqw3cDxVdCRpiFhpA+RZBAQREUXoaDVrg3P4N9OaB9WpiGhlAABCcAJeAHk8B2zqYfrZcTPbh++qeGevgHNZBtqNED+QJvfyQENxACQJN/e5iIh1AEEON4vDYiinUDsWKAiliJhlAFPOJ3eRYNRuBg1WaJoDj/CMMVBD0gbsPQfLAFVXoDU+8WZGIiAg+SBFalH92Wc8TEdaGYi4cwF/+EAxy2LtjXUVAiIriWVUjAbEhAdA2BBDWYE0bgaceni9JYCEzwaX5QLgmEBE7DEOOwbxG1Sx3UAwIQEMjxT0UQcNOYjofABJgYBFOmGNwUFtxUdIbEEFVmBPhUBBVQANunjv64CMPFVCBCIjgwA18BUUMVEDkAAFpwB542W/8YkaYxZ0wgAGJAUdBXTz9DbTEgORL5kdzAAHRQAAwQj1kVBPsYjSC5ks9SBRvwcytlaZbGkjRpEQUHMV+BJUBzST4gDtwUFECDBF+IMb5ACdHgbpURENek/xb3Ui8L8GvDEg355gTUwFBrpVjRAITAZB/UVpNeiRQWYGkl9GQcczEYox8+MB1hsS4gEiE5ARc8oAXMlhn7gBxxATQ3oI3UcBxFSS29MAk3IAI8MABMFR9feZh2MQBFUAD7SAcnBFVD4Qf/8GYSwAMcgzFHYC3IdBl4EIZrgQOSdwR/NA3l9T2L9RXvwQ/6QFoDUAEVYAGIGZvLsQEbBUQMhUwaszdUWUk+2RB52ZNn4IFrgRvIEVSSwU1vCCEdhAQ9sADYRpLhJJvSuSEa12IM4ESqpR84FRczgAOb4ieYEW3SoTp6E4VLaFtMwAArOJ3sySV5MZKwwzra01EywYpNk7CUaTEiXiAjXMYArWkfsNaeAuoshOlgn1ZafpVMVAQJTFBC1ZiHAxqhNoNtmfV5MimTB3GhGupgKiehHtpIwrZRIjqiJFqiIzpcsLOYnPehLNqiLvqiMBqjMjqjNFqjNnqjOJqjOrqjPNqjPvqjQBqkQjqkRFqkRnqkSJqkSrqkTNqkTpqjgQAAOw=="/>
-  <p:tag name="MIO_MST_COLOR_1" val="0,0,0,Dark 1"/>
-  <p:tag name="MIO_MST_COLOR_2" val="255,255,255,Light 1"/>
-  <p:tag name="MIO_MST_COLOR_3" val="255,255,255,Dark 2"/>
-  <p:tag name="MIO_MST_COLOR_4" val="235,235,235,Light 2"/>
-  <p:tag name="MIO_MST_COLOR_5" val="255,165,0,Accent 1"/>
-  <p:tag name="MIO_MST_COLOR_6" val="191,115,0,Accent 2"/>
-  <p:tag name="MIO_MST_COLOR_7" val="226,135,0,Accent 3"/>
-  <p:tag name="MIO_MST_COLOR_8" val="255,194,102,Accent 4"/>
-  <p:tag name="MIO_MST_COLOR_9" val="95,95,95,Accent 5"/>
-  <p:tag name="MIO_MST_COLOR_10" val="38,38,38,Accent 6"/>
-  <p:tag name="MIO_MST_COLOR_11" val="255,165,0,"/>
-  <p:tag name="MIO_MST_COLOR_12" val="119,119,119,"/>
-  <p:tag name="MIO_HDS" val="True"/>
-  <p:tag name="MIO_EK" val="7226"/>
-  <p:tag name="MIO_UPDATE" val="True"/>
-  <p:tag name="MIO_VERSION" val="17.03.2014 13:10:57"/>
-  <p:tag name="MIO_DBID" val="ED9FF2F2-6643-46BA-B685-7D49126FFAFF"/>
+<p:tagLst xmlns:a="http://schemas.openxmlformats.org/drawingml/2006/main" xmlns:r="http://schemas.openxmlformats.org/officeDocument/2006/relationships" xmlns:p="http://schemas.openxmlformats.org/presentationml/2006/main">
+  <p:tag name="KSO_WM_DOC_GUID" val="{40083ee8-aa06-44b7-a7e8-ab89c988e4c1}"/>
+  <p:tag name="COMMONDATA" val="eyJoZGlkIjoiNDczMzRkMDEwOTFhZTk1ZGUyODdlZTI0NjFjODRiZjYifQ=="/>
 </p:tagLst>
 </file>
 
 <file path=ppt/tags/tag2.xml><?xml version="1.0" encoding="utf-8"?>
-<p:tagLst xmlns:p="http://schemas.openxmlformats.org/presentationml/2006/main">
+<p:tagLst xmlns:a="http://schemas.openxmlformats.org/drawingml/2006/main" xmlns:r="http://schemas.openxmlformats.org/officeDocument/2006/relationships" xmlns:p="http://schemas.openxmlformats.org/presentationml/2006/main">
   <p:tag name="KSO_WM_TEMPLATE_TOPIC_ID" val="2869567"/>
   <p:tag name="KSO_WM_TEMPLATE_OUTLINE_ID" val="15"/>
   <p:tag name="KSO_WM_TEMPLATE_SCENE_ID" val="1"/>
@@ -27525,7 +27081,7 @@
 </file>
 
 <file path=ppt/tags/tag3.xml><?xml version="1.0" encoding="utf-8"?>
-<p:tagLst xmlns:p="http://schemas.openxmlformats.org/presentationml/2006/main">
+<p:tagLst xmlns:a="http://schemas.openxmlformats.org/drawingml/2006/main" xmlns:r="http://schemas.openxmlformats.org/officeDocument/2006/relationships" xmlns:p="http://schemas.openxmlformats.org/presentationml/2006/main">
   <p:tag name="KSO_WM_UNIT_TABLE_BEAUTIFY" val="smartTable{5ddcbd42-a4de-45d8-be08-7442f165ebc1}"/>
   <p:tag name="TABLE_ENDDRAG_ORIGIN_RECT" val="618*301"/>
   <p:tag name="TABLE_ENDDRAG_RECT" val="42*95*618*301"/>
@@ -27533,7 +27089,7 @@
 </file>
 
 <file path=ppt/tags/tag4.xml><?xml version="1.0" encoding="utf-8"?>
-<p:tagLst xmlns:p="http://schemas.openxmlformats.org/presentationml/2006/main">
+<p:tagLst xmlns:a="http://schemas.openxmlformats.org/drawingml/2006/main" xmlns:r="http://schemas.openxmlformats.org/officeDocument/2006/relationships" xmlns:p="http://schemas.openxmlformats.org/presentationml/2006/main">
   <p:tag name="KSO_WM_UNIT_TABLE_BEAUTIFY" val="smartTable{51297203-e14e-4962-97a8-b09a129983b4}"/>
   <p:tag name="TABLE_ENDDRAG_ORIGIN_RECT" val="627*232"/>
   <p:tag name="TABLE_ENDDRAG_RECT" val="33*131*627*232"/>
@@ -27541,23 +27097,16 @@
 </file>
 
 <file path=ppt/tags/tag5.xml><?xml version="1.0" encoding="utf-8"?>
-<p:tagLst xmlns:p="http://schemas.openxmlformats.org/presentationml/2006/main">
+<p:tagLst xmlns:a="http://schemas.openxmlformats.org/drawingml/2006/main" xmlns:r="http://schemas.openxmlformats.org/officeDocument/2006/relationships" xmlns:p="http://schemas.openxmlformats.org/presentationml/2006/main">
   <p:tag name="TABLE_ENDDRAG_ORIGIN_RECT" val="628*266"/>
   <p:tag name="TABLE_ENDDRAG_RECT" val="53*109*628*266"/>
 </p:tagLst>
 </file>
 
 <file path=ppt/tags/tag6.xml><?xml version="1.0" encoding="utf-8"?>
-<p:tagLst xmlns:p="http://schemas.openxmlformats.org/presentationml/2006/main">
+<p:tagLst xmlns:a="http://schemas.openxmlformats.org/drawingml/2006/main" xmlns:r="http://schemas.openxmlformats.org/officeDocument/2006/relationships" xmlns:p="http://schemas.openxmlformats.org/presentationml/2006/main">
   <p:tag name="TABLE_ENDDRAG_ORIGIN_RECT" val="628*266"/>
   <p:tag name="TABLE_ENDDRAG_RECT" val="53*109*628*266"/>
-</p:tagLst>
-</file>
-
-<file path=ppt/tags/tag7.xml><?xml version="1.0" encoding="utf-8"?>
-<p:tagLst xmlns:p="http://schemas.openxmlformats.org/presentationml/2006/main">
-  <p:tag name="KSO_WM_DOC_GUID" val="{40083ee8-aa06-44b7-a7e8-ab89c988e4c1}"/>
-  <p:tag name="COMMONDATA" val="eyJoZGlkIjoiNDczMzRkMDEwOTFhZTk1ZGUyODdlZTI0NjFjODRiZjYifQ=="/>
 </p:tagLst>
 </file>
 
@@ -27839,6 +27388,8 @@
       </a:bgFillStyleLst>
     </a:fmtScheme>
   </a:themeElements>
+  <a:objectDefaults/>
+  <a:extraClrSchemeLst/>
   <a:extLst>
     <a:ext uri="{05A4C25C-085E-4340-85A3-A5531E510DB2}">
       <thm15:themeFamily xmlns:thm15="http://schemas.microsoft.com/office/thememl/2012/main" name="Office Theme" id="{62F939B6-93AF-4DB8-9C6B-D6C7DFDC589F}" vid="{4A3C46E8-61CC-4603-A589-7422A47A8E4A}"/>
@@ -28132,6 +27683,7 @@
       </a:style>
     </a:lnDef>
   </a:objectDefaults>
+  <a:extraClrSchemeLst/>
   <a:extLst>
     <a:ext uri="{05A4C25C-085E-4340-85A3-A5531E510DB2}">
       <thm15:themeFamily xmlns:thm15="http://schemas.microsoft.com/office/thememl/2012/main" name="Office Theme" id="{62F939B6-93AF-4DB8-9C6B-D6C7DFDC589F}" vid="{4A3C46E8-61CC-4603-A589-7422A47A8E4A}"/>
@@ -28418,6 +27970,8 @@
       </a:bgFillStyleLst>
     </a:fmtScheme>
   </a:themeElements>
+  <a:objectDefaults/>
+  <a:extraClrSchemeLst/>
   <a:extLst>
     <a:ext uri="{05A4C25C-085E-4340-85A3-A5531E510DB2}">
       <thm15:themeFamily xmlns:thm15="http://schemas.microsoft.com/office/thememl/2012/main" name="Office Theme" id="{62F939B6-93AF-4DB8-9C6B-D6C7DFDC589F}" vid="{4A3C46E8-61CC-4603-A589-7422A47A8E4A}"/>
@@ -28704,6 +28258,8 @@
       </a:bgFillStyleLst>
     </a:fmtScheme>
   </a:themeElements>
+  <a:objectDefaults/>
+  <a:extraClrSchemeLst/>
   <a:extLst>
     <a:ext uri="{05A4C25C-085E-4340-85A3-A5531E510DB2}">
       <thm15:themeFamily xmlns:thm15="http://schemas.microsoft.com/office/thememl/2012/main" name="Office Theme" id="{62F939B6-93AF-4DB8-9C6B-D6C7DFDC589F}" vid="{4A3C46E8-61CC-4603-A589-7422A47A8E4A}"/>
